--- a/assets/decks/episodio-05-contratos-versoes.pptx
+++ b/assets/decks/episodio-05-contratos-versoes.pptx
@@ -2,33 +2,33 @@
 <file path=ppt/presentation.xml><?xml version="1.0" encoding="utf-8"?>
 <p:presentation xmlns:p="http://schemas.openxmlformats.org/presentationml/2006/main">
   <p:sldMasterIdLst>
-    <p:sldMasterId xmlns:r="http://schemas.openxmlformats.org/officeDocument/2006/relationships" id="2147483648" r:id="R704115cebbb245f9"/>
-    <p:sldMasterId xmlns:r="http://schemas.openxmlformats.org/officeDocument/2006/relationships" id="2147483650" r:id="Rd692948799f1498b"/>
+    <p:sldMasterId xmlns:r="http://schemas.openxmlformats.org/officeDocument/2006/relationships" id="2147483648" r:id="R8069b5d0d9474189"/>
+    <p:sldMasterId xmlns:r="http://schemas.openxmlformats.org/officeDocument/2006/relationships" id="2147483650" r:id="R282e7f3a52d6447b"/>
   </p:sldMasterIdLst>
   <p:notesMasterIdLst>
-    <p:notesMasterId xmlns:r="http://schemas.openxmlformats.org/officeDocument/2006/relationships" r:id="Rc503fc2114f84b45"/>
+    <p:notesMasterId xmlns:r="http://schemas.openxmlformats.org/officeDocument/2006/relationships" r:id="Rc98b8335e7bc457b"/>
   </p:notesMasterIdLst>
   <p:sldIdLst>
-    <p:sldId xmlns:r="http://schemas.openxmlformats.org/officeDocument/2006/relationships" id="256" r:id="Ra4f8d8eae7ca4523"/>
-    <p:sldId xmlns:r="http://schemas.openxmlformats.org/officeDocument/2006/relationships" id="257" r:id="Rff4eaceb7bb14816"/>
-    <p:sldId xmlns:r="http://schemas.openxmlformats.org/officeDocument/2006/relationships" id="258" r:id="Rbbb95d6927864318"/>
-    <p:sldId xmlns:r="http://schemas.openxmlformats.org/officeDocument/2006/relationships" id="259" r:id="Rf436decdcde84549"/>
-    <p:sldId xmlns:r="http://schemas.openxmlformats.org/officeDocument/2006/relationships" id="260" r:id="R5d9a8bd6967349ac"/>
-    <p:sldId xmlns:r="http://schemas.openxmlformats.org/officeDocument/2006/relationships" id="261" r:id="Rff7139bc1d7a4783"/>
-    <p:sldId xmlns:r="http://schemas.openxmlformats.org/officeDocument/2006/relationships" id="262" r:id="R171d3f441b8c4692"/>
-    <p:sldId xmlns:r="http://schemas.openxmlformats.org/officeDocument/2006/relationships" id="263" r:id="R41d6f2dee91a4002"/>
-    <p:sldId xmlns:r="http://schemas.openxmlformats.org/officeDocument/2006/relationships" id="264" r:id="R188f29a0b29d4cda"/>
-    <p:sldId xmlns:r="http://schemas.openxmlformats.org/officeDocument/2006/relationships" id="265" r:id="Rc4333e9c78b243e6"/>
-    <p:sldId xmlns:r="http://schemas.openxmlformats.org/officeDocument/2006/relationships" id="266" r:id="Re13867466d864014"/>
-    <p:sldId xmlns:r="http://schemas.openxmlformats.org/officeDocument/2006/relationships" id="267" r:id="Rb764cb9b63334214"/>
-    <p:sldId xmlns:r="http://schemas.openxmlformats.org/officeDocument/2006/relationships" id="268" r:id="Ra9c403e7e7c5425f"/>
-    <p:sldId xmlns:r="http://schemas.openxmlformats.org/officeDocument/2006/relationships" id="269" r:id="R4b1c4b69b10e4cfd"/>
-    <p:sldId xmlns:r="http://schemas.openxmlformats.org/officeDocument/2006/relationships" id="270" r:id="R1ed8846728e945a0"/>
-    <p:sldId xmlns:r="http://schemas.openxmlformats.org/officeDocument/2006/relationships" id="271" r:id="R5e9a8a05f0b34214"/>
-    <p:sldId xmlns:r="http://schemas.openxmlformats.org/officeDocument/2006/relationships" id="272" r:id="Ra49700939d714dab"/>
-    <p:sldId xmlns:r="http://schemas.openxmlformats.org/officeDocument/2006/relationships" id="273" r:id="Rc1efb24fb7ce4a77"/>
-    <p:sldId xmlns:r="http://schemas.openxmlformats.org/officeDocument/2006/relationships" id="274" r:id="R51f63fe7cccf464f"/>
-    <p:sldId xmlns:r="http://schemas.openxmlformats.org/officeDocument/2006/relationships" id="275" r:id="Ra598afe4d7474f26"/>
+    <p:sldId xmlns:r="http://schemas.openxmlformats.org/officeDocument/2006/relationships" id="256" r:id="Rc03ccbae99764a4c"/>
+    <p:sldId xmlns:r="http://schemas.openxmlformats.org/officeDocument/2006/relationships" id="257" r:id="R4ddc7bd4fb6942bb"/>
+    <p:sldId xmlns:r="http://schemas.openxmlformats.org/officeDocument/2006/relationships" id="258" r:id="Rf38eb73f979f4d08"/>
+    <p:sldId xmlns:r="http://schemas.openxmlformats.org/officeDocument/2006/relationships" id="259" r:id="R810094c1372f459e"/>
+    <p:sldId xmlns:r="http://schemas.openxmlformats.org/officeDocument/2006/relationships" id="260" r:id="R4054c874709f473a"/>
+    <p:sldId xmlns:r="http://schemas.openxmlformats.org/officeDocument/2006/relationships" id="261" r:id="Rba52f7b43f5b4ae3"/>
+    <p:sldId xmlns:r="http://schemas.openxmlformats.org/officeDocument/2006/relationships" id="262" r:id="Re6ef36ec89b34ac5"/>
+    <p:sldId xmlns:r="http://schemas.openxmlformats.org/officeDocument/2006/relationships" id="263" r:id="Rea74f07345d44153"/>
+    <p:sldId xmlns:r="http://schemas.openxmlformats.org/officeDocument/2006/relationships" id="264" r:id="R1276d7bf5cb048db"/>
+    <p:sldId xmlns:r="http://schemas.openxmlformats.org/officeDocument/2006/relationships" id="265" r:id="R093df43a20a14271"/>
+    <p:sldId xmlns:r="http://schemas.openxmlformats.org/officeDocument/2006/relationships" id="266" r:id="R380636d5f9c84d63"/>
+    <p:sldId xmlns:r="http://schemas.openxmlformats.org/officeDocument/2006/relationships" id="267" r:id="Rb3909d0f3ad64534"/>
+    <p:sldId xmlns:r="http://schemas.openxmlformats.org/officeDocument/2006/relationships" id="268" r:id="R5cd87bd12c064274"/>
+    <p:sldId xmlns:r="http://schemas.openxmlformats.org/officeDocument/2006/relationships" id="269" r:id="R269206fb794249bf"/>
+    <p:sldId xmlns:r="http://schemas.openxmlformats.org/officeDocument/2006/relationships" id="270" r:id="Rc0f4929939f54220"/>
+    <p:sldId xmlns:r="http://schemas.openxmlformats.org/officeDocument/2006/relationships" id="271" r:id="Rcf5906bd93af41f5"/>
+    <p:sldId xmlns:r="http://schemas.openxmlformats.org/officeDocument/2006/relationships" id="272" r:id="R1e58d59f1b664415"/>
+    <p:sldId xmlns:r="http://schemas.openxmlformats.org/officeDocument/2006/relationships" id="273" r:id="R38bd96e0dc664c4d"/>
+    <p:sldId xmlns:r="http://schemas.openxmlformats.org/officeDocument/2006/relationships" id="274" r:id="R8f89021e6a1e42d0"/>
+    <p:sldId xmlns:r="http://schemas.openxmlformats.org/officeDocument/2006/relationships" id="275" r:id="Rcd690e52f38e478c"/>
   </p:sldIdLst>
   <p:sldSz cx="12192000" cy="6858000"/>
   <p:notesSz cx="6858000" cy="9144000"/>
@@ -462,7 +462,57 @@
           <a:lstStyle xmlns:a="http://schemas.openxmlformats.org/drawingml/2006/main"/>
           <a:p xmlns:a="http://schemas.openxmlformats.org/drawingml/2006/main">
             <a:r>
-              <a:t>Apresente o objetivo do EPISÓDIO 5 e conecte-o ao checkpoint executável. Se um dashboard ou agente depende da Gold, ela já é uma API.</a:t>
+              <a:t>[Roteiro recomendado]</a:t>
+            </a:r>
+          </a:p>
+          <a:p xmlns:a="http://schemas.openxmlformats.org/drawingml/2006/main">
+            <a:r>
+              <a:t>[Tempo sugerido: 00:45]</a:t>
+            </a:r>
+          </a:p>
+          <a:p xmlns:a="http://schemas.openxmlformats.org/drawingml/2006/main">
+            <a:r>
+              <a:t/>
+            </a:r>
+          </a:p>
+          <a:p xmlns:a="http://schemas.openxmlformats.org/drawingml/2006/main">
+            <a:r>
+              <a:t>Fala sugerida:</a:t>
+            </a:r>
+          </a:p>
+          <a:p xmlns:a="http://schemas.openxmlformats.org/drawingml/2006/main">
+            <a:r>
+              <a:t>Bem-vindo ao episódio 5 do dbt Moderno na Prática. Hoje vamos trabalhar o tema “Contratos e versões: Gold como API”. Bloqueie quebra estrutural antes do consumidor. O objetivo não é apenas conhecer o conceito: vamos conectá-lo ao laboratório e terminar com uma evidência que você consegue reproduzir no seu próprio ambiente. Ao longo da aula, separe sempre o que é recurso aberto e estável daquilo que aparecerá apenas no Radar.</a:t>
+            </a:r>
+          </a:p>
+          <a:p xmlns:a="http://schemas.openxmlformats.org/drawingml/2006/main">
+            <a:r>
+              <a:t/>
+            </a:r>
+          </a:p>
+          <a:p xmlns:a="http://schemas.openxmlformats.org/drawingml/2006/main">
+            <a:r>
+              <a:t>O que destacar:</a:t>
+            </a:r>
+          </a:p>
+          <a:p xmlns:a="http://schemas.openxmlformats.org/drawingml/2006/main">
+            <a:r>
+              <a:t>- Apresente o título, situe o checkpoint 05 e deixe claro que a aula faz parte da trilha open/stable.</a:t>
+            </a:r>
+          </a:p>
+          <a:p xmlns:a="http://schemas.openxmlformats.org/drawingml/2006/main">
+            <a:r>
+              <a:t/>
+            </a:r>
+          </a:p>
+          <a:p xmlns:a="http://schemas.openxmlformats.org/drawingml/2006/main">
+            <a:r>
+              <a:t>Transição:</a:t>
+            </a:r>
+          </a:p>
+          <a:p xmlns:a="http://schemas.openxmlformats.org/drawingml/2006/main">
+            <a:r>
+              <a:t>Com esse ponto estabelecido, avance para “Se um dashboard ou agente depende da Gold, ela já é uma API.”.</a:t>
             </a:r>
           </a:p>
           <a:p xmlns:a="http://schemas.openxmlformats.org/drawingml/2006/main">
@@ -577,7 +627,57 @@
           <a:lstStyle xmlns:a="http://schemas.openxmlformats.org/drawingml/2006/main"/>
           <a:p xmlns:a="http://schemas.openxmlformats.org/drawingml/2006/main">
             <a:r>
-              <a:t>Use a composição para explicar visualmente: Versão sem owner, consumidor e data vira dívida permanente. Publicação Aviso Fim do suporte Remoção</a:t>
+              <a:t>[Roteiro recomendado]</a:t>
+            </a:r>
+          </a:p>
+          <a:p xmlns:a="http://schemas.openxmlformats.org/drawingml/2006/main">
+            <a:r>
+              <a:t>[Tempo sugerido: 00:55]</a:t>
+            </a:r>
+          </a:p>
+          <a:p xmlns:a="http://schemas.openxmlformats.org/drawingml/2006/main">
+            <a:r>
+              <a:t/>
+            </a:r>
+          </a:p>
+          <a:p xmlns:a="http://schemas.openxmlformats.org/drawingml/2006/main">
+            <a:r>
+              <a:t>Fala sugerida:</a:t>
+            </a:r>
+          </a:p>
+          <a:p xmlns:a="http://schemas.openxmlformats.org/drawingml/2006/main">
+            <a:r>
+              <a:t>Agora vamos ler a ideia visualmente. Versão sem owner, consumidor e data vira dívida permanente. Siga a composição na ordem mostrada e conecte publicar, Avisar, Migrar e Remover. A imagem ou o fluxo não cria uma regra nova; ele torna visível a relação que acabamos de explicar. Use a disposição dos elementos para reforçar causa, dependência ou comparação.</a:t>
+            </a:r>
+          </a:p>
+          <a:p xmlns:a="http://schemas.openxmlformats.org/drawingml/2006/main">
+            <a:r>
+              <a:t/>
+            </a:r>
+          </a:p>
+          <a:p xmlns:a="http://schemas.openxmlformats.org/drawingml/2006/main">
+            <a:r>
+              <a:t>O que destacar:</a:t>
+            </a:r>
+          </a:p>
+          <a:p xmlns:a="http://schemas.openxmlformats.org/drawingml/2006/main">
+            <a:r>
+              <a:t>- Acompanhe o fluxo ou a comparação com o cursor e preserve a ordem de leitura do slide.</a:t>
+            </a:r>
+          </a:p>
+          <a:p xmlns:a="http://schemas.openxmlformats.org/drawingml/2006/main">
+            <a:r>
+              <a:t/>
+            </a:r>
+          </a:p>
+          <a:p xmlns:a="http://schemas.openxmlformats.org/drawingml/2006/main">
+            <a:r>
+              <a:t>Transição:</a:t>
+            </a:r>
+          </a:p>
+          <a:p xmlns:a="http://schemas.openxmlformats.org/drawingml/2006/main">
+            <a:r>
+              <a:t>Com esse ponto estabelecido, avance para “Mudança semântica exige outro controle”.</a:t>
             </a:r>
           </a:p>
           <a:p xmlns:a="http://schemas.openxmlformats.org/drawingml/2006/main">
@@ -692,7 +792,57 @@
           <a:lstStyle xmlns:a="http://schemas.openxmlformats.org/drawingml/2006/main"/>
           <a:p xmlns:a="http://schemas.openxmlformats.org/drawingml/2006/main">
             <a:r>
-              <a:t>Manter nome e tipo não impede delivered_revenue de mudar silenciosamente. Desenvolva os pontos: Unit test; Data test; Ground truth; Changelog.</a:t>
+              <a:t>[Roteiro recomendado]</a:t>
+            </a:r>
+          </a:p>
+          <a:p xmlns:a="http://schemas.openxmlformats.org/drawingml/2006/main">
+            <a:r>
+              <a:t>[Tempo sugerido: 01:10]</a:t>
+            </a:r>
+          </a:p>
+          <a:p xmlns:a="http://schemas.openxmlformats.org/drawingml/2006/main">
+            <a:r>
+              <a:t/>
+            </a:r>
+          </a:p>
+          <a:p xmlns:a="http://schemas.openxmlformats.org/drawingml/2006/main">
+            <a:r>
+              <a:t>Fala sugerida:</a:t>
+            </a:r>
+          </a:p>
+          <a:p xmlns:a="http://schemas.openxmlformats.org/drawingml/2006/main">
+            <a:r>
+              <a:t>A mensagem principal deste slide é: Manter nome e tipo não impede delivered_revenue de mudar silenciosamente. Para tornar isso concreto, observe unit test, Data test, Ground truth e Changelog. Esses pontos devem ser entendidos em conjunto; não são funcionalidades isoladas. No projeto, essa combinação transforma uma convenção informal em algo que pode ser revisado, testado ou consumido de maneira consistente.</a:t>
+            </a:r>
+          </a:p>
+          <a:p xmlns:a="http://schemas.openxmlformats.org/drawingml/2006/main">
+            <a:r>
+              <a:t/>
+            </a:r>
+          </a:p>
+          <a:p xmlns:a="http://schemas.openxmlformats.org/drawingml/2006/main">
+            <a:r>
+              <a:t>O que destacar:</a:t>
+            </a:r>
+          </a:p>
+          <a:p xmlns:a="http://schemas.openxmlformats.org/drawingml/2006/main">
+            <a:r>
+              <a:t>- Comece pelo título, leia a afirmação abaixo dele e depois desenvolva os itens sem repetir o texto palavra por palavra.</a:t>
+            </a:r>
+          </a:p>
+          <a:p xmlns:a="http://schemas.openxmlformats.org/drawingml/2006/main">
+            <a:r>
+              <a:t/>
+            </a:r>
+          </a:p>
+          <a:p xmlns:a="http://schemas.openxmlformats.org/drawingml/2006/main">
+            <a:r>
+              <a:t>Transição:</a:t>
+            </a:r>
+          </a:p>
+          <a:p xmlns:a="http://schemas.openxmlformats.org/drawingml/2006/main">
+            <a:r>
+              <a:t>Com esse ponto estabelecido, avance para “Mudança semântica exige outro controle”.</a:t>
             </a:r>
           </a:p>
           <a:p xmlns:a="http://schemas.openxmlformats.org/drawingml/2006/main">
@@ -807,7 +957,57 @@
           <a:lstStyle xmlns:a="http://schemas.openxmlformats.org/drawingml/2006/main"/>
           <a:p xmlns:a="http://schemas.openxmlformats.org/drawingml/2006/main">
             <a:r>
-              <a:t>Use a composição para explicar visualmente: Manter nome e tipo não impede delivered_revenue de mudar silenciosamente. Unit test Data test Ground truth Changelog</a:t>
+              <a:t>[Roteiro recomendado]</a:t>
+            </a:r>
+          </a:p>
+          <a:p xmlns:a="http://schemas.openxmlformats.org/drawingml/2006/main">
+            <a:r>
+              <a:t>[Tempo sugerido: 00:55]</a:t>
+            </a:r>
+          </a:p>
+          <a:p xmlns:a="http://schemas.openxmlformats.org/drawingml/2006/main">
+            <a:r>
+              <a:t/>
+            </a:r>
+          </a:p>
+          <a:p xmlns:a="http://schemas.openxmlformats.org/drawingml/2006/main">
+            <a:r>
+              <a:t>Fala sugerida:</a:t>
+            </a:r>
+          </a:p>
+          <a:p xmlns:a="http://schemas.openxmlformats.org/drawingml/2006/main">
+            <a:r>
+              <a:t>Agora vamos ler a ideia visualmente. Manter nome e tipo não impede delivered_revenue de mudar silenciosamente. Siga a composição na ordem mostrada e conecte schema, Teste, Valor e Consumidor. A imagem ou o fluxo não cria uma regra nova; ele torna visível a relação que acabamos de explicar. Use a disposição dos elementos para reforçar causa, dependência ou comparação.</a:t>
+            </a:r>
+          </a:p>
+          <a:p xmlns:a="http://schemas.openxmlformats.org/drawingml/2006/main">
+            <a:r>
+              <a:t/>
+            </a:r>
+          </a:p>
+          <a:p xmlns:a="http://schemas.openxmlformats.org/drawingml/2006/main">
+            <a:r>
+              <a:t>O que destacar:</a:t>
+            </a:r>
+          </a:p>
+          <a:p xmlns:a="http://schemas.openxmlformats.org/drawingml/2006/main">
+            <a:r>
+              <a:t>- Acompanhe o fluxo ou a comparação com o cursor e preserve a ordem de leitura do slide.</a:t>
+            </a:r>
+          </a:p>
+          <a:p xmlns:a="http://schemas.openxmlformats.org/drawingml/2006/main">
+            <a:r>
+              <a:t/>
+            </a:r>
+          </a:p>
+          <a:p xmlns:a="http://schemas.openxmlformats.org/drawingml/2006/main">
+            <a:r>
+              <a:t>Transição:</a:t>
+            </a:r>
+          </a:p>
+          <a:p xmlns:a="http://schemas.openxmlformats.org/drawingml/2006/main">
+            <a:r>
+              <a:t>Com esse ponto estabelecido, avance para “Demonstração — execute”.</a:t>
             </a:r>
           </a:p>
           <a:p xmlns:a="http://schemas.openxmlformats.org/drawingml/2006/main">
@@ -922,7 +1122,57 @@
           <a:lstStyle xmlns:a="http://schemas.openxmlformats.org/drawingml/2006/main"/>
           <a:p xmlns:a="http://schemas.openxmlformats.org/drawingml/2006/main">
             <a:r>
-              <a:t>Execute python course.py checkpoint 05. Pause para o aluno acompanhar o terminal.</a:t>
+              <a:t>[Roteiro recomendado]</a:t>
+            </a:r>
+          </a:p>
+          <a:p xmlns:a="http://schemas.openxmlformats.org/drawingml/2006/main">
+            <a:r>
+              <a:t>[Tempo sugerido: 01:20]</a:t>
+            </a:r>
+          </a:p>
+          <a:p xmlns:a="http://schemas.openxmlformats.org/drawingml/2006/main">
+            <a:r>
+              <a:t/>
+            </a:r>
+          </a:p>
+          <a:p xmlns:a="http://schemas.openxmlformats.org/drawingml/2006/main">
+            <a:r>
+              <a:t>Fala sugerida:</a:t>
+            </a:r>
+          </a:p>
+          <a:p xmlns:a="http://schemas.openxmlformats.org/drawingml/2006/main">
+            <a:r>
+              <a:t>Agora vamos sair da explicação e comprovar o comportamento. Execute os comandos exatamente como aparecem: python course.py checkpoint 05. Não é necessário ativar o ambiente virtual manualmente; o launcher do curso seleciona o ambiente correto. Antes de avançar, confirme que o comando iniciou sem erro e dê tempo para o aluno acompanhar a mesma etapa.</a:t>
+            </a:r>
+          </a:p>
+          <a:p xmlns:a="http://schemas.openxmlformats.org/drawingml/2006/main">
+            <a:r>
+              <a:t/>
+            </a:r>
+          </a:p>
+          <a:p xmlns:a="http://schemas.openxmlformats.org/drawingml/2006/main">
+            <a:r>
+              <a:t>O que destacar:</a:t>
+            </a:r>
+          </a:p>
+          <a:p xmlns:a="http://schemas.openxmlformats.org/drawingml/2006/main">
+            <a:r>
+              <a:t>- Mostre o comando completo, execute uma linha por vez quando houver mais de uma e mantenha o terminal visível.</a:t>
+            </a:r>
+          </a:p>
+          <a:p xmlns:a="http://schemas.openxmlformats.org/drawingml/2006/main">
+            <a:r>
+              <a:t/>
+            </a:r>
+          </a:p>
+          <a:p xmlns:a="http://schemas.openxmlformats.org/drawingml/2006/main">
+            <a:r>
+              <a:t>Transição:</a:t>
+            </a:r>
+          </a:p>
+          <a:p xmlns:a="http://schemas.openxmlformats.org/drawingml/2006/main">
+            <a:r>
+              <a:t>Com esse ponto estabelecido, avance para “Demonstração — observe”.</a:t>
             </a:r>
           </a:p>
           <a:p xmlns:a="http://schemas.openxmlformats.org/drawingml/2006/main">
@@ -1037,7 +1287,57 @@
           <a:lstStyle xmlns:a="http://schemas.openxmlformats.org/drawingml/2006/main"/>
           <a:p xmlns:a="http://schemas.openxmlformats.org/drawingml/2006/main">
             <a:r>
-              <a:t>Durante a execução, destaque: Cópia temporária do projeto; customer_id removido da v2; Build específico retorna falha.</a:t>
+              <a:t>[Roteiro recomendado]</a:t>
+            </a:r>
+          </a:p>
+          <a:p xmlns:a="http://schemas.openxmlformats.org/drawingml/2006/main">
+            <a:r>
+              <a:t>[Tempo sugerido: 01:10]</a:t>
+            </a:r>
+          </a:p>
+          <a:p xmlns:a="http://schemas.openxmlformats.org/drawingml/2006/main">
+            <a:r>
+              <a:t/>
+            </a:r>
+          </a:p>
+          <a:p xmlns:a="http://schemas.openxmlformats.org/drawingml/2006/main">
+            <a:r>
+              <a:t>Fala sugerida:</a:t>
+            </a:r>
+          </a:p>
+          <a:p xmlns:a="http://schemas.openxmlformats.org/drawingml/2006/main">
+            <a:r>
+              <a:t>Enquanto a execução acontece, não olhe apenas para a mensagem final. Observe cópia temporária do projeto, customer_id removido da v2 e Build específico retorna falha. Cada sinal responde a uma pergunta diferente sobre o pipeline. Se um deles divergir, interrompa a demonstração e investigue; o objetivo do hands-on é produzir evidência, não apenas chegar rapidamente a uma tela verde.</a:t>
+            </a:r>
+          </a:p>
+          <a:p xmlns:a="http://schemas.openxmlformats.org/drawingml/2006/main">
+            <a:r>
+              <a:t/>
+            </a:r>
+          </a:p>
+          <a:p xmlns:a="http://schemas.openxmlformats.org/drawingml/2006/main">
+            <a:r>
+              <a:t>O que destacar:</a:t>
+            </a:r>
+          </a:p>
+          <a:p xmlns:a="http://schemas.openxmlformats.org/drawingml/2006/main">
+            <a:r>
+              <a:t>- Marque cada observação quando ela aparecer no terminal ou no artifact correspondente.</a:t>
+            </a:r>
+          </a:p>
+          <a:p xmlns:a="http://schemas.openxmlformats.org/drawingml/2006/main">
+            <a:r>
+              <a:t/>
+            </a:r>
+          </a:p>
+          <a:p xmlns:a="http://schemas.openxmlformats.org/drawingml/2006/main">
+            <a:r>
+              <a:t>Transição:</a:t>
+            </a:r>
+          </a:p>
+          <a:p xmlns:a="http://schemas.openxmlformats.org/drawingml/2006/main">
+            <a:r>
+              <a:t>Com esse ponto estabelecido, avance para “RESULTADO ESPERADO”.</a:t>
             </a:r>
           </a:p>
           <a:p xmlns:a="http://schemas.openxmlformats.org/drawingml/2006/main">
@@ -1152,7 +1452,57 @@
           <a:lstStyle xmlns:a="http://schemas.openxmlformats.org/drawingml/2006/main"/>
           <a:p xmlns:a="http://schemas.openxmlformats.org/drawingml/2006/main">
             <a:r>
-              <a:t>Confirme o resultado esperado: Breaking change bloqueada. Se o valor divergir, não avance sem investigar.</a:t>
+              <a:t>[Roteiro recomendado]</a:t>
+            </a:r>
+          </a:p>
+          <a:p xmlns:a="http://schemas.openxmlformats.org/drawingml/2006/main">
+            <a:r>
+              <a:t>[Tempo sugerido: 00:45]</a:t>
+            </a:r>
+          </a:p>
+          <a:p xmlns:a="http://schemas.openxmlformats.org/drawingml/2006/main">
+            <a:r>
+              <a:t/>
+            </a:r>
+          </a:p>
+          <a:p xmlns:a="http://schemas.openxmlformats.org/drawingml/2006/main">
+            <a:r>
+              <a:t>Fala sugerida:</a:t>
+            </a:r>
+          </a:p>
+          <a:p xmlns:a="http://schemas.openxmlformats.org/drawingml/2006/main">
+            <a:r>
+              <a:t>Este é o ponto de parada da demonstração: Breaking change bloqueada. Esse resultado confirma que a etapa executada produziu a evidência esperada para o checkpoint 05. Se o valor, o status ou o artifact estiver diferente, não trate a divergência como detalhe de ambiente. Use o diagnóstico do curso e só avance quando a causa estiver compreendida.</a:t>
+            </a:r>
+          </a:p>
+          <a:p xmlns:a="http://schemas.openxmlformats.org/drawingml/2006/main">
+            <a:r>
+              <a:t/>
+            </a:r>
+          </a:p>
+          <a:p xmlns:a="http://schemas.openxmlformats.org/drawingml/2006/main">
+            <a:r>
+              <a:t>O que destacar:</a:t>
+            </a:r>
+          </a:p>
+          <a:p xmlns:a="http://schemas.openxmlformats.org/drawingml/2006/main">
+            <a:r>
+              <a:t>- Compare o resultado do terminal com a frase central do slide e registre a evidência antes de continuar.</a:t>
+            </a:r>
+          </a:p>
+          <a:p xmlns:a="http://schemas.openxmlformats.org/drawingml/2006/main">
+            <a:r>
+              <a:t/>
+            </a:r>
+          </a:p>
+          <a:p xmlns:a="http://schemas.openxmlformats.org/drawingml/2006/main">
+            <a:r>
+              <a:t>Transição:</a:t>
+            </a:r>
+          </a:p>
+          <a:p xmlns:a="http://schemas.openxmlformats.org/drawingml/2006/main">
+            <a:r>
+              <a:t>Com esse ponto estabelecido, avance para “O mesmo recurso afeta três decisões”.</a:t>
             </a:r>
           </a:p>
           <a:p xmlns:a="http://schemas.openxmlformats.org/drawingml/2006/main">
@@ -1267,7 +1617,57 @@
           <a:lstStyle xmlns:a="http://schemas.openxmlformats.org/drawingml/2006/main"/>
           <a:p xmlns:a="http://schemas.openxmlformats.org/drawingml/2006/main">
             <a:r>
-              <a:t>Conecte a técnica aos efeitos: Governança: migração explícita; FinOps: falha antecipada; IA: schema previsível. Não prometa economia sem medição.</a:t>
+              <a:t>[Roteiro recomendado]</a:t>
+            </a:r>
+          </a:p>
+          <a:p xmlns:a="http://schemas.openxmlformats.org/drawingml/2006/main">
+            <a:r>
+              <a:t>[Tempo sugerido: 01:00]</a:t>
+            </a:r>
+          </a:p>
+          <a:p xmlns:a="http://schemas.openxmlformats.org/drawingml/2006/main">
+            <a:r>
+              <a:t/>
+            </a:r>
+          </a:p>
+          <a:p xmlns:a="http://schemas.openxmlformats.org/drawingml/2006/main">
+            <a:r>
+              <a:t>Fala sugerida:</a:t>
+            </a:r>
+          </a:p>
+          <a:p xmlns:a="http://schemas.openxmlformats.org/drawingml/2006/main">
+            <a:r>
+              <a:t>Antes de seguir, conecte a técnica às decisões que ela afeta: Governança: migração explícita, FinOps: falha antecipada e IA: schema previsível. Governança define responsabilidade e consistência; FinOps pergunta quanto trabalho estamos repetindo; e IA depende do contexto que decidimos expor. A mesma implementação pode melhorar os três eixos, mas os ganhos devem ser medidos separadamente.</a:t>
+            </a:r>
+          </a:p>
+          <a:p xmlns:a="http://schemas.openxmlformats.org/drawingml/2006/main">
+            <a:r>
+              <a:t/>
+            </a:r>
+          </a:p>
+          <a:p xmlns:a="http://schemas.openxmlformats.org/drawingml/2006/main">
+            <a:r>
+              <a:t>O que destacar:</a:t>
+            </a:r>
+          </a:p>
+          <a:p xmlns:a="http://schemas.openxmlformats.org/drawingml/2006/main">
+            <a:r>
+              <a:t>- Percorra os três eixos e evite apresentar economia ou acurácia como consequência automática.</a:t>
+            </a:r>
+          </a:p>
+          <a:p xmlns:a="http://schemas.openxmlformats.org/drawingml/2006/main">
+            <a:r>
+              <a:t/>
+            </a:r>
+          </a:p>
+          <a:p xmlns:a="http://schemas.openxmlformats.org/drawingml/2006/main">
+            <a:r>
+              <a:t>Transição:</a:t>
+            </a:r>
+          </a:p>
+          <a:p xmlns:a="http://schemas.openxmlformats.org/drawingml/2006/main">
+            <a:r>
+              <a:t>Com esse ponto estabelecido, avance para “v1 + v2”.</a:t>
             </a:r>
           </a:p>
           <a:p xmlns:a="http://schemas.openxmlformats.org/drawingml/2006/main">
@@ -1382,7 +1782,57 @@
           <a:lstStyle xmlns:a="http://schemas.openxmlformats.org/drawingml/2006/main"/>
           <a:p xmlns:a="http://schemas.openxmlformats.org/drawingml/2006/main">
             <a:r>
-              <a:t>v1 + v2: coexistem durante a migração. Evidência do laboratório; sem porcentagem comercial.</a:t>
+              <a:t>[Roteiro recomendado]</a:t>
+            </a:r>
+          </a:p>
+          <a:p xmlns:a="http://schemas.openxmlformats.org/drawingml/2006/main">
+            <a:r>
+              <a:t>[Tempo sugerido: 00:55]</a:t>
+            </a:r>
+          </a:p>
+          <a:p xmlns:a="http://schemas.openxmlformats.org/drawingml/2006/main">
+            <a:r>
+              <a:t/>
+            </a:r>
+          </a:p>
+          <a:p xmlns:a="http://schemas.openxmlformats.org/drawingml/2006/main">
+            <a:r>
+              <a:t>Fala sugerida:</a:t>
+            </a:r>
+          </a:p>
+          <a:p xmlns:a="http://schemas.openxmlformats.org/drawingml/2006/main">
+            <a:r>
+              <a:t>Aqui temos v1 + v2: coexistem durante a migração. O número ajuda a dimensionar o exemplo, mas precisa ser lido com a ressalva correta. Evidência do laboratório; sem porcentagem comercial. Use o case como evidência contextual e não como promessa de que outro projeto repetirá o mesmo resultado sem as mesmas condições.</a:t>
+            </a:r>
+          </a:p>
+          <a:p xmlns:a="http://schemas.openxmlformats.org/drawingml/2006/main">
+            <a:r>
+              <a:t/>
+            </a:r>
+          </a:p>
+          <a:p xmlns:a="http://schemas.openxmlformats.org/drawingml/2006/main">
+            <a:r>
+              <a:t>O que destacar:</a:t>
+            </a:r>
+          </a:p>
+          <a:p xmlns:a="http://schemas.openxmlformats.org/drawingml/2006/main">
+            <a:r>
+              <a:t>- Apresente primeiro o número, depois a definição e termine obrigatoriamente com a ressalva.</a:t>
+            </a:r>
+          </a:p>
+          <a:p xmlns:a="http://schemas.openxmlformats.org/drawingml/2006/main">
+            <a:r>
+              <a:t/>
+            </a:r>
+          </a:p>
+          <a:p xmlns:a="http://schemas.openxmlformats.org/drawingml/2006/main">
+            <a:r>
+              <a:t>Transição:</a:t>
+            </a:r>
+          </a:p>
+          <a:p xmlns:a="http://schemas.openxmlformats.org/drawingml/2006/main">
+            <a:r>
+              <a:t>Com esse ponto estabelecido, avance para “Limitações que precisam permanecer visíveis”.</a:t>
             </a:r>
           </a:p>
           <a:p xmlns:a="http://schemas.openxmlformats.org/drawingml/2006/main">
@@ -1497,7 +1947,57 @@
           <a:lstStyle xmlns:a="http://schemas.openxmlformats.org/drawingml/2006/main"/>
           <a:p xmlns:a="http://schemas.openxmlformats.org/drawingml/2006/main">
             <a:r>
-              <a:t>Apresente os limites sem minimizá-los: Constraints variam por adaptador; Contrato não detecta toda lógica; Versões duplicadas têm custo.</a:t>
+              <a:t>[Roteiro recomendado]</a:t>
+            </a:r>
+          </a:p>
+          <a:p xmlns:a="http://schemas.openxmlformats.org/drawingml/2006/main">
+            <a:r>
+              <a:t>[Tempo sugerido: 01:00]</a:t>
+            </a:r>
+          </a:p>
+          <a:p xmlns:a="http://schemas.openxmlformats.org/drawingml/2006/main">
+            <a:r>
+              <a:t/>
+            </a:r>
+          </a:p>
+          <a:p xmlns:a="http://schemas.openxmlformats.org/drawingml/2006/main">
+            <a:r>
+              <a:t>Fala sugerida:</a:t>
+            </a:r>
+          </a:p>
+          <a:p xmlns:a="http://schemas.openxmlformats.org/drawingml/2006/main">
+            <a:r>
+              <a:t>Também precisamos declarar os limites da recomendação. Neste cenário, considere constraints variam por adaptador, Contrato não detecta toda lógica e Versões duplicadas têm custo. Esses pontos não anulam a técnica; eles delimitam onde a demonstração é válida e quais condições precisam ser verificadas antes de levar o padrão para produção. Tratar limites como parte do design evita transformar uma boa prática em regra universal.</a:t>
+            </a:r>
+          </a:p>
+          <a:p xmlns:a="http://schemas.openxmlformats.org/drawingml/2006/main">
+            <a:r>
+              <a:t/>
+            </a:r>
+          </a:p>
+          <a:p xmlns:a="http://schemas.openxmlformats.org/drawingml/2006/main">
+            <a:r>
+              <a:t>O que destacar:</a:t>
+            </a:r>
+          </a:p>
+          <a:p xmlns:a="http://schemas.openxmlformats.org/drawingml/2006/main">
+            <a:r>
+              <a:t>- Leia os limites com o mesmo peso dado aos benefícios e diferencie restrição do laboratório de restrição do produto.</a:t>
+            </a:r>
+          </a:p>
+          <a:p xmlns:a="http://schemas.openxmlformats.org/drawingml/2006/main">
+            <a:r>
+              <a:t/>
+            </a:r>
+          </a:p>
+          <a:p xmlns:a="http://schemas.openxmlformats.org/drawingml/2006/main">
+            <a:r>
+              <a:t>Transição:</a:t>
+            </a:r>
+          </a:p>
+          <a:p xmlns:a="http://schemas.openxmlformats.org/drawingml/2006/main">
+            <a:r>
+              <a:t>Com esse ponto estabelecido, avance para “RADAR”.</a:t>
             </a:r>
           </a:p>
           <a:p xmlns:a="http://schemas.openxmlformats.org/drawingml/2006/main">
@@ -1612,7 +2112,57 @@
           <a:lstStyle xmlns:a="http://schemas.openxmlformats.org/drawingml/2006/main"/>
           <a:p xmlns:a="http://schemas.openxmlformats.org/drawingml/2006/main">
             <a:r>
-              <a:t>Melhorias futuras não justificam migrar um contrato estável para runtime beta. Reforce que beta e preview não fazem parte da aceitação.</a:t>
+              <a:t>[Roteiro recomendado]</a:t>
+            </a:r>
+          </a:p>
+          <a:p xmlns:a="http://schemas.openxmlformats.org/drawingml/2006/main">
+            <a:r>
+              <a:t>[Tempo sugerido: 00:55]</a:t>
+            </a:r>
+          </a:p>
+          <a:p xmlns:a="http://schemas.openxmlformats.org/drawingml/2006/main">
+            <a:r>
+              <a:t/>
+            </a:r>
+          </a:p>
+          <a:p xmlns:a="http://schemas.openxmlformats.org/drawingml/2006/main">
+            <a:r>
+              <a:t>Fala sugerida:</a:t>
+            </a:r>
+          </a:p>
+          <a:p xmlns:a="http://schemas.openxmlformats.org/drawingml/2006/main">
+            <a:r>
+              <a:t>Este é o nosso Radar: Melhorias futuras não justificam migrar um contrato estável para runtime beta. A intenção é mostrar a direção da ferramenta sem misturar preview com o caminho suportado da aula. Novidade observada não é recomendação de produção. Para adotar qualquer recurso futuro, confirme maturidade, adaptador, documentação e impacto sobre o projeto antes de alterar o baseline estável.</a:t>
+            </a:r>
+          </a:p>
+          <a:p xmlns:a="http://schemas.openxmlformats.org/drawingml/2006/main">
+            <a:r>
+              <a:t/>
+            </a:r>
+          </a:p>
+          <a:p xmlns:a="http://schemas.openxmlformats.org/drawingml/2006/main">
+            <a:r>
+              <a:t>O que destacar:</a:t>
+            </a:r>
+          </a:p>
+          <a:p xmlns:a="http://schemas.openxmlformats.org/drawingml/2006/main">
+            <a:r>
+              <a:t>- Reforce visualmente a regra do rodapé e não execute comandos beta ou preview como parte obrigatória da aula.</a:t>
+            </a:r>
+          </a:p>
+          <a:p xmlns:a="http://schemas.openxmlformats.org/drawingml/2006/main">
+            <a:r>
+              <a:t/>
+            </a:r>
+          </a:p>
+          <a:p xmlns:a="http://schemas.openxmlformats.org/drawingml/2006/main">
+            <a:r>
+              <a:t>Transição:</a:t>
+            </a:r>
+          </a:p>
+          <a:p xmlns:a="http://schemas.openxmlformats.org/drawingml/2006/main">
+            <a:r>
+              <a:t>Com esse ponto estabelecido, avance para “PRÓXIMO PASSO”.</a:t>
             </a:r>
           </a:p>
           <a:p xmlns:a="http://schemas.openxmlformats.org/drawingml/2006/main">
@@ -1727,7 +2277,57 @@
           <a:lstStyle xmlns:a="http://schemas.openxmlformats.org/drawingml/2006/main"/>
           <a:p xmlns:a="http://schemas.openxmlformats.org/drawingml/2006/main">
             <a:r>
-              <a:t>Se um dashboard ou agente depende da Gold, ela já é uma API. Use o diagrama para antecipar o problema que será comprovado no laboratório.</a:t>
+              <a:t>[Roteiro recomendado]</a:t>
+            </a:r>
+          </a:p>
+          <a:p xmlns:a="http://schemas.openxmlformats.org/drawingml/2006/main">
+            <a:r>
+              <a:t>[Tempo sugerido: 01:00]</a:t>
+            </a:r>
+          </a:p>
+          <a:p xmlns:a="http://schemas.openxmlformats.org/drawingml/2006/main">
+            <a:r>
+              <a:t/>
+            </a:r>
+          </a:p>
+          <a:p xmlns:a="http://schemas.openxmlformats.org/drawingml/2006/main">
+            <a:r>
+              <a:t>Fala sugerida:</a:t>
+            </a:r>
+          </a:p>
+          <a:p xmlns:a="http://schemas.openxmlformats.org/drawingml/2006/main">
+            <a:r>
+              <a:t>Quero começar com uma provocação: Se um dashboard ou agente depende da Gold, ela já é uma API. Essa pergunta orienta toda a aula. Em vez de aceitar uma afirmação porque ela parece correta, vamos procurar uma definição verificável e uma demonstração executável. Guarde essa tensão, porque voltaremos a ela quando compararmos o conceito com o resultado do laboratório.</a:t>
+            </a:r>
+          </a:p>
+          <a:p xmlns:a="http://schemas.openxmlformats.org/drawingml/2006/main">
+            <a:r>
+              <a:t/>
+            </a:r>
+          </a:p>
+          <a:p xmlns:a="http://schemas.openxmlformats.org/drawingml/2006/main">
+            <a:r>
+              <a:t>O que destacar:</a:t>
+            </a:r>
+          </a:p>
+          <a:p xmlns:a="http://schemas.openxmlformats.org/drawingml/2006/main">
+            <a:r>
+              <a:t>- Dê uma pausa depois da provocação e use o diagrama como mapa do problema, sem explicar todas as etapas ainda.</a:t>
+            </a:r>
+          </a:p>
+          <a:p xmlns:a="http://schemas.openxmlformats.org/drawingml/2006/main">
+            <a:r>
+              <a:t/>
+            </a:r>
+          </a:p>
+          <a:p xmlns:a="http://schemas.openxmlformats.org/drawingml/2006/main">
+            <a:r>
+              <a:t>Transição:</a:t>
+            </a:r>
+          </a:p>
+          <a:p xmlns:a="http://schemas.openxmlformats.org/drawingml/2006/main">
+            <a:r>
+              <a:t>Com esse ponto estabelecido, avance para “Ao final, você consegue...”.</a:t>
             </a:r>
           </a:p>
           <a:p xmlns:a="http://schemas.openxmlformats.org/drawingml/2006/main">
@@ -1842,7 +2442,57 @@
           <a:lstStyle xmlns:a="http://schemas.openxmlformats.org/drawingml/2006/main"/>
           <a:p xmlns:a="http://schemas.openxmlformats.org/drawingml/2006/main">
             <a:r>
-              <a:t>Simule a remoção de uma coluna pública e verifique se a CI bloqueia. Encerre conectando a aula ao próximo checkpoint.</a:t>
+              <a:t>[Roteiro recomendado]</a:t>
+            </a:r>
+          </a:p>
+          <a:p xmlns:a="http://schemas.openxmlformats.org/drawingml/2006/main">
+            <a:r>
+              <a:t>[Tempo sugerido: 00:40]</a:t>
+            </a:r>
+          </a:p>
+          <a:p xmlns:a="http://schemas.openxmlformats.org/drawingml/2006/main">
+            <a:r>
+              <a:t/>
+            </a:r>
+          </a:p>
+          <a:p xmlns:a="http://schemas.openxmlformats.org/drawingml/2006/main">
+            <a:r>
+              <a:t>Fala sugerida:</a:t>
+            </a:r>
+          </a:p>
+          <a:p xmlns:a="http://schemas.openxmlformats.org/drawingml/2006/main">
+            <a:r>
+              <a:t>Simule a remoção de uma coluna pública e verifique se a CI bloqueia. Faça essa etapa antes de seguir para o próximo episódio, porque o curso é cumulativo e o checkpoint atual se torna a base da aula seguinte. Se houver divergência, use o relatório de suporte e registre o que foi observado. O objetivo é avançar com um estado conhecido e reproduzível, não apenas assistir ao conteúdo.</a:t>
+            </a:r>
+          </a:p>
+          <a:p xmlns:a="http://schemas.openxmlformats.org/drawingml/2006/main">
+            <a:r>
+              <a:t/>
+            </a:r>
+          </a:p>
+          <a:p xmlns:a="http://schemas.openxmlformats.org/drawingml/2006/main">
+            <a:r>
+              <a:t>O que destacar:</a:t>
+            </a:r>
+          </a:p>
+          <a:p xmlns:a="http://schemas.openxmlformats.org/drawingml/2006/main">
+            <a:r>
+              <a:t>- Mostre o checkpoint e indique no repositório onde ficam o roteiro, os comandos e as referências da aula.</a:t>
+            </a:r>
+          </a:p>
+          <a:p xmlns:a="http://schemas.openxmlformats.org/drawingml/2006/main">
+            <a:r>
+              <a:t/>
+            </a:r>
+          </a:p>
+          <a:p xmlns:a="http://schemas.openxmlformats.org/drawingml/2006/main">
+            <a:r>
+              <a:t>Transição:</a:t>
+            </a:r>
+          </a:p>
+          <a:p xmlns:a="http://schemas.openxmlformats.org/drawingml/2006/main">
+            <a:r>
+              <a:t>Encerre retomando a pergunta inicial e confirme que o aluno sabe qual ação executar depois do episódio 5.</a:t>
             </a:r>
           </a:p>
           <a:p xmlns:a="http://schemas.openxmlformats.org/drawingml/2006/main">
@@ -1957,7 +2607,57 @@
           <a:lstStyle xmlns:a="http://schemas.openxmlformats.org/drawingml/2006/main"/>
           <a:p xmlns:a="http://schemas.openxmlformats.org/drawingml/2006/main">
             <a:r>
-              <a:t>Explique os três resultados observáveis da aula: Aplicar contract; Coexistir v1 e v2; Provar um breaking change bloqueado.</a:t>
+              <a:t>[Roteiro recomendado]</a:t>
+            </a:r>
+          </a:p>
+          <a:p xmlns:a="http://schemas.openxmlformats.org/drawingml/2006/main">
+            <a:r>
+              <a:t>[Tempo sugerido: 01:00]</a:t>
+            </a:r>
+          </a:p>
+          <a:p xmlns:a="http://schemas.openxmlformats.org/drawingml/2006/main">
+            <a:r>
+              <a:t/>
+            </a:r>
+          </a:p>
+          <a:p xmlns:a="http://schemas.openxmlformats.org/drawingml/2006/main">
+            <a:r>
+              <a:t>Fala sugerida:</a:t>
+            </a:r>
+          </a:p>
+          <a:p xmlns:a="http://schemas.openxmlformats.org/drawingml/2006/main">
+            <a:r>
+              <a:t>Ao final desta aula, você deverá conseguir aplicar contract, Coexistir v1 e v2 e Provar um breaking change bloqueado. Esses resultados formam uma sequência: primeiro entendemos a regra, depois observamos sua representação no projeto e, por fim, comprovamos o comportamento no checkpoint. Se alguma dessas três partes não estiver clara, volte ao slide correspondente antes de executar a demonstração.</a:t>
+            </a:r>
+          </a:p>
+          <a:p xmlns:a="http://schemas.openxmlformats.org/drawingml/2006/main">
+            <a:r>
+              <a:t/>
+            </a:r>
+          </a:p>
+          <a:p xmlns:a="http://schemas.openxmlformats.org/drawingml/2006/main">
+            <a:r>
+              <a:t>O que destacar:</a:t>
+            </a:r>
+          </a:p>
+          <a:p xmlns:a="http://schemas.openxmlformats.org/drawingml/2006/main">
+            <a:r>
+              <a:t>- Percorra os objetivos da esquerda para a direita e apresente-os como resultados observáveis, não como uma agenda abstrata.</a:t>
+            </a:r>
+          </a:p>
+          <a:p xmlns:a="http://schemas.openxmlformats.org/drawingml/2006/main">
+            <a:r>
+              <a:t/>
+            </a:r>
+          </a:p>
+          <a:p xmlns:a="http://schemas.openxmlformats.org/drawingml/2006/main">
+            <a:r>
+              <a:t>Transição:</a:t>
+            </a:r>
+          </a:p>
+          <a:p xmlns:a="http://schemas.openxmlformats.org/drawingml/2006/main">
+            <a:r>
+              <a:t>Com esse ponto estabelecido, avance para “Contrato protege forma, não verdade”.</a:t>
             </a:r>
           </a:p>
           <a:p xmlns:a="http://schemas.openxmlformats.org/drawingml/2006/main">
@@ -2072,7 +2772,57 @@
           <a:lstStyle xmlns:a="http://schemas.openxmlformats.org/drawingml/2006/main"/>
           <a:p xmlns:a="http://schemas.openxmlformats.org/drawingml/2006/main">
             <a:r>
-              <a:t>Nomes e tipos podem estar corretos enquanto a regra de negócio está errada. Desenvolva os pontos: Schema esperado; Tipos coerentes; Comportamento testado separadamente.</a:t>
+              <a:t>[Roteiro recomendado]</a:t>
+            </a:r>
+          </a:p>
+          <a:p xmlns:a="http://schemas.openxmlformats.org/drawingml/2006/main">
+            <a:r>
+              <a:t>[Tempo sugerido: 01:10]</a:t>
+            </a:r>
+          </a:p>
+          <a:p xmlns:a="http://schemas.openxmlformats.org/drawingml/2006/main">
+            <a:r>
+              <a:t/>
+            </a:r>
+          </a:p>
+          <a:p xmlns:a="http://schemas.openxmlformats.org/drawingml/2006/main">
+            <a:r>
+              <a:t>Fala sugerida:</a:t>
+            </a:r>
+          </a:p>
+          <a:p xmlns:a="http://schemas.openxmlformats.org/drawingml/2006/main">
+            <a:r>
+              <a:t>A mensagem principal deste slide é: Nomes e tipos podem estar corretos enquanto a regra de negócio está errada. Para tornar isso concreto, observe schema esperado, Tipos coerentes e Comportamento testado separadamente. Esses pontos devem ser entendidos em conjunto; não são funcionalidades isoladas. No projeto, essa combinação transforma uma convenção informal em algo que pode ser revisado, testado ou consumido de maneira consistente.</a:t>
+            </a:r>
+          </a:p>
+          <a:p xmlns:a="http://schemas.openxmlformats.org/drawingml/2006/main">
+            <a:r>
+              <a:t/>
+            </a:r>
+          </a:p>
+          <a:p xmlns:a="http://schemas.openxmlformats.org/drawingml/2006/main">
+            <a:r>
+              <a:t>O que destacar:</a:t>
+            </a:r>
+          </a:p>
+          <a:p xmlns:a="http://schemas.openxmlformats.org/drawingml/2006/main">
+            <a:r>
+              <a:t>- Comece pelo título, leia a afirmação abaixo dele e depois desenvolva os itens sem repetir o texto palavra por palavra.</a:t>
+            </a:r>
+          </a:p>
+          <a:p xmlns:a="http://schemas.openxmlformats.org/drawingml/2006/main">
+            <a:r>
+              <a:t/>
+            </a:r>
+          </a:p>
+          <a:p xmlns:a="http://schemas.openxmlformats.org/drawingml/2006/main">
+            <a:r>
+              <a:t>Transição:</a:t>
+            </a:r>
+          </a:p>
+          <a:p xmlns:a="http://schemas.openxmlformats.org/drawingml/2006/main">
+            <a:r>
+              <a:t>Com esse ponto estabelecido, avance para “Contrate o limite público”.</a:t>
             </a:r>
           </a:p>
           <a:p xmlns:a="http://schemas.openxmlformats.org/drawingml/2006/main">
@@ -2187,7 +2937,57 @@
           <a:lstStyle xmlns:a="http://schemas.openxmlformats.org/drawingml/2006/main"/>
           <a:p xmlns:a="http://schemas.openxmlformats.org/drawingml/2006/main">
             <a:r>
-              <a:t>Interfaces críticas merecem rigidez; staging ainda precisa evoluir. Desenvolva os pontos: Dashboard; API; Outro domínio; Agente.</a:t>
+              <a:t>[Roteiro recomendado]</a:t>
+            </a:r>
+          </a:p>
+          <a:p xmlns:a="http://schemas.openxmlformats.org/drawingml/2006/main">
+            <a:r>
+              <a:t>[Tempo sugerido: 01:10]</a:t>
+            </a:r>
+          </a:p>
+          <a:p xmlns:a="http://schemas.openxmlformats.org/drawingml/2006/main">
+            <a:r>
+              <a:t/>
+            </a:r>
+          </a:p>
+          <a:p xmlns:a="http://schemas.openxmlformats.org/drawingml/2006/main">
+            <a:r>
+              <a:t>Fala sugerida:</a:t>
+            </a:r>
+          </a:p>
+          <a:p xmlns:a="http://schemas.openxmlformats.org/drawingml/2006/main">
+            <a:r>
+              <a:t>A mensagem principal deste slide é: Interfaces críticas merecem rigidez; staging ainda precisa evoluir. Para tornar isso concreto, observe dashboard, API, Outro domínio e Agente. Esses pontos devem ser entendidos em conjunto; não são funcionalidades isoladas. No projeto, essa combinação transforma uma convenção informal em algo que pode ser revisado, testado ou consumido de maneira consistente.</a:t>
+            </a:r>
+          </a:p>
+          <a:p xmlns:a="http://schemas.openxmlformats.org/drawingml/2006/main">
+            <a:r>
+              <a:t/>
+            </a:r>
+          </a:p>
+          <a:p xmlns:a="http://schemas.openxmlformats.org/drawingml/2006/main">
+            <a:r>
+              <a:t>O que destacar:</a:t>
+            </a:r>
+          </a:p>
+          <a:p xmlns:a="http://schemas.openxmlformats.org/drawingml/2006/main">
+            <a:r>
+              <a:t>- Comece pelo título, leia a afirmação abaixo dele e depois desenvolva os itens sem repetir o texto palavra por palavra.</a:t>
+            </a:r>
+          </a:p>
+          <a:p xmlns:a="http://schemas.openxmlformats.org/drawingml/2006/main">
+            <a:r>
+              <a:t/>
+            </a:r>
+          </a:p>
+          <a:p xmlns:a="http://schemas.openxmlformats.org/drawingml/2006/main">
+            <a:r>
+              <a:t>Transição:</a:t>
+            </a:r>
+          </a:p>
+          <a:p xmlns:a="http://schemas.openxmlformats.org/drawingml/2006/main">
+            <a:r>
+              <a:t>Com esse ponto estabelecido, avance para “Contrate o limite público”.</a:t>
             </a:r>
           </a:p>
           <a:p xmlns:a="http://schemas.openxmlformats.org/drawingml/2006/main">
@@ -2302,7 +3102,57 @@
           <a:lstStyle xmlns:a="http://schemas.openxmlformats.org/drawingml/2006/main"/>
           <a:p xmlns:a="http://schemas.openxmlformats.org/drawingml/2006/main">
             <a:r>
-              <a:t>Use a composição para explicar visualmente: Interfaces críticas merecem rigidez; staging ainda precisa evoluir. Dashboard API Outro domínio Agente</a:t>
+              <a:t>[Roteiro recomendado]</a:t>
+            </a:r>
+          </a:p>
+          <a:p xmlns:a="http://schemas.openxmlformats.org/drawingml/2006/main">
+            <a:r>
+              <a:t>[Tempo sugerido: 00:55]</a:t>
+            </a:r>
+          </a:p>
+          <a:p xmlns:a="http://schemas.openxmlformats.org/drawingml/2006/main">
+            <a:r>
+              <a:t/>
+            </a:r>
+          </a:p>
+          <a:p xmlns:a="http://schemas.openxmlformats.org/drawingml/2006/main">
+            <a:r>
+              <a:t>Fala sugerida:</a:t>
+            </a:r>
+          </a:p>
+          <a:p xmlns:a="http://schemas.openxmlformats.org/drawingml/2006/main">
+            <a:r>
+              <a:t>Agora vamos ler a ideia visualmente. Interfaces críticas merecem rigidez; staging ainda precisa evoluir. Siga a composição na ordem mostrada e conecte privado, Contrato e Público. A imagem ou o fluxo não cria uma regra nova; ele torna visível a relação que acabamos de explicar. Use a disposição dos elementos para reforçar causa, dependência ou comparação.</a:t>
+            </a:r>
+          </a:p>
+          <a:p xmlns:a="http://schemas.openxmlformats.org/drawingml/2006/main">
+            <a:r>
+              <a:t/>
+            </a:r>
+          </a:p>
+          <a:p xmlns:a="http://schemas.openxmlformats.org/drawingml/2006/main">
+            <a:r>
+              <a:t>O que destacar:</a:t>
+            </a:r>
+          </a:p>
+          <a:p xmlns:a="http://schemas.openxmlformats.org/drawingml/2006/main">
+            <a:r>
+              <a:t>- Acompanhe o fluxo ou a comparação com o cursor e preserve a ordem de leitura do slide.</a:t>
+            </a:r>
+          </a:p>
+          <a:p xmlns:a="http://schemas.openxmlformats.org/drawingml/2006/main">
+            <a:r>
+              <a:t/>
+            </a:r>
+          </a:p>
+          <a:p xmlns:a="http://schemas.openxmlformats.org/drawingml/2006/main">
+            <a:r>
+              <a:t>Transição:</a:t>
+            </a:r>
+          </a:p>
+          <a:p xmlns:a="http://schemas.openxmlformats.org/drawingml/2006/main">
+            <a:r>
+              <a:t>Com esse ponto estabelecido, avance para “Versão é para mudança incompatível”.</a:t>
             </a:r>
           </a:p>
           <a:p xmlns:a="http://schemas.openxmlformats.org/drawingml/2006/main">
@@ -2417,7 +3267,57 @@
           <a:lstStyle xmlns:a="http://schemas.openxmlformats.org/drawingml/2006/main"/>
           <a:p xmlns:a="http://schemas.openxmlformats.org/drawingml/2006/main">
             <a:r>
-              <a:t>Remover coluna pede nova versão; adicionar coluna costuma ser compatível. Desenvolva os pontos: v1 continua ativa; v2 vira latest; Consumidores migram com prazo.</a:t>
+              <a:t>[Roteiro recomendado]</a:t>
+            </a:r>
+          </a:p>
+          <a:p xmlns:a="http://schemas.openxmlformats.org/drawingml/2006/main">
+            <a:r>
+              <a:t>[Tempo sugerido: 01:10]</a:t>
+            </a:r>
+          </a:p>
+          <a:p xmlns:a="http://schemas.openxmlformats.org/drawingml/2006/main">
+            <a:r>
+              <a:t/>
+            </a:r>
+          </a:p>
+          <a:p xmlns:a="http://schemas.openxmlformats.org/drawingml/2006/main">
+            <a:r>
+              <a:t>Fala sugerida:</a:t>
+            </a:r>
+          </a:p>
+          <a:p xmlns:a="http://schemas.openxmlformats.org/drawingml/2006/main">
+            <a:r>
+              <a:t>A mensagem principal deste slide é: Remover coluna pede nova versão; adicionar coluna costuma ser compatível. Para tornar isso concreto, observe v1 continua ativa, v2 vira latest e Consumidores migram com prazo. Esses pontos devem ser entendidos em conjunto; não são funcionalidades isoladas. No projeto, essa combinação transforma uma convenção informal em algo que pode ser revisado, testado ou consumido de maneira consistente.</a:t>
+            </a:r>
+          </a:p>
+          <a:p xmlns:a="http://schemas.openxmlformats.org/drawingml/2006/main">
+            <a:r>
+              <a:t/>
+            </a:r>
+          </a:p>
+          <a:p xmlns:a="http://schemas.openxmlformats.org/drawingml/2006/main">
+            <a:r>
+              <a:t>O que destacar:</a:t>
+            </a:r>
+          </a:p>
+          <a:p xmlns:a="http://schemas.openxmlformats.org/drawingml/2006/main">
+            <a:r>
+              <a:t>- Comece pelo título, leia a afirmação abaixo dele e depois desenvolva os itens sem repetir o texto palavra por palavra.</a:t>
+            </a:r>
+          </a:p>
+          <a:p xmlns:a="http://schemas.openxmlformats.org/drawingml/2006/main">
+            <a:r>
+              <a:t/>
+            </a:r>
+          </a:p>
+          <a:p xmlns:a="http://schemas.openxmlformats.org/drawingml/2006/main">
+            <a:r>
+              <a:t>Transição:</a:t>
+            </a:r>
+          </a:p>
+          <a:p xmlns:a="http://schemas.openxmlformats.org/drawingml/2006/main">
+            <a:r>
+              <a:t>Com esse ponto estabelecido, avance para “Versão é para mudança incompatível”.</a:t>
             </a:r>
           </a:p>
           <a:p xmlns:a="http://schemas.openxmlformats.org/drawingml/2006/main">
@@ -2532,7 +3432,57 @@
           <a:lstStyle xmlns:a="http://schemas.openxmlformats.org/drawingml/2006/main"/>
           <a:p xmlns:a="http://schemas.openxmlformats.org/drawingml/2006/main">
             <a:r>
-              <a:t>Use a composição para explicar visualmente: Remover coluna pede nova versão; adicionar coluna costuma ser compatível. v1 continua ativa v2 vira latest Consumidores migram com prazo</a:t>
+              <a:t>[Roteiro recomendado]</a:t>
+            </a:r>
+          </a:p>
+          <a:p xmlns:a="http://schemas.openxmlformats.org/drawingml/2006/main">
+            <a:r>
+              <a:t>[Tempo sugerido: 00:55]</a:t>
+            </a:r>
+          </a:p>
+          <a:p xmlns:a="http://schemas.openxmlformats.org/drawingml/2006/main">
+            <a:r>
+              <a:t/>
+            </a:r>
+          </a:p>
+          <a:p xmlns:a="http://schemas.openxmlformats.org/drawingml/2006/main">
+            <a:r>
+              <a:t>Fala sugerida:</a:t>
+            </a:r>
+          </a:p>
+          <a:p xmlns:a="http://schemas.openxmlformats.org/drawingml/2006/main">
+            <a:r>
+              <a:t>Agora vamos ler a ideia visualmente. Remover coluna pede nova versão; adicionar coluna costuma ser compatível. Siga a composição na ordem mostrada e conecte v1, v2, v1 continua ativa, v2 vira latest e Consumidores migram com prazo. A imagem ou o fluxo não cria uma regra nova; ele torna visível a relação que acabamos de explicar. Use a disposição dos elementos para reforçar causa, dependência ou comparação.</a:t>
+            </a:r>
+          </a:p>
+          <a:p xmlns:a="http://schemas.openxmlformats.org/drawingml/2006/main">
+            <a:r>
+              <a:t/>
+            </a:r>
+          </a:p>
+          <a:p xmlns:a="http://schemas.openxmlformats.org/drawingml/2006/main">
+            <a:r>
+              <a:t>O que destacar:</a:t>
+            </a:r>
+          </a:p>
+          <a:p xmlns:a="http://schemas.openxmlformats.org/drawingml/2006/main">
+            <a:r>
+              <a:t>- Acompanhe o fluxo ou a comparação com o cursor e preserve a ordem de leitura do slide.</a:t>
+            </a:r>
+          </a:p>
+          <a:p xmlns:a="http://schemas.openxmlformats.org/drawingml/2006/main">
+            <a:r>
+              <a:t/>
+            </a:r>
+          </a:p>
+          <a:p xmlns:a="http://schemas.openxmlformats.org/drawingml/2006/main">
+            <a:r>
+              <a:t>Transição:</a:t>
+            </a:r>
+          </a:p>
+          <a:p xmlns:a="http://schemas.openxmlformats.org/drawingml/2006/main">
+            <a:r>
+              <a:t>Com esse ponto estabelecido, avance para “Depreciação precisa de saída”.</a:t>
             </a:r>
           </a:p>
           <a:p xmlns:a="http://schemas.openxmlformats.org/drawingml/2006/main">
@@ -2647,7 +3597,57 @@
           <a:lstStyle xmlns:a="http://schemas.openxmlformats.org/drawingml/2006/main"/>
           <a:p xmlns:a="http://schemas.openxmlformats.org/drawingml/2006/main">
             <a:r>
-              <a:t>Versão sem owner, consumidor e data vira dívida permanente. Desenvolva os pontos: Publicação; Aviso; Fim do suporte; Remoção.</a:t>
+              <a:t>[Roteiro recomendado]</a:t>
+            </a:r>
+          </a:p>
+          <a:p xmlns:a="http://schemas.openxmlformats.org/drawingml/2006/main">
+            <a:r>
+              <a:t>[Tempo sugerido: 01:10]</a:t>
+            </a:r>
+          </a:p>
+          <a:p xmlns:a="http://schemas.openxmlformats.org/drawingml/2006/main">
+            <a:r>
+              <a:t/>
+            </a:r>
+          </a:p>
+          <a:p xmlns:a="http://schemas.openxmlformats.org/drawingml/2006/main">
+            <a:r>
+              <a:t>Fala sugerida:</a:t>
+            </a:r>
+          </a:p>
+          <a:p xmlns:a="http://schemas.openxmlformats.org/drawingml/2006/main">
+            <a:r>
+              <a:t>A mensagem principal deste slide é: Versão sem owner, consumidor e data vira dívida permanente. Para tornar isso concreto, observe publicação, Aviso, Fim do suporte e Remoção. Esses pontos devem ser entendidos em conjunto; não são funcionalidades isoladas. No projeto, essa combinação transforma uma convenção informal em algo que pode ser revisado, testado ou consumido de maneira consistente.</a:t>
+            </a:r>
+          </a:p>
+          <a:p xmlns:a="http://schemas.openxmlformats.org/drawingml/2006/main">
+            <a:r>
+              <a:t/>
+            </a:r>
+          </a:p>
+          <a:p xmlns:a="http://schemas.openxmlformats.org/drawingml/2006/main">
+            <a:r>
+              <a:t>O que destacar:</a:t>
+            </a:r>
+          </a:p>
+          <a:p xmlns:a="http://schemas.openxmlformats.org/drawingml/2006/main">
+            <a:r>
+              <a:t>- Comece pelo título, leia a afirmação abaixo dele e depois desenvolva os itens sem repetir o texto palavra por palavra.</a:t>
+            </a:r>
+          </a:p>
+          <a:p xmlns:a="http://schemas.openxmlformats.org/drawingml/2006/main">
+            <a:r>
+              <a:t/>
+            </a:r>
+          </a:p>
+          <a:p xmlns:a="http://schemas.openxmlformats.org/drawingml/2006/main">
+            <a:r>
+              <a:t>Transição:</a:t>
+            </a:r>
+          </a:p>
+          <a:p xmlns:a="http://schemas.openxmlformats.org/drawingml/2006/main">
+            <a:r>
+              <a:t>Com esse ponto estabelecido, avance para “Depreciação precisa de saída”.</a:t>
             </a:r>
           </a:p>
           <a:p xmlns:a="http://schemas.openxmlformats.org/drawingml/2006/main">
@@ -2794,7 +3794,7 @@
   </p:cSld>
   <p:clrMap bg1="lt1" tx1="dk1" bg2="lt2" tx2="dk2" accent1="accent1" accent2="accent2" accent3="accent3" accent4="accent4" accent5="accent5" accent6="accent6" hlink="hlink" folHlink="folHlink"/>
   <p:sldLayoutIdLst>
-    <p:sldLayoutId xmlns:r="http://schemas.openxmlformats.org/officeDocument/2006/relationships" id="2147483649" r:id="Rd3daebc9d8574eb5"/>
+    <p:sldLayoutId xmlns:r="http://schemas.openxmlformats.org/officeDocument/2006/relationships" id="2147483649" r:id="Re7b899b4fbea437d"/>
   </p:sldLayoutIdLst>
   <p:txStyles>
     <p:titleStyle>
@@ -3092,8 +4092,8 @@
   </p:cSld>
   <p:clrMap bg1="lt1" tx1="dk1" bg2="lt2" tx2="dk2" accent1="accent1" accent2="accent2" accent3="accent3" accent4="accent4" accent5="accent5" accent6="accent6" hlink="hlink" folHlink="folHlink"/>
   <p:sldLayoutIdLst>
-    <p:sldLayoutId xmlns:r="http://schemas.openxmlformats.org/officeDocument/2006/relationships" id="2147483651" r:id="Rdfb4424e8c864ebe"/>
-    <p:sldLayoutId xmlns:r="http://schemas.openxmlformats.org/officeDocument/2006/relationships" id="2147483652" r:id="R2db0dc4778214cd5"/>
+    <p:sldLayoutId xmlns:r="http://schemas.openxmlformats.org/officeDocument/2006/relationships" id="2147483651" r:id="R0adc34f906674027"/>
+    <p:sldLayoutId xmlns:r="http://schemas.openxmlformats.org/officeDocument/2006/relationships" id="2147483652" r:id="R2435d980426f45db"/>
   </p:sldLayoutIdLst>
 </p:sldMaster>
 </file>
@@ -3617,14 +4617,14 @@
       </p:grpSpPr>
       <p:pic>
         <p:nvPicPr>
-          <p:cNvPr id="9" name="" descr="Ilustração conceitual autoral da capa: EPISÓDIO 5 — Contratos e versões: Gold como API."/>
+          <p:cNvPr id="10" name="" descr="Ilustração conceitual autoral da capa: EPISÓDIO 5 — Contratos e versões: Gold como API."/>
           <p:cNvPicPr>
             <a:picLocks xmlns:a="http://schemas.openxmlformats.org/drawingml/2006/main" noChangeAspect="1"/>
           </p:cNvPicPr>
           <p:nvPr/>
         </p:nvPicPr>
         <p:blipFill>
-          <a:blip xmlns:r="http://schemas.openxmlformats.org/officeDocument/2006/relationships" xmlns:a="http://schemas.openxmlformats.org/drawingml/2006/main" r:embed="Rc1c214b83ca545b5"/>
+          <a:blip xmlns:r="http://schemas.openxmlformats.org/officeDocument/2006/relationships" xmlns:a="http://schemas.openxmlformats.org/drawingml/2006/main" r:embed="R56d52c9f61364f28"/>
           <a:srcRect xmlns:a="http://schemas.openxmlformats.org/drawingml/2006/main" l="19785" t="0" r="19785" b="0"/>
           <a:stretch xmlns:a="http://schemas.openxmlformats.org/drawingml/2006/main">
             <a:fillRect l="0" t="0" r="0" b="0"/>
@@ -3737,6 +4737,7 @@
           <a:lstStyle xmlns:a="http://schemas.openxmlformats.org/drawingml/2006/main"/>
           <a:p xmlns:a="http://schemas.openxmlformats.org/drawingml/2006/main">
             <a:pPr>
+              <a:buNone/>
               <a:defRPr sz="1350" b="1">
                 <a:solidFill>
                   <a:srgbClr val="1EC5FF"/>
@@ -3787,6 +4788,7 @@
           <a:lstStyle xmlns:a="http://schemas.openxmlformats.org/drawingml/2006/main"/>
           <a:p xmlns:a="http://schemas.openxmlformats.org/drawingml/2006/main">
             <a:pPr>
+              <a:buNone/>
               <a:defRPr sz="3225" b="1">
                 <a:solidFill>
                   <a:srgbClr val="FFFFFF"/>
@@ -3837,6 +4839,7 @@
           <a:lstStyle xmlns:a="http://schemas.openxmlformats.org/drawingml/2006/main"/>
           <a:p xmlns:a="http://schemas.openxmlformats.org/drawingml/2006/main">
             <a:pPr>
+              <a:buNone/>
               <a:defRPr sz="1800">
                 <a:solidFill>
                   <a:srgbClr val="E2F2FF"/>
@@ -3918,6 +4921,7 @@
           <a:lstStyle xmlns:a="http://schemas.openxmlformats.org/drawingml/2006/main"/>
           <a:p xmlns:a="http://schemas.openxmlformats.org/drawingml/2006/main">
             <a:pPr>
+              <a:buNone/>
               <a:defRPr sz="1200" b="1">
                 <a:solidFill>
                   <a:srgbClr val="FFFFFF">
@@ -4009,6 +5013,7 @@
           <a:lstStyle xmlns:a="http://schemas.openxmlformats.org/drawingml/2006/main"/>
           <a:p xmlns:a="http://schemas.openxmlformats.org/drawingml/2006/main">
             <a:pPr>
+              <a:buNone/>
               <a:defRPr sz="2925" b="1">
                 <a:solidFill>
                   <a:srgbClr val="FFFFFF"/>
@@ -4059,6 +5064,7 @@
           <a:lstStyle xmlns:a="http://schemas.openxmlformats.org/drawingml/2006/main"/>
           <a:p xmlns:a="http://schemas.openxmlformats.org/drawingml/2006/main">
             <a:pPr>
+              <a:buNone/>
               <a:defRPr sz="3450" b="1">
                 <a:solidFill>
                   <a:srgbClr val="1EC5FF"/>
@@ -4109,6 +5115,7 @@
           <a:lstStyle xmlns:a="http://schemas.openxmlformats.org/drawingml/2006/main"/>
           <a:p xmlns:a="http://schemas.openxmlformats.org/drawingml/2006/main">
             <a:pPr>
+              <a:buNone/>
               <a:defRPr sz="1575" b="1">
                 <a:solidFill>
                   <a:srgbClr val="FFFFFF"/>
@@ -4190,6 +5197,7 @@
           <a:lstStyle xmlns:a="http://schemas.openxmlformats.org/drawingml/2006/main"/>
           <a:p xmlns:a="http://schemas.openxmlformats.org/drawingml/2006/main">
             <a:pPr>
+              <a:buNone/>
               <a:defRPr sz="3450" b="1">
                 <a:solidFill>
                   <a:srgbClr val="1EC5FF"/>
@@ -4240,6 +5248,7 @@
           <a:lstStyle xmlns:a="http://schemas.openxmlformats.org/drawingml/2006/main"/>
           <a:p xmlns:a="http://schemas.openxmlformats.org/drawingml/2006/main">
             <a:pPr>
+              <a:buNone/>
               <a:defRPr sz="1575" b="1">
                 <a:solidFill>
                   <a:srgbClr val="FFFFFF"/>
@@ -4321,6 +5330,7 @@
           <a:lstStyle xmlns:a="http://schemas.openxmlformats.org/drawingml/2006/main"/>
           <a:p xmlns:a="http://schemas.openxmlformats.org/drawingml/2006/main">
             <a:pPr>
+              <a:buNone/>
               <a:defRPr sz="3450" b="1">
                 <a:solidFill>
                   <a:srgbClr val="1EC5FF"/>
@@ -4371,6 +5381,7 @@
           <a:lstStyle xmlns:a="http://schemas.openxmlformats.org/drawingml/2006/main"/>
           <a:p xmlns:a="http://schemas.openxmlformats.org/drawingml/2006/main">
             <a:pPr>
+              <a:buNone/>
               <a:defRPr sz="1575" b="1">
                 <a:solidFill>
                   <a:srgbClr val="FFFFFF"/>
@@ -4452,6 +5463,7 @@
           <a:lstStyle xmlns:a="http://schemas.openxmlformats.org/drawingml/2006/main"/>
           <a:p xmlns:a="http://schemas.openxmlformats.org/drawingml/2006/main">
             <a:pPr>
+              <a:buNone/>
               <a:defRPr sz="3450" b="1">
                 <a:solidFill>
                   <a:srgbClr val="1EC5FF"/>
@@ -4502,6 +5514,7 @@
           <a:lstStyle xmlns:a="http://schemas.openxmlformats.org/drawingml/2006/main"/>
           <a:p xmlns:a="http://schemas.openxmlformats.org/drawingml/2006/main">
             <a:pPr>
+              <a:buNone/>
               <a:defRPr sz="1575" b="1">
                 <a:solidFill>
                   <a:srgbClr val="FFFFFF"/>
@@ -4552,6 +5565,7 @@
           <a:lstStyle xmlns:a="http://schemas.openxmlformats.org/drawingml/2006/main"/>
           <a:p xmlns:a="http://schemas.openxmlformats.org/drawingml/2006/main">
             <a:pPr>
+              <a:buNone/>
               <a:defRPr sz="1050" b="1">
                 <a:solidFill>
                   <a:srgbClr val="1EC5FF"/>
@@ -4635,6 +5649,7 @@
           <a:lstStyle xmlns:a="http://schemas.openxmlformats.org/drawingml/2006/main"/>
           <a:p xmlns:a="http://schemas.openxmlformats.org/drawingml/2006/main">
             <a:pPr>
+              <a:buNone/>
               <a:defRPr sz="825">
                 <a:solidFill>
                   <a:srgbClr val="FFFFFF">
@@ -4689,6 +5704,7 @@
           <a:lstStyle xmlns:a="http://schemas.openxmlformats.org/drawingml/2006/main"/>
           <a:p xmlns:a="http://schemas.openxmlformats.org/drawingml/2006/main">
             <a:pPr algn="r">
+              <a:buNone/>
               <a:defRPr sz="825" b="1">
                 <a:solidFill>
                   <a:srgbClr val="FFFFFF">
@@ -4780,6 +5796,7 @@
           <a:lstStyle xmlns:a="http://schemas.openxmlformats.org/drawingml/2006/main"/>
           <a:p xmlns:a="http://schemas.openxmlformats.org/drawingml/2006/main">
             <a:pPr>
+              <a:buNone/>
               <a:defRPr sz="2925" b="1">
                 <a:solidFill>
                   <a:srgbClr val="FFFFFF"/>
@@ -4830,6 +5847,7 @@
           <a:lstStyle xmlns:a="http://schemas.openxmlformats.org/drawingml/2006/main"/>
           <a:p xmlns:a="http://schemas.openxmlformats.org/drawingml/2006/main">
             <a:pPr>
+              <a:buNone/>
               <a:defRPr sz="1650">
                 <a:solidFill>
                   <a:srgbClr val="E2F2FF"/>
@@ -4880,6 +5898,7 @@
           <a:lstStyle xmlns:a="http://schemas.openxmlformats.org/drawingml/2006/main"/>
           <a:p xmlns:a="http://schemas.openxmlformats.org/drawingml/2006/main">
             <a:pPr>
+              <a:buNone/>
               <a:defRPr sz="1800">
                 <a:solidFill>
                   <a:srgbClr val="FFFFFF"/>
@@ -4897,6 +5916,7 @@
           </a:p>
           <a:p xmlns:a="http://schemas.openxmlformats.org/drawingml/2006/main">
             <a:pPr>
+              <a:buNone/>
               <a:defRPr sz="1800">
                 <a:solidFill>
                   <a:srgbClr val="FFFFFF"/>
@@ -4914,6 +5934,7 @@
           </a:p>
           <a:p xmlns:a="http://schemas.openxmlformats.org/drawingml/2006/main">
             <a:pPr>
+              <a:buNone/>
               <a:defRPr sz="1800">
                 <a:solidFill>
                   <a:srgbClr val="FFFFFF"/>
@@ -4931,6 +5952,7 @@
           </a:p>
           <a:p xmlns:a="http://schemas.openxmlformats.org/drawingml/2006/main">
             <a:pPr>
+              <a:buNone/>
               <a:defRPr sz="1800">
                 <a:solidFill>
                   <a:srgbClr val="FFFFFF"/>
@@ -5055,6 +6077,7 @@
           <a:lstStyle xmlns:a="http://schemas.openxmlformats.org/drawingml/2006/main"/>
           <a:p xmlns:a="http://schemas.openxmlformats.org/drawingml/2006/main">
             <a:pPr algn="ctr">
+              <a:buNone/>
               <a:defRPr sz="4650" b="1">
                 <a:solidFill>
                   <a:srgbClr val="1EC5FF"/>
@@ -5105,6 +6128,7 @@
           <a:lstStyle xmlns:a="http://schemas.openxmlformats.org/drawingml/2006/main"/>
           <a:p xmlns:a="http://schemas.openxmlformats.org/drawingml/2006/main">
             <a:pPr>
+              <a:buNone/>
               <a:defRPr sz="1050" b="1">
                 <a:solidFill>
                   <a:srgbClr val="1EC5FF"/>
@@ -5188,6 +6212,7 @@
           <a:lstStyle xmlns:a="http://schemas.openxmlformats.org/drawingml/2006/main"/>
           <a:p xmlns:a="http://schemas.openxmlformats.org/drawingml/2006/main">
             <a:pPr>
+              <a:buNone/>
               <a:defRPr sz="825">
                 <a:solidFill>
                   <a:srgbClr val="FFFFFF">
@@ -5242,6 +6267,7 @@
           <a:lstStyle xmlns:a="http://schemas.openxmlformats.org/drawingml/2006/main"/>
           <a:p xmlns:a="http://schemas.openxmlformats.org/drawingml/2006/main">
             <a:pPr algn="r">
+              <a:buNone/>
               <a:defRPr sz="825" b="1">
                 <a:solidFill>
                   <a:srgbClr val="FFFFFF">
@@ -5325,6 +6351,7 @@
           <a:lstStyle xmlns:a="http://schemas.openxmlformats.org/drawingml/2006/main"/>
           <a:p xmlns:a="http://schemas.openxmlformats.org/drawingml/2006/main">
             <a:pPr>
+              <a:buNone/>
               <a:defRPr sz="2925" b="1">
                 <a:solidFill>
                   <a:srgbClr val="0B1F3A"/>
@@ -5381,6 +6408,7 @@
           <a:lstStyle xmlns:a="http://schemas.openxmlformats.org/drawingml/2006/main"/>
           <a:p xmlns:a="http://schemas.openxmlformats.org/drawingml/2006/main">
             <a:pPr algn="ctr">
+              <a:buNone/>
               <a:defRPr sz="1575" b="1">
                 <a:solidFill>
                   <a:srgbClr val="0B1F3A"/>
@@ -5437,6 +6465,7 @@
           <a:lstStyle xmlns:a="http://schemas.openxmlformats.org/drawingml/2006/main"/>
           <a:p xmlns:a="http://schemas.openxmlformats.org/drawingml/2006/main">
             <a:pPr algn="ctr">
+              <a:buNone/>
               <a:defRPr sz="1575" b="1">
                 <a:solidFill>
                   <a:srgbClr val="0B1F3A"/>
@@ -5493,6 +6522,7 @@
           <a:lstStyle xmlns:a="http://schemas.openxmlformats.org/drawingml/2006/main"/>
           <a:p xmlns:a="http://schemas.openxmlformats.org/drawingml/2006/main">
             <a:pPr algn="ctr">
+              <a:buNone/>
               <a:defRPr sz="1575" b="1">
                 <a:solidFill>
                   <a:srgbClr val="0B1F3A"/>
@@ -5549,6 +6579,7 @@
           <a:lstStyle xmlns:a="http://schemas.openxmlformats.org/drawingml/2006/main"/>
           <a:p xmlns:a="http://schemas.openxmlformats.org/drawingml/2006/main">
             <a:pPr algn="ctr">
+              <a:buNone/>
               <a:defRPr sz="1575" b="1">
                 <a:solidFill>
                   <a:srgbClr val="0B1F3A"/>
@@ -5568,7 +6599,7 @@
       </p:sp>
       <p:cxnSp>
         <p:nvCxnSpPr>
-          <p:cNvPr id="18" name=""/>
+          <p:cNvPr id="26" name=""/>
           <p:cNvCxnSpPr>
             <a:stCxn xmlns:a="http://schemas.openxmlformats.org/drawingml/2006/main" id="2" idx="3"/>
             <a:endCxn xmlns:a="http://schemas.openxmlformats.org/drawingml/2006/main" id="3" idx="1"/>
@@ -5594,7 +6625,7 @@
       </p:cxnSp>
       <p:cxnSp>
         <p:nvCxnSpPr>
-          <p:cNvPr id="19" name=""/>
+          <p:cNvPr id="27" name=""/>
           <p:cNvCxnSpPr>
             <a:stCxn xmlns:a="http://schemas.openxmlformats.org/drawingml/2006/main" id="3" idx="3"/>
             <a:endCxn xmlns:a="http://schemas.openxmlformats.org/drawingml/2006/main" id="4" idx="1"/>
@@ -5620,7 +6651,7 @@
       </p:cxnSp>
       <p:cxnSp>
         <p:nvCxnSpPr>
-          <p:cNvPr id="20" name=""/>
+          <p:cNvPr id="28" name=""/>
           <p:cNvCxnSpPr>
             <a:stCxn xmlns:a="http://schemas.openxmlformats.org/drawingml/2006/main" id="4" idx="3"/>
             <a:endCxn xmlns:a="http://schemas.openxmlformats.org/drawingml/2006/main" id="5" idx="1"/>
@@ -5677,6 +6708,7 @@
           <a:lstStyle xmlns:a="http://schemas.openxmlformats.org/drawingml/2006/main"/>
           <a:p xmlns:a="http://schemas.openxmlformats.org/drawingml/2006/main">
             <a:pPr>
+              <a:buNone/>
               <a:defRPr sz="1050" b="1">
                 <a:solidFill>
                   <a:srgbClr val="1565C0"/>
@@ -5760,6 +6792,7 @@
           <a:lstStyle xmlns:a="http://schemas.openxmlformats.org/drawingml/2006/main"/>
           <a:p xmlns:a="http://schemas.openxmlformats.org/drawingml/2006/main">
             <a:pPr>
+              <a:buNone/>
               <a:defRPr sz="825">
                 <a:solidFill>
                   <a:srgbClr val="0B1F3A">
@@ -5814,6 +6847,7 @@
           <a:lstStyle xmlns:a="http://schemas.openxmlformats.org/drawingml/2006/main"/>
           <a:p xmlns:a="http://schemas.openxmlformats.org/drawingml/2006/main">
             <a:pPr algn="r">
+              <a:buNone/>
               <a:defRPr sz="825" b="1">
                 <a:solidFill>
                   <a:srgbClr val="0B1F3A">
@@ -5905,6 +6939,7 @@
           <a:lstStyle xmlns:a="http://schemas.openxmlformats.org/drawingml/2006/main"/>
           <a:p xmlns:a="http://schemas.openxmlformats.org/drawingml/2006/main">
             <a:pPr>
+              <a:buNone/>
               <a:defRPr sz="2925" b="1">
                 <a:solidFill>
                   <a:srgbClr val="FFFFFF"/>
@@ -5990,6 +7025,7 @@
           <a:lstStyle xmlns:a="http://schemas.openxmlformats.org/drawingml/2006/main"/>
           <a:p xmlns:a="http://schemas.openxmlformats.org/drawingml/2006/main">
             <a:pPr>
+              <a:buNone/>
               <a:defRPr sz="1875" b="1">
                 <a:solidFill>
                   <a:srgbClr val="1EC5FF"/>
@@ -6040,6 +7076,7 @@
           <a:lstStyle xmlns:a="http://schemas.openxmlformats.org/drawingml/2006/main"/>
           <a:p xmlns:a="http://schemas.openxmlformats.org/drawingml/2006/main">
             <a:pPr>
+              <a:buNone/>
               <a:defRPr sz="1425">
                 <a:solidFill>
                   <a:srgbClr val="E2F2FF"/>
@@ -6090,6 +7127,7 @@
           <a:lstStyle xmlns:a="http://schemas.openxmlformats.org/drawingml/2006/main"/>
           <a:p xmlns:a="http://schemas.openxmlformats.org/drawingml/2006/main">
             <a:pPr>
+              <a:buNone/>
               <a:defRPr sz="1050" b="1">
                 <a:solidFill>
                   <a:srgbClr val="1EC5FF"/>
@@ -6173,6 +7211,7 @@
           <a:lstStyle xmlns:a="http://schemas.openxmlformats.org/drawingml/2006/main"/>
           <a:p xmlns:a="http://schemas.openxmlformats.org/drawingml/2006/main">
             <a:pPr>
+              <a:buNone/>
               <a:defRPr sz="825">
                 <a:solidFill>
                   <a:srgbClr val="FFFFFF">
@@ -6227,6 +7266,7 @@
           <a:lstStyle xmlns:a="http://schemas.openxmlformats.org/drawingml/2006/main"/>
           <a:p xmlns:a="http://schemas.openxmlformats.org/drawingml/2006/main">
             <a:pPr algn="r">
+              <a:buNone/>
               <a:defRPr sz="825" b="1">
                 <a:solidFill>
                   <a:srgbClr val="FFFFFF">
@@ -6310,6 +7350,7 @@
           <a:lstStyle xmlns:a="http://schemas.openxmlformats.org/drawingml/2006/main"/>
           <a:p xmlns:a="http://schemas.openxmlformats.org/drawingml/2006/main">
             <a:pPr>
+              <a:buNone/>
               <a:defRPr sz="2925" b="1">
                 <a:solidFill>
                   <a:srgbClr val="0B1F3A"/>
@@ -6360,6 +7401,7 @@
           <a:lstStyle xmlns:a="http://schemas.openxmlformats.org/drawingml/2006/main"/>
           <a:p xmlns:a="http://schemas.openxmlformats.org/drawingml/2006/main">
             <a:pPr>
+              <a:buNone/>
               <a:defRPr sz="3450" b="1">
                 <a:solidFill>
                   <a:srgbClr val="1565C0"/>
@@ -6410,6 +7452,7 @@
           <a:lstStyle xmlns:a="http://schemas.openxmlformats.org/drawingml/2006/main"/>
           <a:p xmlns:a="http://schemas.openxmlformats.org/drawingml/2006/main">
             <a:pPr>
+              <a:buNone/>
               <a:defRPr sz="1575" b="1">
                 <a:solidFill>
                   <a:srgbClr val="0B1F3A"/>
@@ -6491,6 +7534,7 @@
           <a:lstStyle xmlns:a="http://schemas.openxmlformats.org/drawingml/2006/main"/>
           <a:p xmlns:a="http://schemas.openxmlformats.org/drawingml/2006/main">
             <a:pPr>
+              <a:buNone/>
               <a:defRPr sz="3450" b="1">
                 <a:solidFill>
                   <a:srgbClr val="1565C0"/>
@@ -6541,6 +7585,7 @@
           <a:lstStyle xmlns:a="http://schemas.openxmlformats.org/drawingml/2006/main"/>
           <a:p xmlns:a="http://schemas.openxmlformats.org/drawingml/2006/main">
             <a:pPr>
+              <a:buNone/>
               <a:defRPr sz="1575" b="1">
                 <a:solidFill>
                   <a:srgbClr val="0B1F3A"/>
@@ -6622,6 +7667,7 @@
           <a:lstStyle xmlns:a="http://schemas.openxmlformats.org/drawingml/2006/main"/>
           <a:p xmlns:a="http://schemas.openxmlformats.org/drawingml/2006/main">
             <a:pPr>
+              <a:buNone/>
               <a:defRPr sz="3450" b="1">
                 <a:solidFill>
                   <a:srgbClr val="1565C0"/>
@@ -6672,6 +7718,7 @@
           <a:lstStyle xmlns:a="http://schemas.openxmlformats.org/drawingml/2006/main"/>
           <a:p xmlns:a="http://schemas.openxmlformats.org/drawingml/2006/main">
             <a:pPr>
+              <a:buNone/>
               <a:defRPr sz="1575" b="1">
                 <a:solidFill>
                   <a:srgbClr val="0B1F3A"/>
@@ -6722,6 +7769,7 @@
           <a:lstStyle xmlns:a="http://schemas.openxmlformats.org/drawingml/2006/main"/>
           <a:p xmlns:a="http://schemas.openxmlformats.org/drawingml/2006/main">
             <a:pPr>
+              <a:buNone/>
               <a:defRPr sz="1050" b="1">
                 <a:solidFill>
                   <a:srgbClr val="1565C0"/>
@@ -6805,6 +7853,7 @@
           <a:lstStyle xmlns:a="http://schemas.openxmlformats.org/drawingml/2006/main"/>
           <a:p xmlns:a="http://schemas.openxmlformats.org/drawingml/2006/main">
             <a:pPr>
+              <a:buNone/>
               <a:defRPr sz="825">
                 <a:solidFill>
                   <a:srgbClr val="0B1F3A">
@@ -6859,6 +7908,7 @@
           <a:lstStyle xmlns:a="http://schemas.openxmlformats.org/drawingml/2006/main"/>
           <a:p xmlns:a="http://schemas.openxmlformats.org/drawingml/2006/main">
             <a:pPr algn="r">
+              <a:buNone/>
               <a:defRPr sz="825" b="1">
                 <a:solidFill>
                   <a:srgbClr val="0B1F3A">
@@ -6950,6 +8000,7 @@
           <a:lstStyle xmlns:a="http://schemas.openxmlformats.org/drawingml/2006/main"/>
           <a:p xmlns:a="http://schemas.openxmlformats.org/drawingml/2006/main">
             <a:pPr>
+              <a:buNone/>
               <a:defRPr sz="1350" b="1">
                 <a:solidFill>
                   <a:srgbClr val="1EC5FF"/>
@@ -7000,6 +8051,7 @@
           <a:lstStyle xmlns:a="http://schemas.openxmlformats.org/drawingml/2006/main"/>
           <a:p xmlns:a="http://schemas.openxmlformats.org/drawingml/2006/main">
             <a:pPr>
+              <a:buNone/>
               <a:defRPr sz="3450" b="1">
                 <a:solidFill>
                   <a:srgbClr val="FFFFFF"/>
@@ -7050,6 +8102,7 @@
           <a:lstStyle xmlns:a="http://schemas.openxmlformats.org/drawingml/2006/main"/>
           <a:p xmlns:a="http://schemas.openxmlformats.org/drawingml/2006/main">
             <a:pPr>
+              <a:buNone/>
               <a:defRPr sz="1650">
                 <a:solidFill>
                   <a:srgbClr val="E2F2FF"/>
@@ -7174,6 +8227,7 @@
           <a:lstStyle xmlns:a="http://schemas.openxmlformats.org/drawingml/2006/main"/>
           <a:p xmlns:a="http://schemas.openxmlformats.org/drawingml/2006/main">
             <a:pPr>
+              <a:buNone/>
               <a:defRPr sz="1050" b="1">
                 <a:solidFill>
                   <a:srgbClr val="1EC5FF"/>
@@ -7257,6 +8311,7 @@
           <a:lstStyle xmlns:a="http://schemas.openxmlformats.org/drawingml/2006/main"/>
           <a:p xmlns:a="http://schemas.openxmlformats.org/drawingml/2006/main">
             <a:pPr>
+              <a:buNone/>
               <a:defRPr sz="825">
                 <a:solidFill>
                   <a:srgbClr val="FFFFFF">
@@ -7311,6 +8366,7 @@
           <a:lstStyle xmlns:a="http://schemas.openxmlformats.org/drawingml/2006/main"/>
           <a:p xmlns:a="http://schemas.openxmlformats.org/drawingml/2006/main">
             <a:pPr algn="r">
+              <a:buNone/>
               <a:defRPr sz="825" b="1">
                 <a:solidFill>
                   <a:srgbClr val="FFFFFF">
@@ -7394,6 +8450,7 @@
           <a:lstStyle xmlns:a="http://schemas.openxmlformats.org/drawingml/2006/main"/>
           <a:p xmlns:a="http://schemas.openxmlformats.org/drawingml/2006/main">
             <a:pPr>
+              <a:buNone/>
               <a:defRPr sz="2925" b="1">
                 <a:solidFill>
                   <a:srgbClr val="0B1F3A"/>
@@ -7444,6 +8501,7 @@
           <a:lstStyle xmlns:a="http://schemas.openxmlformats.org/drawingml/2006/main"/>
           <a:p xmlns:a="http://schemas.openxmlformats.org/drawingml/2006/main">
             <a:pPr>
+              <a:buNone/>
               <a:defRPr sz="3450" b="1">
                 <a:solidFill>
                   <a:srgbClr val="1565C0"/>
@@ -7494,6 +8552,7 @@
           <a:lstStyle xmlns:a="http://schemas.openxmlformats.org/drawingml/2006/main"/>
           <a:p xmlns:a="http://schemas.openxmlformats.org/drawingml/2006/main">
             <a:pPr>
+              <a:buNone/>
               <a:defRPr sz="1575" b="1">
                 <a:solidFill>
                   <a:srgbClr val="0B1F3A"/>
@@ -7575,6 +8634,7 @@
           <a:lstStyle xmlns:a="http://schemas.openxmlformats.org/drawingml/2006/main"/>
           <a:p xmlns:a="http://schemas.openxmlformats.org/drawingml/2006/main">
             <a:pPr>
+              <a:buNone/>
               <a:defRPr sz="3450" b="1">
                 <a:solidFill>
                   <a:srgbClr val="1565C0"/>
@@ -7625,6 +8685,7 @@
           <a:lstStyle xmlns:a="http://schemas.openxmlformats.org/drawingml/2006/main"/>
           <a:p xmlns:a="http://schemas.openxmlformats.org/drawingml/2006/main">
             <a:pPr>
+              <a:buNone/>
               <a:defRPr sz="1575" b="1">
                 <a:solidFill>
                   <a:srgbClr val="0B1F3A"/>
@@ -7706,6 +8767,7 @@
           <a:lstStyle xmlns:a="http://schemas.openxmlformats.org/drawingml/2006/main"/>
           <a:p xmlns:a="http://schemas.openxmlformats.org/drawingml/2006/main">
             <a:pPr>
+              <a:buNone/>
               <a:defRPr sz="3450" b="1">
                 <a:solidFill>
                   <a:srgbClr val="1565C0"/>
@@ -7756,6 +8818,7 @@
           <a:lstStyle xmlns:a="http://schemas.openxmlformats.org/drawingml/2006/main"/>
           <a:p xmlns:a="http://schemas.openxmlformats.org/drawingml/2006/main">
             <a:pPr>
+              <a:buNone/>
               <a:defRPr sz="1575" b="1">
                 <a:solidFill>
                   <a:srgbClr val="0B1F3A"/>
@@ -7806,6 +8869,7 @@
           <a:lstStyle xmlns:a="http://schemas.openxmlformats.org/drawingml/2006/main"/>
           <a:p xmlns:a="http://schemas.openxmlformats.org/drawingml/2006/main">
             <a:pPr>
+              <a:buNone/>
               <a:defRPr sz="1050" b="1">
                 <a:solidFill>
                   <a:srgbClr val="1565C0"/>
@@ -7889,6 +8953,7 @@
           <a:lstStyle xmlns:a="http://schemas.openxmlformats.org/drawingml/2006/main"/>
           <a:p xmlns:a="http://schemas.openxmlformats.org/drawingml/2006/main">
             <a:pPr>
+              <a:buNone/>
               <a:defRPr sz="825">
                 <a:solidFill>
                   <a:srgbClr val="0B1F3A">
@@ -7943,6 +9008,7 @@
           <a:lstStyle xmlns:a="http://schemas.openxmlformats.org/drawingml/2006/main"/>
           <a:p xmlns:a="http://schemas.openxmlformats.org/drawingml/2006/main">
             <a:pPr algn="r">
+              <a:buNone/>
               <a:defRPr sz="825" b="1">
                 <a:solidFill>
                   <a:srgbClr val="0B1F3A">
@@ -8034,6 +9100,7 @@
           <a:lstStyle xmlns:a="http://schemas.openxmlformats.org/drawingml/2006/main"/>
           <a:p xmlns:a="http://schemas.openxmlformats.org/drawingml/2006/main">
             <a:pPr>
+              <a:buNone/>
               <a:defRPr sz="5550" b="1">
                 <a:solidFill>
                   <a:srgbClr val="1EC5FF"/>
@@ -8084,6 +9151,7 @@
           <a:lstStyle xmlns:a="http://schemas.openxmlformats.org/drawingml/2006/main"/>
           <a:p xmlns:a="http://schemas.openxmlformats.org/drawingml/2006/main">
             <a:pPr>
+              <a:buNone/>
               <a:defRPr sz="2250" b="1">
                 <a:solidFill>
                   <a:srgbClr val="FFFFFF"/>
@@ -8167,6 +9235,7 @@
           <a:lstStyle xmlns:a="http://schemas.openxmlformats.org/drawingml/2006/main"/>
           <a:p xmlns:a="http://schemas.openxmlformats.org/drawingml/2006/main">
             <a:pPr>
+              <a:buNone/>
               <a:defRPr sz="1800">
                 <a:solidFill>
                   <a:srgbClr val="E2F2FF"/>
@@ -8217,6 +9286,7 @@
           <a:lstStyle xmlns:a="http://schemas.openxmlformats.org/drawingml/2006/main"/>
           <a:p xmlns:a="http://schemas.openxmlformats.org/drawingml/2006/main">
             <a:pPr>
+              <a:buNone/>
               <a:defRPr sz="1050" b="1">
                 <a:solidFill>
                   <a:srgbClr val="1EC5FF"/>
@@ -8300,6 +9370,7 @@
           <a:lstStyle xmlns:a="http://schemas.openxmlformats.org/drawingml/2006/main"/>
           <a:p xmlns:a="http://schemas.openxmlformats.org/drawingml/2006/main">
             <a:pPr>
+              <a:buNone/>
               <a:defRPr sz="825">
                 <a:solidFill>
                   <a:srgbClr val="FFFFFF">
@@ -8354,6 +9425,7 @@
           <a:lstStyle xmlns:a="http://schemas.openxmlformats.org/drawingml/2006/main"/>
           <a:p xmlns:a="http://schemas.openxmlformats.org/drawingml/2006/main">
             <a:pPr algn="r">
+              <a:buNone/>
               <a:defRPr sz="825" b="1">
                 <a:solidFill>
                   <a:srgbClr val="FFFFFF">
@@ -8437,6 +9509,7 @@
           <a:lstStyle xmlns:a="http://schemas.openxmlformats.org/drawingml/2006/main"/>
           <a:p xmlns:a="http://schemas.openxmlformats.org/drawingml/2006/main">
             <a:pPr>
+              <a:buNone/>
               <a:defRPr sz="2925" b="1">
                 <a:solidFill>
                   <a:srgbClr val="0B1F3A"/>
@@ -8487,6 +9560,7 @@
           <a:lstStyle xmlns:a="http://schemas.openxmlformats.org/drawingml/2006/main"/>
           <a:p xmlns:a="http://schemas.openxmlformats.org/drawingml/2006/main">
             <a:pPr>
+              <a:buNone/>
               <a:defRPr sz="1950">
                 <a:solidFill>
                   <a:srgbClr val="0B1F3A"/>
@@ -8504,6 +9578,7 @@
           </a:p>
           <a:p xmlns:a="http://schemas.openxmlformats.org/drawingml/2006/main">
             <a:pPr>
+              <a:buNone/>
               <a:defRPr sz="1950">
                 <a:solidFill>
                   <a:srgbClr val="0B1F3A"/>
@@ -8521,6 +9596,7 @@
           </a:p>
           <a:p xmlns:a="http://schemas.openxmlformats.org/drawingml/2006/main">
             <a:pPr>
+              <a:buNone/>
               <a:defRPr sz="1950">
                 <a:solidFill>
                   <a:srgbClr val="0B1F3A"/>
@@ -8571,6 +9647,7 @@
           <a:lstStyle xmlns:a="http://schemas.openxmlformats.org/drawingml/2006/main"/>
           <a:p xmlns:a="http://schemas.openxmlformats.org/drawingml/2006/main">
             <a:pPr>
+              <a:buNone/>
               <a:defRPr sz="1050" b="1">
                 <a:solidFill>
                   <a:srgbClr val="1565C0"/>
@@ -8654,6 +9731,7 @@
           <a:lstStyle xmlns:a="http://schemas.openxmlformats.org/drawingml/2006/main"/>
           <a:p xmlns:a="http://schemas.openxmlformats.org/drawingml/2006/main">
             <a:pPr>
+              <a:buNone/>
               <a:defRPr sz="825">
                 <a:solidFill>
                   <a:srgbClr val="0B1F3A">
@@ -8708,6 +9786,7 @@
           <a:lstStyle xmlns:a="http://schemas.openxmlformats.org/drawingml/2006/main"/>
           <a:p xmlns:a="http://schemas.openxmlformats.org/drawingml/2006/main">
             <a:pPr algn="r">
+              <a:buNone/>
               <a:defRPr sz="825" b="1">
                 <a:solidFill>
                   <a:srgbClr val="0B1F3A">
@@ -8799,6 +9878,7 @@
           <a:lstStyle xmlns:a="http://schemas.openxmlformats.org/drawingml/2006/main"/>
           <a:p xmlns:a="http://schemas.openxmlformats.org/drawingml/2006/main">
             <a:pPr>
+              <a:buNone/>
               <a:defRPr sz="1500" b="1">
                 <a:solidFill>
                   <a:srgbClr val="1EC5FF"/>
@@ -8849,6 +9929,7 @@
           <a:lstStyle xmlns:a="http://schemas.openxmlformats.org/drawingml/2006/main"/>
           <a:p xmlns:a="http://schemas.openxmlformats.org/drawingml/2006/main">
             <a:pPr>
+              <a:buNone/>
               <a:defRPr sz="2850" b="1">
                 <a:solidFill>
                   <a:srgbClr val="FFFFFF"/>
@@ -8899,6 +9980,7 @@
           <a:lstStyle xmlns:a="http://schemas.openxmlformats.org/drawingml/2006/main"/>
           <a:p xmlns:a="http://schemas.openxmlformats.org/drawingml/2006/main">
             <a:pPr>
+              <a:buNone/>
               <a:defRPr sz="1500">
                 <a:solidFill>
                   <a:srgbClr val="E2F2FF"/>
@@ -9023,6 +10105,7 @@
           <a:lstStyle xmlns:a="http://schemas.openxmlformats.org/drawingml/2006/main"/>
           <a:p xmlns:a="http://schemas.openxmlformats.org/drawingml/2006/main">
             <a:pPr>
+              <a:buNone/>
               <a:defRPr sz="1050" b="1">
                 <a:solidFill>
                   <a:srgbClr val="1EC5FF"/>
@@ -9106,6 +10189,7 @@
           <a:lstStyle xmlns:a="http://schemas.openxmlformats.org/drawingml/2006/main"/>
           <a:p xmlns:a="http://schemas.openxmlformats.org/drawingml/2006/main">
             <a:pPr>
+              <a:buNone/>
               <a:defRPr sz="825">
                 <a:solidFill>
                   <a:srgbClr val="FFFFFF">
@@ -9160,6 +10244,7 @@
           <a:lstStyle xmlns:a="http://schemas.openxmlformats.org/drawingml/2006/main"/>
           <a:p xmlns:a="http://schemas.openxmlformats.org/drawingml/2006/main">
             <a:pPr algn="r">
+              <a:buNone/>
               <a:defRPr sz="825" b="1">
                 <a:solidFill>
                   <a:srgbClr val="FFFFFF">
@@ -9243,6 +10328,7 @@
           <a:lstStyle xmlns:a="http://schemas.openxmlformats.org/drawingml/2006/main"/>
           <a:p xmlns:a="http://schemas.openxmlformats.org/drawingml/2006/main">
             <a:pPr>
+              <a:buNone/>
               <a:defRPr sz="2850" b="1">
                 <a:solidFill>
                   <a:srgbClr val="0B1F3A"/>
@@ -9324,6 +10410,7 @@
           <a:lstStyle xmlns:a="http://schemas.openxmlformats.org/drawingml/2006/main"/>
           <a:p xmlns:a="http://schemas.openxmlformats.org/drawingml/2006/main">
             <a:pPr>
+              <a:buNone/>
               <a:defRPr sz="1425" b="1">
                 <a:solidFill>
                   <a:srgbClr val="1565C0"/>
@@ -9378,14 +10465,14 @@
       </p:sp>
       <p:pic>
         <p:nvPicPr>
-          <p:cNvPr id="14" name="" descr="Diagrama didático autoral que apresenta: Se um dashboard ou agente depende da Gold, ela já é uma API. — A pergunta que guia a aula."/>
+          <p:cNvPr id="16" name="" descr="Diagrama didático autoral que apresenta: Se um dashboard ou agente depende da Gold, ela já é uma API. — A pergunta que guia a aula."/>
           <p:cNvPicPr>
             <a:picLocks xmlns:a="http://schemas.openxmlformats.org/drawingml/2006/main" noChangeAspect="1"/>
           </p:cNvPicPr>
           <p:nvPr/>
         </p:nvPicPr>
         <p:blipFill>
-          <a:blip xmlns:r="http://schemas.openxmlformats.org/officeDocument/2006/relationships" xmlns:a="http://schemas.openxmlformats.org/drawingml/2006/main" r:embed="Re4e0077f927847d3"/>
+          <a:blip xmlns:r="http://schemas.openxmlformats.org/officeDocument/2006/relationships" xmlns:a="http://schemas.openxmlformats.org/drawingml/2006/main" r:embed="R31768f2f61374167"/>
           <a:stretch xmlns:a="http://schemas.openxmlformats.org/drawingml/2006/main"/>
         </p:blipFill>
         <p:spPr>
@@ -9431,6 +10518,7 @@
           <a:lstStyle xmlns:a="http://schemas.openxmlformats.org/drawingml/2006/main"/>
           <a:p xmlns:a="http://schemas.openxmlformats.org/drawingml/2006/main">
             <a:pPr>
+              <a:buNone/>
               <a:defRPr sz="1050" b="1">
                 <a:solidFill>
                   <a:srgbClr val="1565C0"/>
@@ -9514,6 +10602,7 @@
           <a:lstStyle xmlns:a="http://schemas.openxmlformats.org/drawingml/2006/main"/>
           <a:p xmlns:a="http://schemas.openxmlformats.org/drawingml/2006/main">
             <a:pPr>
+              <a:buNone/>
               <a:defRPr sz="825">
                 <a:solidFill>
                   <a:srgbClr val="0B1F3A">
@@ -9568,6 +10657,7 @@
           <a:lstStyle xmlns:a="http://schemas.openxmlformats.org/drawingml/2006/main"/>
           <a:p xmlns:a="http://schemas.openxmlformats.org/drawingml/2006/main">
             <a:pPr algn="r">
+              <a:buNone/>
               <a:defRPr sz="825" b="1">
                 <a:solidFill>
                   <a:srgbClr val="0B1F3A">
@@ -9651,6 +10741,7 @@
           <a:lstStyle xmlns:a="http://schemas.openxmlformats.org/drawingml/2006/main"/>
           <a:p xmlns:a="http://schemas.openxmlformats.org/drawingml/2006/main">
             <a:pPr>
+              <a:buNone/>
               <a:defRPr sz="1350" b="1">
                 <a:solidFill>
                   <a:srgbClr val="1565C0"/>
@@ -9701,6 +10792,7 @@
           <a:lstStyle xmlns:a="http://schemas.openxmlformats.org/drawingml/2006/main"/>
           <a:p xmlns:a="http://schemas.openxmlformats.org/drawingml/2006/main">
             <a:pPr>
+              <a:buNone/>
               <a:defRPr sz="3300" b="1">
                 <a:solidFill>
                   <a:srgbClr val="0B1F3A"/>
@@ -9751,6 +10843,7 @@
           <a:lstStyle xmlns:a="http://schemas.openxmlformats.org/drawingml/2006/main"/>
           <a:p xmlns:a="http://schemas.openxmlformats.org/drawingml/2006/main">
             <a:pPr>
+              <a:buNone/>
               <a:defRPr sz="1500">
                 <a:solidFill>
                   <a:srgbClr val="5C6F86"/>
@@ -9801,6 +10894,7 @@
           <a:lstStyle xmlns:a="http://schemas.openxmlformats.org/drawingml/2006/main"/>
           <a:p xmlns:a="http://schemas.openxmlformats.org/drawingml/2006/main">
             <a:pPr>
+              <a:buNone/>
               <a:defRPr sz="1050" b="1">
                 <a:solidFill>
                   <a:srgbClr val="1565C0"/>
@@ -9884,6 +10978,7 @@
           <a:lstStyle xmlns:a="http://schemas.openxmlformats.org/drawingml/2006/main"/>
           <a:p xmlns:a="http://schemas.openxmlformats.org/drawingml/2006/main">
             <a:pPr>
+              <a:buNone/>
               <a:defRPr sz="825">
                 <a:solidFill>
                   <a:srgbClr val="0B1F3A">
@@ -9938,6 +11033,7 @@
           <a:lstStyle xmlns:a="http://schemas.openxmlformats.org/drawingml/2006/main"/>
           <a:p xmlns:a="http://schemas.openxmlformats.org/drawingml/2006/main">
             <a:pPr algn="r">
+              <a:buNone/>
               <a:defRPr sz="825" b="1">
                 <a:solidFill>
                   <a:srgbClr val="0B1F3A">
@@ -10029,6 +11125,7 @@
           <a:lstStyle xmlns:a="http://schemas.openxmlformats.org/drawingml/2006/main"/>
           <a:p xmlns:a="http://schemas.openxmlformats.org/drawingml/2006/main">
             <a:pPr>
+              <a:buNone/>
               <a:defRPr sz="2925" b="1">
                 <a:solidFill>
                   <a:srgbClr val="FFFFFF"/>
@@ -10079,6 +11176,7 @@
           <a:lstStyle xmlns:a="http://schemas.openxmlformats.org/drawingml/2006/main"/>
           <a:p xmlns:a="http://schemas.openxmlformats.org/drawingml/2006/main">
             <a:pPr>
+              <a:buNone/>
               <a:defRPr sz="3450" b="1">
                 <a:solidFill>
                   <a:srgbClr val="1EC5FF"/>
@@ -10129,6 +11227,7 @@
           <a:lstStyle xmlns:a="http://schemas.openxmlformats.org/drawingml/2006/main"/>
           <a:p xmlns:a="http://schemas.openxmlformats.org/drawingml/2006/main">
             <a:pPr>
+              <a:buNone/>
               <a:defRPr sz="1575" b="1">
                 <a:solidFill>
                   <a:srgbClr val="FFFFFF"/>
@@ -10210,6 +11309,7 @@
           <a:lstStyle xmlns:a="http://schemas.openxmlformats.org/drawingml/2006/main"/>
           <a:p xmlns:a="http://schemas.openxmlformats.org/drawingml/2006/main">
             <a:pPr>
+              <a:buNone/>
               <a:defRPr sz="3450" b="1">
                 <a:solidFill>
                   <a:srgbClr val="1EC5FF"/>
@@ -10260,6 +11360,7 @@
           <a:lstStyle xmlns:a="http://schemas.openxmlformats.org/drawingml/2006/main"/>
           <a:p xmlns:a="http://schemas.openxmlformats.org/drawingml/2006/main">
             <a:pPr>
+              <a:buNone/>
               <a:defRPr sz="1575" b="1">
                 <a:solidFill>
                   <a:srgbClr val="FFFFFF"/>
@@ -10341,6 +11442,7 @@
           <a:lstStyle xmlns:a="http://schemas.openxmlformats.org/drawingml/2006/main"/>
           <a:p xmlns:a="http://schemas.openxmlformats.org/drawingml/2006/main">
             <a:pPr>
+              <a:buNone/>
               <a:defRPr sz="3450" b="1">
                 <a:solidFill>
                   <a:srgbClr val="1EC5FF"/>
@@ -10391,6 +11493,7 @@
           <a:lstStyle xmlns:a="http://schemas.openxmlformats.org/drawingml/2006/main"/>
           <a:p xmlns:a="http://schemas.openxmlformats.org/drawingml/2006/main">
             <a:pPr>
+              <a:buNone/>
               <a:defRPr sz="1575" b="1">
                 <a:solidFill>
                   <a:srgbClr val="FFFFFF"/>
@@ -10441,6 +11544,7 @@
           <a:lstStyle xmlns:a="http://schemas.openxmlformats.org/drawingml/2006/main"/>
           <a:p xmlns:a="http://schemas.openxmlformats.org/drawingml/2006/main">
             <a:pPr>
+              <a:buNone/>
               <a:defRPr sz="1050" b="1">
                 <a:solidFill>
                   <a:srgbClr val="1EC5FF"/>
@@ -10524,6 +11628,7 @@
           <a:lstStyle xmlns:a="http://schemas.openxmlformats.org/drawingml/2006/main"/>
           <a:p xmlns:a="http://schemas.openxmlformats.org/drawingml/2006/main">
             <a:pPr>
+              <a:buNone/>
               <a:defRPr sz="825">
                 <a:solidFill>
                   <a:srgbClr val="FFFFFF">
@@ -10578,6 +11683,7 @@
           <a:lstStyle xmlns:a="http://schemas.openxmlformats.org/drawingml/2006/main"/>
           <a:p xmlns:a="http://schemas.openxmlformats.org/drawingml/2006/main">
             <a:pPr algn="r">
+              <a:buNone/>
               <a:defRPr sz="825" b="1">
                 <a:solidFill>
                   <a:srgbClr val="FFFFFF">
@@ -10669,6 +11775,7 @@
           <a:lstStyle xmlns:a="http://schemas.openxmlformats.org/drawingml/2006/main"/>
           <a:p xmlns:a="http://schemas.openxmlformats.org/drawingml/2006/main">
             <a:pPr>
+              <a:buNone/>
               <a:defRPr sz="2925" b="1">
                 <a:solidFill>
                   <a:srgbClr val="FFFFFF"/>
@@ -10719,6 +11826,7 @@
           <a:lstStyle xmlns:a="http://schemas.openxmlformats.org/drawingml/2006/main"/>
           <a:p xmlns:a="http://schemas.openxmlformats.org/drawingml/2006/main">
             <a:pPr>
+              <a:buNone/>
               <a:defRPr sz="1650">
                 <a:solidFill>
                   <a:srgbClr val="E2F2FF"/>
@@ -10769,6 +11877,7 @@
           <a:lstStyle xmlns:a="http://schemas.openxmlformats.org/drawingml/2006/main"/>
           <a:p xmlns:a="http://schemas.openxmlformats.org/drawingml/2006/main">
             <a:pPr>
+              <a:buNone/>
               <a:defRPr sz="1800">
                 <a:solidFill>
                   <a:srgbClr val="FFFFFF"/>
@@ -10786,6 +11895,7 @@
           </a:p>
           <a:p xmlns:a="http://schemas.openxmlformats.org/drawingml/2006/main">
             <a:pPr>
+              <a:buNone/>
               <a:defRPr sz="1800">
                 <a:solidFill>
                   <a:srgbClr val="FFFFFF"/>
@@ -10803,6 +11913,7 @@
           </a:p>
           <a:p xmlns:a="http://schemas.openxmlformats.org/drawingml/2006/main">
             <a:pPr>
+              <a:buNone/>
               <a:defRPr sz="1800">
                 <a:solidFill>
                   <a:srgbClr val="FFFFFF"/>
@@ -10927,6 +12038,7 @@
           <a:lstStyle xmlns:a="http://schemas.openxmlformats.org/drawingml/2006/main"/>
           <a:p xmlns:a="http://schemas.openxmlformats.org/drawingml/2006/main">
             <a:pPr algn="ctr">
+              <a:buNone/>
               <a:defRPr sz="4650" b="1">
                 <a:solidFill>
                   <a:srgbClr val="1EC5FF"/>
@@ -10977,6 +12089,7 @@
           <a:lstStyle xmlns:a="http://schemas.openxmlformats.org/drawingml/2006/main"/>
           <a:p xmlns:a="http://schemas.openxmlformats.org/drawingml/2006/main">
             <a:pPr>
+              <a:buNone/>
               <a:defRPr sz="1050" b="1">
                 <a:solidFill>
                   <a:srgbClr val="1EC5FF"/>
@@ -11060,6 +12173,7 @@
           <a:lstStyle xmlns:a="http://schemas.openxmlformats.org/drawingml/2006/main"/>
           <a:p xmlns:a="http://schemas.openxmlformats.org/drawingml/2006/main">
             <a:pPr>
+              <a:buNone/>
               <a:defRPr sz="825">
                 <a:solidFill>
                   <a:srgbClr val="FFFFFF">
@@ -11114,6 +12228,7 @@
           <a:lstStyle xmlns:a="http://schemas.openxmlformats.org/drawingml/2006/main"/>
           <a:p xmlns:a="http://schemas.openxmlformats.org/drawingml/2006/main">
             <a:pPr algn="r">
+              <a:buNone/>
               <a:defRPr sz="825" b="1">
                 <a:solidFill>
                   <a:srgbClr val="FFFFFF">
@@ -11197,6 +12312,7 @@
           <a:lstStyle xmlns:a="http://schemas.openxmlformats.org/drawingml/2006/main"/>
           <a:p xmlns:a="http://schemas.openxmlformats.org/drawingml/2006/main">
             <a:pPr>
+              <a:buNone/>
               <a:defRPr sz="2925" b="1">
                 <a:solidFill>
                   <a:srgbClr val="0B1F3A"/>
@@ -11247,6 +12363,7 @@
           <a:lstStyle xmlns:a="http://schemas.openxmlformats.org/drawingml/2006/main"/>
           <a:p xmlns:a="http://schemas.openxmlformats.org/drawingml/2006/main">
             <a:pPr>
+              <a:buNone/>
               <a:defRPr sz="1650">
                 <a:solidFill>
                   <a:srgbClr val="5C6F86"/>
@@ -11297,6 +12414,7 @@
           <a:lstStyle xmlns:a="http://schemas.openxmlformats.org/drawingml/2006/main"/>
           <a:p xmlns:a="http://schemas.openxmlformats.org/drawingml/2006/main">
             <a:pPr>
+              <a:buNone/>
               <a:defRPr sz="1800">
                 <a:solidFill>
                   <a:srgbClr val="0B1F3A"/>
@@ -11314,6 +12432,7 @@
           </a:p>
           <a:p xmlns:a="http://schemas.openxmlformats.org/drawingml/2006/main">
             <a:pPr>
+              <a:buNone/>
               <a:defRPr sz="1800">
                 <a:solidFill>
                   <a:srgbClr val="0B1F3A"/>
@@ -11331,6 +12450,7 @@
           </a:p>
           <a:p xmlns:a="http://schemas.openxmlformats.org/drawingml/2006/main">
             <a:pPr>
+              <a:buNone/>
               <a:defRPr sz="1800">
                 <a:solidFill>
                   <a:srgbClr val="0B1F3A"/>
@@ -11348,6 +12468,7 @@
           </a:p>
           <a:p xmlns:a="http://schemas.openxmlformats.org/drawingml/2006/main">
             <a:pPr>
+              <a:buNone/>
               <a:defRPr sz="1800">
                 <a:solidFill>
                   <a:srgbClr val="0B1F3A"/>
@@ -11472,6 +12593,7 @@
           <a:lstStyle xmlns:a="http://schemas.openxmlformats.org/drawingml/2006/main"/>
           <a:p xmlns:a="http://schemas.openxmlformats.org/drawingml/2006/main">
             <a:pPr algn="ctr">
+              <a:buNone/>
               <a:defRPr sz="4650" b="1">
                 <a:solidFill>
                   <a:srgbClr val="1565C0"/>
@@ -11522,6 +12644,7 @@
           <a:lstStyle xmlns:a="http://schemas.openxmlformats.org/drawingml/2006/main"/>
           <a:p xmlns:a="http://schemas.openxmlformats.org/drawingml/2006/main">
             <a:pPr>
+              <a:buNone/>
               <a:defRPr sz="1050" b="1">
                 <a:solidFill>
                   <a:srgbClr val="1565C0"/>
@@ -11605,6 +12728,7 @@
           <a:lstStyle xmlns:a="http://schemas.openxmlformats.org/drawingml/2006/main"/>
           <a:p xmlns:a="http://schemas.openxmlformats.org/drawingml/2006/main">
             <a:pPr>
+              <a:buNone/>
               <a:defRPr sz="825">
                 <a:solidFill>
                   <a:srgbClr val="0B1F3A">
@@ -11659,6 +12783,7 @@
           <a:lstStyle xmlns:a="http://schemas.openxmlformats.org/drawingml/2006/main"/>
           <a:p xmlns:a="http://schemas.openxmlformats.org/drawingml/2006/main">
             <a:pPr algn="r">
+              <a:buNone/>
               <a:defRPr sz="825" b="1">
                 <a:solidFill>
                   <a:srgbClr val="0B1F3A">
@@ -11750,6 +12875,7 @@
           <a:lstStyle xmlns:a="http://schemas.openxmlformats.org/drawingml/2006/main"/>
           <a:p xmlns:a="http://schemas.openxmlformats.org/drawingml/2006/main">
             <a:pPr>
+              <a:buNone/>
               <a:defRPr sz="2925" b="1">
                 <a:solidFill>
                   <a:srgbClr val="FFFFFF"/>
@@ -11806,6 +12932,7 @@
           <a:lstStyle xmlns:a="http://schemas.openxmlformats.org/drawingml/2006/main"/>
           <a:p xmlns:a="http://schemas.openxmlformats.org/drawingml/2006/main">
             <a:pPr algn="ctr">
+              <a:buNone/>
               <a:defRPr sz="1575" b="1">
                 <a:solidFill>
                   <a:srgbClr val="FFFFFF"/>
@@ -11862,6 +12989,7 @@
           <a:lstStyle xmlns:a="http://schemas.openxmlformats.org/drawingml/2006/main"/>
           <a:p xmlns:a="http://schemas.openxmlformats.org/drawingml/2006/main">
             <a:pPr algn="ctr">
+              <a:buNone/>
               <a:defRPr sz="1575" b="1">
                 <a:solidFill>
                   <a:srgbClr val="FFFFFF"/>
@@ -11918,6 +13046,7 @@
           <a:lstStyle xmlns:a="http://schemas.openxmlformats.org/drawingml/2006/main"/>
           <a:p xmlns:a="http://schemas.openxmlformats.org/drawingml/2006/main">
             <a:pPr algn="ctr">
+              <a:buNone/>
               <a:defRPr sz="1575" b="1">
                 <a:solidFill>
                   <a:srgbClr val="FFFFFF"/>
@@ -11937,7 +13066,7 @@
       </p:sp>
       <p:cxnSp>
         <p:nvCxnSpPr>
-          <p:cNvPr id="15" name=""/>
+          <p:cNvPr id="21" name=""/>
           <p:cNvCxnSpPr>
             <a:stCxn xmlns:a="http://schemas.openxmlformats.org/drawingml/2006/main" id="2" idx="3"/>
             <a:endCxn xmlns:a="http://schemas.openxmlformats.org/drawingml/2006/main" id="3" idx="1"/>
@@ -11963,7 +13092,7 @@
       </p:cxnSp>
       <p:cxnSp>
         <p:nvCxnSpPr>
-          <p:cNvPr id="16" name=""/>
+          <p:cNvPr id="22" name=""/>
           <p:cNvCxnSpPr>
             <a:stCxn xmlns:a="http://schemas.openxmlformats.org/drawingml/2006/main" id="3" idx="3"/>
             <a:endCxn xmlns:a="http://schemas.openxmlformats.org/drawingml/2006/main" id="4" idx="1"/>
@@ -12020,6 +13149,7 @@
           <a:lstStyle xmlns:a="http://schemas.openxmlformats.org/drawingml/2006/main"/>
           <a:p xmlns:a="http://schemas.openxmlformats.org/drawingml/2006/main">
             <a:pPr>
+              <a:buNone/>
               <a:defRPr sz="1050" b="1">
                 <a:solidFill>
                   <a:srgbClr val="1EC5FF"/>
@@ -12103,6 +13233,7 @@
           <a:lstStyle xmlns:a="http://schemas.openxmlformats.org/drawingml/2006/main"/>
           <a:p xmlns:a="http://schemas.openxmlformats.org/drawingml/2006/main">
             <a:pPr>
+              <a:buNone/>
               <a:defRPr sz="825">
                 <a:solidFill>
                   <a:srgbClr val="FFFFFF">
@@ -12157,6 +13288,7 @@
           <a:lstStyle xmlns:a="http://schemas.openxmlformats.org/drawingml/2006/main"/>
           <a:p xmlns:a="http://schemas.openxmlformats.org/drawingml/2006/main">
             <a:pPr algn="r">
+              <a:buNone/>
               <a:defRPr sz="825" b="1">
                 <a:solidFill>
                   <a:srgbClr val="FFFFFF">
@@ -12248,6 +13380,7 @@
           <a:lstStyle xmlns:a="http://schemas.openxmlformats.org/drawingml/2006/main"/>
           <a:p xmlns:a="http://schemas.openxmlformats.org/drawingml/2006/main">
             <a:pPr>
+              <a:buNone/>
               <a:defRPr sz="2925" b="1">
                 <a:solidFill>
                   <a:srgbClr val="FFFFFF"/>
@@ -12298,6 +13431,7 @@
           <a:lstStyle xmlns:a="http://schemas.openxmlformats.org/drawingml/2006/main"/>
           <a:p xmlns:a="http://schemas.openxmlformats.org/drawingml/2006/main">
             <a:pPr>
+              <a:buNone/>
               <a:defRPr sz="1650">
                 <a:solidFill>
                   <a:srgbClr val="E2F2FF"/>
@@ -12348,6 +13482,7 @@
           <a:lstStyle xmlns:a="http://schemas.openxmlformats.org/drawingml/2006/main"/>
           <a:p xmlns:a="http://schemas.openxmlformats.org/drawingml/2006/main">
             <a:pPr>
+              <a:buNone/>
               <a:defRPr sz="1800">
                 <a:solidFill>
                   <a:srgbClr val="FFFFFF"/>
@@ -12365,6 +13500,7 @@
           </a:p>
           <a:p xmlns:a="http://schemas.openxmlformats.org/drawingml/2006/main">
             <a:pPr>
+              <a:buNone/>
               <a:defRPr sz="1800">
                 <a:solidFill>
                   <a:srgbClr val="FFFFFF"/>
@@ -12382,6 +13518,7 @@
           </a:p>
           <a:p xmlns:a="http://schemas.openxmlformats.org/drawingml/2006/main">
             <a:pPr>
+              <a:buNone/>
               <a:defRPr sz="1800">
                 <a:solidFill>
                   <a:srgbClr val="FFFFFF"/>
@@ -12506,6 +13643,7 @@
           <a:lstStyle xmlns:a="http://schemas.openxmlformats.org/drawingml/2006/main"/>
           <a:p xmlns:a="http://schemas.openxmlformats.org/drawingml/2006/main">
             <a:pPr algn="ctr">
+              <a:buNone/>
               <a:defRPr sz="4650" b="1">
                 <a:solidFill>
                   <a:srgbClr val="1EC5FF"/>
@@ -12556,6 +13694,7 @@
           <a:lstStyle xmlns:a="http://schemas.openxmlformats.org/drawingml/2006/main"/>
           <a:p xmlns:a="http://schemas.openxmlformats.org/drawingml/2006/main">
             <a:pPr>
+              <a:buNone/>
               <a:defRPr sz="1050" b="1">
                 <a:solidFill>
                   <a:srgbClr val="1EC5FF"/>
@@ -12639,6 +13778,7 @@
           <a:lstStyle xmlns:a="http://schemas.openxmlformats.org/drawingml/2006/main"/>
           <a:p xmlns:a="http://schemas.openxmlformats.org/drawingml/2006/main">
             <a:pPr>
+              <a:buNone/>
               <a:defRPr sz="825">
                 <a:solidFill>
                   <a:srgbClr val="FFFFFF">
@@ -12693,6 +13833,7 @@
           <a:lstStyle xmlns:a="http://schemas.openxmlformats.org/drawingml/2006/main"/>
           <a:p xmlns:a="http://schemas.openxmlformats.org/drawingml/2006/main">
             <a:pPr algn="r">
+              <a:buNone/>
               <a:defRPr sz="825" b="1">
                 <a:solidFill>
                   <a:srgbClr val="FFFFFF">
@@ -12776,6 +13917,7 @@
           <a:lstStyle xmlns:a="http://schemas.openxmlformats.org/drawingml/2006/main"/>
           <a:p xmlns:a="http://schemas.openxmlformats.org/drawingml/2006/main">
             <a:pPr>
+              <a:buNone/>
               <a:defRPr sz="2925" b="1">
                 <a:solidFill>
                   <a:srgbClr val="0B1F3A"/>
@@ -12826,6 +13968,7 @@
           <a:lstStyle xmlns:a="http://schemas.openxmlformats.org/drawingml/2006/main"/>
           <a:p xmlns:a="http://schemas.openxmlformats.org/drawingml/2006/main">
             <a:pPr>
+              <a:buNone/>
               <a:defRPr sz="2100" b="1">
                 <a:solidFill>
                   <a:srgbClr val="1565C0"/>
@@ -12876,6 +14019,7 @@
           <a:lstStyle xmlns:a="http://schemas.openxmlformats.org/drawingml/2006/main"/>
           <a:p xmlns:a="http://schemas.openxmlformats.org/drawingml/2006/main">
             <a:pPr>
+              <a:buNone/>
               <a:defRPr sz="2100" b="1">
                 <a:solidFill>
                   <a:srgbClr val="1565C0"/>
@@ -12957,6 +14101,7 @@
           <a:lstStyle xmlns:a="http://schemas.openxmlformats.org/drawingml/2006/main"/>
           <a:p xmlns:a="http://schemas.openxmlformats.org/drawingml/2006/main">
             <a:pPr>
+              <a:buNone/>
               <a:defRPr sz="1650">
                 <a:solidFill>
                   <a:srgbClr val="0B1F3A"/>
@@ -12974,6 +14119,7 @@
           </a:p>
           <a:p xmlns:a="http://schemas.openxmlformats.org/drawingml/2006/main">
             <a:pPr>
+              <a:buNone/>
               <a:defRPr sz="1650">
                 <a:solidFill>
                   <a:srgbClr val="0B1F3A"/>
@@ -13024,6 +14170,7 @@
           <a:lstStyle xmlns:a="http://schemas.openxmlformats.org/drawingml/2006/main"/>
           <a:p xmlns:a="http://schemas.openxmlformats.org/drawingml/2006/main">
             <a:pPr>
+              <a:buNone/>
               <a:defRPr sz="1650">
                 <a:solidFill>
                   <a:srgbClr val="0B1F3A"/>
@@ -13074,6 +14221,7 @@
           <a:lstStyle xmlns:a="http://schemas.openxmlformats.org/drawingml/2006/main"/>
           <a:p xmlns:a="http://schemas.openxmlformats.org/drawingml/2006/main">
             <a:pPr>
+              <a:buNone/>
               <a:defRPr sz="1050" b="1">
                 <a:solidFill>
                   <a:srgbClr val="1565C0"/>
@@ -13157,6 +14305,7 @@
           <a:lstStyle xmlns:a="http://schemas.openxmlformats.org/drawingml/2006/main"/>
           <a:p xmlns:a="http://schemas.openxmlformats.org/drawingml/2006/main">
             <a:pPr>
+              <a:buNone/>
               <a:defRPr sz="825">
                 <a:solidFill>
                   <a:srgbClr val="0B1F3A">
@@ -13211,6 +14360,7 @@
           <a:lstStyle xmlns:a="http://schemas.openxmlformats.org/drawingml/2006/main"/>
           <a:p xmlns:a="http://schemas.openxmlformats.org/drawingml/2006/main">
             <a:pPr algn="r">
+              <a:buNone/>
               <a:defRPr sz="825" b="1">
                 <a:solidFill>
                   <a:srgbClr val="0B1F3A">
@@ -13294,6 +14444,7 @@
           <a:lstStyle xmlns:a="http://schemas.openxmlformats.org/drawingml/2006/main"/>
           <a:p xmlns:a="http://schemas.openxmlformats.org/drawingml/2006/main">
             <a:pPr>
+              <a:buNone/>
               <a:defRPr sz="2925" b="1">
                 <a:solidFill>
                   <a:srgbClr val="0B1F3A"/>
@@ -13344,6 +14495,7 @@
           <a:lstStyle xmlns:a="http://schemas.openxmlformats.org/drawingml/2006/main"/>
           <a:p xmlns:a="http://schemas.openxmlformats.org/drawingml/2006/main">
             <a:pPr>
+              <a:buNone/>
               <a:defRPr sz="1650">
                 <a:solidFill>
                   <a:srgbClr val="5C6F86"/>
@@ -13394,6 +14546,7 @@
           <a:lstStyle xmlns:a="http://schemas.openxmlformats.org/drawingml/2006/main"/>
           <a:p xmlns:a="http://schemas.openxmlformats.org/drawingml/2006/main">
             <a:pPr>
+              <a:buNone/>
               <a:defRPr sz="1800">
                 <a:solidFill>
                   <a:srgbClr val="0B1F3A"/>
@@ -13411,6 +14564,7 @@
           </a:p>
           <a:p xmlns:a="http://schemas.openxmlformats.org/drawingml/2006/main">
             <a:pPr>
+              <a:buNone/>
               <a:defRPr sz="1800">
                 <a:solidFill>
                   <a:srgbClr val="0B1F3A"/>
@@ -13428,6 +14582,7 @@
           </a:p>
           <a:p xmlns:a="http://schemas.openxmlformats.org/drawingml/2006/main">
             <a:pPr>
+              <a:buNone/>
               <a:defRPr sz="1800">
                 <a:solidFill>
                   <a:srgbClr val="0B1F3A"/>
@@ -13445,6 +14600,7 @@
           </a:p>
           <a:p xmlns:a="http://schemas.openxmlformats.org/drawingml/2006/main">
             <a:pPr>
+              <a:buNone/>
               <a:defRPr sz="1800">
                 <a:solidFill>
                   <a:srgbClr val="0B1F3A"/>
@@ -13569,6 +14725,7 @@
           <a:lstStyle xmlns:a="http://schemas.openxmlformats.org/drawingml/2006/main"/>
           <a:p xmlns:a="http://schemas.openxmlformats.org/drawingml/2006/main">
             <a:pPr algn="ctr">
+              <a:buNone/>
               <a:defRPr sz="4650" b="1">
                 <a:solidFill>
                   <a:srgbClr val="1565C0"/>
@@ -13619,6 +14776,7 @@
           <a:lstStyle xmlns:a="http://schemas.openxmlformats.org/drawingml/2006/main"/>
           <a:p xmlns:a="http://schemas.openxmlformats.org/drawingml/2006/main">
             <a:pPr>
+              <a:buNone/>
               <a:defRPr sz="1050" b="1">
                 <a:solidFill>
                   <a:srgbClr val="1565C0"/>
@@ -13702,6 +14860,7 @@
           <a:lstStyle xmlns:a="http://schemas.openxmlformats.org/drawingml/2006/main"/>
           <a:p xmlns:a="http://schemas.openxmlformats.org/drawingml/2006/main">
             <a:pPr>
+              <a:buNone/>
               <a:defRPr sz="825">
                 <a:solidFill>
                   <a:srgbClr val="0B1F3A">
@@ -13756,6 +14915,7 @@
           <a:lstStyle xmlns:a="http://schemas.openxmlformats.org/drawingml/2006/main"/>
           <a:p xmlns:a="http://schemas.openxmlformats.org/drawingml/2006/main">
             <a:pPr algn="r">
+              <a:buNone/>
               <a:defRPr sz="825" b="1">
                 <a:solidFill>
                   <a:srgbClr val="0B1F3A">

--- a/assets/decks/episodio-05-contratos-versoes.pptx
+++ b/assets/decks/episodio-05-contratos-versoes.pptx
@@ -2,33 +2,33 @@
 <file path=ppt/presentation.xml><?xml version="1.0" encoding="utf-8"?>
 <p:presentation xmlns:p="http://schemas.openxmlformats.org/presentationml/2006/main">
   <p:sldMasterIdLst>
-    <p:sldMasterId xmlns:r="http://schemas.openxmlformats.org/officeDocument/2006/relationships" id="2147483648" r:id="R8069b5d0d9474189"/>
-    <p:sldMasterId xmlns:r="http://schemas.openxmlformats.org/officeDocument/2006/relationships" id="2147483650" r:id="R282e7f3a52d6447b"/>
+    <p:sldMasterId xmlns:r="http://schemas.openxmlformats.org/officeDocument/2006/relationships" id="2147483648" r:id="R257015bc9649421c"/>
+    <p:sldMasterId xmlns:r="http://schemas.openxmlformats.org/officeDocument/2006/relationships" id="2147483650" r:id="Rcdc56cd753244692"/>
   </p:sldMasterIdLst>
   <p:notesMasterIdLst>
-    <p:notesMasterId xmlns:r="http://schemas.openxmlformats.org/officeDocument/2006/relationships" r:id="Rc98b8335e7bc457b"/>
+    <p:notesMasterId xmlns:r="http://schemas.openxmlformats.org/officeDocument/2006/relationships" r:id="R96f8db04b3994605"/>
   </p:notesMasterIdLst>
   <p:sldIdLst>
-    <p:sldId xmlns:r="http://schemas.openxmlformats.org/officeDocument/2006/relationships" id="256" r:id="Rc03ccbae99764a4c"/>
-    <p:sldId xmlns:r="http://schemas.openxmlformats.org/officeDocument/2006/relationships" id="257" r:id="R4ddc7bd4fb6942bb"/>
-    <p:sldId xmlns:r="http://schemas.openxmlformats.org/officeDocument/2006/relationships" id="258" r:id="Rf38eb73f979f4d08"/>
-    <p:sldId xmlns:r="http://schemas.openxmlformats.org/officeDocument/2006/relationships" id="259" r:id="R810094c1372f459e"/>
-    <p:sldId xmlns:r="http://schemas.openxmlformats.org/officeDocument/2006/relationships" id="260" r:id="R4054c874709f473a"/>
-    <p:sldId xmlns:r="http://schemas.openxmlformats.org/officeDocument/2006/relationships" id="261" r:id="Rba52f7b43f5b4ae3"/>
-    <p:sldId xmlns:r="http://schemas.openxmlformats.org/officeDocument/2006/relationships" id="262" r:id="Re6ef36ec89b34ac5"/>
-    <p:sldId xmlns:r="http://schemas.openxmlformats.org/officeDocument/2006/relationships" id="263" r:id="Rea74f07345d44153"/>
-    <p:sldId xmlns:r="http://schemas.openxmlformats.org/officeDocument/2006/relationships" id="264" r:id="R1276d7bf5cb048db"/>
-    <p:sldId xmlns:r="http://schemas.openxmlformats.org/officeDocument/2006/relationships" id="265" r:id="R093df43a20a14271"/>
-    <p:sldId xmlns:r="http://schemas.openxmlformats.org/officeDocument/2006/relationships" id="266" r:id="R380636d5f9c84d63"/>
-    <p:sldId xmlns:r="http://schemas.openxmlformats.org/officeDocument/2006/relationships" id="267" r:id="Rb3909d0f3ad64534"/>
-    <p:sldId xmlns:r="http://schemas.openxmlformats.org/officeDocument/2006/relationships" id="268" r:id="R5cd87bd12c064274"/>
-    <p:sldId xmlns:r="http://schemas.openxmlformats.org/officeDocument/2006/relationships" id="269" r:id="R269206fb794249bf"/>
-    <p:sldId xmlns:r="http://schemas.openxmlformats.org/officeDocument/2006/relationships" id="270" r:id="Rc0f4929939f54220"/>
-    <p:sldId xmlns:r="http://schemas.openxmlformats.org/officeDocument/2006/relationships" id="271" r:id="Rcf5906bd93af41f5"/>
-    <p:sldId xmlns:r="http://schemas.openxmlformats.org/officeDocument/2006/relationships" id="272" r:id="R1e58d59f1b664415"/>
-    <p:sldId xmlns:r="http://schemas.openxmlformats.org/officeDocument/2006/relationships" id="273" r:id="R38bd96e0dc664c4d"/>
-    <p:sldId xmlns:r="http://schemas.openxmlformats.org/officeDocument/2006/relationships" id="274" r:id="R8f89021e6a1e42d0"/>
-    <p:sldId xmlns:r="http://schemas.openxmlformats.org/officeDocument/2006/relationships" id="275" r:id="Rcd690e52f38e478c"/>
+    <p:sldId xmlns:r="http://schemas.openxmlformats.org/officeDocument/2006/relationships" id="256" r:id="R9c83733d40b845c3"/>
+    <p:sldId xmlns:r="http://schemas.openxmlformats.org/officeDocument/2006/relationships" id="257" r:id="Rf537bfc9ab9b44ce"/>
+    <p:sldId xmlns:r="http://schemas.openxmlformats.org/officeDocument/2006/relationships" id="258" r:id="Rbd3c7cdce8304889"/>
+    <p:sldId xmlns:r="http://schemas.openxmlformats.org/officeDocument/2006/relationships" id="259" r:id="Rdf490da6315045ed"/>
+    <p:sldId xmlns:r="http://schemas.openxmlformats.org/officeDocument/2006/relationships" id="260" r:id="Rf7ff04c0e3df43c1"/>
+    <p:sldId xmlns:r="http://schemas.openxmlformats.org/officeDocument/2006/relationships" id="261" r:id="R0abf5b143d554163"/>
+    <p:sldId xmlns:r="http://schemas.openxmlformats.org/officeDocument/2006/relationships" id="262" r:id="Rc2da359ad7ac46c7"/>
+    <p:sldId xmlns:r="http://schemas.openxmlformats.org/officeDocument/2006/relationships" id="263" r:id="R08e1f7bca60943d3"/>
+    <p:sldId xmlns:r="http://schemas.openxmlformats.org/officeDocument/2006/relationships" id="264" r:id="R025884518308427e"/>
+    <p:sldId xmlns:r="http://schemas.openxmlformats.org/officeDocument/2006/relationships" id="265" r:id="R910d19050fd54ae6"/>
+    <p:sldId xmlns:r="http://schemas.openxmlformats.org/officeDocument/2006/relationships" id="266" r:id="R0bcdf1625f6a4c39"/>
+    <p:sldId xmlns:r="http://schemas.openxmlformats.org/officeDocument/2006/relationships" id="267" r:id="Re66f76d05ea04177"/>
+    <p:sldId xmlns:r="http://schemas.openxmlformats.org/officeDocument/2006/relationships" id="268" r:id="R2f2396f530a94af2"/>
+    <p:sldId xmlns:r="http://schemas.openxmlformats.org/officeDocument/2006/relationships" id="269" r:id="R940895d4c97149c4"/>
+    <p:sldId xmlns:r="http://schemas.openxmlformats.org/officeDocument/2006/relationships" id="270" r:id="R1322c138c6e147c7"/>
+    <p:sldId xmlns:r="http://schemas.openxmlformats.org/officeDocument/2006/relationships" id="271" r:id="R341f90a54f984ee3"/>
+    <p:sldId xmlns:r="http://schemas.openxmlformats.org/officeDocument/2006/relationships" id="272" r:id="R47d9fb8b05224ed8"/>
+    <p:sldId xmlns:r="http://schemas.openxmlformats.org/officeDocument/2006/relationships" id="273" r:id="R34a9a77bda464ed0"/>
+    <p:sldId xmlns:r="http://schemas.openxmlformats.org/officeDocument/2006/relationships" id="274" r:id="R167b61f83e0b40d8"/>
+    <p:sldId xmlns:r="http://schemas.openxmlformats.org/officeDocument/2006/relationships" id="275" r:id="R6bb8940a7b3547d9"/>
   </p:sldIdLst>
   <p:sldSz cx="12192000" cy="6858000"/>
   <p:notesSz cx="6858000" cy="9144000"/>
@@ -542,6 +542,11 @@
           </a:p>
           <a:p xmlns:a="http://schemas.openxmlformats.org/drawingml/2006/main">
             <a:r>
+              <a:t>- https://rescuepoint.com.br/assets/img/logo.png</a:t>
+            </a:r>
+          </a:p>
+          <a:p xmlns:a="http://schemas.openxmlformats.org/drawingml/2006/main">
+            <a:r>
               <a:t>- https://github.com/AnselmoBorges/dbt-moderno-na-pratica/blob/main/roteiros/05-contratos-versoes.md</a:t>
             </a:r>
           </a:p>
@@ -707,6 +712,11 @@
           </a:p>
           <a:p xmlns:a="http://schemas.openxmlformats.org/drawingml/2006/main">
             <a:r>
+              <a:t>- https://rescuepoint.com.br/assets/img/logo.png</a:t>
+            </a:r>
+          </a:p>
+          <a:p xmlns:a="http://schemas.openxmlformats.org/drawingml/2006/main">
+            <a:r>
               <a:t>- https://github.com/AnselmoBorges/dbt-moderno-na-pratica/blob/main/roteiros/05-contratos-versoes.md</a:t>
             </a:r>
           </a:p>
@@ -872,6 +882,11 @@
           </a:p>
           <a:p xmlns:a="http://schemas.openxmlformats.org/drawingml/2006/main">
             <a:r>
+              <a:t>- https://rescuepoint.com.br/assets/img/logo.png</a:t>
+            </a:r>
+          </a:p>
+          <a:p xmlns:a="http://schemas.openxmlformats.org/drawingml/2006/main">
+            <a:r>
               <a:t>- https://github.com/AnselmoBorges/dbt-moderno-na-pratica/blob/main/roteiros/05-contratos-versoes.md</a:t>
             </a:r>
           </a:p>
@@ -1037,6 +1052,11 @@
           </a:p>
           <a:p xmlns:a="http://schemas.openxmlformats.org/drawingml/2006/main">
             <a:r>
+              <a:t>- https://rescuepoint.com.br/assets/img/logo.png</a:t>
+            </a:r>
+          </a:p>
+          <a:p xmlns:a="http://schemas.openxmlformats.org/drawingml/2006/main">
+            <a:r>
               <a:t>- https://github.com/AnselmoBorges/dbt-moderno-na-pratica/blob/main/roteiros/05-contratos-versoes.md</a:t>
             </a:r>
           </a:p>
@@ -1202,6 +1222,11 @@
           </a:p>
           <a:p xmlns:a="http://schemas.openxmlformats.org/drawingml/2006/main">
             <a:r>
+              <a:t>- https://rescuepoint.com.br/assets/img/logo.png</a:t>
+            </a:r>
+          </a:p>
+          <a:p xmlns:a="http://schemas.openxmlformats.org/drawingml/2006/main">
+            <a:r>
               <a:t>- https://github.com/AnselmoBorges/dbt-moderno-na-pratica/blob/main/roteiros/05-contratos-versoes.md</a:t>
             </a:r>
           </a:p>
@@ -1367,6 +1392,11 @@
           </a:p>
           <a:p xmlns:a="http://schemas.openxmlformats.org/drawingml/2006/main">
             <a:r>
+              <a:t>- https://rescuepoint.com.br/assets/img/logo.png</a:t>
+            </a:r>
+          </a:p>
+          <a:p xmlns:a="http://schemas.openxmlformats.org/drawingml/2006/main">
+            <a:r>
               <a:t>- https://github.com/AnselmoBorges/dbt-moderno-na-pratica/blob/main/roteiros/05-contratos-versoes.md</a:t>
             </a:r>
           </a:p>
@@ -1532,6 +1562,11 @@
           </a:p>
           <a:p xmlns:a="http://schemas.openxmlformats.org/drawingml/2006/main">
             <a:r>
+              <a:t>- https://rescuepoint.com.br/assets/img/logo.png</a:t>
+            </a:r>
+          </a:p>
+          <a:p xmlns:a="http://schemas.openxmlformats.org/drawingml/2006/main">
+            <a:r>
               <a:t>- https://github.com/AnselmoBorges/dbt-moderno-na-pratica/blob/main/roteiros/05-contratos-versoes.md</a:t>
             </a:r>
           </a:p>
@@ -1697,6 +1732,11 @@
           </a:p>
           <a:p xmlns:a="http://schemas.openxmlformats.org/drawingml/2006/main">
             <a:r>
+              <a:t>- https://rescuepoint.com.br/assets/img/logo.png</a:t>
+            </a:r>
+          </a:p>
+          <a:p xmlns:a="http://schemas.openxmlformats.org/drawingml/2006/main">
+            <a:r>
               <a:t>- https://github.com/AnselmoBorges/dbt-moderno-na-pratica/blob/main/roteiros/05-contratos-versoes.md</a:t>
             </a:r>
           </a:p>
@@ -1862,6 +1902,11 @@
           </a:p>
           <a:p xmlns:a="http://schemas.openxmlformats.org/drawingml/2006/main">
             <a:r>
+              <a:t>- https://rescuepoint.com.br/assets/img/logo.png</a:t>
+            </a:r>
+          </a:p>
+          <a:p xmlns:a="http://schemas.openxmlformats.org/drawingml/2006/main">
+            <a:r>
               <a:t>- https://github.com/AnselmoBorges/dbt-moderno-na-pratica/blob/main/roteiros/05-contratos-versoes.md</a:t>
             </a:r>
           </a:p>
@@ -2027,6 +2072,11 @@
           </a:p>
           <a:p xmlns:a="http://schemas.openxmlformats.org/drawingml/2006/main">
             <a:r>
+              <a:t>- https://rescuepoint.com.br/assets/img/logo.png</a:t>
+            </a:r>
+          </a:p>
+          <a:p xmlns:a="http://schemas.openxmlformats.org/drawingml/2006/main">
+            <a:r>
               <a:t>- https://github.com/AnselmoBorges/dbt-moderno-na-pratica/blob/main/roteiros/05-contratos-versoes.md</a:t>
             </a:r>
           </a:p>
@@ -2192,6 +2242,11 @@
           </a:p>
           <a:p xmlns:a="http://schemas.openxmlformats.org/drawingml/2006/main">
             <a:r>
+              <a:t>- https://rescuepoint.com.br/assets/img/logo.png</a:t>
+            </a:r>
+          </a:p>
+          <a:p xmlns:a="http://schemas.openxmlformats.org/drawingml/2006/main">
+            <a:r>
               <a:t>- https://github.com/AnselmoBorges/dbt-moderno-na-pratica/blob/main/roteiros/05-contratos-versoes.md</a:t>
             </a:r>
           </a:p>
@@ -2357,6 +2412,11 @@
           </a:p>
           <a:p xmlns:a="http://schemas.openxmlformats.org/drawingml/2006/main">
             <a:r>
+              <a:t>- https://rescuepoint.com.br/assets/img/logo.png</a:t>
+            </a:r>
+          </a:p>
+          <a:p xmlns:a="http://schemas.openxmlformats.org/drawingml/2006/main">
+            <a:r>
               <a:t>- https://github.com/AnselmoBorges/dbt-moderno-na-pratica/blob/main/roteiros/05-contratos-versoes.md</a:t>
             </a:r>
           </a:p>
@@ -2522,6 +2582,11 @@
           </a:p>
           <a:p xmlns:a="http://schemas.openxmlformats.org/drawingml/2006/main">
             <a:r>
+              <a:t>- https://rescuepoint.com.br/assets/img/logo.png</a:t>
+            </a:r>
+          </a:p>
+          <a:p xmlns:a="http://schemas.openxmlformats.org/drawingml/2006/main">
+            <a:r>
               <a:t>- https://github.com/AnselmoBorges/dbt-moderno-na-pratica/blob/main/roteiros/05-contratos-versoes.md</a:t>
             </a:r>
           </a:p>
@@ -2687,6 +2752,11 @@
           </a:p>
           <a:p xmlns:a="http://schemas.openxmlformats.org/drawingml/2006/main">
             <a:r>
+              <a:t>- https://rescuepoint.com.br/assets/img/logo.png</a:t>
+            </a:r>
+          </a:p>
+          <a:p xmlns:a="http://schemas.openxmlformats.org/drawingml/2006/main">
+            <a:r>
               <a:t>- https://github.com/AnselmoBorges/dbt-moderno-na-pratica/blob/main/roteiros/05-contratos-versoes.md</a:t>
             </a:r>
           </a:p>
@@ -2852,6 +2922,11 @@
           </a:p>
           <a:p xmlns:a="http://schemas.openxmlformats.org/drawingml/2006/main">
             <a:r>
+              <a:t>- https://rescuepoint.com.br/assets/img/logo.png</a:t>
+            </a:r>
+          </a:p>
+          <a:p xmlns:a="http://schemas.openxmlformats.org/drawingml/2006/main">
+            <a:r>
               <a:t>- https://github.com/AnselmoBorges/dbt-moderno-na-pratica/blob/main/roteiros/05-contratos-versoes.md</a:t>
             </a:r>
           </a:p>
@@ -3017,6 +3092,11 @@
           </a:p>
           <a:p xmlns:a="http://schemas.openxmlformats.org/drawingml/2006/main">
             <a:r>
+              <a:t>- https://rescuepoint.com.br/assets/img/logo.png</a:t>
+            </a:r>
+          </a:p>
+          <a:p xmlns:a="http://schemas.openxmlformats.org/drawingml/2006/main">
+            <a:r>
               <a:t>- https://github.com/AnselmoBorges/dbt-moderno-na-pratica/blob/main/roteiros/05-contratos-versoes.md</a:t>
             </a:r>
           </a:p>
@@ -3182,6 +3262,11 @@
           </a:p>
           <a:p xmlns:a="http://schemas.openxmlformats.org/drawingml/2006/main">
             <a:r>
+              <a:t>- https://rescuepoint.com.br/assets/img/logo.png</a:t>
+            </a:r>
+          </a:p>
+          <a:p xmlns:a="http://schemas.openxmlformats.org/drawingml/2006/main">
+            <a:r>
               <a:t>- https://github.com/AnselmoBorges/dbt-moderno-na-pratica/blob/main/roteiros/05-contratos-versoes.md</a:t>
             </a:r>
           </a:p>
@@ -3347,6 +3432,11 @@
           </a:p>
           <a:p xmlns:a="http://schemas.openxmlformats.org/drawingml/2006/main">
             <a:r>
+              <a:t>- https://rescuepoint.com.br/assets/img/logo.png</a:t>
+            </a:r>
+          </a:p>
+          <a:p xmlns:a="http://schemas.openxmlformats.org/drawingml/2006/main">
+            <a:r>
               <a:t>- https://github.com/AnselmoBorges/dbt-moderno-na-pratica/blob/main/roteiros/05-contratos-versoes.md</a:t>
             </a:r>
           </a:p>
@@ -3512,6 +3602,11 @@
           </a:p>
           <a:p xmlns:a="http://schemas.openxmlformats.org/drawingml/2006/main">
             <a:r>
+              <a:t>- https://rescuepoint.com.br/assets/img/logo.png</a:t>
+            </a:r>
+          </a:p>
+          <a:p xmlns:a="http://schemas.openxmlformats.org/drawingml/2006/main">
+            <a:r>
               <a:t>- https://github.com/AnselmoBorges/dbt-moderno-na-pratica/blob/main/roteiros/05-contratos-versoes.md</a:t>
             </a:r>
           </a:p>
@@ -3673,6 +3768,11 @@
           <a:p xmlns:a="http://schemas.openxmlformats.org/drawingml/2006/main">
             <a:r>
               <a:t>- https://docs.getdbt.com/docs/mesh/govern/about-model-governance</a:t>
+            </a:r>
+          </a:p>
+          <a:p xmlns:a="http://schemas.openxmlformats.org/drawingml/2006/main">
+            <a:r>
+              <a:t>- https://rescuepoint.com.br/assets/img/logo.png</a:t>
             </a:r>
           </a:p>
           <a:p xmlns:a="http://schemas.openxmlformats.org/drawingml/2006/main">
@@ -3794,7 +3894,7 @@
   </p:cSld>
   <p:clrMap bg1="lt1" tx1="dk1" bg2="lt2" tx2="dk2" accent1="accent1" accent2="accent2" accent3="accent3" accent4="accent4" accent5="accent5" accent6="accent6" hlink="hlink" folHlink="folHlink"/>
   <p:sldLayoutIdLst>
-    <p:sldLayoutId xmlns:r="http://schemas.openxmlformats.org/officeDocument/2006/relationships" id="2147483649" r:id="Re7b899b4fbea437d"/>
+    <p:sldLayoutId xmlns:r="http://schemas.openxmlformats.org/officeDocument/2006/relationships" id="2147483649" r:id="R8804f5c048a548b5"/>
   </p:sldLayoutIdLst>
   <p:txStyles>
     <p:titleStyle>
@@ -4092,8 +4192,8 @@
   </p:cSld>
   <p:clrMap bg1="lt1" tx1="dk1" bg2="lt2" tx2="dk2" accent1="accent1" accent2="accent2" accent3="accent3" accent4="accent4" accent5="accent5" accent6="accent6" hlink="hlink" folHlink="folHlink"/>
   <p:sldLayoutIdLst>
-    <p:sldLayoutId xmlns:r="http://schemas.openxmlformats.org/officeDocument/2006/relationships" id="2147483651" r:id="R0adc34f906674027"/>
-    <p:sldLayoutId xmlns:r="http://schemas.openxmlformats.org/officeDocument/2006/relationships" id="2147483652" r:id="R2435d980426f45db"/>
+    <p:sldLayoutId xmlns:r="http://schemas.openxmlformats.org/officeDocument/2006/relationships" id="2147483651" r:id="R9c54d82b56c348cc"/>
+    <p:sldLayoutId xmlns:r="http://schemas.openxmlformats.org/officeDocument/2006/relationships" id="2147483652" r:id="Rb34111e1b37d474a"/>
   </p:sldLayoutIdLst>
 </p:sldMaster>
 </file>
@@ -4617,14 +4717,14 @@
       </p:grpSpPr>
       <p:pic>
         <p:nvPicPr>
-          <p:cNvPr id="10" name="" descr="Ilustração conceitual autoral da capa: EPISÓDIO 5 — Contratos e versões: Gold como API."/>
+          <p:cNvPr id="13" name="" descr="Ilustração conceitual autoral da capa: EPISÓDIO 5 — Contratos e versões: Gold como API."/>
           <p:cNvPicPr>
             <a:picLocks xmlns:a="http://schemas.openxmlformats.org/drawingml/2006/main" noChangeAspect="1"/>
           </p:cNvPicPr>
           <p:nvPr/>
         </p:nvPicPr>
         <p:blipFill>
-          <a:blip xmlns:r="http://schemas.openxmlformats.org/officeDocument/2006/relationships" xmlns:a="http://schemas.openxmlformats.org/drawingml/2006/main" r:embed="R56d52c9f61364f28"/>
+          <a:blip xmlns:r="http://schemas.openxmlformats.org/officeDocument/2006/relationships" xmlns:a="http://schemas.openxmlformats.org/drawingml/2006/main" r:embed="R183760e1c1644f39"/>
           <a:srcRect xmlns:a="http://schemas.openxmlformats.org/drawingml/2006/main" l="19785" t="0" r="19785" b="0"/>
           <a:stretch xmlns:a="http://schemas.openxmlformats.org/drawingml/2006/main">
             <a:fillRect l="0" t="0" r="0" b="0"/>
@@ -4645,7 +4745,7 @@
           <p:cNvPr id="2" name="cover-text-surface">
             <a:extLst xmlns:a="http://schemas.openxmlformats.org/drawingml/2006/main">
               <a:ext uri="{FF2B5EF4-FFF2-40B4-BE49-F238E27FC236}">
-                <a16:creationId xmlns:a16="http://schemas.microsoft.com/office/drawing/2014/main" id="{4C35978A-17FB-4941-A45D-D3D9B3B47684}"/>
+                <a16:creationId xmlns:a16="http://schemas.microsoft.com/office/drawing/2014/main" id="{FC71C81C-A2D1-4376-8D52-66ACBC353ED2}"/>
               </a:ext>
             </a:extLst>
           </p:cNvPr>
@@ -4678,7 +4778,7 @@
           <p:cNvPr id="3" name="cover-divider">
             <a:extLst xmlns:a="http://schemas.openxmlformats.org/drawingml/2006/main">
               <a:ext uri="{FF2B5EF4-FFF2-40B4-BE49-F238E27FC236}">
-                <a16:creationId xmlns:a16="http://schemas.microsoft.com/office/drawing/2014/main" id="{86BFB43C-BCD2-4B47-8C51-3C8D64E2EADB}"/>
+                <a16:creationId xmlns:a16="http://schemas.microsoft.com/office/drawing/2014/main" id="{D96D8219-67DE-42FE-B34F-ADD6B964D5BA}"/>
               </a:ext>
             </a:extLst>
           </p:cNvPr>
@@ -4709,7 +4809,7 @@
           <p:cNvPr id="4" name="cover-episode">
             <a:extLst xmlns:a="http://schemas.openxmlformats.org/drawingml/2006/main">
               <a:ext uri="{FF2B5EF4-FFF2-40B4-BE49-F238E27FC236}">
-                <a16:creationId xmlns:a16="http://schemas.microsoft.com/office/drawing/2014/main" id="{2ECDAF65-2EA3-4D49-8A2D-72687896FE86}"/>
+                <a16:creationId xmlns:a16="http://schemas.microsoft.com/office/drawing/2014/main" id="{83BCE118-8416-429E-A7E6-62A20C2A7639}"/>
               </a:ext>
             </a:extLst>
           </p:cNvPr>
@@ -4757,10 +4857,69 @@
       </p:sp>
       <p:sp>
         <p:nvSpPr>
-          <p:cNvPr id="5" name="cover-title">
-            <a:extLst xmlns:a="http://schemas.openxmlformats.org/drawingml/2006/main">
-              <a:ext uri="{FF2B5EF4-FFF2-40B4-BE49-F238E27FC236}">
-                <a16:creationId xmlns:a16="http://schemas.microsoft.com/office/drawing/2014/main" id="{A0DDECD7-363B-4353-BBD2-E9B217828FEC}"/>
+          <p:cNvPr id="5" name="rescue-point-logo-background">
+            <a:extLst xmlns:a="http://schemas.openxmlformats.org/drawingml/2006/main">
+              <a:ext uri="{FF2B5EF4-FFF2-40B4-BE49-F238E27FC236}">
+                <a16:creationId xmlns:a16="http://schemas.microsoft.com/office/drawing/2014/main" id="{08EE5F40-6FF9-4556-B89C-794D03411704}"/>
+              </a:ext>
+            </a:extLst>
+          </p:cNvPr>
+          <p:cNvSpPr>
+            <a:spLocks xmlns:a="http://schemas.openxmlformats.org/drawingml/2006/main" noGrp="1"/>
+          </p:cNvSpPr>
+          <p:nvPr/>
+        </p:nvSpPr>
+        <p:spPr>
+          <a:xfrm xmlns:a="http://schemas.openxmlformats.org/drawingml/2006/main">
+            <a:off x="9772650" y="133350"/>
+            <a:ext cx="1733550" cy="457200"/>
+          </a:xfrm>
+          <a:prstGeom xmlns:a="http://schemas.openxmlformats.org/drawingml/2006/main" prst="roundRect">
+            <a:avLst>
+              <a:gd name="adj" fmla="val 16667"/>
+            </a:avLst>
+          </a:prstGeom>
+          <a:solidFill xmlns:a="http://schemas.openxmlformats.org/drawingml/2006/main">
+            <a:srgbClr val="06142E"/>
+          </a:solidFill>
+          <a:ln xmlns:a="http://schemas.openxmlformats.org/drawingml/2006/main" w="9525">
+            <a:solidFill>
+              <a:srgbClr val="1EC5FF">
+                <a:alpha val="33333"/>
+              </a:srgbClr>
+            </a:solidFill>
+            <a:prstDash val="solid"/>
+          </a:ln>
+        </p:spPr>
+      </p:sp>
+      <p:pic>
+        <p:nvPicPr>
+          <p:cNvPr id="18" name="" descr="Ilustração conceitual autoral da capa: EPISÓDIO 5 — Contratos e versões: Gold como API."/>
+          <p:cNvPicPr>
+            <a:picLocks xmlns:a="http://schemas.openxmlformats.org/drawingml/2006/main" noChangeAspect="1"/>
+          </p:cNvPicPr>
+          <p:nvPr/>
+        </p:nvPicPr>
+        <p:blipFill>
+          <a:blip xmlns:r="http://schemas.openxmlformats.org/officeDocument/2006/relationships" xmlns:a="http://schemas.openxmlformats.org/drawingml/2006/main" r:embed="Rb0bf110abd1c4f5d"/>
+          <a:stretch xmlns:a="http://schemas.openxmlformats.org/drawingml/2006/main"/>
+        </p:blipFill>
+        <p:spPr>
+          <a:xfrm xmlns:a="http://schemas.openxmlformats.org/drawingml/2006/main">
+            <a:off x="9893718" y="209550"/>
+            <a:ext cx="1491414" cy="323850"/>
+          </a:xfrm>
+          <a:prstGeom xmlns:a="http://schemas.openxmlformats.org/drawingml/2006/main" prst="rect">
+            <a:avLst/>
+          </a:prstGeom>
+        </p:spPr>
+      </p:pic>
+      <p:sp>
+        <p:nvSpPr>
+          <p:cNvPr id="7" name="cover-title">
+            <a:extLst xmlns:a="http://schemas.openxmlformats.org/drawingml/2006/main">
+              <a:ext uri="{FF2B5EF4-FFF2-40B4-BE49-F238E27FC236}">
+                <a16:creationId xmlns:a16="http://schemas.microsoft.com/office/drawing/2014/main" id="{EBB64A1B-5869-4377-B3DB-628B90B39725}"/>
               </a:ext>
             </a:extLst>
           </p:cNvPr>
@@ -4808,10 +4967,10 @@
       </p:sp>
       <p:sp>
         <p:nvSpPr>
-          <p:cNvPr id="6" name="cover-subtitle">
-            <a:extLst xmlns:a="http://schemas.openxmlformats.org/drawingml/2006/main">
-              <a:ext uri="{FF2B5EF4-FFF2-40B4-BE49-F238E27FC236}">
-                <a16:creationId xmlns:a16="http://schemas.microsoft.com/office/drawing/2014/main" id="{B03FC72D-1E6C-4EFF-9725-DB2343BD328D}"/>
+          <p:cNvPr id="8" name="cover-subtitle">
+            <a:extLst xmlns:a="http://schemas.openxmlformats.org/drawingml/2006/main">
+              <a:ext uri="{FF2B5EF4-FFF2-40B4-BE49-F238E27FC236}">
+                <a16:creationId xmlns:a16="http://schemas.microsoft.com/office/drawing/2014/main" id="{6C0291EC-F2A5-423C-8311-7FFFD7C89C8B}"/>
               </a:ext>
             </a:extLst>
           </p:cNvPr>
@@ -4859,10 +5018,10 @@
       </p:sp>
       <p:sp>
         <p:nvSpPr>
-          <p:cNvPr id="7" name="cover-accent">
-            <a:extLst xmlns:a="http://schemas.openxmlformats.org/drawingml/2006/main">
-              <a:ext uri="{FF2B5EF4-FFF2-40B4-BE49-F238E27FC236}">
-                <a16:creationId xmlns:a16="http://schemas.microsoft.com/office/drawing/2014/main" id="{981E8E34-61F3-4466-A323-C786BE969A98}"/>
+          <p:cNvPr id="9" name="cover-accent">
+            <a:extLst xmlns:a="http://schemas.openxmlformats.org/drawingml/2006/main">
+              <a:ext uri="{FF2B5EF4-FFF2-40B4-BE49-F238E27FC236}">
+                <a16:creationId xmlns:a16="http://schemas.microsoft.com/office/drawing/2014/main" id="{CF19DE7B-7F28-4103-8F40-A7356159F664}"/>
               </a:ext>
             </a:extLst>
           </p:cNvPr>
@@ -4890,10 +5049,10 @@
       </p:sp>
       <p:sp>
         <p:nvSpPr>
-          <p:cNvPr id="8" name="cover-meta">
-            <a:extLst xmlns:a="http://schemas.openxmlformats.org/drawingml/2006/main">
-              <a:ext uri="{FF2B5EF4-FFF2-40B4-BE49-F238E27FC236}">
-                <a16:creationId xmlns:a16="http://schemas.microsoft.com/office/drawing/2014/main" id="{1563830E-9D30-4E2A-8DAC-73FD3A812ECE}"/>
+          <p:cNvPr id="10" name="cover-meta">
+            <a:extLst xmlns:a="http://schemas.openxmlformats.org/drawingml/2006/main">
+              <a:ext uri="{FF2B5EF4-FFF2-40B4-BE49-F238E27FC236}">
+                <a16:creationId xmlns:a16="http://schemas.microsoft.com/office/drawing/2014/main" id="{6EFD60AB-4010-41B4-A64C-919575B1FBC3}"/>
               </a:ext>
             </a:extLst>
           </p:cNvPr>
@@ -4946,7 +5105,7 @@
     </p:spTree>
     <p:extLst>
       <p:ext uri="{BB962C8B-B14F-4D97-AF65-F5344CB8AC3E}">
-        <p14:creationId xmlns:p14="http://schemas.microsoft.com/office/powerpoint/2010/main" val="1596609390"/>
+        <p14:creationId xmlns:p14="http://schemas.microsoft.com/office/powerpoint/2010/main" val="587945620"/>
       </p:ext>
     </p:extLst>
   </p:cSld>
@@ -4982,10 +5141,10 @@
       </p:grpSpPr>
       <p:sp>
         <p:nvSpPr>
-          <p:cNvPr id="17" name="slide-title">
-            <a:extLst xmlns:a="http://schemas.openxmlformats.org/drawingml/2006/main">
-              <a:ext uri="{FF2B5EF4-FFF2-40B4-BE49-F238E27FC236}">
-                <a16:creationId xmlns:a16="http://schemas.microsoft.com/office/drawing/2014/main" id="{DAAF2B45-8AAE-4401-A156-1F9ED1FC7ECC}"/>
+          <p:cNvPr id="19" name="slide-title">
+            <a:extLst xmlns:a="http://schemas.openxmlformats.org/drawingml/2006/main">
+              <a:ext uri="{FF2B5EF4-FFF2-40B4-BE49-F238E27FC236}">
+                <a16:creationId xmlns:a16="http://schemas.microsoft.com/office/drawing/2014/main" id="{657D96E4-22A0-40F3-8D88-B12C39F0543F}"/>
               </a:ext>
             </a:extLst>
           </p:cNvPr>
@@ -5036,7 +5195,7 @@
           <p:cNvPr id="2" name="step-num-1">
             <a:extLst xmlns:a="http://schemas.openxmlformats.org/drawingml/2006/main">
               <a:ext uri="{FF2B5EF4-FFF2-40B4-BE49-F238E27FC236}">
-                <a16:creationId xmlns:a16="http://schemas.microsoft.com/office/drawing/2014/main" id="{441F010E-DBB7-4782-B34B-DAED0B28D1A2}"/>
+                <a16:creationId xmlns:a16="http://schemas.microsoft.com/office/drawing/2014/main" id="{A49FA6FE-1F63-44B1-90DC-DA453B0244D5}"/>
               </a:ext>
             </a:extLst>
           </p:cNvPr>
@@ -5087,7 +5246,7 @@
           <p:cNvPr id="3" name="step-label-1">
             <a:extLst xmlns:a="http://schemas.openxmlformats.org/drawingml/2006/main">
               <a:ext uri="{FF2B5EF4-FFF2-40B4-BE49-F238E27FC236}">
-                <a16:creationId xmlns:a16="http://schemas.microsoft.com/office/drawing/2014/main" id="{2E4E8396-2C26-42BC-AA7F-2D1910DDEF82}"/>
+                <a16:creationId xmlns:a16="http://schemas.microsoft.com/office/drawing/2014/main" id="{CA295F7F-FAA2-49DC-8639-C3BEBBF9CA10}"/>
               </a:ext>
             </a:extLst>
           </p:cNvPr>
@@ -5138,7 +5297,7 @@
           <p:cNvPr id="4" name="step-line-1">
             <a:extLst xmlns:a="http://schemas.openxmlformats.org/drawingml/2006/main">
               <a:ext uri="{FF2B5EF4-FFF2-40B4-BE49-F238E27FC236}">
-                <a16:creationId xmlns:a16="http://schemas.microsoft.com/office/drawing/2014/main" id="{FE0DDBF7-26EB-4394-AB27-D946E2A01DA8}"/>
+                <a16:creationId xmlns:a16="http://schemas.microsoft.com/office/drawing/2014/main" id="{313901D9-C3F1-4782-A953-868A6BC71D22}"/>
               </a:ext>
             </a:extLst>
           </p:cNvPr>
@@ -5169,7 +5328,7 @@
           <p:cNvPr id="5" name="step-num-2">
             <a:extLst xmlns:a="http://schemas.openxmlformats.org/drawingml/2006/main">
               <a:ext uri="{FF2B5EF4-FFF2-40B4-BE49-F238E27FC236}">
-                <a16:creationId xmlns:a16="http://schemas.microsoft.com/office/drawing/2014/main" id="{92BADECA-4299-4C9A-B643-0076B0414CAA}"/>
+                <a16:creationId xmlns:a16="http://schemas.microsoft.com/office/drawing/2014/main" id="{B8FCDCC3-61D4-459A-8DAC-3D1828A9A5F1}"/>
               </a:ext>
             </a:extLst>
           </p:cNvPr>
@@ -5220,7 +5379,7 @@
           <p:cNvPr id="6" name="step-label-2">
             <a:extLst xmlns:a="http://schemas.openxmlformats.org/drawingml/2006/main">
               <a:ext uri="{FF2B5EF4-FFF2-40B4-BE49-F238E27FC236}">
-                <a16:creationId xmlns:a16="http://schemas.microsoft.com/office/drawing/2014/main" id="{5D4C9002-AA01-4627-9797-7DAD21DA36C7}"/>
+                <a16:creationId xmlns:a16="http://schemas.microsoft.com/office/drawing/2014/main" id="{0BCF170B-1B19-4BBF-B65C-03566528ECDB}"/>
               </a:ext>
             </a:extLst>
           </p:cNvPr>
@@ -5271,7 +5430,7 @@
           <p:cNvPr id="7" name="step-line-2">
             <a:extLst xmlns:a="http://schemas.openxmlformats.org/drawingml/2006/main">
               <a:ext uri="{FF2B5EF4-FFF2-40B4-BE49-F238E27FC236}">
-                <a16:creationId xmlns:a16="http://schemas.microsoft.com/office/drawing/2014/main" id="{59ACEB92-2CB7-46D2-95E9-230F9A6CAA17}"/>
+                <a16:creationId xmlns:a16="http://schemas.microsoft.com/office/drawing/2014/main" id="{3C4E1391-10D6-4C51-BE44-2F4F5EF9D918}"/>
               </a:ext>
             </a:extLst>
           </p:cNvPr>
@@ -5302,7 +5461,7 @@
           <p:cNvPr id="8" name="step-num-3">
             <a:extLst xmlns:a="http://schemas.openxmlformats.org/drawingml/2006/main">
               <a:ext uri="{FF2B5EF4-FFF2-40B4-BE49-F238E27FC236}">
-                <a16:creationId xmlns:a16="http://schemas.microsoft.com/office/drawing/2014/main" id="{D3A48781-95A0-4AD3-904B-DE2FA8696688}"/>
+                <a16:creationId xmlns:a16="http://schemas.microsoft.com/office/drawing/2014/main" id="{4C8D39E6-51BA-4BB3-938F-4DF0805EA8D0}"/>
               </a:ext>
             </a:extLst>
           </p:cNvPr>
@@ -5353,7 +5512,7 @@
           <p:cNvPr id="9" name="step-label-3">
             <a:extLst xmlns:a="http://schemas.openxmlformats.org/drawingml/2006/main">
               <a:ext uri="{FF2B5EF4-FFF2-40B4-BE49-F238E27FC236}">
-                <a16:creationId xmlns:a16="http://schemas.microsoft.com/office/drawing/2014/main" id="{A7794CE9-2F79-4AF0-86F7-F222F4B6FA4D}"/>
+                <a16:creationId xmlns:a16="http://schemas.microsoft.com/office/drawing/2014/main" id="{E1762C4B-930B-481F-A92D-CA6DBFA5348E}"/>
               </a:ext>
             </a:extLst>
           </p:cNvPr>
@@ -5404,7 +5563,7 @@
           <p:cNvPr id="10" name="step-line-3">
             <a:extLst xmlns:a="http://schemas.openxmlformats.org/drawingml/2006/main">
               <a:ext uri="{FF2B5EF4-FFF2-40B4-BE49-F238E27FC236}">
-                <a16:creationId xmlns:a16="http://schemas.microsoft.com/office/drawing/2014/main" id="{B07B19DB-C3A3-44DF-A7D9-E93DA4A35BC6}"/>
+                <a16:creationId xmlns:a16="http://schemas.microsoft.com/office/drawing/2014/main" id="{60668D47-48CD-44A1-9463-8665582CE4D9}"/>
               </a:ext>
             </a:extLst>
           </p:cNvPr>
@@ -5435,7 +5594,7 @@
           <p:cNvPr id="11" name="step-num-4">
             <a:extLst xmlns:a="http://schemas.openxmlformats.org/drawingml/2006/main">
               <a:ext uri="{FF2B5EF4-FFF2-40B4-BE49-F238E27FC236}">
-                <a16:creationId xmlns:a16="http://schemas.microsoft.com/office/drawing/2014/main" id="{83112994-94F6-4E22-997E-C5B15DC3925B}"/>
+                <a16:creationId xmlns:a16="http://schemas.microsoft.com/office/drawing/2014/main" id="{85ADF8CB-1FE5-46BC-AD58-38BFC8A4B57B}"/>
               </a:ext>
             </a:extLst>
           </p:cNvPr>
@@ -5486,7 +5645,7 @@
           <p:cNvPr id="12" name="step-label-4">
             <a:extLst xmlns:a="http://schemas.openxmlformats.org/drawingml/2006/main">
               <a:ext uri="{FF2B5EF4-FFF2-40B4-BE49-F238E27FC236}">
-                <a16:creationId xmlns:a16="http://schemas.microsoft.com/office/drawing/2014/main" id="{056B7C8A-D0E6-45F7-A9AD-C1914275604D}"/>
+                <a16:creationId xmlns:a16="http://schemas.microsoft.com/office/drawing/2014/main" id="{992614B0-868E-4240-B792-406971DD62F4}"/>
               </a:ext>
             </a:extLst>
           </p:cNvPr>
@@ -5537,7 +5696,7 @@
           <p:cNvPr id="13" name="eyebrow">
             <a:extLst xmlns:a="http://schemas.openxmlformats.org/drawingml/2006/main">
               <a:ext uri="{FF2B5EF4-FFF2-40B4-BE49-F238E27FC236}">
-                <a16:creationId xmlns:a16="http://schemas.microsoft.com/office/drawing/2014/main" id="{94B7E7C5-1D9A-4132-992F-9EA5E14BE015}"/>
+                <a16:creationId xmlns:a16="http://schemas.microsoft.com/office/drawing/2014/main" id="{3EF66F9C-EB42-41F8-A29B-A5A8A7747A63}"/>
               </a:ext>
             </a:extLst>
           </p:cNvPr>
@@ -5585,10 +5744,69 @@
       </p:sp>
       <p:sp>
         <p:nvSpPr>
-          <p:cNvPr id="14" name="footer-rule">
-            <a:extLst xmlns:a="http://schemas.openxmlformats.org/drawingml/2006/main">
-              <a:ext uri="{FF2B5EF4-FFF2-40B4-BE49-F238E27FC236}">
-                <a16:creationId xmlns:a16="http://schemas.microsoft.com/office/drawing/2014/main" id="{5FAA76C8-6A74-4818-883D-E25FABF25880}"/>
+          <p:cNvPr id="14" name="rescue-point-logo-background">
+            <a:extLst xmlns:a="http://schemas.openxmlformats.org/drawingml/2006/main">
+              <a:ext uri="{FF2B5EF4-FFF2-40B4-BE49-F238E27FC236}">
+                <a16:creationId xmlns:a16="http://schemas.microsoft.com/office/drawing/2014/main" id="{31DB1F48-8528-4C90-9733-2F63C790AE37}"/>
+              </a:ext>
+            </a:extLst>
+          </p:cNvPr>
+          <p:cNvSpPr>
+            <a:spLocks xmlns:a="http://schemas.openxmlformats.org/drawingml/2006/main" noGrp="1"/>
+          </p:cNvSpPr>
+          <p:nvPr/>
+        </p:nvSpPr>
+        <p:spPr>
+          <a:xfrm xmlns:a="http://schemas.openxmlformats.org/drawingml/2006/main">
+            <a:off x="9772650" y="133350"/>
+            <a:ext cx="1733550" cy="457200"/>
+          </a:xfrm>
+          <a:prstGeom xmlns:a="http://schemas.openxmlformats.org/drawingml/2006/main" prst="roundRect">
+            <a:avLst>
+              <a:gd name="adj" fmla="val 16667"/>
+            </a:avLst>
+          </a:prstGeom>
+          <a:solidFill xmlns:a="http://schemas.openxmlformats.org/drawingml/2006/main">
+            <a:srgbClr val="06142E"/>
+          </a:solidFill>
+          <a:ln xmlns:a="http://schemas.openxmlformats.org/drawingml/2006/main" w="9525">
+            <a:solidFill>
+              <a:srgbClr val="1EC5FF">
+                <a:alpha val="33333"/>
+              </a:srgbClr>
+            </a:solidFill>
+            <a:prstDash val="solid"/>
+          </a:ln>
+        </p:spPr>
+      </p:sp>
+      <p:pic>
+        <p:nvPicPr>
+          <p:cNvPr id="35" name="" descr="Figura oficial da documentação dbt usada para explicar: Depreciação precisa de saída — 01."/>
+          <p:cNvPicPr>
+            <a:picLocks xmlns:a="http://schemas.openxmlformats.org/drawingml/2006/main" noChangeAspect="1"/>
+          </p:cNvPicPr>
+          <p:nvPr/>
+        </p:nvPicPr>
+        <p:blipFill>
+          <a:blip xmlns:r="http://schemas.openxmlformats.org/officeDocument/2006/relationships" xmlns:a="http://schemas.openxmlformats.org/drawingml/2006/main" r:embed="R4ad8791f4ed8455b"/>
+          <a:stretch xmlns:a="http://schemas.openxmlformats.org/drawingml/2006/main"/>
+        </p:blipFill>
+        <p:spPr>
+          <a:xfrm xmlns:a="http://schemas.openxmlformats.org/drawingml/2006/main">
+            <a:off x="9893718" y="209550"/>
+            <a:ext cx="1491414" cy="323850"/>
+          </a:xfrm>
+          <a:prstGeom xmlns:a="http://schemas.openxmlformats.org/drawingml/2006/main" prst="rect">
+            <a:avLst/>
+          </a:prstGeom>
+        </p:spPr>
+      </p:pic>
+      <p:sp>
+        <p:nvSpPr>
+          <p:cNvPr id="16" name="footer-rule">
+            <a:extLst xmlns:a="http://schemas.openxmlformats.org/drawingml/2006/main">
+              <a:ext uri="{FF2B5EF4-FFF2-40B4-BE49-F238E27FC236}">
+                <a16:creationId xmlns:a16="http://schemas.microsoft.com/office/drawing/2014/main" id="{FAF4048F-51A8-4F99-A1DD-3ADBE798A07E}"/>
               </a:ext>
             </a:extLst>
           </p:cNvPr>
@@ -5618,10 +5836,10 @@
       </p:sp>
       <p:sp>
         <p:nvSpPr>
-          <p:cNvPr id="15" name="footer">
-            <a:extLst xmlns:a="http://schemas.openxmlformats.org/drawingml/2006/main">
-              <a:ext uri="{FF2B5EF4-FFF2-40B4-BE49-F238E27FC236}">
-                <a16:creationId xmlns:a16="http://schemas.microsoft.com/office/drawing/2014/main" id="{04757A05-C017-4092-9882-8C9DF146ECD2}"/>
+          <p:cNvPr id="17" name="footer">
+            <a:extLst xmlns:a="http://schemas.openxmlformats.org/drawingml/2006/main">
+              <a:ext uri="{FF2B5EF4-FFF2-40B4-BE49-F238E27FC236}">
+                <a16:creationId xmlns:a16="http://schemas.microsoft.com/office/drawing/2014/main" id="{4E7E77C7-D156-4F3F-9AB5-D47AB30E41B8}"/>
               </a:ext>
             </a:extLst>
           </p:cNvPr>
@@ -5673,10 +5891,10 @@
       </p:sp>
       <p:sp>
         <p:nvSpPr>
-          <p:cNvPr id="16" name="page-number">
-            <a:extLst xmlns:a="http://schemas.openxmlformats.org/drawingml/2006/main">
-              <a:ext uri="{FF2B5EF4-FFF2-40B4-BE49-F238E27FC236}">
-                <a16:creationId xmlns:a16="http://schemas.microsoft.com/office/drawing/2014/main" id="{C758BA0F-6958-465D-B079-4E04967ED259}"/>
+          <p:cNvPr id="18" name="page-number">
+            <a:extLst xmlns:a="http://schemas.openxmlformats.org/drawingml/2006/main">
+              <a:ext uri="{FF2B5EF4-FFF2-40B4-BE49-F238E27FC236}">
+                <a16:creationId xmlns:a16="http://schemas.microsoft.com/office/drawing/2014/main" id="{4F4CB925-43FD-48F3-BB83-ACD616779F73}"/>
               </a:ext>
             </a:extLst>
           </p:cNvPr>
@@ -5729,7 +5947,7 @@
     </p:spTree>
     <p:extLst>
       <p:ext uri="{BB962C8B-B14F-4D97-AF65-F5344CB8AC3E}">
-        <p14:creationId xmlns:p14="http://schemas.microsoft.com/office/powerpoint/2010/main" val="1677077178"/>
+        <p14:creationId xmlns:p14="http://schemas.microsoft.com/office/powerpoint/2010/main" val="16784947"/>
       </p:ext>
     </p:extLst>
   </p:cSld>
@@ -5765,10 +5983,10 @@
       </p:grpSpPr>
       <p:sp>
         <p:nvSpPr>
-          <p:cNvPr id="11" name="slide-title">
-            <a:extLst xmlns:a="http://schemas.openxmlformats.org/drawingml/2006/main">
-              <a:ext uri="{FF2B5EF4-FFF2-40B4-BE49-F238E27FC236}">
-                <a16:creationId xmlns:a16="http://schemas.microsoft.com/office/drawing/2014/main" id="{344D939C-E561-48F5-BBAA-B74C2A9CAE68}"/>
+          <p:cNvPr id="13" name="slide-title">
+            <a:extLst xmlns:a="http://schemas.openxmlformats.org/drawingml/2006/main">
+              <a:ext uri="{FF2B5EF4-FFF2-40B4-BE49-F238E27FC236}">
+                <a16:creationId xmlns:a16="http://schemas.microsoft.com/office/drawing/2014/main" id="{9BC32A90-3524-44E7-A6BA-C073CA5B6217}"/>
               </a:ext>
             </a:extLst>
           </p:cNvPr>
@@ -5819,7 +6037,7 @@
           <p:cNvPr id="2" name="slide-subtitle">
             <a:extLst xmlns:a="http://schemas.openxmlformats.org/drawingml/2006/main">
               <a:ext uri="{FF2B5EF4-FFF2-40B4-BE49-F238E27FC236}">
-                <a16:creationId xmlns:a16="http://schemas.microsoft.com/office/drawing/2014/main" id="{D25E8098-5A4E-43E9-AB09-A466F09392A5}"/>
+                <a16:creationId xmlns:a16="http://schemas.microsoft.com/office/drawing/2014/main" id="{6C449EF2-0CF3-403B-AABE-FEB3B467E776}"/>
               </a:ext>
             </a:extLst>
           </p:cNvPr>
@@ -5870,7 +6088,7 @@
           <p:cNvPr id="3" name="bullets">
             <a:extLst xmlns:a="http://schemas.openxmlformats.org/drawingml/2006/main">
               <a:ext uri="{FF2B5EF4-FFF2-40B4-BE49-F238E27FC236}">
-                <a16:creationId xmlns:a16="http://schemas.microsoft.com/office/drawing/2014/main" id="{7E6BD812-6511-4454-9F4E-CBCCAF2DBE2C}"/>
+                <a16:creationId xmlns:a16="http://schemas.microsoft.com/office/drawing/2014/main" id="{05E1E83C-462F-45AE-9C78-CEBF0C6AD2AB}"/>
               </a:ext>
             </a:extLst>
           </p:cNvPr>
@@ -5975,7 +6193,7 @@
           <p:cNvPr id="4" name="ambient-glow">
             <a:extLst xmlns:a="http://schemas.openxmlformats.org/drawingml/2006/main">
               <a:ext uri="{FF2B5EF4-FFF2-40B4-BE49-F238E27FC236}">
-                <a16:creationId xmlns:a16="http://schemas.microsoft.com/office/drawing/2014/main" id="{AC986E49-F728-4277-9CF0-5EC2F3C9797D}"/>
+                <a16:creationId xmlns:a16="http://schemas.microsoft.com/office/drawing/2014/main" id="{F035DDBA-46C3-424D-99AE-756FF1C0CDF8}"/>
               </a:ext>
             </a:extLst>
           </p:cNvPr>
@@ -6012,7 +6230,7 @@
           <p:cNvPr id="5" name="ambient-core">
             <a:extLst xmlns:a="http://schemas.openxmlformats.org/drawingml/2006/main">
               <a:ext uri="{FF2B5EF4-FFF2-40B4-BE49-F238E27FC236}">
-                <a16:creationId xmlns:a16="http://schemas.microsoft.com/office/drawing/2014/main" id="{5BE1306D-6C5C-4823-8EDE-D0E6304ACB5B}"/>
+                <a16:creationId xmlns:a16="http://schemas.microsoft.com/office/drawing/2014/main" id="{75013B98-5FD7-423F-AAF6-862EABD440FC}"/>
               </a:ext>
             </a:extLst>
           </p:cNvPr>
@@ -6049,7 +6267,7 @@
           <p:cNvPr id="6" name="section-number">
             <a:extLst xmlns:a="http://schemas.openxmlformats.org/drawingml/2006/main">
               <a:ext uri="{FF2B5EF4-FFF2-40B4-BE49-F238E27FC236}">
-                <a16:creationId xmlns:a16="http://schemas.microsoft.com/office/drawing/2014/main" id="{4993404A-8AF0-4B6A-BDD9-DF7D588A458E}"/>
+                <a16:creationId xmlns:a16="http://schemas.microsoft.com/office/drawing/2014/main" id="{2F60779C-4073-42B0-B9CA-541E242401E0}"/>
               </a:ext>
             </a:extLst>
           </p:cNvPr>
@@ -6100,7 +6318,7 @@
           <p:cNvPr id="7" name="eyebrow">
             <a:extLst xmlns:a="http://schemas.openxmlformats.org/drawingml/2006/main">
               <a:ext uri="{FF2B5EF4-FFF2-40B4-BE49-F238E27FC236}">
-                <a16:creationId xmlns:a16="http://schemas.microsoft.com/office/drawing/2014/main" id="{4D672BB6-5E00-4C57-995D-2185D2FA56D1}"/>
+                <a16:creationId xmlns:a16="http://schemas.microsoft.com/office/drawing/2014/main" id="{E63221B6-0162-484A-A67D-11C9C0EC8357}"/>
               </a:ext>
             </a:extLst>
           </p:cNvPr>
@@ -6148,10 +6366,69 @@
       </p:sp>
       <p:sp>
         <p:nvSpPr>
-          <p:cNvPr id="8" name="footer-rule">
-            <a:extLst xmlns:a="http://schemas.openxmlformats.org/drawingml/2006/main">
-              <a:ext uri="{FF2B5EF4-FFF2-40B4-BE49-F238E27FC236}">
-                <a16:creationId xmlns:a16="http://schemas.microsoft.com/office/drawing/2014/main" id="{6402595F-D59E-4F77-805E-F95E1512342A}"/>
+          <p:cNvPr id="8" name="rescue-point-logo-background">
+            <a:extLst xmlns:a="http://schemas.openxmlformats.org/drawingml/2006/main">
+              <a:ext uri="{FF2B5EF4-FFF2-40B4-BE49-F238E27FC236}">
+                <a16:creationId xmlns:a16="http://schemas.microsoft.com/office/drawing/2014/main" id="{BC1CA3C8-C7EB-4E07-BABD-365F91079661}"/>
+              </a:ext>
+            </a:extLst>
+          </p:cNvPr>
+          <p:cNvSpPr>
+            <a:spLocks xmlns:a="http://schemas.openxmlformats.org/drawingml/2006/main" noGrp="1"/>
+          </p:cNvSpPr>
+          <p:nvPr/>
+        </p:nvSpPr>
+        <p:spPr>
+          <a:xfrm xmlns:a="http://schemas.openxmlformats.org/drawingml/2006/main">
+            <a:off x="9772650" y="133350"/>
+            <a:ext cx="1733550" cy="457200"/>
+          </a:xfrm>
+          <a:prstGeom xmlns:a="http://schemas.openxmlformats.org/drawingml/2006/main" prst="roundRect">
+            <a:avLst>
+              <a:gd name="adj" fmla="val 16667"/>
+            </a:avLst>
+          </a:prstGeom>
+          <a:solidFill xmlns:a="http://schemas.openxmlformats.org/drawingml/2006/main">
+            <a:srgbClr val="06142E"/>
+          </a:solidFill>
+          <a:ln xmlns:a="http://schemas.openxmlformats.org/drawingml/2006/main" w="9525">
+            <a:solidFill>
+              <a:srgbClr val="1EC5FF">
+                <a:alpha val="33333"/>
+              </a:srgbClr>
+            </a:solidFill>
+            <a:prstDash val="solid"/>
+          </a:ln>
+        </p:spPr>
+      </p:sp>
+      <p:pic>
+        <p:nvPicPr>
+          <p:cNvPr id="23" name="" descr="Figura oficial da documentação dbt usada para explicar: Mudança semântica exige outro controle — Manter nome e tipo não impede delivered_revenue de mudar silenciosamente.."/>
+          <p:cNvPicPr>
+            <a:picLocks xmlns:a="http://schemas.openxmlformats.org/drawingml/2006/main" noChangeAspect="1"/>
+          </p:cNvPicPr>
+          <p:nvPr/>
+        </p:nvPicPr>
+        <p:blipFill>
+          <a:blip xmlns:r="http://schemas.openxmlformats.org/officeDocument/2006/relationships" xmlns:a="http://schemas.openxmlformats.org/drawingml/2006/main" r:embed="Rf4dbbf34ea404f3e"/>
+          <a:stretch xmlns:a="http://schemas.openxmlformats.org/drawingml/2006/main"/>
+        </p:blipFill>
+        <p:spPr>
+          <a:xfrm xmlns:a="http://schemas.openxmlformats.org/drawingml/2006/main">
+            <a:off x="9893718" y="209550"/>
+            <a:ext cx="1491414" cy="323850"/>
+          </a:xfrm>
+          <a:prstGeom xmlns:a="http://schemas.openxmlformats.org/drawingml/2006/main" prst="rect">
+            <a:avLst/>
+          </a:prstGeom>
+        </p:spPr>
+      </p:pic>
+      <p:sp>
+        <p:nvSpPr>
+          <p:cNvPr id="10" name="footer-rule">
+            <a:extLst xmlns:a="http://schemas.openxmlformats.org/drawingml/2006/main">
+              <a:ext uri="{FF2B5EF4-FFF2-40B4-BE49-F238E27FC236}">
+                <a16:creationId xmlns:a16="http://schemas.microsoft.com/office/drawing/2014/main" id="{5A4E67B4-AA4D-4B6E-B058-5C08627B7259}"/>
               </a:ext>
             </a:extLst>
           </p:cNvPr>
@@ -6181,10 +6458,10 @@
       </p:sp>
       <p:sp>
         <p:nvSpPr>
-          <p:cNvPr id="9" name="footer">
-            <a:extLst xmlns:a="http://schemas.openxmlformats.org/drawingml/2006/main">
-              <a:ext uri="{FF2B5EF4-FFF2-40B4-BE49-F238E27FC236}">
-                <a16:creationId xmlns:a16="http://schemas.microsoft.com/office/drawing/2014/main" id="{A7D0F283-6EF1-46D5-9298-2F7F439928A9}"/>
+          <p:cNvPr id="11" name="footer">
+            <a:extLst xmlns:a="http://schemas.openxmlformats.org/drawingml/2006/main">
+              <a:ext uri="{FF2B5EF4-FFF2-40B4-BE49-F238E27FC236}">
+                <a16:creationId xmlns:a16="http://schemas.microsoft.com/office/drawing/2014/main" id="{A1A0EE37-D0E1-4E01-9119-2F0CC6A7E7E9}"/>
               </a:ext>
             </a:extLst>
           </p:cNvPr>
@@ -6236,10 +6513,10 @@
       </p:sp>
       <p:sp>
         <p:nvSpPr>
-          <p:cNvPr id="10" name="page-number">
-            <a:extLst xmlns:a="http://schemas.openxmlformats.org/drawingml/2006/main">
-              <a:ext uri="{FF2B5EF4-FFF2-40B4-BE49-F238E27FC236}">
-                <a16:creationId xmlns:a16="http://schemas.microsoft.com/office/drawing/2014/main" id="{F94312B2-6003-4A1D-9314-0AC286E64AEC}"/>
+          <p:cNvPr id="12" name="page-number">
+            <a:extLst xmlns:a="http://schemas.openxmlformats.org/drawingml/2006/main">
+              <a:ext uri="{FF2B5EF4-FFF2-40B4-BE49-F238E27FC236}">
+                <a16:creationId xmlns:a16="http://schemas.microsoft.com/office/drawing/2014/main" id="{DF1256C9-F5A1-4108-BFF9-76B49C03B849}"/>
               </a:ext>
             </a:extLst>
           </p:cNvPr>
@@ -6292,7 +6569,7 @@
     </p:spTree>
     <p:extLst>
       <p:ext uri="{BB962C8B-B14F-4D97-AF65-F5344CB8AC3E}">
-        <p14:creationId xmlns:p14="http://schemas.microsoft.com/office/powerpoint/2010/main" val="1908563963"/>
+        <p14:creationId xmlns:p14="http://schemas.microsoft.com/office/powerpoint/2010/main" val="693860528"/>
       </p:ext>
     </p:extLst>
   </p:cSld>
@@ -6320,10 +6597,10 @@
       </p:grpSpPr>
       <p:sp>
         <p:nvSpPr>
-          <p:cNvPr id="13" name="slide-title">
-            <a:extLst xmlns:a="http://schemas.openxmlformats.org/drawingml/2006/main">
-              <a:ext uri="{FF2B5EF4-FFF2-40B4-BE49-F238E27FC236}">
-                <a16:creationId xmlns:a16="http://schemas.microsoft.com/office/drawing/2014/main" id="{C93656F8-8F53-4402-90B4-41592D8E2CE8}"/>
+          <p:cNvPr id="15" name="slide-title">
+            <a:extLst xmlns:a="http://schemas.openxmlformats.org/drawingml/2006/main">
+              <a:ext uri="{FF2B5EF4-FFF2-40B4-BE49-F238E27FC236}">
+                <a16:creationId xmlns:a16="http://schemas.microsoft.com/office/drawing/2014/main" id="{19AC1E73-2308-48B5-B1D0-93DE1C7D3CFC}"/>
               </a:ext>
             </a:extLst>
           </p:cNvPr>
@@ -6374,7 +6651,7 @@
           <p:cNvPr id="2" name="flow-1">
             <a:extLst xmlns:a="http://schemas.openxmlformats.org/drawingml/2006/main">
               <a:ext uri="{FF2B5EF4-FFF2-40B4-BE49-F238E27FC236}">
-                <a16:creationId xmlns:a16="http://schemas.microsoft.com/office/drawing/2014/main" id="{EFCAB577-C12B-47F5-82AD-4A542F812848}"/>
+                <a16:creationId xmlns:a16="http://schemas.microsoft.com/office/drawing/2014/main" id="{81E5FD23-5FF8-4B61-A0AD-C51B64AFE99C}"/>
               </a:ext>
             </a:extLst>
           </p:cNvPr>
@@ -6431,7 +6708,7 @@
           <p:cNvPr id="3" name="flow-2">
             <a:extLst xmlns:a="http://schemas.openxmlformats.org/drawingml/2006/main">
               <a:ext uri="{FF2B5EF4-FFF2-40B4-BE49-F238E27FC236}">
-                <a16:creationId xmlns:a16="http://schemas.microsoft.com/office/drawing/2014/main" id="{9F1BB7B4-4939-4418-BE45-709336E130AF}"/>
+                <a16:creationId xmlns:a16="http://schemas.microsoft.com/office/drawing/2014/main" id="{9124378A-7B51-42B7-8D8D-96DE652EF4BE}"/>
               </a:ext>
             </a:extLst>
           </p:cNvPr>
@@ -6488,7 +6765,7 @@
           <p:cNvPr id="4" name="flow-3">
             <a:extLst xmlns:a="http://schemas.openxmlformats.org/drawingml/2006/main">
               <a:ext uri="{FF2B5EF4-FFF2-40B4-BE49-F238E27FC236}">
-                <a16:creationId xmlns:a16="http://schemas.microsoft.com/office/drawing/2014/main" id="{0D1278C8-9064-46AC-99F0-E1E0F43E8ADB}"/>
+                <a16:creationId xmlns:a16="http://schemas.microsoft.com/office/drawing/2014/main" id="{971C46EE-D2BB-4865-8EC8-4153F1ED0D0F}"/>
               </a:ext>
             </a:extLst>
           </p:cNvPr>
@@ -6545,7 +6822,7 @@
           <p:cNvPr id="5" name="flow-4">
             <a:extLst xmlns:a="http://schemas.openxmlformats.org/drawingml/2006/main">
               <a:ext uri="{FF2B5EF4-FFF2-40B4-BE49-F238E27FC236}">
-                <a16:creationId xmlns:a16="http://schemas.microsoft.com/office/drawing/2014/main" id="{CF92E08F-32D6-4956-AC64-9A8ED2A28AE6}"/>
+                <a16:creationId xmlns:a16="http://schemas.microsoft.com/office/drawing/2014/main" id="{93513AA2-57B5-473D-9219-3333D2011D32}"/>
               </a:ext>
             </a:extLst>
           </p:cNvPr>
@@ -6599,7 +6876,7 @@
       </p:sp>
       <p:cxnSp>
         <p:nvCxnSpPr>
-          <p:cNvPr id="26" name=""/>
+          <p:cNvPr id="29" name=""/>
           <p:cNvCxnSpPr>
             <a:stCxn xmlns:a="http://schemas.openxmlformats.org/drawingml/2006/main" id="2" idx="3"/>
             <a:endCxn xmlns:a="http://schemas.openxmlformats.org/drawingml/2006/main" id="3" idx="1"/>
@@ -6625,7 +6902,7 @@
       </p:cxnSp>
       <p:cxnSp>
         <p:nvCxnSpPr>
-          <p:cNvPr id="27" name=""/>
+          <p:cNvPr id="30" name=""/>
           <p:cNvCxnSpPr>
             <a:stCxn xmlns:a="http://schemas.openxmlformats.org/drawingml/2006/main" id="3" idx="3"/>
             <a:endCxn xmlns:a="http://schemas.openxmlformats.org/drawingml/2006/main" id="4" idx="1"/>
@@ -6651,7 +6928,7 @@
       </p:cxnSp>
       <p:cxnSp>
         <p:nvCxnSpPr>
-          <p:cNvPr id="28" name=""/>
+          <p:cNvPr id="31" name=""/>
           <p:cNvCxnSpPr>
             <a:stCxn xmlns:a="http://schemas.openxmlformats.org/drawingml/2006/main" id="4" idx="3"/>
             <a:endCxn xmlns:a="http://schemas.openxmlformats.org/drawingml/2006/main" id="5" idx="1"/>
@@ -6680,7 +6957,7 @@
           <p:cNvPr id="9" name="eyebrow">
             <a:extLst xmlns:a="http://schemas.openxmlformats.org/drawingml/2006/main">
               <a:ext uri="{FF2B5EF4-FFF2-40B4-BE49-F238E27FC236}">
-                <a16:creationId xmlns:a16="http://schemas.microsoft.com/office/drawing/2014/main" id="{C0EE92F1-08EF-4B0C-B2E5-6A1938F502FC}"/>
+                <a16:creationId xmlns:a16="http://schemas.microsoft.com/office/drawing/2014/main" id="{140AB658-C50E-4491-8035-6BE736C9D07C}"/>
               </a:ext>
             </a:extLst>
           </p:cNvPr>
@@ -6728,10 +7005,69 @@
       </p:sp>
       <p:sp>
         <p:nvSpPr>
-          <p:cNvPr id="10" name="footer-rule">
-            <a:extLst xmlns:a="http://schemas.openxmlformats.org/drawingml/2006/main">
-              <a:ext uri="{FF2B5EF4-FFF2-40B4-BE49-F238E27FC236}">
-                <a16:creationId xmlns:a16="http://schemas.microsoft.com/office/drawing/2014/main" id="{FB3D525B-5C0E-44C2-ABD6-E3CA7518FA0F}"/>
+          <p:cNvPr id="10" name="rescue-point-logo-background">
+            <a:extLst xmlns:a="http://schemas.openxmlformats.org/drawingml/2006/main">
+              <a:ext uri="{FF2B5EF4-FFF2-40B4-BE49-F238E27FC236}">
+                <a16:creationId xmlns:a16="http://schemas.microsoft.com/office/drawing/2014/main" id="{F26E3283-F9A8-46C4-B5EA-1E3245E78C3A}"/>
+              </a:ext>
+            </a:extLst>
+          </p:cNvPr>
+          <p:cNvSpPr>
+            <a:spLocks xmlns:a="http://schemas.openxmlformats.org/drawingml/2006/main" noGrp="1"/>
+          </p:cNvSpPr>
+          <p:nvPr/>
+        </p:nvSpPr>
+        <p:spPr>
+          <a:xfrm xmlns:a="http://schemas.openxmlformats.org/drawingml/2006/main">
+            <a:off x="9772650" y="133350"/>
+            <a:ext cx="1733550" cy="457200"/>
+          </a:xfrm>
+          <a:prstGeom xmlns:a="http://schemas.openxmlformats.org/drawingml/2006/main" prst="roundRect">
+            <a:avLst>
+              <a:gd name="adj" fmla="val 16667"/>
+            </a:avLst>
+          </a:prstGeom>
+          <a:solidFill xmlns:a="http://schemas.openxmlformats.org/drawingml/2006/main">
+            <a:srgbClr val="06142E"/>
+          </a:solidFill>
+          <a:ln xmlns:a="http://schemas.openxmlformats.org/drawingml/2006/main" w="9525">
+            <a:solidFill>
+              <a:srgbClr val="1EC5FF">
+                <a:alpha val="33333"/>
+              </a:srgbClr>
+            </a:solidFill>
+            <a:prstDash val="solid"/>
+          </a:ln>
+        </p:spPr>
+      </p:sp>
+      <p:pic>
+        <p:nvPicPr>
+          <p:cNvPr id="34" name="" descr="Figura oficial da documentação dbt usada para explicar: Mudança semântica exige outro controle — Schema."/>
+          <p:cNvPicPr>
+            <a:picLocks xmlns:a="http://schemas.openxmlformats.org/drawingml/2006/main" noChangeAspect="1"/>
+          </p:cNvPicPr>
+          <p:nvPr/>
+        </p:nvPicPr>
+        <p:blipFill>
+          <a:blip xmlns:r="http://schemas.openxmlformats.org/officeDocument/2006/relationships" xmlns:a="http://schemas.openxmlformats.org/drawingml/2006/main" r:embed="Rb772ff81d9c54ee0"/>
+          <a:stretch xmlns:a="http://schemas.openxmlformats.org/drawingml/2006/main"/>
+        </p:blipFill>
+        <p:spPr>
+          <a:xfrm xmlns:a="http://schemas.openxmlformats.org/drawingml/2006/main">
+            <a:off x="9893718" y="209550"/>
+            <a:ext cx="1491414" cy="323850"/>
+          </a:xfrm>
+          <a:prstGeom xmlns:a="http://schemas.openxmlformats.org/drawingml/2006/main" prst="rect">
+            <a:avLst/>
+          </a:prstGeom>
+        </p:spPr>
+      </p:pic>
+      <p:sp>
+        <p:nvSpPr>
+          <p:cNvPr id="12" name="footer-rule">
+            <a:extLst xmlns:a="http://schemas.openxmlformats.org/drawingml/2006/main">
+              <a:ext uri="{FF2B5EF4-FFF2-40B4-BE49-F238E27FC236}">
+                <a16:creationId xmlns:a16="http://schemas.microsoft.com/office/drawing/2014/main" id="{4759A002-CCD3-4502-9E70-C47D54B9C47C}"/>
               </a:ext>
             </a:extLst>
           </p:cNvPr>
@@ -6761,10 +7097,10 @@
       </p:sp>
       <p:sp>
         <p:nvSpPr>
-          <p:cNvPr id="11" name="footer">
-            <a:extLst xmlns:a="http://schemas.openxmlformats.org/drawingml/2006/main">
-              <a:ext uri="{FF2B5EF4-FFF2-40B4-BE49-F238E27FC236}">
-                <a16:creationId xmlns:a16="http://schemas.microsoft.com/office/drawing/2014/main" id="{68637C27-17F2-4122-AB8F-20E4B2CDA362}"/>
+          <p:cNvPr id="13" name="footer">
+            <a:extLst xmlns:a="http://schemas.openxmlformats.org/drawingml/2006/main">
+              <a:ext uri="{FF2B5EF4-FFF2-40B4-BE49-F238E27FC236}">
+                <a16:creationId xmlns:a16="http://schemas.microsoft.com/office/drawing/2014/main" id="{3C12CE5C-6027-4259-88C7-959BCD6826E0}"/>
               </a:ext>
             </a:extLst>
           </p:cNvPr>
@@ -6816,10 +7152,10 @@
       </p:sp>
       <p:sp>
         <p:nvSpPr>
-          <p:cNvPr id="12" name="page-number">
-            <a:extLst xmlns:a="http://schemas.openxmlformats.org/drawingml/2006/main">
-              <a:ext uri="{FF2B5EF4-FFF2-40B4-BE49-F238E27FC236}">
-                <a16:creationId xmlns:a16="http://schemas.microsoft.com/office/drawing/2014/main" id="{45484863-70BB-4143-BAA0-0A730659A747}"/>
+          <p:cNvPr id="14" name="page-number">
+            <a:extLst xmlns:a="http://schemas.openxmlformats.org/drawingml/2006/main">
+              <a:ext uri="{FF2B5EF4-FFF2-40B4-BE49-F238E27FC236}">
+                <a16:creationId xmlns:a16="http://schemas.microsoft.com/office/drawing/2014/main" id="{B348AD50-FF61-427C-BE38-D0931E169BB2}"/>
               </a:ext>
             </a:extLst>
           </p:cNvPr>
@@ -6872,7 +7208,7 @@
     </p:spTree>
     <p:extLst>
       <p:ext uri="{BB962C8B-B14F-4D97-AF65-F5344CB8AC3E}">
-        <p14:creationId xmlns:p14="http://schemas.microsoft.com/office/powerpoint/2010/main" val="1928075712"/>
+        <p14:creationId xmlns:p14="http://schemas.microsoft.com/office/powerpoint/2010/main" val="1789760645"/>
       </p:ext>
     </p:extLst>
   </p:cSld>
@@ -6908,10 +7244,10 @@
       </p:grpSpPr>
       <p:sp>
         <p:nvSpPr>
-          <p:cNvPr id="9" name="slide-title">
-            <a:extLst xmlns:a="http://schemas.openxmlformats.org/drawingml/2006/main">
-              <a:ext uri="{FF2B5EF4-FFF2-40B4-BE49-F238E27FC236}">
-                <a16:creationId xmlns:a16="http://schemas.microsoft.com/office/drawing/2014/main" id="{82550668-0DFA-4DE3-9BED-2E34C12906E9}"/>
+          <p:cNvPr id="11" name="slide-title">
+            <a:extLst xmlns:a="http://schemas.openxmlformats.org/drawingml/2006/main">
+              <a:ext uri="{FF2B5EF4-FFF2-40B4-BE49-F238E27FC236}">
+                <a16:creationId xmlns:a16="http://schemas.microsoft.com/office/drawing/2014/main" id="{B7D88488-A26A-462F-BEDC-0D4C0229C700}"/>
               </a:ext>
             </a:extLst>
           </p:cNvPr>
@@ -6962,7 +7298,7 @@
           <p:cNvPr id="2" name="code-surface">
             <a:extLst xmlns:a="http://schemas.openxmlformats.org/drawingml/2006/main">
               <a:ext uri="{FF2B5EF4-FFF2-40B4-BE49-F238E27FC236}">
-                <a16:creationId xmlns:a16="http://schemas.microsoft.com/office/drawing/2014/main" id="{7D3FD94C-A399-4F84-AD4F-13950FBDBEDA}"/>
+                <a16:creationId xmlns:a16="http://schemas.microsoft.com/office/drawing/2014/main" id="{42F900CD-7F2D-4066-B2C6-2F36CCDEEEAF}"/>
               </a:ext>
             </a:extLst>
           </p:cNvPr>
@@ -6997,7 +7333,7 @@
           <p:cNvPr id="3" name="command">
             <a:extLst xmlns:a="http://schemas.openxmlformats.org/drawingml/2006/main">
               <a:ext uri="{FF2B5EF4-FFF2-40B4-BE49-F238E27FC236}">
-                <a16:creationId xmlns:a16="http://schemas.microsoft.com/office/drawing/2014/main" id="{CFA23668-6105-4A42-BE73-C717DA7C3B9F}"/>
+                <a16:creationId xmlns:a16="http://schemas.microsoft.com/office/drawing/2014/main" id="{231C5424-0F2B-4BAF-AFFE-27A41321DA20}"/>
               </a:ext>
             </a:extLst>
           </p:cNvPr>
@@ -7048,7 +7384,7 @@
           <p:cNvPr id="4" name="command-help">
             <a:extLst xmlns:a="http://schemas.openxmlformats.org/drawingml/2006/main">
               <a:ext uri="{FF2B5EF4-FFF2-40B4-BE49-F238E27FC236}">
-                <a16:creationId xmlns:a16="http://schemas.microsoft.com/office/drawing/2014/main" id="{A579EB31-D815-4426-8040-2A0783E9DE66}"/>
+                <a16:creationId xmlns:a16="http://schemas.microsoft.com/office/drawing/2014/main" id="{F8E5095A-E989-44A9-9507-F9F55B07572B}"/>
               </a:ext>
             </a:extLst>
           </p:cNvPr>
@@ -7099,7 +7435,7 @@
           <p:cNvPr id="5" name="eyebrow">
             <a:extLst xmlns:a="http://schemas.openxmlformats.org/drawingml/2006/main">
               <a:ext uri="{FF2B5EF4-FFF2-40B4-BE49-F238E27FC236}">
-                <a16:creationId xmlns:a16="http://schemas.microsoft.com/office/drawing/2014/main" id="{EFAB619B-50BE-45D8-8AFE-B877E3AFC36D}"/>
+                <a16:creationId xmlns:a16="http://schemas.microsoft.com/office/drawing/2014/main" id="{AEE970B2-2BB5-475D-9216-B1F2177A1825}"/>
               </a:ext>
             </a:extLst>
           </p:cNvPr>
@@ -7147,10 +7483,69 @@
       </p:sp>
       <p:sp>
         <p:nvSpPr>
-          <p:cNvPr id="6" name="footer-rule">
-            <a:extLst xmlns:a="http://schemas.openxmlformats.org/drawingml/2006/main">
-              <a:ext uri="{FF2B5EF4-FFF2-40B4-BE49-F238E27FC236}">
-                <a16:creationId xmlns:a16="http://schemas.microsoft.com/office/drawing/2014/main" id="{29B90E55-8C17-47F4-8F07-B8CD428281A6}"/>
+          <p:cNvPr id="6" name="rescue-point-logo-background">
+            <a:extLst xmlns:a="http://schemas.openxmlformats.org/drawingml/2006/main">
+              <a:ext uri="{FF2B5EF4-FFF2-40B4-BE49-F238E27FC236}">
+                <a16:creationId xmlns:a16="http://schemas.microsoft.com/office/drawing/2014/main" id="{3C1DD1D5-2C1E-4E9F-9470-9C47451E43EB}"/>
+              </a:ext>
+            </a:extLst>
+          </p:cNvPr>
+          <p:cNvSpPr>
+            <a:spLocks xmlns:a="http://schemas.openxmlformats.org/drawingml/2006/main" noGrp="1"/>
+          </p:cNvSpPr>
+          <p:nvPr/>
+        </p:nvSpPr>
+        <p:spPr>
+          <a:xfrm xmlns:a="http://schemas.openxmlformats.org/drawingml/2006/main">
+            <a:off x="9772650" y="133350"/>
+            <a:ext cx="1733550" cy="457200"/>
+          </a:xfrm>
+          <a:prstGeom xmlns:a="http://schemas.openxmlformats.org/drawingml/2006/main" prst="roundRect">
+            <a:avLst>
+              <a:gd name="adj" fmla="val 16667"/>
+            </a:avLst>
+          </a:prstGeom>
+          <a:solidFill xmlns:a="http://schemas.openxmlformats.org/drawingml/2006/main">
+            <a:srgbClr val="06142E"/>
+          </a:solidFill>
+          <a:ln xmlns:a="http://schemas.openxmlformats.org/drawingml/2006/main" w="9525">
+            <a:solidFill>
+              <a:srgbClr val="1EC5FF">
+                <a:alpha val="33333"/>
+              </a:srgbClr>
+            </a:solidFill>
+            <a:prstDash val="solid"/>
+          </a:ln>
+        </p:spPr>
+      </p:sp>
+      <p:pic>
+        <p:nvPicPr>
+          <p:cNvPr id="19" name="" descr="Figura oficial da documentação dbt usada para explicar: Demonstração — execute — python course.py checkpoint 05."/>
+          <p:cNvPicPr>
+            <a:picLocks xmlns:a="http://schemas.openxmlformats.org/drawingml/2006/main" noChangeAspect="1"/>
+          </p:cNvPicPr>
+          <p:nvPr/>
+        </p:nvPicPr>
+        <p:blipFill>
+          <a:blip xmlns:r="http://schemas.openxmlformats.org/officeDocument/2006/relationships" xmlns:a="http://schemas.openxmlformats.org/drawingml/2006/main" r:embed="R0e65136a70fb4ce3"/>
+          <a:stretch xmlns:a="http://schemas.openxmlformats.org/drawingml/2006/main"/>
+        </p:blipFill>
+        <p:spPr>
+          <a:xfrm xmlns:a="http://schemas.openxmlformats.org/drawingml/2006/main">
+            <a:off x="9893718" y="209550"/>
+            <a:ext cx="1491414" cy="323850"/>
+          </a:xfrm>
+          <a:prstGeom xmlns:a="http://schemas.openxmlformats.org/drawingml/2006/main" prst="rect">
+            <a:avLst/>
+          </a:prstGeom>
+        </p:spPr>
+      </p:pic>
+      <p:sp>
+        <p:nvSpPr>
+          <p:cNvPr id="8" name="footer-rule">
+            <a:extLst xmlns:a="http://schemas.openxmlformats.org/drawingml/2006/main">
+              <a:ext uri="{FF2B5EF4-FFF2-40B4-BE49-F238E27FC236}">
+                <a16:creationId xmlns:a16="http://schemas.microsoft.com/office/drawing/2014/main" id="{281B5966-3A2D-4775-8A95-51FDE285597B}"/>
               </a:ext>
             </a:extLst>
           </p:cNvPr>
@@ -7180,10 +7575,10 @@
       </p:sp>
       <p:sp>
         <p:nvSpPr>
-          <p:cNvPr id="7" name="footer">
-            <a:extLst xmlns:a="http://schemas.openxmlformats.org/drawingml/2006/main">
-              <a:ext uri="{FF2B5EF4-FFF2-40B4-BE49-F238E27FC236}">
-                <a16:creationId xmlns:a16="http://schemas.microsoft.com/office/drawing/2014/main" id="{36310E16-0A55-483F-9C53-B6C1E4B11CD8}"/>
+          <p:cNvPr id="9" name="footer">
+            <a:extLst xmlns:a="http://schemas.openxmlformats.org/drawingml/2006/main">
+              <a:ext uri="{FF2B5EF4-FFF2-40B4-BE49-F238E27FC236}">
+                <a16:creationId xmlns:a16="http://schemas.microsoft.com/office/drawing/2014/main" id="{D25386D0-2D5E-43C5-9971-706F7B440ABF}"/>
               </a:ext>
             </a:extLst>
           </p:cNvPr>
@@ -7235,10 +7630,10 @@
       </p:sp>
       <p:sp>
         <p:nvSpPr>
-          <p:cNvPr id="8" name="page-number">
-            <a:extLst xmlns:a="http://schemas.openxmlformats.org/drawingml/2006/main">
-              <a:ext uri="{FF2B5EF4-FFF2-40B4-BE49-F238E27FC236}">
-                <a16:creationId xmlns:a16="http://schemas.microsoft.com/office/drawing/2014/main" id="{98F32944-FA47-4A29-BBF1-BFB4050D6608}"/>
+          <p:cNvPr id="10" name="page-number">
+            <a:extLst xmlns:a="http://schemas.openxmlformats.org/drawingml/2006/main">
+              <a:ext uri="{FF2B5EF4-FFF2-40B4-BE49-F238E27FC236}">
+                <a16:creationId xmlns:a16="http://schemas.microsoft.com/office/drawing/2014/main" id="{60C7CE80-D855-407D-A3CF-BB9F02F6CD61}"/>
               </a:ext>
             </a:extLst>
           </p:cNvPr>
@@ -7291,7 +7686,7 @@
     </p:spTree>
     <p:extLst>
       <p:ext uri="{BB962C8B-B14F-4D97-AF65-F5344CB8AC3E}">
-        <p14:creationId xmlns:p14="http://schemas.microsoft.com/office/powerpoint/2010/main" val="333192737"/>
+        <p14:creationId xmlns:p14="http://schemas.microsoft.com/office/powerpoint/2010/main" val="52778369"/>
       </p:ext>
     </p:extLst>
   </p:cSld>
@@ -7319,10 +7714,10 @@
       </p:grpSpPr>
       <p:sp>
         <p:nvSpPr>
-          <p:cNvPr id="14" name="slide-title">
-            <a:extLst xmlns:a="http://schemas.openxmlformats.org/drawingml/2006/main">
-              <a:ext uri="{FF2B5EF4-FFF2-40B4-BE49-F238E27FC236}">
-                <a16:creationId xmlns:a16="http://schemas.microsoft.com/office/drawing/2014/main" id="{87482193-074B-4E48-BE78-D69D7701F40C}"/>
+          <p:cNvPr id="16" name="slide-title">
+            <a:extLst xmlns:a="http://schemas.openxmlformats.org/drawingml/2006/main">
+              <a:ext uri="{FF2B5EF4-FFF2-40B4-BE49-F238E27FC236}">
+                <a16:creationId xmlns:a16="http://schemas.microsoft.com/office/drawing/2014/main" id="{C304BF86-481F-4148-BD6F-3B09324F1677}"/>
               </a:ext>
             </a:extLst>
           </p:cNvPr>
@@ -7373,7 +7768,7 @@
           <p:cNvPr id="2" name="step-num-1">
             <a:extLst xmlns:a="http://schemas.openxmlformats.org/drawingml/2006/main">
               <a:ext uri="{FF2B5EF4-FFF2-40B4-BE49-F238E27FC236}">
-                <a16:creationId xmlns:a16="http://schemas.microsoft.com/office/drawing/2014/main" id="{DE4347BF-38EA-4F3E-A6E5-F78DF3C79D23}"/>
+                <a16:creationId xmlns:a16="http://schemas.microsoft.com/office/drawing/2014/main" id="{B456D513-856B-4FDE-8823-9329E8B27943}"/>
               </a:ext>
             </a:extLst>
           </p:cNvPr>
@@ -7424,7 +7819,7 @@
           <p:cNvPr id="3" name="step-label-1">
             <a:extLst xmlns:a="http://schemas.openxmlformats.org/drawingml/2006/main">
               <a:ext uri="{FF2B5EF4-FFF2-40B4-BE49-F238E27FC236}">
-                <a16:creationId xmlns:a16="http://schemas.microsoft.com/office/drawing/2014/main" id="{B9B37E7B-5550-41C2-BC04-63F190F3F617}"/>
+                <a16:creationId xmlns:a16="http://schemas.microsoft.com/office/drawing/2014/main" id="{0257A440-535E-47C6-A801-A7E5AFF5C97A}"/>
               </a:ext>
             </a:extLst>
           </p:cNvPr>
@@ -7475,7 +7870,7 @@
           <p:cNvPr id="4" name="step-line-1">
             <a:extLst xmlns:a="http://schemas.openxmlformats.org/drawingml/2006/main">
               <a:ext uri="{FF2B5EF4-FFF2-40B4-BE49-F238E27FC236}">
-                <a16:creationId xmlns:a16="http://schemas.microsoft.com/office/drawing/2014/main" id="{E25EF49E-C198-49EB-90BE-8A8950DF668A}"/>
+                <a16:creationId xmlns:a16="http://schemas.microsoft.com/office/drawing/2014/main" id="{4F48ED04-04B8-4D6E-97FF-9E168A752D03}"/>
               </a:ext>
             </a:extLst>
           </p:cNvPr>
@@ -7506,7 +7901,7 @@
           <p:cNvPr id="5" name="step-num-2">
             <a:extLst xmlns:a="http://schemas.openxmlformats.org/drawingml/2006/main">
               <a:ext uri="{FF2B5EF4-FFF2-40B4-BE49-F238E27FC236}">
-                <a16:creationId xmlns:a16="http://schemas.microsoft.com/office/drawing/2014/main" id="{5B68AE1F-2C8D-4CCA-87E8-CC53D773F480}"/>
+                <a16:creationId xmlns:a16="http://schemas.microsoft.com/office/drawing/2014/main" id="{7FE8FD05-703E-47BE-9EBA-2C3851517E06}"/>
               </a:ext>
             </a:extLst>
           </p:cNvPr>
@@ -7557,7 +7952,7 @@
           <p:cNvPr id="6" name="step-label-2">
             <a:extLst xmlns:a="http://schemas.openxmlformats.org/drawingml/2006/main">
               <a:ext uri="{FF2B5EF4-FFF2-40B4-BE49-F238E27FC236}">
-                <a16:creationId xmlns:a16="http://schemas.microsoft.com/office/drawing/2014/main" id="{AC290B61-AB4C-425E-A54F-5DC9D7F8DBC5}"/>
+                <a16:creationId xmlns:a16="http://schemas.microsoft.com/office/drawing/2014/main" id="{22B9E01A-28CB-45D1-814D-3970B4236BF0}"/>
               </a:ext>
             </a:extLst>
           </p:cNvPr>
@@ -7608,7 +8003,7 @@
           <p:cNvPr id="7" name="step-line-2">
             <a:extLst xmlns:a="http://schemas.openxmlformats.org/drawingml/2006/main">
               <a:ext uri="{FF2B5EF4-FFF2-40B4-BE49-F238E27FC236}">
-                <a16:creationId xmlns:a16="http://schemas.microsoft.com/office/drawing/2014/main" id="{079001EE-C868-4B60-BB0F-E6C32EDF69CB}"/>
+                <a16:creationId xmlns:a16="http://schemas.microsoft.com/office/drawing/2014/main" id="{757C7047-DEFD-4A3D-B799-93243B7C3560}"/>
               </a:ext>
             </a:extLst>
           </p:cNvPr>
@@ -7639,7 +8034,7 @@
           <p:cNvPr id="8" name="step-num-3">
             <a:extLst xmlns:a="http://schemas.openxmlformats.org/drawingml/2006/main">
               <a:ext uri="{FF2B5EF4-FFF2-40B4-BE49-F238E27FC236}">
-                <a16:creationId xmlns:a16="http://schemas.microsoft.com/office/drawing/2014/main" id="{748957CF-0A02-484D-9925-DF5C6D83451A}"/>
+                <a16:creationId xmlns:a16="http://schemas.microsoft.com/office/drawing/2014/main" id="{EA33E68D-8919-49DB-8ED9-D34CE18C9317}"/>
               </a:ext>
             </a:extLst>
           </p:cNvPr>
@@ -7690,7 +8085,7 @@
           <p:cNvPr id="9" name="step-label-3">
             <a:extLst xmlns:a="http://schemas.openxmlformats.org/drawingml/2006/main">
               <a:ext uri="{FF2B5EF4-FFF2-40B4-BE49-F238E27FC236}">
-                <a16:creationId xmlns:a16="http://schemas.microsoft.com/office/drawing/2014/main" id="{E98E3474-EC36-4464-9FBE-15026E56080F}"/>
+                <a16:creationId xmlns:a16="http://schemas.microsoft.com/office/drawing/2014/main" id="{791609A1-E711-4D12-9369-10B975E4B018}"/>
               </a:ext>
             </a:extLst>
           </p:cNvPr>
@@ -7741,7 +8136,7 @@
           <p:cNvPr id="10" name="eyebrow">
             <a:extLst xmlns:a="http://schemas.openxmlformats.org/drawingml/2006/main">
               <a:ext uri="{FF2B5EF4-FFF2-40B4-BE49-F238E27FC236}">
-                <a16:creationId xmlns:a16="http://schemas.microsoft.com/office/drawing/2014/main" id="{956D2060-6EFB-47DE-B4A9-19470A6955C7}"/>
+                <a16:creationId xmlns:a16="http://schemas.microsoft.com/office/drawing/2014/main" id="{9E0760AF-F10E-4A9D-8BD8-F52E8127D6A1}"/>
               </a:ext>
             </a:extLst>
           </p:cNvPr>
@@ -7789,10 +8184,69 @@
       </p:sp>
       <p:sp>
         <p:nvSpPr>
-          <p:cNvPr id="11" name="footer-rule">
-            <a:extLst xmlns:a="http://schemas.openxmlformats.org/drawingml/2006/main">
-              <a:ext uri="{FF2B5EF4-FFF2-40B4-BE49-F238E27FC236}">
-                <a16:creationId xmlns:a16="http://schemas.microsoft.com/office/drawing/2014/main" id="{419F1322-87B9-4E52-B94D-11EC0CC6BBE6}"/>
+          <p:cNvPr id="11" name="rescue-point-logo-background">
+            <a:extLst xmlns:a="http://schemas.openxmlformats.org/drawingml/2006/main">
+              <a:ext uri="{FF2B5EF4-FFF2-40B4-BE49-F238E27FC236}">
+                <a16:creationId xmlns:a16="http://schemas.microsoft.com/office/drawing/2014/main" id="{166EB5D9-F77F-48C3-99F3-4219FB71BCE0}"/>
+              </a:ext>
+            </a:extLst>
+          </p:cNvPr>
+          <p:cNvSpPr>
+            <a:spLocks xmlns:a="http://schemas.openxmlformats.org/drawingml/2006/main" noGrp="1"/>
+          </p:cNvSpPr>
+          <p:nvPr/>
+        </p:nvSpPr>
+        <p:spPr>
+          <a:xfrm xmlns:a="http://schemas.openxmlformats.org/drawingml/2006/main">
+            <a:off x="9772650" y="133350"/>
+            <a:ext cx="1733550" cy="457200"/>
+          </a:xfrm>
+          <a:prstGeom xmlns:a="http://schemas.openxmlformats.org/drawingml/2006/main" prst="roundRect">
+            <a:avLst>
+              <a:gd name="adj" fmla="val 16667"/>
+            </a:avLst>
+          </a:prstGeom>
+          <a:solidFill xmlns:a="http://schemas.openxmlformats.org/drawingml/2006/main">
+            <a:srgbClr val="06142E"/>
+          </a:solidFill>
+          <a:ln xmlns:a="http://schemas.openxmlformats.org/drawingml/2006/main" w="9525">
+            <a:solidFill>
+              <a:srgbClr val="1EC5FF">
+                <a:alpha val="33333"/>
+              </a:srgbClr>
+            </a:solidFill>
+            <a:prstDash val="solid"/>
+          </a:ln>
+        </p:spPr>
+      </p:sp>
+      <p:pic>
+        <p:nvPicPr>
+          <p:cNvPr id="29" name="" descr="Figura oficial da documentação dbt usada para explicar: Demonstração — observe — 01."/>
+          <p:cNvPicPr>
+            <a:picLocks xmlns:a="http://schemas.openxmlformats.org/drawingml/2006/main" noChangeAspect="1"/>
+          </p:cNvPicPr>
+          <p:nvPr/>
+        </p:nvPicPr>
+        <p:blipFill>
+          <a:blip xmlns:r="http://schemas.openxmlformats.org/officeDocument/2006/relationships" xmlns:a="http://schemas.openxmlformats.org/drawingml/2006/main" r:embed="R0cefaec8c32943b6"/>
+          <a:stretch xmlns:a="http://schemas.openxmlformats.org/drawingml/2006/main"/>
+        </p:blipFill>
+        <p:spPr>
+          <a:xfrm xmlns:a="http://schemas.openxmlformats.org/drawingml/2006/main">
+            <a:off x="9893718" y="209550"/>
+            <a:ext cx="1491414" cy="323850"/>
+          </a:xfrm>
+          <a:prstGeom xmlns:a="http://schemas.openxmlformats.org/drawingml/2006/main" prst="rect">
+            <a:avLst/>
+          </a:prstGeom>
+        </p:spPr>
+      </p:pic>
+      <p:sp>
+        <p:nvSpPr>
+          <p:cNvPr id="13" name="footer-rule">
+            <a:extLst xmlns:a="http://schemas.openxmlformats.org/drawingml/2006/main">
+              <a:ext uri="{FF2B5EF4-FFF2-40B4-BE49-F238E27FC236}">
+                <a16:creationId xmlns:a16="http://schemas.microsoft.com/office/drawing/2014/main" id="{0E29A30C-002C-4B6A-9BF6-55E666934633}"/>
               </a:ext>
             </a:extLst>
           </p:cNvPr>
@@ -7822,10 +8276,10 @@
       </p:sp>
       <p:sp>
         <p:nvSpPr>
-          <p:cNvPr id="12" name="footer">
-            <a:extLst xmlns:a="http://schemas.openxmlformats.org/drawingml/2006/main">
-              <a:ext uri="{FF2B5EF4-FFF2-40B4-BE49-F238E27FC236}">
-                <a16:creationId xmlns:a16="http://schemas.microsoft.com/office/drawing/2014/main" id="{820AA29E-6359-4A2B-A8C5-4C9AB97F080E}"/>
+          <p:cNvPr id="14" name="footer">
+            <a:extLst xmlns:a="http://schemas.openxmlformats.org/drawingml/2006/main">
+              <a:ext uri="{FF2B5EF4-FFF2-40B4-BE49-F238E27FC236}">
+                <a16:creationId xmlns:a16="http://schemas.microsoft.com/office/drawing/2014/main" id="{8DE28DD9-3C45-4E15-9413-65516F1CDB60}"/>
               </a:ext>
             </a:extLst>
           </p:cNvPr>
@@ -7877,10 +8331,10 @@
       </p:sp>
       <p:sp>
         <p:nvSpPr>
-          <p:cNvPr id="13" name="page-number">
-            <a:extLst xmlns:a="http://schemas.openxmlformats.org/drawingml/2006/main">
-              <a:ext uri="{FF2B5EF4-FFF2-40B4-BE49-F238E27FC236}">
-                <a16:creationId xmlns:a16="http://schemas.microsoft.com/office/drawing/2014/main" id="{9669955E-8599-4227-AFA4-192D8FD5D25C}"/>
+          <p:cNvPr id="15" name="page-number">
+            <a:extLst xmlns:a="http://schemas.openxmlformats.org/drawingml/2006/main">
+              <a:ext uri="{FF2B5EF4-FFF2-40B4-BE49-F238E27FC236}">
+                <a16:creationId xmlns:a16="http://schemas.microsoft.com/office/drawing/2014/main" id="{D4A98061-C60E-4FA4-AAC5-0F5CB0B696D2}"/>
               </a:ext>
             </a:extLst>
           </p:cNvPr>
@@ -7933,7 +8387,7 @@
     </p:spTree>
     <p:extLst>
       <p:ext uri="{BB962C8B-B14F-4D97-AF65-F5344CB8AC3E}">
-        <p14:creationId xmlns:p14="http://schemas.microsoft.com/office/powerpoint/2010/main" val="566589313"/>
+        <p14:creationId xmlns:p14="http://schemas.microsoft.com/office/powerpoint/2010/main" val="1955877177"/>
       </p:ext>
     </p:extLst>
   </p:cSld>
@@ -7969,10 +8423,10 @@
       </p:grpSpPr>
       <p:sp>
         <p:nvSpPr>
-          <p:cNvPr id="10" name="result-label">
-            <a:extLst xmlns:a="http://schemas.openxmlformats.org/drawingml/2006/main">
-              <a:ext uri="{FF2B5EF4-FFF2-40B4-BE49-F238E27FC236}">
-                <a16:creationId xmlns:a16="http://schemas.microsoft.com/office/drawing/2014/main" id="{F48E09D8-70BB-4AB2-8C59-5DAFAB5DB6FD}"/>
+          <p:cNvPr id="12" name="result-label">
+            <a:extLst xmlns:a="http://schemas.openxmlformats.org/drawingml/2006/main">
+              <a:ext uri="{FF2B5EF4-FFF2-40B4-BE49-F238E27FC236}">
+                <a16:creationId xmlns:a16="http://schemas.microsoft.com/office/drawing/2014/main" id="{A8FE9588-014E-4434-BB81-FD6577AB13F8}"/>
               </a:ext>
             </a:extLst>
           </p:cNvPr>
@@ -8023,7 +8477,7 @@
           <p:cNvPr id="2" name="result">
             <a:extLst xmlns:a="http://schemas.openxmlformats.org/drawingml/2006/main">
               <a:ext uri="{FF2B5EF4-FFF2-40B4-BE49-F238E27FC236}">
-                <a16:creationId xmlns:a16="http://schemas.microsoft.com/office/drawing/2014/main" id="{FDCD5EC6-A1D4-44E1-90D0-DB7BA38B86F6}"/>
+                <a16:creationId xmlns:a16="http://schemas.microsoft.com/office/drawing/2014/main" id="{8B1EC2DD-43DA-44E7-B091-49899BB31167}"/>
               </a:ext>
             </a:extLst>
           </p:cNvPr>
@@ -8074,7 +8528,7 @@
           <p:cNvPr id="3" name="result-meta">
             <a:extLst xmlns:a="http://schemas.openxmlformats.org/drawingml/2006/main">
               <a:ext uri="{FF2B5EF4-FFF2-40B4-BE49-F238E27FC236}">
-                <a16:creationId xmlns:a16="http://schemas.microsoft.com/office/drawing/2014/main" id="{4CE869BA-BA21-4C25-8CBD-C5B63310E7A1}"/>
+                <a16:creationId xmlns:a16="http://schemas.microsoft.com/office/drawing/2014/main" id="{693C7DDF-B57E-4AF9-A3BD-685169AED7A8}"/>
               </a:ext>
             </a:extLst>
           </p:cNvPr>
@@ -8125,7 +8579,7 @@
           <p:cNvPr id="4" name="ambient-glow">
             <a:extLst xmlns:a="http://schemas.openxmlformats.org/drawingml/2006/main">
               <a:ext uri="{FF2B5EF4-FFF2-40B4-BE49-F238E27FC236}">
-                <a16:creationId xmlns:a16="http://schemas.microsoft.com/office/drawing/2014/main" id="{C20D459B-1E10-423F-B575-4A97B9B141AD}"/>
+                <a16:creationId xmlns:a16="http://schemas.microsoft.com/office/drawing/2014/main" id="{A7E3D1E3-560F-4F33-8D56-1979FF952260}"/>
               </a:ext>
             </a:extLst>
           </p:cNvPr>
@@ -8162,7 +8616,7 @@
           <p:cNvPr id="5" name="ambient-core">
             <a:extLst xmlns:a="http://schemas.openxmlformats.org/drawingml/2006/main">
               <a:ext uri="{FF2B5EF4-FFF2-40B4-BE49-F238E27FC236}">
-                <a16:creationId xmlns:a16="http://schemas.microsoft.com/office/drawing/2014/main" id="{9A5A0009-2E21-4A6C-80BB-073EF1AB16CE}"/>
+                <a16:creationId xmlns:a16="http://schemas.microsoft.com/office/drawing/2014/main" id="{26BD87C7-1D1E-407D-9867-B02F058D30D6}"/>
               </a:ext>
             </a:extLst>
           </p:cNvPr>
@@ -8199,7 +8653,7 @@
           <p:cNvPr id="6" name="eyebrow">
             <a:extLst xmlns:a="http://schemas.openxmlformats.org/drawingml/2006/main">
               <a:ext uri="{FF2B5EF4-FFF2-40B4-BE49-F238E27FC236}">
-                <a16:creationId xmlns:a16="http://schemas.microsoft.com/office/drawing/2014/main" id="{D8155272-D95A-4FF3-B67A-8FFBE56164A6}"/>
+                <a16:creationId xmlns:a16="http://schemas.microsoft.com/office/drawing/2014/main" id="{FDC7CE86-A128-4357-873C-C771AC6E89DF}"/>
               </a:ext>
             </a:extLst>
           </p:cNvPr>
@@ -8247,10 +8701,69 @@
       </p:sp>
       <p:sp>
         <p:nvSpPr>
-          <p:cNvPr id="7" name="footer-rule">
-            <a:extLst xmlns:a="http://schemas.openxmlformats.org/drawingml/2006/main">
-              <a:ext uri="{FF2B5EF4-FFF2-40B4-BE49-F238E27FC236}">
-                <a16:creationId xmlns:a16="http://schemas.microsoft.com/office/drawing/2014/main" id="{2206BAA3-24C6-45BA-845C-479EE80E2431}"/>
+          <p:cNvPr id="7" name="rescue-point-logo-background">
+            <a:extLst xmlns:a="http://schemas.openxmlformats.org/drawingml/2006/main">
+              <a:ext uri="{FF2B5EF4-FFF2-40B4-BE49-F238E27FC236}">
+                <a16:creationId xmlns:a16="http://schemas.microsoft.com/office/drawing/2014/main" id="{F1492561-AA16-4191-A7D8-EA0EBCA42C50}"/>
+              </a:ext>
+            </a:extLst>
+          </p:cNvPr>
+          <p:cNvSpPr>
+            <a:spLocks xmlns:a="http://schemas.openxmlformats.org/drawingml/2006/main" noGrp="1"/>
+          </p:cNvSpPr>
+          <p:nvPr/>
+        </p:nvSpPr>
+        <p:spPr>
+          <a:xfrm xmlns:a="http://schemas.openxmlformats.org/drawingml/2006/main">
+            <a:off x="9772650" y="133350"/>
+            <a:ext cx="1733550" cy="457200"/>
+          </a:xfrm>
+          <a:prstGeom xmlns:a="http://schemas.openxmlformats.org/drawingml/2006/main" prst="roundRect">
+            <a:avLst>
+              <a:gd name="adj" fmla="val 16667"/>
+            </a:avLst>
+          </a:prstGeom>
+          <a:solidFill xmlns:a="http://schemas.openxmlformats.org/drawingml/2006/main">
+            <a:srgbClr val="06142E"/>
+          </a:solidFill>
+          <a:ln xmlns:a="http://schemas.openxmlformats.org/drawingml/2006/main" w="9525">
+            <a:solidFill>
+              <a:srgbClr val="1EC5FF">
+                <a:alpha val="33333"/>
+              </a:srgbClr>
+            </a:solidFill>
+            <a:prstDash val="solid"/>
+          </a:ln>
+        </p:spPr>
+      </p:sp>
+      <p:pic>
+        <p:nvPicPr>
+          <p:cNvPr id="21" name="" descr="Figura oficial da documentação dbt usada para explicar: RESULTADO ESPERADO — Breaking change bloqueada."/>
+          <p:cNvPicPr>
+            <a:picLocks xmlns:a="http://schemas.openxmlformats.org/drawingml/2006/main" noChangeAspect="1"/>
+          </p:cNvPicPr>
+          <p:nvPr/>
+        </p:nvPicPr>
+        <p:blipFill>
+          <a:blip xmlns:r="http://schemas.openxmlformats.org/officeDocument/2006/relationships" xmlns:a="http://schemas.openxmlformats.org/drawingml/2006/main" r:embed="Rfb11737b4d674c98"/>
+          <a:stretch xmlns:a="http://schemas.openxmlformats.org/drawingml/2006/main"/>
+        </p:blipFill>
+        <p:spPr>
+          <a:xfrm xmlns:a="http://schemas.openxmlformats.org/drawingml/2006/main">
+            <a:off x="9893718" y="209550"/>
+            <a:ext cx="1491414" cy="323850"/>
+          </a:xfrm>
+          <a:prstGeom xmlns:a="http://schemas.openxmlformats.org/drawingml/2006/main" prst="rect">
+            <a:avLst/>
+          </a:prstGeom>
+        </p:spPr>
+      </p:pic>
+      <p:sp>
+        <p:nvSpPr>
+          <p:cNvPr id="9" name="footer-rule">
+            <a:extLst xmlns:a="http://schemas.openxmlformats.org/drawingml/2006/main">
+              <a:ext uri="{FF2B5EF4-FFF2-40B4-BE49-F238E27FC236}">
+                <a16:creationId xmlns:a16="http://schemas.microsoft.com/office/drawing/2014/main" id="{04F64311-3C58-4699-BE59-FA3763CF542C}"/>
               </a:ext>
             </a:extLst>
           </p:cNvPr>
@@ -8280,10 +8793,10 @@
       </p:sp>
       <p:sp>
         <p:nvSpPr>
-          <p:cNvPr id="8" name="footer">
-            <a:extLst xmlns:a="http://schemas.openxmlformats.org/drawingml/2006/main">
-              <a:ext uri="{FF2B5EF4-FFF2-40B4-BE49-F238E27FC236}">
-                <a16:creationId xmlns:a16="http://schemas.microsoft.com/office/drawing/2014/main" id="{26138AD9-634C-4282-8485-580A248E4E75}"/>
+          <p:cNvPr id="10" name="footer">
+            <a:extLst xmlns:a="http://schemas.openxmlformats.org/drawingml/2006/main">
+              <a:ext uri="{FF2B5EF4-FFF2-40B4-BE49-F238E27FC236}">
+                <a16:creationId xmlns:a16="http://schemas.microsoft.com/office/drawing/2014/main" id="{37E81EAE-9FB4-4A7D-898C-B12AB4948977}"/>
               </a:ext>
             </a:extLst>
           </p:cNvPr>
@@ -8335,10 +8848,10 @@
       </p:sp>
       <p:sp>
         <p:nvSpPr>
-          <p:cNvPr id="9" name="page-number">
-            <a:extLst xmlns:a="http://schemas.openxmlformats.org/drawingml/2006/main">
-              <a:ext uri="{FF2B5EF4-FFF2-40B4-BE49-F238E27FC236}">
-                <a16:creationId xmlns:a16="http://schemas.microsoft.com/office/drawing/2014/main" id="{82DF1E62-CCBB-48AC-B492-D689296B3D24}"/>
+          <p:cNvPr id="11" name="page-number">
+            <a:extLst xmlns:a="http://schemas.openxmlformats.org/drawingml/2006/main">
+              <a:ext uri="{FF2B5EF4-FFF2-40B4-BE49-F238E27FC236}">
+                <a16:creationId xmlns:a16="http://schemas.microsoft.com/office/drawing/2014/main" id="{893B8C9A-A0D8-48F3-87A8-C1538BAB9FE6}"/>
               </a:ext>
             </a:extLst>
           </p:cNvPr>
@@ -8391,7 +8904,7 @@
     </p:spTree>
     <p:extLst>
       <p:ext uri="{BB962C8B-B14F-4D97-AF65-F5344CB8AC3E}">
-        <p14:creationId xmlns:p14="http://schemas.microsoft.com/office/powerpoint/2010/main" val="905358863"/>
+        <p14:creationId xmlns:p14="http://schemas.microsoft.com/office/powerpoint/2010/main" val="1218336381"/>
       </p:ext>
     </p:extLst>
   </p:cSld>
@@ -8419,10 +8932,10 @@
       </p:grpSpPr>
       <p:sp>
         <p:nvSpPr>
-          <p:cNvPr id="14" name="slide-title">
-            <a:extLst xmlns:a="http://schemas.openxmlformats.org/drawingml/2006/main">
-              <a:ext uri="{FF2B5EF4-FFF2-40B4-BE49-F238E27FC236}">
-                <a16:creationId xmlns:a16="http://schemas.microsoft.com/office/drawing/2014/main" id="{99FEAC43-0794-470B-9BE9-3206B68D0CEC}"/>
+          <p:cNvPr id="16" name="slide-title">
+            <a:extLst xmlns:a="http://schemas.openxmlformats.org/drawingml/2006/main">
+              <a:ext uri="{FF2B5EF4-FFF2-40B4-BE49-F238E27FC236}">
+                <a16:creationId xmlns:a16="http://schemas.microsoft.com/office/drawing/2014/main" id="{606DFB46-74FC-40CB-BECA-62EB3DE04E86}"/>
               </a:ext>
             </a:extLst>
           </p:cNvPr>
@@ -8473,7 +8986,7 @@
           <p:cNvPr id="2" name="step-num-1">
             <a:extLst xmlns:a="http://schemas.openxmlformats.org/drawingml/2006/main">
               <a:ext uri="{FF2B5EF4-FFF2-40B4-BE49-F238E27FC236}">
-                <a16:creationId xmlns:a16="http://schemas.microsoft.com/office/drawing/2014/main" id="{21EB55A3-28D0-42B5-B15B-7CAB31343F45}"/>
+                <a16:creationId xmlns:a16="http://schemas.microsoft.com/office/drawing/2014/main" id="{413837D4-E9BC-4067-AA54-A3F7CD8B3637}"/>
               </a:ext>
             </a:extLst>
           </p:cNvPr>
@@ -8524,7 +9037,7 @@
           <p:cNvPr id="3" name="step-label-1">
             <a:extLst xmlns:a="http://schemas.openxmlformats.org/drawingml/2006/main">
               <a:ext uri="{FF2B5EF4-FFF2-40B4-BE49-F238E27FC236}">
-                <a16:creationId xmlns:a16="http://schemas.microsoft.com/office/drawing/2014/main" id="{2993F0A0-B599-4D57-ACD1-39A097970106}"/>
+                <a16:creationId xmlns:a16="http://schemas.microsoft.com/office/drawing/2014/main" id="{6936A3B1-738A-40BB-9806-C46724620B1B}"/>
               </a:ext>
             </a:extLst>
           </p:cNvPr>
@@ -8575,7 +9088,7 @@
           <p:cNvPr id="4" name="step-line-1">
             <a:extLst xmlns:a="http://schemas.openxmlformats.org/drawingml/2006/main">
               <a:ext uri="{FF2B5EF4-FFF2-40B4-BE49-F238E27FC236}">
-                <a16:creationId xmlns:a16="http://schemas.microsoft.com/office/drawing/2014/main" id="{411623B0-DE28-4F07-B367-9AD1799BA343}"/>
+                <a16:creationId xmlns:a16="http://schemas.microsoft.com/office/drawing/2014/main" id="{EF5FC217-C058-4B2D-BAFF-D6AB18F87DB1}"/>
               </a:ext>
             </a:extLst>
           </p:cNvPr>
@@ -8606,7 +9119,7 @@
           <p:cNvPr id="5" name="step-num-2">
             <a:extLst xmlns:a="http://schemas.openxmlformats.org/drawingml/2006/main">
               <a:ext uri="{FF2B5EF4-FFF2-40B4-BE49-F238E27FC236}">
-                <a16:creationId xmlns:a16="http://schemas.microsoft.com/office/drawing/2014/main" id="{9BCB9B2C-06B9-4907-976F-4DD4668B60B5}"/>
+                <a16:creationId xmlns:a16="http://schemas.microsoft.com/office/drawing/2014/main" id="{4BEC0C84-96FA-402A-9EB7-EAE5822B6674}"/>
               </a:ext>
             </a:extLst>
           </p:cNvPr>
@@ -8657,7 +9170,7 @@
           <p:cNvPr id="6" name="step-label-2">
             <a:extLst xmlns:a="http://schemas.openxmlformats.org/drawingml/2006/main">
               <a:ext uri="{FF2B5EF4-FFF2-40B4-BE49-F238E27FC236}">
-                <a16:creationId xmlns:a16="http://schemas.microsoft.com/office/drawing/2014/main" id="{540EA6B7-87AB-442F-B920-D669F92D84AE}"/>
+                <a16:creationId xmlns:a16="http://schemas.microsoft.com/office/drawing/2014/main" id="{68A2EF7A-DC73-4C07-9A1D-B1F889A040BF}"/>
               </a:ext>
             </a:extLst>
           </p:cNvPr>
@@ -8708,7 +9221,7 @@
           <p:cNvPr id="7" name="step-line-2">
             <a:extLst xmlns:a="http://schemas.openxmlformats.org/drawingml/2006/main">
               <a:ext uri="{FF2B5EF4-FFF2-40B4-BE49-F238E27FC236}">
-                <a16:creationId xmlns:a16="http://schemas.microsoft.com/office/drawing/2014/main" id="{E9393F6E-ED2F-4807-9F72-4D8CF1659C7C}"/>
+                <a16:creationId xmlns:a16="http://schemas.microsoft.com/office/drawing/2014/main" id="{A9FA57DC-E451-4685-931E-5CA26308D59D}"/>
               </a:ext>
             </a:extLst>
           </p:cNvPr>
@@ -8739,7 +9252,7 @@
           <p:cNvPr id="8" name="step-num-3">
             <a:extLst xmlns:a="http://schemas.openxmlformats.org/drawingml/2006/main">
               <a:ext uri="{FF2B5EF4-FFF2-40B4-BE49-F238E27FC236}">
-                <a16:creationId xmlns:a16="http://schemas.microsoft.com/office/drawing/2014/main" id="{8B6AAE40-9015-482C-AC31-49382C82A1BB}"/>
+                <a16:creationId xmlns:a16="http://schemas.microsoft.com/office/drawing/2014/main" id="{EDBB19F1-5F5B-44C5-B978-23C801F9AB23}"/>
               </a:ext>
             </a:extLst>
           </p:cNvPr>
@@ -8790,7 +9303,7 @@
           <p:cNvPr id="9" name="step-label-3">
             <a:extLst xmlns:a="http://schemas.openxmlformats.org/drawingml/2006/main">
               <a:ext uri="{FF2B5EF4-FFF2-40B4-BE49-F238E27FC236}">
-                <a16:creationId xmlns:a16="http://schemas.microsoft.com/office/drawing/2014/main" id="{76A6B858-812B-49F8-B105-66EBC481CF50}"/>
+                <a16:creationId xmlns:a16="http://schemas.microsoft.com/office/drawing/2014/main" id="{B133E6F1-79F7-45B3-AEBA-878A4D6CFB40}"/>
               </a:ext>
             </a:extLst>
           </p:cNvPr>
@@ -8841,7 +9354,7 @@
           <p:cNvPr id="10" name="eyebrow">
             <a:extLst xmlns:a="http://schemas.openxmlformats.org/drawingml/2006/main">
               <a:ext uri="{FF2B5EF4-FFF2-40B4-BE49-F238E27FC236}">
-                <a16:creationId xmlns:a16="http://schemas.microsoft.com/office/drawing/2014/main" id="{90EDAC50-EFCD-4BA8-9B0E-3C6BC0C1A126}"/>
+                <a16:creationId xmlns:a16="http://schemas.microsoft.com/office/drawing/2014/main" id="{1AEB7C9E-AE0F-46CC-B61F-BCFCDF7ED65D}"/>
               </a:ext>
             </a:extLst>
           </p:cNvPr>
@@ -8889,10 +9402,69 @@
       </p:sp>
       <p:sp>
         <p:nvSpPr>
-          <p:cNvPr id="11" name="footer-rule">
-            <a:extLst xmlns:a="http://schemas.openxmlformats.org/drawingml/2006/main">
-              <a:ext uri="{FF2B5EF4-FFF2-40B4-BE49-F238E27FC236}">
-                <a16:creationId xmlns:a16="http://schemas.microsoft.com/office/drawing/2014/main" id="{F87211B0-AE41-4601-96C3-78BB66419C53}"/>
+          <p:cNvPr id="11" name="rescue-point-logo-background">
+            <a:extLst xmlns:a="http://schemas.openxmlformats.org/drawingml/2006/main">
+              <a:ext uri="{FF2B5EF4-FFF2-40B4-BE49-F238E27FC236}">
+                <a16:creationId xmlns:a16="http://schemas.microsoft.com/office/drawing/2014/main" id="{F6A55BC5-012E-47F7-AEA6-E11D5F577E27}"/>
+              </a:ext>
+            </a:extLst>
+          </p:cNvPr>
+          <p:cNvSpPr>
+            <a:spLocks xmlns:a="http://schemas.openxmlformats.org/drawingml/2006/main" noGrp="1"/>
+          </p:cNvSpPr>
+          <p:nvPr/>
+        </p:nvSpPr>
+        <p:spPr>
+          <a:xfrm xmlns:a="http://schemas.openxmlformats.org/drawingml/2006/main">
+            <a:off x="9772650" y="133350"/>
+            <a:ext cx="1733550" cy="457200"/>
+          </a:xfrm>
+          <a:prstGeom xmlns:a="http://schemas.openxmlformats.org/drawingml/2006/main" prst="roundRect">
+            <a:avLst>
+              <a:gd name="adj" fmla="val 16667"/>
+            </a:avLst>
+          </a:prstGeom>
+          <a:solidFill xmlns:a="http://schemas.openxmlformats.org/drawingml/2006/main">
+            <a:srgbClr val="06142E"/>
+          </a:solidFill>
+          <a:ln xmlns:a="http://schemas.openxmlformats.org/drawingml/2006/main" w="9525">
+            <a:solidFill>
+              <a:srgbClr val="1EC5FF">
+                <a:alpha val="33333"/>
+              </a:srgbClr>
+            </a:solidFill>
+            <a:prstDash val="solid"/>
+          </a:ln>
+        </p:spPr>
+      </p:sp>
+      <p:pic>
+        <p:nvPicPr>
+          <p:cNvPr id="29" name="" descr="Figura oficial da documentação dbt usada para explicar: O mesmo recurso afeta três decisões — 01."/>
+          <p:cNvPicPr>
+            <a:picLocks xmlns:a="http://schemas.openxmlformats.org/drawingml/2006/main" noChangeAspect="1"/>
+          </p:cNvPicPr>
+          <p:nvPr/>
+        </p:nvPicPr>
+        <p:blipFill>
+          <a:blip xmlns:r="http://schemas.openxmlformats.org/officeDocument/2006/relationships" xmlns:a="http://schemas.openxmlformats.org/drawingml/2006/main" r:embed="R81916b1e511942f3"/>
+          <a:stretch xmlns:a="http://schemas.openxmlformats.org/drawingml/2006/main"/>
+        </p:blipFill>
+        <p:spPr>
+          <a:xfrm xmlns:a="http://schemas.openxmlformats.org/drawingml/2006/main">
+            <a:off x="9893718" y="209550"/>
+            <a:ext cx="1491414" cy="323850"/>
+          </a:xfrm>
+          <a:prstGeom xmlns:a="http://schemas.openxmlformats.org/drawingml/2006/main" prst="rect">
+            <a:avLst/>
+          </a:prstGeom>
+        </p:spPr>
+      </p:pic>
+      <p:sp>
+        <p:nvSpPr>
+          <p:cNvPr id="13" name="footer-rule">
+            <a:extLst xmlns:a="http://schemas.openxmlformats.org/drawingml/2006/main">
+              <a:ext uri="{FF2B5EF4-FFF2-40B4-BE49-F238E27FC236}">
+                <a16:creationId xmlns:a16="http://schemas.microsoft.com/office/drawing/2014/main" id="{A1371BBE-8044-4E27-86E1-B8FB74FD4661}"/>
               </a:ext>
             </a:extLst>
           </p:cNvPr>
@@ -8922,10 +9494,10 @@
       </p:sp>
       <p:sp>
         <p:nvSpPr>
-          <p:cNvPr id="12" name="footer">
-            <a:extLst xmlns:a="http://schemas.openxmlformats.org/drawingml/2006/main">
-              <a:ext uri="{FF2B5EF4-FFF2-40B4-BE49-F238E27FC236}">
-                <a16:creationId xmlns:a16="http://schemas.microsoft.com/office/drawing/2014/main" id="{10C97B08-02AB-46CD-B270-809655CF6C0E}"/>
+          <p:cNvPr id="14" name="footer">
+            <a:extLst xmlns:a="http://schemas.openxmlformats.org/drawingml/2006/main">
+              <a:ext uri="{FF2B5EF4-FFF2-40B4-BE49-F238E27FC236}">
+                <a16:creationId xmlns:a16="http://schemas.microsoft.com/office/drawing/2014/main" id="{AF441317-3F0D-439D-BBE9-7E1420F898B1}"/>
               </a:ext>
             </a:extLst>
           </p:cNvPr>
@@ -8977,10 +9549,10 @@
       </p:sp>
       <p:sp>
         <p:nvSpPr>
-          <p:cNvPr id="13" name="page-number">
-            <a:extLst xmlns:a="http://schemas.openxmlformats.org/drawingml/2006/main">
-              <a:ext uri="{FF2B5EF4-FFF2-40B4-BE49-F238E27FC236}">
-                <a16:creationId xmlns:a16="http://schemas.microsoft.com/office/drawing/2014/main" id="{C587FACB-AC63-4D9B-8950-62E56EAAD867}"/>
+          <p:cNvPr id="15" name="page-number">
+            <a:extLst xmlns:a="http://schemas.openxmlformats.org/drawingml/2006/main">
+              <a:ext uri="{FF2B5EF4-FFF2-40B4-BE49-F238E27FC236}">
+                <a16:creationId xmlns:a16="http://schemas.microsoft.com/office/drawing/2014/main" id="{DEAAC782-B140-45CB-AD54-1EA0ED53F9F9}"/>
               </a:ext>
             </a:extLst>
           </p:cNvPr>
@@ -9033,7 +9605,7 @@
     </p:spTree>
     <p:extLst>
       <p:ext uri="{BB962C8B-B14F-4D97-AF65-F5344CB8AC3E}">
-        <p14:creationId xmlns:p14="http://schemas.microsoft.com/office/powerpoint/2010/main" val="1183891108"/>
+        <p14:creationId xmlns:p14="http://schemas.microsoft.com/office/powerpoint/2010/main" val="1719683764"/>
       </p:ext>
     </p:extLst>
   </p:cSld>
@@ -9069,10 +9641,10 @@
       </p:grpSpPr>
       <p:sp>
         <p:nvSpPr>
-          <p:cNvPr id="9" name="case-number">
-            <a:extLst xmlns:a="http://schemas.openxmlformats.org/drawingml/2006/main">
-              <a:ext uri="{FF2B5EF4-FFF2-40B4-BE49-F238E27FC236}">
-                <a16:creationId xmlns:a16="http://schemas.microsoft.com/office/drawing/2014/main" id="{BAB256C9-C4A0-4595-B143-A7F6BC9FBB05}"/>
+          <p:cNvPr id="11" name="case-number">
+            <a:extLst xmlns:a="http://schemas.openxmlformats.org/drawingml/2006/main">
+              <a:ext uri="{FF2B5EF4-FFF2-40B4-BE49-F238E27FC236}">
+                <a16:creationId xmlns:a16="http://schemas.microsoft.com/office/drawing/2014/main" id="{C3C2D51F-7AD7-4750-89CF-5B1F259D8CFA}"/>
               </a:ext>
             </a:extLst>
           </p:cNvPr>
@@ -9123,7 +9695,7 @@
           <p:cNvPr id="2" name="case-label">
             <a:extLst xmlns:a="http://schemas.openxmlformats.org/drawingml/2006/main">
               <a:ext uri="{FF2B5EF4-FFF2-40B4-BE49-F238E27FC236}">
-                <a16:creationId xmlns:a16="http://schemas.microsoft.com/office/drawing/2014/main" id="{6345F931-03BB-4079-AF48-B7859AE0107F}"/>
+                <a16:creationId xmlns:a16="http://schemas.microsoft.com/office/drawing/2014/main" id="{B9FC115C-937C-448B-9C5A-54D0F13B9592}"/>
               </a:ext>
             </a:extLst>
           </p:cNvPr>
@@ -9174,7 +9746,7 @@
           <p:cNvPr id="3" name="case-divider">
             <a:extLst xmlns:a="http://schemas.openxmlformats.org/drawingml/2006/main">
               <a:ext uri="{FF2B5EF4-FFF2-40B4-BE49-F238E27FC236}">
-                <a16:creationId xmlns:a16="http://schemas.microsoft.com/office/drawing/2014/main" id="{C7603BF0-E622-45F9-BB17-99C91F463DEB}"/>
+                <a16:creationId xmlns:a16="http://schemas.microsoft.com/office/drawing/2014/main" id="{2E1751F2-B509-4218-807A-991B6D7C7F45}"/>
               </a:ext>
             </a:extLst>
           </p:cNvPr>
@@ -9207,7 +9779,7 @@
           <p:cNvPr id="4" name="case-caveat">
             <a:extLst xmlns:a="http://schemas.openxmlformats.org/drawingml/2006/main">
               <a:ext uri="{FF2B5EF4-FFF2-40B4-BE49-F238E27FC236}">
-                <a16:creationId xmlns:a16="http://schemas.microsoft.com/office/drawing/2014/main" id="{33A6385E-67E3-4570-947E-A21DBCAEE921}"/>
+                <a16:creationId xmlns:a16="http://schemas.microsoft.com/office/drawing/2014/main" id="{12910615-37E4-4013-BF5B-0968AFC94F46}"/>
               </a:ext>
             </a:extLst>
           </p:cNvPr>
@@ -9258,7 +9830,7 @@
           <p:cNvPr id="5" name="eyebrow">
             <a:extLst xmlns:a="http://schemas.openxmlformats.org/drawingml/2006/main">
               <a:ext uri="{FF2B5EF4-FFF2-40B4-BE49-F238E27FC236}">
-                <a16:creationId xmlns:a16="http://schemas.microsoft.com/office/drawing/2014/main" id="{E5FD7875-D021-4709-A191-12F72B1657D8}"/>
+                <a16:creationId xmlns:a16="http://schemas.microsoft.com/office/drawing/2014/main" id="{D2CF2EC4-B311-4C54-94DC-662043F07960}"/>
               </a:ext>
             </a:extLst>
           </p:cNvPr>
@@ -9306,10 +9878,69 @@
       </p:sp>
       <p:sp>
         <p:nvSpPr>
-          <p:cNvPr id="6" name="footer-rule">
-            <a:extLst xmlns:a="http://schemas.openxmlformats.org/drawingml/2006/main">
-              <a:ext uri="{FF2B5EF4-FFF2-40B4-BE49-F238E27FC236}">
-                <a16:creationId xmlns:a16="http://schemas.microsoft.com/office/drawing/2014/main" id="{E1840374-02C7-410B-918D-ED1149A747AF}"/>
+          <p:cNvPr id="6" name="rescue-point-logo-background">
+            <a:extLst xmlns:a="http://schemas.openxmlformats.org/drawingml/2006/main">
+              <a:ext uri="{FF2B5EF4-FFF2-40B4-BE49-F238E27FC236}">
+                <a16:creationId xmlns:a16="http://schemas.microsoft.com/office/drawing/2014/main" id="{DB0DBC56-6EBF-470E-90EE-5632A271DE33}"/>
+              </a:ext>
+            </a:extLst>
+          </p:cNvPr>
+          <p:cNvSpPr>
+            <a:spLocks xmlns:a="http://schemas.openxmlformats.org/drawingml/2006/main" noGrp="1"/>
+          </p:cNvSpPr>
+          <p:nvPr/>
+        </p:nvSpPr>
+        <p:spPr>
+          <a:xfrm xmlns:a="http://schemas.openxmlformats.org/drawingml/2006/main">
+            <a:off x="9772650" y="133350"/>
+            <a:ext cx="1733550" cy="457200"/>
+          </a:xfrm>
+          <a:prstGeom xmlns:a="http://schemas.openxmlformats.org/drawingml/2006/main" prst="roundRect">
+            <a:avLst>
+              <a:gd name="adj" fmla="val 16667"/>
+            </a:avLst>
+          </a:prstGeom>
+          <a:solidFill xmlns:a="http://schemas.openxmlformats.org/drawingml/2006/main">
+            <a:srgbClr val="06142E"/>
+          </a:solidFill>
+          <a:ln xmlns:a="http://schemas.openxmlformats.org/drawingml/2006/main" w="9525">
+            <a:solidFill>
+              <a:srgbClr val="1EC5FF">
+                <a:alpha val="33333"/>
+              </a:srgbClr>
+            </a:solidFill>
+            <a:prstDash val="solid"/>
+          </a:ln>
+        </p:spPr>
+      </p:sp>
+      <p:pic>
+        <p:nvPicPr>
+          <p:cNvPr id="19" name="" descr="Figura oficial da documentação dbt usada para explicar: v1 + v2 — coexistem durante a migração."/>
+          <p:cNvPicPr>
+            <a:picLocks xmlns:a="http://schemas.openxmlformats.org/drawingml/2006/main" noChangeAspect="1"/>
+          </p:cNvPicPr>
+          <p:nvPr/>
+        </p:nvPicPr>
+        <p:blipFill>
+          <a:blip xmlns:r="http://schemas.openxmlformats.org/officeDocument/2006/relationships" xmlns:a="http://schemas.openxmlformats.org/drawingml/2006/main" r:embed="R48b4f4cd25044112"/>
+          <a:stretch xmlns:a="http://schemas.openxmlformats.org/drawingml/2006/main"/>
+        </p:blipFill>
+        <p:spPr>
+          <a:xfrm xmlns:a="http://schemas.openxmlformats.org/drawingml/2006/main">
+            <a:off x="9893718" y="209550"/>
+            <a:ext cx="1491414" cy="323850"/>
+          </a:xfrm>
+          <a:prstGeom xmlns:a="http://schemas.openxmlformats.org/drawingml/2006/main" prst="rect">
+            <a:avLst/>
+          </a:prstGeom>
+        </p:spPr>
+      </p:pic>
+      <p:sp>
+        <p:nvSpPr>
+          <p:cNvPr id="8" name="footer-rule">
+            <a:extLst xmlns:a="http://schemas.openxmlformats.org/drawingml/2006/main">
+              <a:ext uri="{FF2B5EF4-FFF2-40B4-BE49-F238E27FC236}">
+                <a16:creationId xmlns:a16="http://schemas.microsoft.com/office/drawing/2014/main" id="{4D0CC824-F66B-4474-9DAC-A1EC5DBC7543}"/>
               </a:ext>
             </a:extLst>
           </p:cNvPr>
@@ -9339,10 +9970,10 @@
       </p:sp>
       <p:sp>
         <p:nvSpPr>
-          <p:cNvPr id="7" name="footer">
-            <a:extLst xmlns:a="http://schemas.openxmlformats.org/drawingml/2006/main">
-              <a:ext uri="{FF2B5EF4-FFF2-40B4-BE49-F238E27FC236}">
-                <a16:creationId xmlns:a16="http://schemas.microsoft.com/office/drawing/2014/main" id="{D37D3FAE-4CDF-448B-8AF6-981270586537}"/>
+          <p:cNvPr id="9" name="footer">
+            <a:extLst xmlns:a="http://schemas.openxmlformats.org/drawingml/2006/main">
+              <a:ext uri="{FF2B5EF4-FFF2-40B4-BE49-F238E27FC236}">
+                <a16:creationId xmlns:a16="http://schemas.microsoft.com/office/drawing/2014/main" id="{6522F811-A1D3-47D9-ACAE-4ACBE4FC7863}"/>
               </a:ext>
             </a:extLst>
           </p:cNvPr>
@@ -9394,10 +10025,10 @@
       </p:sp>
       <p:sp>
         <p:nvSpPr>
-          <p:cNvPr id="8" name="page-number">
-            <a:extLst xmlns:a="http://schemas.openxmlformats.org/drawingml/2006/main">
-              <a:ext uri="{FF2B5EF4-FFF2-40B4-BE49-F238E27FC236}">
-                <a16:creationId xmlns:a16="http://schemas.microsoft.com/office/drawing/2014/main" id="{5275F5E4-1E1B-451C-8C33-5A435CA87453}"/>
+          <p:cNvPr id="10" name="page-number">
+            <a:extLst xmlns:a="http://schemas.openxmlformats.org/drawingml/2006/main">
+              <a:ext uri="{FF2B5EF4-FFF2-40B4-BE49-F238E27FC236}">
+                <a16:creationId xmlns:a16="http://schemas.microsoft.com/office/drawing/2014/main" id="{1332831C-9402-4A3E-B5BF-91532C8F2114}"/>
               </a:ext>
             </a:extLst>
           </p:cNvPr>
@@ -9450,7 +10081,7 @@
     </p:spTree>
     <p:extLst>
       <p:ext uri="{BB962C8B-B14F-4D97-AF65-F5344CB8AC3E}">
-        <p14:creationId xmlns:p14="http://schemas.microsoft.com/office/powerpoint/2010/main" val="1382068033"/>
+        <p14:creationId xmlns:p14="http://schemas.microsoft.com/office/powerpoint/2010/main" val="626568982"/>
       </p:ext>
     </p:extLst>
   </p:cSld>
@@ -9478,10 +10109,10 @@
       </p:grpSpPr>
       <p:sp>
         <p:nvSpPr>
-          <p:cNvPr id="7" name="slide-title">
-            <a:extLst xmlns:a="http://schemas.openxmlformats.org/drawingml/2006/main">
-              <a:ext uri="{FF2B5EF4-FFF2-40B4-BE49-F238E27FC236}">
-                <a16:creationId xmlns:a16="http://schemas.microsoft.com/office/drawing/2014/main" id="{58D5BF40-5CB7-4DBA-A2A2-E141316C916E}"/>
+          <p:cNvPr id="9" name="slide-title">
+            <a:extLst xmlns:a="http://schemas.openxmlformats.org/drawingml/2006/main">
+              <a:ext uri="{FF2B5EF4-FFF2-40B4-BE49-F238E27FC236}">
+                <a16:creationId xmlns:a16="http://schemas.microsoft.com/office/drawing/2014/main" id="{233A500D-F4F1-4A3A-A26A-9AC1F4ECBBD2}"/>
               </a:ext>
             </a:extLst>
           </p:cNvPr>
@@ -9532,7 +10163,7 @@
           <p:cNvPr id="2" name="bullets">
             <a:extLst xmlns:a="http://schemas.openxmlformats.org/drawingml/2006/main">
               <a:ext uri="{FF2B5EF4-FFF2-40B4-BE49-F238E27FC236}">
-                <a16:creationId xmlns:a16="http://schemas.microsoft.com/office/drawing/2014/main" id="{54924653-9F49-4C89-BC8B-F7493B4DFC20}"/>
+                <a16:creationId xmlns:a16="http://schemas.microsoft.com/office/drawing/2014/main" id="{C7E6C598-FEE4-4A95-9FD5-5CD18D1C660D}"/>
               </a:ext>
             </a:extLst>
           </p:cNvPr>
@@ -9619,7 +10250,7 @@
           <p:cNvPr id="3" name="eyebrow">
             <a:extLst xmlns:a="http://schemas.openxmlformats.org/drawingml/2006/main">
               <a:ext uri="{FF2B5EF4-FFF2-40B4-BE49-F238E27FC236}">
-                <a16:creationId xmlns:a16="http://schemas.microsoft.com/office/drawing/2014/main" id="{F377D38C-1C17-4D27-871F-514F06F3ED86}"/>
+                <a16:creationId xmlns:a16="http://schemas.microsoft.com/office/drawing/2014/main" id="{F13CCEC4-5E99-4A80-BF3D-84E15343A30B}"/>
               </a:ext>
             </a:extLst>
           </p:cNvPr>
@@ -9667,10 +10298,69 @@
       </p:sp>
       <p:sp>
         <p:nvSpPr>
-          <p:cNvPr id="4" name="footer-rule">
-            <a:extLst xmlns:a="http://schemas.openxmlformats.org/drawingml/2006/main">
-              <a:ext uri="{FF2B5EF4-FFF2-40B4-BE49-F238E27FC236}">
-                <a16:creationId xmlns:a16="http://schemas.microsoft.com/office/drawing/2014/main" id="{2A9EAE66-C1A9-4A65-A523-E041F60407FF}"/>
+          <p:cNvPr id="4" name="rescue-point-logo-background">
+            <a:extLst xmlns:a="http://schemas.openxmlformats.org/drawingml/2006/main">
+              <a:ext uri="{FF2B5EF4-FFF2-40B4-BE49-F238E27FC236}">
+                <a16:creationId xmlns:a16="http://schemas.microsoft.com/office/drawing/2014/main" id="{189B9787-964E-4ED9-A07C-B2A1F07C45F3}"/>
+              </a:ext>
+            </a:extLst>
+          </p:cNvPr>
+          <p:cNvSpPr>
+            <a:spLocks xmlns:a="http://schemas.openxmlformats.org/drawingml/2006/main" noGrp="1"/>
+          </p:cNvSpPr>
+          <p:nvPr/>
+        </p:nvSpPr>
+        <p:spPr>
+          <a:xfrm xmlns:a="http://schemas.openxmlformats.org/drawingml/2006/main">
+            <a:off x="9772650" y="133350"/>
+            <a:ext cx="1733550" cy="457200"/>
+          </a:xfrm>
+          <a:prstGeom xmlns:a="http://schemas.openxmlformats.org/drawingml/2006/main" prst="roundRect">
+            <a:avLst>
+              <a:gd name="adj" fmla="val 16667"/>
+            </a:avLst>
+          </a:prstGeom>
+          <a:solidFill xmlns:a="http://schemas.openxmlformats.org/drawingml/2006/main">
+            <a:srgbClr val="06142E"/>
+          </a:solidFill>
+          <a:ln xmlns:a="http://schemas.openxmlformats.org/drawingml/2006/main" w="9525">
+            <a:solidFill>
+              <a:srgbClr val="1EC5FF">
+                <a:alpha val="33333"/>
+              </a:srgbClr>
+            </a:solidFill>
+            <a:prstDash val="solid"/>
+          </a:ln>
+        </p:spPr>
+      </p:sp>
+      <p:pic>
+        <p:nvPicPr>
+          <p:cNvPr id="15" name="" descr="Figura oficial da documentação dbt usada para explicar: Limitações que precisam permanecer visíveis — • Constraints variam por adaptador."/>
+          <p:cNvPicPr>
+            <a:picLocks xmlns:a="http://schemas.openxmlformats.org/drawingml/2006/main" noChangeAspect="1"/>
+          </p:cNvPicPr>
+          <p:nvPr/>
+        </p:nvPicPr>
+        <p:blipFill>
+          <a:blip xmlns:r="http://schemas.openxmlformats.org/officeDocument/2006/relationships" xmlns:a="http://schemas.openxmlformats.org/drawingml/2006/main" r:embed="Rbcf313acc1eb4a4e"/>
+          <a:stretch xmlns:a="http://schemas.openxmlformats.org/drawingml/2006/main"/>
+        </p:blipFill>
+        <p:spPr>
+          <a:xfrm xmlns:a="http://schemas.openxmlformats.org/drawingml/2006/main">
+            <a:off x="9893718" y="209550"/>
+            <a:ext cx="1491414" cy="323850"/>
+          </a:xfrm>
+          <a:prstGeom xmlns:a="http://schemas.openxmlformats.org/drawingml/2006/main" prst="rect">
+            <a:avLst/>
+          </a:prstGeom>
+        </p:spPr>
+      </p:pic>
+      <p:sp>
+        <p:nvSpPr>
+          <p:cNvPr id="6" name="footer-rule">
+            <a:extLst xmlns:a="http://schemas.openxmlformats.org/drawingml/2006/main">
+              <a:ext uri="{FF2B5EF4-FFF2-40B4-BE49-F238E27FC236}">
+                <a16:creationId xmlns:a16="http://schemas.microsoft.com/office/drawing/2014/main" id="{95BC5FE7-6145-439A-95A8-5ECD024289EB}"/>
               </a:ext>
             </a:extLst>
           </p:cNvPr>
@@ -9700,10 +10390,10 @@
       </p:sp>
       <p:sp>
         <p:nvSpPr>
-          <p:cNvPr id="5" name="footer">
-            <a:extLst xmlns:a="http://schemas.openxmlformats.org/drawingml/2006/main">
-              <a:ext uri="{FF2B5EF4-FFF2-40B4-BE49-F238E27FC236}">
-                <a16:creationId xmlns:a16="http://schemas.microsoft.com/office/drawing/2014/main" id="{A3D1695F-0F4F-4179-8555-13839E440282}"/>
+          <p:cNvPr id="7" name="footer">
+            <a:extLst xmlns:a="http://schemas.openxmlformats.org/drawingml/2006/main">
+              <a:ext uri="{FF2B5EF4-FFF2-40B4-BE49-F238E27FC236}">
+                <a16:creationId xmlns:a16="http://schemas.microsoft.com/office/drawing/2014/main" id="{E59E5C5F-167A-4A6D-8CB4-6DBEEECE8C73}"/>
               </a:ext>
             </a:extLst>
           </p:cNvPr>
@@ -9755,10 +10445,10 @@
       </p:sp>
       <p:sp>
         <p:nvSpPr>
-          <p:cNvPr id="6" name="page-number">
-            <a:extLst xmlns:a="http://schemas.openxmlformats.org/drawingml/2006/main">
-              <a:ext uri="{FF2B5EF4-FFF2-40B4-BE49-F238E27FC236}">
-                <a16:creationId xmlns:a16="http://schemas.microsoft.com/office/drawing/2014/main" id="{EA0F678E-FB0B-4653-AD6F-F1B5C5DA4EEE}"/>
+          <p:cNvPr id="8" name="page-number">
+            <a:extLst xmlns:a="http://schemas.openxmlformats.org/drawingml/2006/main">
+              <a:ext uri="{FF2B5EF4-FFF2-40B4-BE49-F238E27FC236}">
+                <a16:creationId xmlns:a16="http://schemas.microsoft.com/office/drawing/2014/main" id="{AF0D7EA6-87CE-4F6B-A093-A36BC1835B9E}"/>
               </a:ext>
             </a:extLst>
           </p:cNvPr>
@@ -9811,7 +10501,7 @@
     </p:spTree>
     <p:extLst>
       <p:ext uri="{BB962C8B-B14F-4D97-AF65-F5344CB8AC3E}">
-        <p14:creationId xmlns:p14="http://schemas.microsoft.com/office/powerpoint/2010/main" val="1679386593"/>
+        <p14:creationId xmlns:p14="http://schemas.microsoft.com/office/powerpoint/2010/main" val="1388795681"/>
       </p:ext>
     </p:extLst>
   </p:cSld>
@@ -9847,10 +10537,10 @@
       </p:grpSpPr>
       <p:sp>
         <p:nvSpPr>
-          <p:cNvPr id="10" name="radar-label">
-            <a:extLst xmlns:a="http://schemas.openxmlformats.org/drawingml/2006/main">
-              <a:ext uri="{FF2B5EF4-FFF2-40B4-BE49-F238E27FC236}">
-                <a16:creationId xmlns:a16="http://schemas.microsoft.com/office/drawing/2014/main" id="{3AF1FD5E-0B94-478A-A17B-1F692BA84198}"/>
+          <p:cNvPr id="12" name="radar-label">
+            <a:extLst xmlns:a="http://schemas.openxmlformats.org/drawingml/2006/main">
+              <a:ext uri="{FF2B5EF4-FFF2-40B4-BE49-F238E27FC236}">
+                <a16:creationId xmlns:a16="http://schemas.microsoft.com/office/drawing/2014/main" id="{06284C5B-1974-4580-BE24-86210102540A}"/>
               </a:ext>
             </a:extLst>
           </p:cNvPr>
@@ -9901,7 +10591,7 @@
           <p:cNvPr id="2" name="radar-text">
             <a:extLst xmlns:a="http://schemas.openxmlformats.org/drawingml/2006/main">
               <a:ext uri="{FF2B5EF4-FFF2-40B4-BE49-F238E27FC236}">
-                <a16:creationId xmlns:a16="http://schemas.microsoft.com/office/drawing/2014/main" id="{BBF1A681-D930-4025-A577-48D550B00D01}"/>
+                <a16:creationId xmlns:a16="http://schemas.microsoft.com/office/drawing/2014/main" id="{6360D53D-43B2-4F1D-896E-782792594BCF}"/>
               </a:ext>
             </a:extLst>
           </p:cNvPr>
@@ -9952,7 +10642,7 @@
           <p:cNvPr id="3" name="radar-rule">
             <a:extLst xmlns:a="http://schemas.openxmlformats.org/drawingml/2006/main">
               <a:ext uri="{FF2B5EF4-FFF2-40B4-BE49-F238E27FC236}">
-                <a16:creationId xmlns:a16="http://schemas.microsoft.com/office/drawing/2014/main" id="{17053ADC-95E6-43C9-B85E-4524370EC2CE}"/>
+                <a16:creationId xmlns:a16="http://schemas.microsoft.com/office/drawing/2014/main" id="{DB0CFE68-D9DF-4865-9AB0-D86572E3EEBA}"/>
               </a:ext>
             </a:extLst>
           </p:cNvPr>
@@ -10003,7 +10693,7 @@
           <p:cNvPr id="4" name="ambient-glow">
             <a:extLst xmlns:a="http://schemas.openxmlformats.org/drawingml/2006/main">
               <a:ext uri="{FF2B5EF4-FFF2-40B4-BE49-F238E27FC236}">
-                <a16:creationId xmlns:a16="http://schemas.microsoft.com/office/drawing/2014/main" id="{7F7B5FB5-76FD-49CB-964A-92BAC60AE8E6}"/>
+                <a16:creationId xmlns:a16="http://schemas.microsoft.com/office/drawing/2014/main" id="{782A23D2-AB9F-4CDF-AA0C-D08D05804E56}"/>
               </a:ext>
             </a:extLst>
           </p:cNvPr>
@@ -10040,7 +10730,7 @@
           <p:cNvPr id="5" name="ambient-core">
             <a:extLst xmlns:a="http://schemas.openxmlformats.org/drawingml/2006/main">
               <a:ext uri="{FF2B5EF4-FFF2-40B4-BE49-F238E27FC236}">
-                <a16:creationId xmlns:a16="http://schemas.microsoft.com/office/drawing/2014/main" id="{CD721EAD-C889-4AAE-805B-6BA7710D38EA}"/>
+                <a16:creationId xmlns:a16="http://schemas.microsoft.com/office/drawing/2014/main" id="{34CA78AA-53BB-461A-823B-5DD3EA282A3D}"/>
               </a:ext>
             </a:extLst>
           </p:cNvPr>
@@ -10077,7 +10767,7 @@
           <p:cNvPr id="6" name="eyebrow">
             <a:extLst xmlns:a="http://schemas.openxmlformats.org/drawingml/2006/main">
               <a:ext uri="{FF2B5EF4-FFF2-40B4-BE49-F238E27FC236}">
-                <a16:creationId xmlns:a16="http://schemas.microsoft.com/office/drawing/2014/main" id="{E0EA28F0-AC23-4CB8-B042-7D82F421226D}"/>
+                <a16:creationId xmlns:a16="http://schemas.microsoft.com/office/drawing/2014/main" id="{8A02CA44-EEB4-47CD-B466-06374EF65AE6}"/>
               </a:ext>
             </a:extLst>
           </p:cNvPr>
@@ -10125,10 +10815,69 @@
       </p:sp>
       <p:sp>
         <p:nvSpPr>
-          <p:cNvPr id="7" name="footer-rule">
-            <a:extLst xmlns:a="http://schemas.openxmlformats.org/drawingml/2006/main">
-              <a:ext uri="{FF2B5EF4-FFF2-40B4-BE49-F238E27FC236}">
-                <a16:creationId xmlns:a16="http://schemas.microsoft.com/office/drawing/2014/main" id="{CF1134E6-06EB-41AB-B541-925AA48CABAC}"/>
+          <p:cNvPr id="7" name="rescue-point-logo-background">
+            <a:extLst xmlns:a="http://schemas.openxmlformats.org/drawingml/2006/main">
+              <a:ext uri="{FF2B5EF4-FFF2-40B4-BE49-F238E27FC236}">
+                <a16:creationId xmlns:a16="http://schemas.microsoft.com/office/drawing/2014/main" id="{D3EDAAA7-A13E-4BA3-B5E1-8F88CBCDC776}"/>
+              </a:ext>
+            </a:extLst>
+          </p:cNvPr>
+          <p:cNvSpPr>
+            <a:spLocks xmlns:a="http://schemas.openxmlformats.org/drawingml/2006/main" noGrp="1"/>
+          </p:cNvSpPr>
+          <p:nvPr/>
+        </p:nvSpPr>
+        <p:spPr>
+          <a:xfrm xmlns:a="http://schemas.openxmlformats.org/drawingml/2006/main">
+            <a:off x="9772650" y="133350"/>
+            <a:ext cx="1733550" cy="457200"/>
+          </a:xfrm>
+          <a:prstGeom xmlns:a="http://schemas.openxmlformats.org/drawingml/2006/main" prst="roundRect">
+            <a:avLst>
+              <a:gd name="adj" fmla="val 16667"/>
+            </a:avLst>
+          </a:prstGeom>
+          <a:solidFill xmlns:a="http://schemas.openxmlformats.org/drawingml/2006/main">
+            <a:srgbClr val="06142E"/>
+          </a:solidFill>
+          <a:ln xmlns:a="http://schemas.openxmlformats.org/drawingml/2006/main" w="9525">
+            <a:solidFill>
+              <a:srgbClr val="1EC5FF">
+                <a:alpha val="33333"/>
+              </a:srgbClr>
+            </a:solidFill>
+            <a:prstDash val="solid"/>
+          </a:ln>
+        </p:spPr>
+      </p:sp>
+      <p:pic>
+        <p:nvPicPr>
+          <p:cNvPr id="21" name="" descr="Figura oficial da documentação dbt usada para explicar: RADAR — Melhorias futuras não justificam migrar um contrato estável para runtime beta.."/>
+          <p:cNvPicPr>
+            <a:picLocks xmlns:a="http://schemas.openxmlformats.org/drawingml/2006/main" noChangeAspect="1"/>
+          </p:cNvPicPr>
+          <p:nvPr/>
+        </p:nvPicPr>
+        <p:blipFill>
+          <a:blip xmlns:r="http://schemas.openxmlformats.org/officeDocument/2006/relationships" xmlns:a="http://schemas.openxmlformats.org/drawingml/2006/main" r:embed="R2c947d2d6dd3445b"/>
+          <a:stretch xmlns:a="http://schemas.openxmlformats.org/drawingml/2006/main"/>
+        </p:blipFill>
+        <p:spPr>
+          <a:xfrm xmlns:a="http://schemas.openxmlformats.org/drawingml/2006/main">
+            <a:off x="9893718" y="209550"/>
+            <a:ext cx="1491414" cy="323850"/>
+          </a:xfrm>
+          <a:prstGeom xmlns:a="http://schemas.openxmlformats.org/drawingml/2006/main" prst="rect">
+            <a:avLst/>
+          </a:prstGeom>
+        </p:spPr>
+      </p:pic>
+      <p:sp>
+        <p:nvSpPr>
+          <p:cNvPr id="9" name="footer-rule">
+            <a:extLst xmlns:a="http://schemas.openxmlformats.org/drawingml/2006/main">
+              <a:ext uri="{FF2B5EF4-FFF2-40B4-BE49-F238E27FC236}">
+                <a16:creationId xmlns:a16="http://schemas.microsoft.com/office/drawing/2014/main" id="{4AFB402C-1450-429D-80D1-728702282FF5}"/>
               </a:ext>
             </a:extLst>
           </p:cNvPr>
@@ -10158,10 +10907,10 @@
       </p:sp>
       <p:sp>
         <p:nvSpPr>
-          <p:cNvPr id="8" name="footer">
-            <a:extLst xmlns:a="http://schemas.openxmlformats.org/drawingml/2006/main">
-              <a:ext uri="{FF2B5EF4-FFF2-40B4-BE49-F238E27FC236}">
-                <a16:creationId xmlns:a16="http://schemas.microsoft.com/office/drawing/2014/main" id="{BB6DF4A5-8944-4100-83B8-7D45570E0623}"/>
+          <p:cNvPr id="10" name="footer">
+            <a:extLst xmlns:a="http://schemas.openxmlformats.org/drawingml/2006/main">
+              <a:ext uri="{FF2B5EF4-FFF2-40B4-BE49-F238E27FC236}">
+                <a16:creationId xmlns:a16="http://schemas.microsoft.com/office/drawing/2014/main" id="{1E192E3D-8A34-4062-82A6-65CF9182EA11}"/>
               </a:ext>
             </a:extLst>
           </p:cNvPr>
@@ -10213,10 +10962,10 @@
       </p:sp>
       <p:sp>
         <p:nvSpPr>
-          <p:cNvPr id="9" name="page-number">
-            <a:extLst xmlns:a="http://schemas.openxmlformats.org/drawingml/2006/main">
-              <a:ext uri="{FF2B5EF4-FFF2-40B4-BE49-F238E27FC236}">
-                <a16:creationId xmlns:a16="http://schemas.microsoft.com/office/drawing/2014/main" id="{23C94DF2-258B-4A95-9063-6CA120722DAC}"/>
+          <p:cNvPr id="11" name="page-number">
+            <a:extLst xmlns:a="http://schemas.openxmlformats.org/drawingml/2006/main">
+              <a:ext uri="{FF2B5EF4-FFF2-40B4-BE49-F238E27FC236}">
+                <a16:creationId xmlns:a16="http://schemas.microsoft.com/office/drawing/2014/main" id="{DBE59DF7-2B5A-41CF-A804-F4CEED93FC37}"/>
               </a:ext>
             </a:extLst>
           </p:cNvPr>
@@ -10269,7 +11018,7 @@
     </p:spTree>
     <p:extLst>
       <p:ext uri="{BB962C8B-B14F-4D97-AF65-F5344CB8AC3E}">
-        <p14:creationId xmlns:p14="http://schemas.microsoft.com/office/powerpoint/2010/main" val="1566901461"/>
+        <p14:creationId xmlns:p14="http://schemas.microsoft.com/office/powerpoint/2010/main" val="1509729628"/>
       </p:ext>
     </p:extLst>
   </p:cSld>
@@ -10297,10 +11046,10 @@
       </p:grpSpPr>
       <p:sp>
         <p:nvSpPr>
-          <p:cNvPr id="10" name="hook">
-            <a:extLst xmlns:a="http://schemas.openxmlformats.org/drawingml/2006/main">
-              <a:ext uri="{FF2B5EF4-FFF2-40B4-BE49-F238E27FC236}">
-                <a16:creationId xmlns:a16="http://schemas.microsoft.com/office/drawing/2014/main" id="{6735AE39-C593-4F33-966C-6DD60A784197}"/>
+          <p:cNvPr id="12" name="hook">
+            <a:extLst xmlns:a="http://schemas.openxmlformats.org/drawingml/2006/main">
+              <a:ext uri="{FF2B5EF4-FFF2-40B4-BE49-F238E27FC236}">
+                <a16:creationId xmlns:a16="http://schemas.microsoft.com/office/drawing/2014/main" id="{AC31E71C-9FE0-473F-A3D0-9A2524803E0C}"/>
               </a:ext>
             </a:extLst>
           </p:cNvPr>
@@ -10351,7 +11100,7 @@
           <p:cNvPr id="2" name="hook-rule">
             <a:extLst xmlns:a="http://schemas.openxmlformats.org/drawingml/2006/main">
               <a:ext uri="{FF2B5EF4-FFF2-40B4-BE49-F238E27FC236}">
-                <a16:creationId xmlns:a16="http://schemas.microsoft.com/office/drawing/2014/main" id="{012BDCC9-A2B0-4C7B-86BB-AEDFFD8473F0}"/>
+                <a16:creationId xmlns:a16="http://schemas.microsoft.com/office/drawing/2014/main" id="{14B88D82-26BF-4863-A2AF-6BADC25198B0}"/>
               </a:ext>
             </a:extLst>
           </p:cNvPr>
@@ -10382,7 +11131,7 @@
           <p:cNvPr id="3" name="hook-label">
             <a:extLst xmlns:a="http://schemas.openxmlformats.org/drawingml/2006/main">
               <a:ext uri="{FF2B5EF4-FFF2-40B4-BE49-F238E27FC236}">
-                <a16:creationId xmlns:a16="http://schemas.microsoft.com/office/drawing/2014/main" id="{E90CCBC0-D4AD-415E-9E70-FA18F6E4D2C7}"/>
+                <a16:creationId xmlns:a16="http://schemas.microsoft.com/office/drawing/2014/main" id="{61341379-D287-4FAF-AF16-73A49EFBAB73}"/>
               </a:ext>
             </a:extLst>
           </p:cNvPr>
@@ -10433,7 +11182,7 @@
           <p:cNvPr id="4" name="diagram-surface">
             <a:extLst xmlns:a="http://schemas.openxmlformats.org/drawingml/2006/main">
               <a:ext uri="{FF2B5EF4-FFF2-40B4-BE49-F238E27FC236}">
-                <a16:creationId xmlns:a16="http://schemas.microsoft.com/office/drawing/2014/main" id="{34943D41-43C1-4C10-9F04-6237859DC766}"/>
+                <a16:creationId xmlns:a16="http://schemas.microsoft.com/office/drawing/2014/main" id="{84D2C457-2A78-400D-998A-4D0A2A5E97DF}"/>
               </a:ext>
             </a:extLst>
           </p:cNvPr>
@@ -10465,14 +11214,14 @@
       </p:sp>
       <p:pic>
         <p:nvPicPr>
-          <p:cNvPr id="16" name="" descr="Diagrama didático autoral que apresenta: Se um dashboard ou agente depende da Gold, ela já é uma API. — A pergunta que guia a aula."/>
+          <p:cNvPr id="19" name="" descr="Diagrama didático autoral que apresenta: Se um dashboard ou agente depende da Gold, ela já é uma API. — A pergunta que guia a aula."/>
           <p:cNvPicPr>
             <a:picLocks xmlns:a="http://schemas.openxmlformats.org/drawingml/2006/main" noChangeAspect="1"/>
           </p:cNvPicPr>
           <p:nvPr/>
         </p:nvPicPr>
         <p:blipFill>
-          <a:blip xmlns:r="http://schemas.openxmlformats.org/officeDocument/2006/relationships" xmlns:a="http://schemas.openxmlformats.org/drawingml/2006/main" r:embed="R31768f2f61374167"/>
+          <a:blip xmlns:r="http://schemas.openxmlformats.org/officeDocument/2006/relationships" xmlns:a="http://schemas.openxmlformats.org/drawingml/2006/main" r:embed="R7a244c80551241c2"/>
           <a:stretch xmlns:a="http://schemas.openxmlformats.org/drawingml/2006/main"/>
         </p:blipFill>
         <p:spPr>
@@ -10490,7 +11239,7 @@
           <p:cNvPr id="6" name="eyebrow">
             <a:extLst xmlns:a="http://schemas.openxmlformats.org/drawingml/2006/main">
               <a:ext uri="{FF2B5EF4-FFF2-40B4-BE49-F238E27FC236}">
-                <a16:creationId xmlns:a16="http://schemas.microsoft.com/office/drawing/2014/main" id="{AF5C7BF9-87D5-4617-8BD4-C8610EF92D83}"/>
+                <a16:creationId xmlns:a16="http://schemas.microsoft.com/office/drawing/2014/main" id="{15CC6628-85F2-4E9E-94C8-68C3519940F8}"/>
               </a:ext>
             </a:extLst>
           </p:cNvPr>
@@ -10538,10 +11287,69 @@
       </p:sp>
       <p:sp>
         <p:nvSpPr>
-          <p:cNvPr id="7" name="footer-rule">
-            <a:extLst xmlns:a="http://schemas.openxmlformats.org/drawingml/2006/main">
-              <a:ext uri="{FF2B5EF4-FFF2-40B4-BE49-F238E27FC236}">
-                <a16:creationId xmlns:a16="http://schemas.microsoft.com/office/drawing/2014/main" id="{81444AEE-1AE9-451C-9B99-ED7EB757F91B}"/>
+          <p:cNvPr id="7" name="rescue-point-logo-background">
+            <a:extLst xmlns:a="http://schemas.openxmlformats.org/drawingml/2006/main">
+              <a:ext uri="{FF2B5EF4-FFF2-40B4-BE49-F238E27FC236}">
+                <a16:creationId xmlns:a16="http://schemas.microsoft.com/office/drawing/2014/main" id="{F9AA86AF-0564-43F0-8AEC-10A3E81DE270}"/>
+              </a:ext>
+            </a:extLst>
+          </p:cNvPr>
+          <p:cNvSpPr>
+            <a:spLocks xmlns:a="http://schemas.openxmlformats.org/drawingml/2006/main" noGrp="1"/>
+          </p:cNvSpPr>
+          <p:nvPr/>
+        </p:nvSpPr>
+        <p:spPr>
+          <a:xfrm xmlns:a="http://schemas.openxmlformats.org/drawingml/2006/main">
+            <a:off x="9772650" y="133350"/>
+            <a:ext cx="1733550" cy="457200"/>
+          </a:xfrm>
+          <a:prstGeom xmlns:a="http://schemas.openxmlformats.org/drawingml/2006/main" prst="roundRect">
+            <a:avLst>
+              <a:gd name="adj" fmla="val 16667"/>
+            </a:avLst>
+          </a:prstGeom>
+          <a:solidFill xmlns:a="http://schemas.openxmlformats.org/drawingml/2006/main">
+            <a:srgbClr val="06142E"/>
+          </a:solidFill>
+          <a:ln xmlns:a="http://schemas.openxmlformats.org/drawingml/2006/main" w="9525">
+            <a:solidFill>
+              <a:srgbClr val="1EC5FF">
+                <a:alpha val="33333"/>
+              </a:srgbClr>
+            </a:solidFill>
+            <a:prstDash val="solid"/>
+          </a:ln>
+        </p:spPr>
+      </p:sp>
+      <p:pic>
+        <p:nvPicPr>
+          <p:cNvPr id="22" name="" descr="Diagrama didático autoral que apresenta: Se um dashboard ou agente depende da Gold, ela já é uma API. — A pergunta que guia a aula."/>
+          <p:cNvPicPr>
+            <a:picLocks xmlns:a="http://schemas.openxmlformats.org/drawingml/2006/main" noChangeAspect="1"/>
+          </p:cNvPicPr>
+          <p:nvPr/>
+        </p:nvPicPr>
+        <p:blipFill>
+          <a:blip xmlns:r="http://schemas.openxmlformats.org/officeDocument/2006/relationships" xmlns:a="http://schemas.openxmlformats.org/drawingml/2006/main" r:embed="R2f706f7fcb78414b"/>
+          <a:stretch xmlns:a="http://schemas.openxmlformats.org/drawingml/2006/main"/>
+        </p:blipFill>
+        <p:spPr>
+          <a:xfrm xmlns:a="http://schemas.openxmlformats.org/drawingml/2006/main">
+            <a:off x="9893718" y="209550"/>
+            <a:ext cx="1491414" cy="323850"/>
+          </a:xfrm>
+          <a:prstGeom xmlns:a="http://schemas.openxmlformats.org/drawingml/2006/main" prst="rect">
+            <a:avLst/>
+          </a:prstGeom>
+        </p:spPr>
+      </p:pic>
+      <p:sp>
+        <p:nvSpPr>
+          <p:cNvPr id="9" name="footer-rule">
+            <a:extLst xmlns:a="http://schemas.openxmlformats.org/drawingml/2006/main">
+              <a:ext uri="{FF2B5EF4-FFF2-40B4-BE49-F238E27FC236}">
+                <a16:creationId xmlns:a16="http://schemas.microsoft.com/office/drawing/2014/main" id="{9C741F8B-96BB-47D8-8069-1BCDBCC171EE}"/>
               </a:ext>
             </a:extLst>
           </p:cNvPr>
@@ -10571,10 +11379,10 @@
       </p:sp>
       <p:sp>
         <p:nvSpPr>
-          <p:cNvPr id="8" name="footer">
-            <a:extLst xmlns:a="http://schemas.openxmlformats.org/drawingml/2006/main">
-              <a:ext uri="{FF2B5EF4-FFF2-40B4-BE49-F238E27FC236}">
-                <a16:creationId xmlns:a16="http://schemas.microsoft.com/office/drawing/2014/main" id="{75CF79BE-4CA2-450B-BDF3-9934F33556CC}"/>
+          <p:cNvPr id="10" name="footer">
+            <a:extLst xmlns:a="http://schemas.openxmlformats.org/drawingml/2006/main">
+              <a:ext uri="{FF2B5EF4-FFF2-40B4-BE49-F238E27FC236}">
+                <a16:creationId xmlns:a16="http://schemas.microsoft.com/office/drawing/2014/main" id="{2A365FE8-76D0-405B-A9C4-2CAD83F488E1}"/>
               </a:ext>
             </a:extLst>
           </p:cNvPr>
@@ -10626,10 +11434,10 @@
       </p:sp>
       <p:sp>
         <p:nvSpPr>
-          <p:cNvPr id="9" name="page-number">
-            <a:extLst xmlns:a="http://schemas.openxmlformats.org/drawingml/2006/main">
-              <a:ext uri="{FF2B5EF4-FFF2-40B4-BE49-F238E27FC236}">
-                <a16:creationId xmlns:a16="http://schemas.microsoft.com/office/drawing/2014/main" id="{186A3E9A-E51E-451F-AEA1-3DC3D1DEFAEB}"/>
+          <p:cNvPr id="11" name="page-number">
+            <a:extLst xmlns:a="http://schemas.openxmlformats.org/drawingml/2006/main">
+              <a:ext uri="{FF2B5EF4-FFF2-40B4-BE49-F238E27FC236}">
+                <a16:creationId xmlns:a16="http://schemas.microsoft.com/office/drawing/2014/main" id="{3FEF2AF3-DC2C-43E3-A436-79BAD51FB8D3}"/>
               </a:ext>
             </a:extLst>
           </p:cNvPr>
@@ -10682,7 +11490,7 @@
     </p:spTree>
     <p:extLst>
       <p:ext uri="{BB962C8B-B14F-4D97-AF65-F5344CB8AC3E}">
-        <p14:creationId xmlns:p14="http://schemas.microsoft.com/office/powerpoint/2010/main" val="1561403474"/>
+        <p14:creationId xmlns:p14="http://schemas.microsoft.com/office/powerpoint/2010/main" val="1421651277"/>
       </p:ext>
     </p:extLst>
   </p:cSld>
@@ -10710,10 +11518,10 @@
       </p:grpSpPr>
       <p:sp>
         <p:nvSpPr>
-          <p:cNvPr id="8" name="cta-label">
-            <a:extLst xmlns:a="http://schemas.openxmlformats.org/drawingml/2006/main">
-              <a:ext uri="{FF2B5EF4-FFF2-40B4-BE49-F238E27FC236}">
-                <a16:creationId xmlns:a16="http://schemas.microsoft.com/office/drawing/2014/main" id="{36A69174-5609-4E98-BE18-DF3533C9F036}"/>
+          <p:cNvPr id="10" name="cta-label">
+            <a:extLst xmlns:a="http://schemas.openxmlformats.org/drawingml/2006/main">
+              <a:ext uri="{FF2B5EF4-FFF2-40B4-BE49-F238E27FC236}">
+                <a16:creationId xmlns:a16="http://schemas.microsoft.com/office/drawing/2014/main" id="{BE99754B-1FD7-450E-B9C6-C0AD3EB2A361}"/>
               </a:ext>
             </a:extLst>
           </p:cNvPr>
@@ -10764,7 +11572,7 @@
           <p:cNvPr id="2" name="cta">
             <a:extLst xmlns:a="http://schemas.openxmlformats.org/drawingml/2006/main">
               <a:ext uri="{FF2B5EF4-FFF2-40B4-BE49-F238E27FC236}">
-                <a16:creationId xmlns:a16="http://schemas.microsoft.com/office/drawing/2014/main" id="{E65E3172-0E31-423F-B353-A1BEC4DCF233}"/>
+                <a16:creationId xmlns:a16="http://schemas.microsoft.com/office/drawing/2014/main" id="{FBF3E4C6-D506-4A0B-BEB0-14B88334ED93}"/>
               </a:ext>
             </a:extLst>
           </p:cNvPr>
@@ -10815,7 +11623,7 @@
           <p:cNvPr id="3" name="cta-meta">
             <a:extLst xmlns:a="http://schemas.openxmlformats.org/drawingml/2006/main">
               <a:ext uri="{FF2B5EF4-FFF2-40B4-BE49-F238E27FC236}">
-                <a16:creationId xmlns:a16="http://schemas.microsoft.com/office/drawing/2014/main" id="{D3B37A91-F2EC-44C0-8809-4664F33154C1}"/>
+                <a16:creationId xmlns:a16="http://schemas.microsoft.com/office/drawing/2014/main" id="{56632822-AB9A-420E-8D0D-55465AE5B433}"/>
               </a:ext>
             </a:extLst>
           </p:cNvPr>
@@ -10866,7 +11674,7 @@
           <p:cNvPr id="4" name="eyebrow">
             <a:extLst xmlns:a="http://schemas.openxmlformats.org/drawingml/2006/main">
               <a:ext uri="{FF2B5EF4-FFF2-40B4-BE49-F238E27FC236}">
-                <a16:creationId xmlns:a16="http://schemas.microsoft.com/office/drawing/2014/main" id="{9035C461-FBF1-4E89-93C8-5861A5FE6FB6}"/>
+                <a16:creationId xmlns:a16="http://schemas.microsoft.com/office/drawing/2014/main" id="{C9751A49-EAB4-4F79-8C28-D943DEBAFC5A}"/>
               </a:ext>
             </a:extLst>
           </p:cNvPr>
@@ -10914,10 +11722,69 @@
       </p:sp>
       <p:sp>
         <p:nvSpPr>
-          <p:cNvPr id="5" name="footer-rule">
-            <a:extLst xmlns:a="http://schemas.openxmlformats.org/drawingml/2006/main">
-              <a:ext uri="{FF2B5EF4-FFF2-40B4-BE49-F238E27FC236}">
-                <a16:creationId xmlns:a16="http://schemas.microsoft.com/office/drawing/2014/main" id="{F6488660-25C7-4BEC-BFD0-3BE1E28EFE91}"/>
+          <p:cNvPr id="5" name="rescue-point-logo-background">
+            <a:extLst xmlns:a="http://schemas.openxmlformats.org/drawingml/2006/main">
+              <a:ext uri="{FF2B5EF4-FFF2-40B4-BE49-F238E27FC236}">
+                <a16:creationId xmlns:a16="http://schemas.microsoft.com/office/drawing/2014/main" id="{5899D660-042B-4825-9F86-D3DB920C6C72}"/>
+              </a:ext>
+            </a:extLst>
+          </p:cNvPr>
+          <p:cNvSpPr>
+            <a:spLocks xmlns:a="http://schemas.openxmlformats.org/drawingml/2006/main" noGrp="1"/>
+          </p:cNvSpPr>
+          <p:nvPr/>
+        </p:nvSpPr>
+        <p:spPr>
+          <a:xfrm xmlns:a="http://schemas.openxmlformats.org/drawingml/2006/main">
+            <a:off x="9772650" y="133350"/>
+            <a:ext cx="1733550" cy="457200"/>
+          </a:xfrm>
+          <a:prstGeom xmlns:a="http://schemas.openxmlformats.org/drawingml/2006/main" prst="roundRect">
+            <a:avLst>
+              <a:gd name="adj" fmla="val 16667"/>
+            </a:avLst>
+          </a:prstGeom>
+          <a:solidFill xmlns:a="http://schemas.openxmlformats.org/drawingml/2006/main">
+            <a:srgbClr val="06142E"/>
+          </a:solidFill>
+          <a:ln xmlns:a="http://schemas.openxmlformats.org/drawingml/2006/main" w="9525">
+            <a:solidFill>
+              <a:srgbClr val="1EC5FF">
+                <a:alpha val="33333"/>
+              </a:srgbClr>
+            </a:solidFill>
+            <a:prstDash val="solid"/>
+          </a:ln>
+        </p:spPr>
+      </p:sp>
+      <p:pic>
+        <p:nvPicPr>
+          <p:cNvPr id="17" name="" descr="Figura oficial da documentação dbt usada para explicar: PRÓXIMO PASSO — Simule a remoção de uma coluna pública e verifique se a CI bloqueia.."/>
+          <p:cNvPicPr>
+            <a:picLocks xmlns:a="http://schemas.openxmlformats.org/drawingml/2006/main" noChangeAspect="1"/>
+          </p:cNvPicPr>
+          <p:nvPr/>
+        </p:nvPicPr>
+        <p:blipFill>
+          <a:blip xmlns:r="http://schemas.openxmlformats.org/officeDocument/2006/relationships" xmlns:a="http://schemas.openxmlformats.org/drawingml/2006/main" r:embed="R8da43847de864f62"/>
+          <a:stretch xmlns:a="http://schemas.openxmlformats.org/drawingml/2006/main"/>
+        </p:blipFill>
+        <p:spPr>
+          <a:xfrm xmlns:a="http://schemas.openxmlformats.org/drawingml/2006/main">
+            <a:off x="9893718" y="209550"/>
+            <a:ext cx="1491414" cy="323850"/>
+          </a:xfrm>
+          <a:prstGeom xmlns:a="http://schemas.openxmlformats.org/drawingml/2006/main" prst="rect">
+            <a:avLst/>
+          </a:prstGeom>
+        </p:spPr>
+      </p:pic>
+      <p:sp>
+        <p:nvSpPr>
+          <p:cNvPr id="7" name="footer-rule">
+            <a:extLst xmlns:a="http://schemas.openxmlformats.org/drawingml/2006/main">
+              <a:ext uri="{FF2B5EF4-FFF2-40B4-BE49-F238E27FC236}">
+                <a16:creationId xmlns:a16="http://schemas.microsoft.com/office/drawing/2014/main" id="{0716BFA3-FB9B-4A37-8021-D8BD55ACD8D3}"/>
               </a:ext>
             </a:extLst>
           </p:cNvPr>
@@ -10947,10 +11814,10 @@
       </p:sp>
       <p:sp>
         <p:nvSpPr>
-          <p:cNvPr id="6" name="footer">
-            <a:extLst xmlns:a="http://schemas.openxmlformats.org/drawingml/2006/main">
-              <a:ext uri="{FF2B5EF4-FFF2-40B4-BE49-F238E27FC236}">
-                <a16:creationId xmlns:a16="http://schemas.microsoft.com/office/drawing/2014/main" id="{70161842-2DAB-45A8-95F9-056606C7BE09}"/>
+          <p:cNvPr id="8" name="footer">
+            <a:extLst xmlns:a="http://schemas.openxmlformats.org/drawingml/2006/main">
+              <a:ext uri="{FF2B5EF4-FFF2-40B4-BE49-F238E27FC236}">
+                <a16:creationId xmlns:a16="http://schemas.microsoft.com/office/drawing/2014/main" id="{16B219CD-2546-4F14-ACAF-478B3050013D}"/>
               </a:ext>
             </a:extLst>
           </p:cNvPr>
@@ -11002,10 +11869,10 @@
       </p:sp>
       <p:sp>
         <p:nvSpPr>
-          <p:cNvPr id="7" name="page-number">
-            <a:extLst xmlns:a="http://schemas.openxmlformats.org/drawingml/2006/main">
-              <a:ext uri="{FF2B5EF4-FFF2-40B4-BE49-F238E27FC236}">
-                <a16:creationId xmlns:a16="http://schemas.microsoft.com/office/drawing/2014/main" id="{1A51F185-FA02-4BC2-B0A7-5820B8A08B74}"/>
+          <p:cNvPr id="9" name="page-number">
+            <a:extLst xmlns:a="http://schemas.openxmlformats.org/drawingml/2006/main">
+              <a:ext uri="{FF2B5EF4-FFF2-40B4-BE49-F238E27FC236}">
+                <a16:creationId xmlns:a16="http://schemas.microsoft.com/office/drawing/2014/main" id="{B342C6C1-6B14-47D4-906B-6AD2A64D484B}"/>
               </a:ext>
             </a:extLst>
           </p:cNvPr>
@@ -11058,7 +11925,7 @@
     </p:spTree>
     <p:extLst>
       <p:ext uri="{BB962C8B-B14F-4D97-AF65-F5344CB8AC3E}">
-        <p14:creationId xmlns:p14="http://schemas.microsoft.com/office/powerpoint/2010/main" val="2011206556"/>
+        <p14:creationId xmlns:p14="http://schemas.microsoft.com/office/powerpoint/2010/main" val="1614097365"/>
       </p:ext>
     </p:extLst>
   </p:cSld>
@@ -11094,10 +11961,10 @@
       </p:grpSpPr>
       <p:sp>
         <p:nvSpPr>
-          <p:cNvPr id="14" name="slide-title">
-            <a:extLst xmlns:a="http://schemas.openxmlformats.org/drawingml/2006/main">
-              <a:ext uri="{FF2B5EF4-FFF2-40B4-BE49-F238E27FC236}">
-                <a16:creationId xmlns:a16="http://schemas.microsoft.com/office/drawing/2014/main" id="{CAF481E7-8952-42CC-9199-20FC69A32208}"/>
+          <p:cNvPr id="16" name="slide-title">
+            <a:extLst xmlns:a="http://schemas.openxmlformats.org/drawingml/2006/main">
+              <a:ext uri="{FF2B5EF4-FFF2-40B4-BE49-F238E27FC236}">
+                <a16:creationId xmlns:a16="http://schemas.microsoft.com/office/drawing/2014/main" id="{C77C93BF-FE07-4DEE-97D9-201A4DBA88B9}"/>
               </a:ext>
             </a:extLst>
           </p:cNvPr>
@@ -11148,7 +12015,7 @@
           <p:cNvPr id="2" name="step-num-1">
             <a:extLst xmlns:a="http://schemas.openxmlformats.org/drawingml/2006/main">
               <a:ext uri="{FF2B5EF4-FFF2-40B4-BE49-F238E27FC236}">
-                <a16:creationId xmlns:a16="http://schemas.microsoft.com/office/drawing/2014/main" id="{5D93D28C-237F-4A7E-8D5F-8B6C781085A6}"/>
+                <a16:creationId xmlns:a16="http://schemas.microsoft.com/office/drawing/2014/main" id="{5F8C1A66-34AE-45EC-888B-BF44EC330743}"/>
               </a:ext>
             </a:extLst>
           </p:cNvPr>
@@ -11199,7 +12066,7 @@
           <p:cNvPr id="3" name="step-label-1">
             <a:extLst xmlns:a="http://schemas.openxmlformats.org/drawingml/2006/main">
               <a:ext uri="{FF2B5EF4-FFF2-40B4-BE49-F238E27FC236}">
-                <a16:creationId xmlns:a16="http://schemas.microsoft.com/office/drawing/2014/main" id="{9529C2B4-51DA-4FBE-892E-4102F391F337}"/>
+                <a16:creationId xmlns:a16="http://schemas.microsoft.com/office/drawing/2014/main" id="{E4030F5D-B5A7-498F-B1BE-339808FEA7D7}"/>
               </a:ext>
             </a:extLst>
           </p:cNvPr>
@@ -11250,7 +12117,7 @@
           <p:cNvPr id="4" name="step-line-1">
             <a:extLst xmlns:a="http://schemas.openxmlformats.org/drawingml/2006/main">
               <a:ext uri="{FF2B5EF4-FFF2-40B4-BE49-F238E27FC236}">
-                <a16:creationId xmlns:a16="http://schemas.microsoft.com/office/drawing/2014/main" id="{3B19925D-C25A-453C-A84F-54AB3242A075}"/>
+                <a16:creationId xmlns:a16="http://schemas.microsoft.com/office/drawing/2014/main" id="{D580BBB6-F816-49AA-8F01-B943D2C144D8}"/>
               </a:ext>
             </a:extLst>
           </p:cNvPr>
@@ -11281,7 +12148,7 @@
           <p:cNvPr id="5" name="step-num-2">
             <a:extLst xmlns:a="http://schemas.openxmlformats.org/drawingml/2006/main">
               <a:ext uri="{FF2B5EF4-FFF2-40B4-BE49-F238E27FC236}">
-                <a16:creationId xmlns:a16="http://schemas.microsoft.com/office/drawing/2014/main" id="{39ED8BFA-4522-4A5B-A475-EFFD71E646F0}"/>
+                <a16:creationId xmlns:a16="http://schemas.microsoft.com/office/drawing/2014/main" id="{2755F98B-5158-4453-AFA8-35276F132684}"/>
               </a:ext>
             </a:extLst>
           </p:cNvPr>
@@ -11332,7 +12199,7 @@
           <p:cNvPr id="6" name="step-label-2">
             <a:extLst xmlns:a="http://schemas.openxmlformats.org/drawingml/2006/main">
               <a:ext uri="{FF2B5EF4-FFF2-40B4-BE49-F238E27FC236}">
-                <a16:creationId xmlns:a16="http://schemas.microsoft.com/office/drawing/2014/main" id="{BCC300CF-BD59-47D3-A7DF-3626F430C5F8}"/>
+                <a16:creationId xmlns:a16="http://schemas.microsoft.com/office/drawing/2014/main" id="{8C615266-55CC-4A6F-8723-FA36E121ECAF}"/>
               </a:ext>
             </a:extLst>
           </p:cNvPr>
@@ -11383,7 +12250,7 @@
           <p:cNvPr id="7" name="step-line-2">
             <a:extLst xmlns:a="http://schemas.openxmlformats.org/drawingml/2006/main">
               <a:ext uri="{FF2B5EF4-FFF2-40B4-BE49-F238E27FC236}">
-                <a16:creationId xmlns:a16="http://schemas.microsoft.com/office/drawing/2014/main" id="{CA49675A-4DC9-4CFF-8E1B-EA86CEAB799F}"/>
+                <a16:creationId xmlns:a16="http://schemas.microsoft.com/office/drawing/2014/main" id="{3AD69053-6505-4C4D-9B13-A654D3232CEF}"/>
               </a:ext>
             </a:extLst>
           </p:cNvPr>
@@ -11414,7 +12281,7 @@
           <p:cNvPr id="8" name="step-num-3">
             <a:extLst xmlns:a="http://schemas.openxmlformats.org/drawingml/2006/main">
               <a:ext uri="{FF2B5EF4-FFF2-40B4-BE49-F238E27FC236}">
-                <a16:creationId xmlns:a16="http://schemas.microsoft.com/office/drawing/2014/main" id="{01EE14EC-573C-49A9-BFFB-981433B2E2DB}"/>
+                <a16:creationId xmlns:a16="http://schemas.microsoft.com/office/drawing/2014/main" id="{4FAE0244-428D-4E5E-9A02-2E129F4AF335}"/>
               </a:ext>
             </a:extLst>
           </p:cNvPr>
@@ -11465,7 +12332,7 @@
           <p:cNvPr id="9" name="step-label-3">
             <a:extLst xmlns:a="http://schemas.openxmlformats.org/drawingml/2006/main">
               <a:ext uri="{FF2B5EF4-FFF2-40B4-BE49-F238E27FC236}">
-                <a16:creationId xmlns:a16="http://schemas.microsoft.com/office/drawing/2014/main" id="{0E851421-890B-473D-8A6E-AC9167CB6025}"/>
+                <a16:creationId xmlns:a16="http://schemas.microsoft.com/office/drawing/2014/main" id="{64F49834-7589-4043-BC00-F2C7E5BFA705}"/>
               </a:ext>
             </a:extLst>
           </p:cNvPr>
@@ -11516,7 +12383,7 @@
           <p:cNvPr id="10" name="eyebrow">
             <a:extLst xmlns:a="http://schemas.openxmlformats.org/drawingml/2006/main">
               <a:ext uri="{FF2B5EF4-FFF2-40B4-BE49-F238E27FC236}">
-                <a16:creationId xmlns:a16="http://schemas.microsoft.com/office/drawing/2014/main" id="{A860F7FA-2C1B-4E1E-AD4F-94560CBCD817}"/>
+                <a16:creationId xmlns:a16="http://schemas.microsoft.com/office/drawing/2014/main" id="{C8904519-3253-437B-8755-596F3287FAAC}"/>
               </a:ext>
             </a:extLst>
           </p:cNvPr>
@@ -11564,10 +12431,69 @@
       </p:sp>
       <p:sp>
         <p:nvSpPr>
-          <p:cNvPr id="11" name="footer-rule">
-            <a:extLst xmlns:a="http://schemas.openxmlformats.org/drawingml/2006/main">
-              <a:ext uri="{FF2B5EF4-FFF2-40B4-BE49-F238E27FC236}">
-                <a16:creationId xmlns:a16="http://schemas.microsoft.com/office/drawing/2014/main" id="{A1C120E8-04C0-49B2-A3C2-DD44393EB1D7}"/>
+          <p:cNvPr id="11" name="rescue-point-logo-background">
+            <a:extLst xmlns:a="http://schemas.openxmlformats.org/drawingml/2006/main">
+              <a:ext uri="{FF2B5EF4-FFF2-40B4-BE49-F238E27FC236}">
+                <a16:creationId xmlns:a16="http://schemas.microsoft.com/office/drawing/2014/main" id="{1DD6B42A-D9FB-4960-BE6C-212AD3227202}"/>
+              </a:ext>
+            </a:extLst>
+          </p:cNvPr>
+          <p:cNvSpPr>
+            <a:spLocks xmlns:a="http://schemas.openxmlformats.org/drawingml/2006/main" noGrp="1"/>
+          </p:cNvSpPr>
+          <p:nvPr/>
+        </p:nvSpPr>
+        <p:spPr>
+          <a:xfrm xmlns:a="http://schemas.openxmlformats.org/drawingml/2006/main">
+            <a:off x="9772650" y="133350"/>
+            <a:ext cx="1733550" cy="457200"/>
+          </a:xfrm>
+          <a:prstGeom xmlns:a="http://schemas.openxmlformats.org/drawingml/2006/main" prst="roundRect">
+            <a:avLst>
+              <a:gd name="adj" fmla="val 16667"/>
+            </a:avLst>
+          </a:prstGeom>
+          <a:solidFill xmlns:a="http://schemas.openxmlformats.org/drawingml/2006/main">
+            <a:srgbClr val="06142E"/>
+          </a:solidFill>
+          <a:ln xmlns:a="http://schemas.openxmlformats.org/drawingml/2006/main" w="9525">
+            <a:solidFill>
+              <a:srgbClr val="1EC5FF">
+                <a:alpha val="33333"/>
+              </a:srgbClr>
+            </a:solidFill>
+            <a:prstDash val="solid"/>
+          </a:ln>
+        </p:spPr>
+      </p:sp>
+      <p:pic>
+        <p:nvPicPr>
+          <p:cNvPr id="29" name="" descr="Figura oficial da documentação dbt usada para explicar: Ao final, você consegue... — 01."/>
+          <p:cNvPicPr>
+            <a:picLocks xmlns:a="http://schemas.openxmlformats.org/drawingml/2006/main" noChangeAspect="1"/>
+          </p:cNvPicPr>
+          <p:nvPr/>
+        </p:nvPicPr>
+        <p:blipFill>
+          <a:blip xmlns:r="http://schemas.openxmlformats.org/officeDocument/2006/relationships" xmlns:a="http://schemas.openxmlformats.org/drawingml/2006/main" r:embed="R789494440af341d1"/>
+          <a:stretch xmlns:a="http://schemas.openxmlformats.org/drawingml/2006/main"/>
+        </p:blipFill>
+        <p:spPr>
+          <a:xfrm xmlns:a="http://schemas.openxmlformats.org/drawingml/2006/main">
+            <a:off x="9893718" y="209550"/>
+            <a:ext cx="1491414" cy="323850"/>
+          </a:xfrm>
+          <a:prstGeom xmlns:a="http://schemas.openxmlformats.org/drawingml/2006/main" prst="rect">
+            <a:avLst/>
+          </a:prstGeom>
+        </p:spPr>
+      </p:pic>
+      <p:sp>
+        <p:nvSpPr>
+          <p:cNvPr id="13" name="footer-rule">
+            <a:extLst xmlns:a="http://schemas.openxmlformats.org/drawingml/2006/main">
+              <a:ext uri="{FF2B5EF4-FFF2-40B4-BE49-F238E27FC236}">
+                <a16:creationId xmlns:a16="http://schemas.microsoft.com/office/drawing/2014/main" id="{42618F20-2ED0-4C43-817C-ADB17E7C7742}"/>
               </a:ext>
             </a:extLst>
           </p:cNvPr>
@@ -11597,10 +12523,10 @@
       </p:sp>
       <p:sp>
         <p:nvSpPr>
-          <p:cNvPr id="12" name="footer">
-            <a:extLst xmlns:a="http://schemas.openxmlformats.org/drawingml/2006/main">
-              <a:ext uri="{FF2B5EF4-FFF2-40B4-BE49-F238E27FC236}">
-                <a16:creationId xmlns:a16="http://schemas.microsoft.com/office/drawing/2014/main" id="{7FD69E99-62AB-450F-8C26-988A5D8AA21A}"/>
+          <p:cNvPr id="14" name="footer">
+            <a:extLst xmlns:a="http://schemas.openxmlformats.org/drawingml/2006/main">
+              <a:ext uri="{FF2B5EF4-FFF2-40B4-BE49-F238E27FC236}">
+                <a16:creationId xmlns:a16="http://schemas.microsoft.com/office/drawing/2014/main" id="{48DC33AE-2D56-4845-A923-DFF05784EE1B}"/>
               </a:ext>
             </a:extLst>
           </p:cNvPr>
@@ -11652,10 +12578,10 @@
       </p:sp>
       <p:sp>
         <p:nvSpPr>
-          <p:cNvPr id="13" name="page-number">
-            <a:extLst xmlns:a="http://schemas.openxmlformats.org/drawingml/2006/main">
-              <a:ext uri="{FF2B5EF4-FFF2-40B4-BE49-F238E27FC236}">
-                <a16:creationId xmlns:a16="http://schemas.microsoft.com/office/drawing/2014/main" id="{E30A2E8F-71D0-45AA-B1D6-7F8D7B194868}"/>
+          <p:cNvPr id="15" name="page-number">
+            <a:extLst xmlns:a="http://schemas.openxmlformats.org/drawingml/2006/main">
+              <a:ext uri="{FF2B5EF4-FFF2-40B4-BE49-F238E27FC236}">
+                <a16:creationId xmlns:a16="http://schemas.microsoft.com/office/drawing/2014/main" id="{9CFB07FB-E606-428E-B277-8672FE0FD36A}"/>
               </a:ext>
             </a:extLst>
           </p:cNvPr>
@@ -11708,7 +12634,7 @@
     </p:spTree>
     <p:extLst>
       <p:ext uri="{BB962C8B-B14F-4D97-AF65-F5344CB8AC3E}">
-        <p14:creationId xmlns:p14="http://schemas.microsoft.com/office/powerpoint/2010/main" val="1207628426"/>
+        <p14:creationId xmlns:p14="http://schemas.microsoft.com/office/powerpoint/2010/main" val="76924134"/>
       </p:ext>
     </p:extLst>
   </p:cSld>
@@ -11744,10 +12670,10 @@
       </p:grpSpPr>
       <p:sp>
         <p:nvSpPr>
-          <p:cNvPr id="11" name="slide-title">
-            <a:extLst xmlns:a="http://schemas.openxmlformats.org/drawingml/2006/main">
-              <a:ext uri="{FF2B5EF4-FFF2-40B4-BE49-F238E27FC236}">
-                <a16:creationId xmlns:a16="http://schemas.microsoft.com/office/drawing/2014/main" id="{45EBB667-5660-402D-8E83-381946A2694F}"/>
+          <p:cNvPr id="13" name="slide-title">
+            <a:extLst xmlns:a="http://schemas.openxmlformats.org/drawingml/2006/main">
+              <a:ext uri="{FF2B5EF4-FFF2-40B4-BE49-F238E27FC236}">
+                <a16:creationId xmlns:a16="http://schemas.microsoft.com/office/drawing/2014/main" id="{D2931324-559C-4F53-8E47-14C60E1BEF3F}"/>
               </a:ext>
             </a:extLst>
           </p:cNvPr>
@@ -11798,7 +12724,7 @@
           <p:cNvPr id="2" name="slide-subtitle">
             <a:extLst xmlns:a="http://schemas.openxmlformats.org/drawingml/2006/main">
               <a:ext uri="{FF2B5EF4-FFF2-40B4-BE49-F238E27FC236}">
-                <a16:creationId xmlns:a16="http://schemas.microsoft.com/office/drawing/2014/main" id="{F94FDB9E-BDC4-430C-B04A-09DE614A053D}"/>
+                <a16:creationId xmlns:a16="http://schemas.microsoft.com/office/drawing/2014/main" id="{68588541-9E55-4330-B5C8-80F999A06BC4}"/>
               </a:ext>
             </a:extLst>
           </p:cNvPr>
@@ -11849,7 +12775,7 @@
           <p:cNvPr id="3" name="bullets">
             <a:extLst xmlns:a="http://schemas.openxmlformats.org/drawingml/2006/main">
               <a:ext uri="{FF2B5EF4-FFF2-40B4-BE49-F238E27FC236}">
-                <a16:creationId xmlns:a16="http://schemas.microsoft.com/office/drawing/2014/main" id="{F27B1501-AD13-4A38-990F-B27F64A6515F}"/>
+                <a16:creationId xmlns:a16="http://schemas.microsoft.com/office/drawing/2014/main" id="{F2D09F9C-1371-4293-A09C-3F9799A066B8}"/>
               </a:ext>
             </a:extLst>
           </p:cNvPr>
@@ -11936,7 +12862,7 @@
           <p:cNvPr id="4" name="ambient-glow">
             <a:extLst xmlns:a="http://schemas.openxmlformats.org/drawingml/2006/main">
               <a:ext uri="{FF2B5EF4-FFF2-40B4-BE49-F238E27FC236}">
-                <a16:creationId xmlns:a16="http://schemas.microsoft.com/office/drawing/2014/main" id="{2FFB12BF-B799-4F33-A5C4-B07A16254DD3}"/>
+                <a16:creationId xmlns:a16="http://schemas.microsoft.com/office/drawing/2014/main" id="{D1712B7F-4339-40E0-B410-A0FFE888F8A6}"/>
               </a:ext>
             </a:extLst>
           </p:cNvPr>
@@ -11973,7 +12899,7 @@
           <p:cNvPr id="5" name="ambient-core">
             <a:extLst xmlns:a="http://schemas.openxmlformats.org/drawingml/2006/main">
               <a:ext uri="{FF2B5EF4-FFF2-40B4-BE49-F238E27FC236}">
-                <a16:creationId xmlns:a16="http://schemas.microsoft.com/office/drawing/2014/main" id="{C866BD85-AEE4-4856-BD6E-9625CF725E75}"/>
+                <a16:creationId xmlns:a16="http://schemas.microsoft.com/office/drawing/2014/main" id="{87341961-0871-47FC-ACF5-6BD0C6DCE8C9}"/>
               </a:ext>
             </a:extLst>
           </p:cNvPr>
@@ -12010,7 +12936,7 @@
           <p:cNvPr id="6" name="section-number">
             <a:extLst xmlns:a="http://schemas.openxmlformats.org/drawingml/2006/main">
               <a:ext uri="{FF2B5EF4-FFF2-40B4-BE49-F238E27FC236}">
-                <a16:creationId xmlns:a16="http://schemas.microsoft.com/office/drawing/2014/main" id="{F257390D-8CCA-490F-B54D-D6E48757ED59}"/>
+                <a16:creationId xmlns:a16="http://schemas.microsoft.com/office/drawing/2014/main" id="{1074B5E5-CEFB-4A66-ACB6-788152CAB03C}"/>
               </a:ext>
             </a:extLst>
           </p:cNvPr>
@@ -12061,7 +12987,7 @@
           <p:cNvPr id="7" name="eyebrow">
             <a:extLst xmlns:a="http://schemas.openxmlformats.org/drawingml/2006/main">
               <a:ext uri="{FF2B5EF4-FFF2-40B4-BE49-F238E27FC236}">
-                <a16:creationId xmlns:a16="http://schemas.microsoft.com/office/drawing/2014/main" id="{E972D5FE-01C8-43FB-926A-BA0CC70AAE10}"/>
+                <a16:creationId xmlns:a16="http://schemas.microsoft.com/office/drawing/2014/main" id="{0C012D62-C19F-417C-BA3F-0BB2C216AB03}"/>
               </a:ext>
             </a:extLst>
           </p:cNvPr>
@@ -12109,10 +13035,69 @@
       </p:sp>
       <p:sp>
         <p:nvSpPr>
-          <p:cNvPr id="8" name="footer-rule">
-            <a:extLst xmlns:a="http://schemas.openxmlformats.org/drawingml/2006/main">
-              <a:ext uri="{FF2B5EF4-FFF2-40B4-BE49-F238E27FC236}">
-                <a16:creationId xmlns:a16="http://schemas.microsoft.com/office/drawing/2014/main" id="{3A868693-8215-4F89-BBEA-2B2D50CC21BA}"/>
+          <p:cNvPr id="8" name="rescue-point-logo-background">
+            <a:extLst xmlns:a="http://schemas.openxmlformats.org/drawingml/2006/main">
+              <a:ext uri="{FF2B5EF4-FFF2-40B4-BE49-F238E27FC236}">
+                <a16:creationId xmlns:a16="http://schemas.microsoft.com/office/drawing/2014/main" id="{A8955E7A-6C16-4CB0-B6D4-419B692515BB}"/>
+              </a:ext>
+            </a:extLst>
+          </p:cNvPr>
+          <p:cNvSpPr>
+            <a:spLocks xmlns:a="http://schemas.openxmlformats.org/drawingml/2006/main" noGrp="1"/>
+          </p:cNvSpPr>
+          <p:nvPr/>
+        </p:nvSpPr>
+        <p:spPr>
+          <a:xfrm xmlns:a="http://schemas.openxmlformats.org/drawingml/2006/main">
+            <a:off x="9772650" y="133350"/>
+            <a:ext cx="1733550" cy="457200"/>
+          </a:xfrm>
+          <a:prstGeom xmlns:a="http://schemas.openxmlformats.org/drawingml/2006/main" prst="roundRect">
+            <a:avLst>
+              <a:gd name="adj" fmla="val 16667"/>
+            </a:avLst>
+          </a:prstGeom>
+          <a:solidFill xmlns:a="http://schemas.openxmlformats.org/drawingml/2006/main">
+            <a:srgbClr val="06142E"/>
+          </a:solidFill>
+          <a:ln xmlns:a="http://schemas.openxmlformats.org/drawingml/2006/main" w="9525">
+            <a:solidFill>
+              <a:srgbClr val="1EC5FF">
+                <a:alpha val="33333"/>
+              </a:srgbClr>
+            </a:solidFill>
+            <a:prstDash val="solid"/>
+          </a:ln>
+        </p:spPr>
+      </p:sp>
+      <p:pic>
+        <p:nvPicPr>
+          <p:cNvPr id="23" name="" descr="Figura oficial da documentação dbt usada para explicar: Contrato protege forma, não verdade — Nomes e tipos podem estar corretos enquanto a regra de negócio está errada.."/>
+          <p:cNvPicPr>
+            <a:picLocks xmlns:a="http://schemas.openxmlformats.org/drawingml/2006/main" noChangeAspect="1"/>
+          </p:cNvPicPr>
+          <p:nvPr/>
+        </p:nvPicPr>
+        <p:blipFill>
+          <a:blip xmlns:r="http://schemas.openxmlformats.org/officeDocument/2006/relationships" xmlns:a="http://schemas.openxmlformats.org/drawingml/2006/main" r:embed="R2960ca4c740b4ab5"/>
+          <a:stretch xmlns:a="http://schemas.openxmlformats.org/drawingml/2006/main"/>
+        </p:blipFill>
+        <p:spPr>
+          <a:xfrm xmlns:a="http://schemas.openxmlformats.org/drawingml/2006/main">
+            <a:off x="9893718" y="209550"/>
+            <a:ext cx="1491414" cy="323850"/>
+          </a:xfrm>
+          <a:prstGeom xmlns:a="http://schemas.openxmlformats.org/drawingml/2006/main" prst="rect">
+            <a:avLst/>
+          </a:prstGeom>
+        </p:spPr>
+      </p:pic>
+      <p:sp>
+        <p:nvSpPr>
+          <p:cNvPr id="10" name="footer-rule">
+            <a:extLst xmlns:a="http://schemas.openxmlformats.org/drawingml/2006/main">
+              <a:ext uri="{FF2B5EF4-FFF2-40B4-BE49-F238E27FC236}">
+                <a16:creationId xmlns:a16="http://schemas.microsoft.com/office/drawing/2014/main" id="{3F6E642C-6324-4A4C-A1B4-508F69425299}"/>
               </a:ext>
             </a:extLst>
           </p:cNvPr>
@@ -12142,10 +13127,10 @@
       </p:sp>
       <p:sp>
         <p:nvSpPr>
-          <p:cNvPr id="9" name="footer">
-            <a:extLst xmlns:a="http://schemas.openxmlformats.org/drawingml/2006/main">
-              <a:ext uri="{FF2B5EF4-FFF2-40B4-BE49-F238E27FC236}">
-                <a16:creationId xmlns:a16="http://schemas.microsoft.com/office/drawing/2014/main" id="{A9DB125D-52F5-4979-BFED-5BF543D9C20D}"/>
+          <p:cNvPr id="11" name="footer">
+            <a:extLst xmlns:a="http://schemas.openxmlformats.org/drawingml/2006/main">
+              <a:ext uri="{FF2B5EF4-FFF2-40B4-BE49-F238E27FC236}">
+                <a16:creationId xmlns:a16="http://schemas.microsoft.com/office/drawing/2014/main" id="{346F94AE-FED3-4134-98E9-93F68914C9CB}"/>
               </a:ext>
             </a:extLst>
           </p:cNvPr>
@@ -12197,10 +13182,10 @@
       </p:sp>
       <p:sp>
         <p:nvSpPr>
-          <p:cNvPr id="10" name="page-number">
-            <a:extLst xmlns:a="http://schemas.openxmlformats.org/drawingml/2006/main">
-              <a:ext uri="{FF2B5EF4-FFF2-40B4-BE49-F238E27FC236}">
-                <a16:creationId xmlns:a16="http://schemas.microsoft.com/office/drawing/2014/main" id="{35253456-789E-45FD-9374-EBA06B1CE7D8}"/>
+          <p:cNvPr id="12" name="page-number">
+            <a:extLst xmlns:a="http://schemas.openxmlformats.org/drawingml/2006/main">
+              <a:ext uri="{FF2B5EF4-FFF2-40B4-BE49-F238E27FC236}">
+                <a16:creationId xmlns:a16="http://schemas.microsoft.com/office/drawing/2014/main" id="{5C4566C9-C365-4701-8A68-ECAED3F04F7B}"/>
               </a:ext>
             </a:extLst>
           </p:cNvPr>
@@ -12253,7 +13238,7 @@
     </p:spTree>
     <p:extLst>
       <p:ext uri="{BB962C8B-B14F-4D97-AF65-F5344CB8AC3E}">
-        <p14:creationId xmlns:p14="http://schemas.microsoft.com/office/powerpoint/2010/main" val="1074094517"/>
+        <p14:creationId xmlns:p14="http://schemas.microsoft.com/office/powerpoint/2010/main" val="1018520536"/>
       </p:ext>
     </p:extLst>
   </p:cSld>
@@ -12281,10 +13266,10 @@
       </p:grpSpPr>
       <p:sp>
         <p:nvSpPr>
-          <p:cNvPr id="11" name="slide-title">
-            <a:extLst xmlns:a="http://schemas.openxmlformats.org/drawingml/2006/main">
-              <a:ext uri="{FF2B5EF4-FFF2-40B4-BE49-F238E27FC236}">
-                <a16:creationId xmlns:a16="http://schemas.microsoft.com/office/drawing/2014/main" id="{85304EE4-FC0D-4BEE-8C6A-FBDAC03D936F}"/>
+          <p:cNvPr id="13" name="slide-title">
+            <a:extLst xmlns:a="http://schemas.openxmlformats.org/drawingml/2006/main">
+              <a:ext uri="{FF2B5EF4-FFF2-40B4-BE49-F238E27FC236}">
+                <a16:creationId xmlns:a16="http://schemas.microsoft.com/office/drawing/2014/main" id="{E59509A5-3CD5-4A39-BE8E-B79DB6C601EC}"/>
               </a:ext>
             </a:extLst>
           </p:cNvPr>
@@ -12335,7 +13320,7 @@
           <p:cNvPr id="2" name="slide-subtitle">
             <a:extLst xmlns:a="http://schemas.openxmlformats.org/drawingml/2006/main">
               <a:ext uri="{FF2B5EF4-FFF2-40B4-BE49-F238E27FC236}">
-                <a16:creationId xmlns:a16="http://schemas.microsoft.com/office/drawing/2014/main" id="{C86736DF-8DC7-471D-9A09-A03AE1D5F86D}"/>
+                <a16:creationId xmlns:a16="http://schemas.microsoft.com/office/drawing/2014/main" id="{9FF25294-CCD1-4DF9-BA8F-621C1637B271}"/>
               </a:ext>
             </a:extLst>
           </p:cNvPr>
@@ -12386,7 +13371,7 @@
           <p:cNvPr id="3" name="bullets">
             <a:extLst xmlns:a="http://schemas.openxmlformats.org/drawingml/2006/main">
               <a:ext uri="{FF2B5EF4-FFF2-40B4-BE49-F238E27FC236}">
-                <a16:creationId xmlns:a16="http://schemas.microsoft.com/office/drawing/2014/main" id="{00946014-E362-4891-BC0C-418E6452CAC5}"/>
+                <a16:creationId xmlns:a16="http://schemas.microsoft.com/office/drawing/2014/main" id="{CE4B6EAF-6888-409F-B50D-A07360D9FED4}"/>
               </a:ext>
             </a:extLst>
           </p:cNvPr>
@@ -12491,7 +13476,7 @@
           <p:cNvPr id="4" name="ambient-glow">
             <a:extLst xmlns:a="http://schemas.openxmlformats.org/drawingml/2006/main">
               <a:ext uri="{FF2B5EF4-FFF2-40B4-BE49-F238E27FC236}">
-                <a16:creationId xmlns:a16="http://schemas.microsoft.com/office/drawing/2014/main" id="{8038DCFD-B534-4AA1-9453-88CA08830DA7}"/>
+                <a16:creationId xmlns:a16="http://schemas.microsoft.com/office/drawing/2014/main" id="{DB721C89-E252-458A-8A0E-1FBE74355FCE}"/>
               </a:ext>
             </a:extLst>
           </p:cNvPr>
@@ -12528,7 +13513,7 @@
           <p:cNvPr id="5" name="ambient-core">
             <a:extLst xmlns:a="http://schemas.openxmlformats.org/drawingml/2006/main">
               <a:ext uri="{FF2B5EF4-FFF2-40B4-BE49-F238E27FC236}">
-                <a16:creationId xmlns:a16="http://schemas.microsoft.com/office/drawing/2014/main" id="{DA6B7C72-9B34-45D5-A461-614B04BF2388}"/>
+                <a16:creationId xmlns:a16="http://schemas.microsoft.com/office/drawing/2014/main" id="{0EF8B1C6-BA9C-4323-8DE4-97BD3E0E1D88}"/>
               </a:ext>
             </a:extLst>
           </p:cNvPr>
@@ -12565,7 +13550,7 @@
           <p:cNvPr id="6" name="section-number">
             <a:extLst xmlns:a="http://schemas.openxmlformats.org/drawingml/2006/main">
               <a:ext uri="{FF2B5EF4-FFF2-40B4-BE49-F238E27FC236}">
-                <a16:creationId xmlns:a16="http://schemas.microsoft.com/office/drawing/2014/main" id="{BA29B319-3FAA-4975-8FB6-8623D96123B0}"/>
+                <a16:creationId xmlns:a16="http://schemas.microsoft.com/office/drawing/2014/main" id="{93CCC16A-E15C-47EA-BB31-4D9C380431B5}"/>
               </a:ext>
             </a:extLst>
           </p:cNvPr>
@@ -12616,7 +13601,7 @@
           <p:cNvPr id="7" name="eyebrow">
             <a:extLst xmlns:a="http://schemas.openxmlformats.org/drawingml/2006/main">
               <a:ext uri="{FF2B5EF4-FFF2-40B4-BE49-F238E27FC236}">
-                <a16:creationId xmlns:a16="http://schemas.microsoft.com/office/drawing/2014/main" id="{0DE7D834-6E57-41DC-8B69-14A69F70C06E}"/>
+                <a16:creationId xmlns:a16="http://schemas.microsoft.com/office/drawing/2014/main" id="{C7F601C5-924E-4048-A1A3-7D182E9FE531}"/>
               </a:ext>
             </a:extLst>
           </p:cNvPr>
@@ -12664,10 +13649,69 @@
       </p:sp>
       <p:sp>
         <p:nvSpPr>
-          <p:cNvPr id="8" name="footer-rule">
-            <a:extLst xmlns:a="http://schemas.openxmlformats.org/drawingml/2006/main">
-              <a:ext uri="{FF2B5EF4-FFF2-40B4-BE49-F238E27FC236}">
-                <a16:creationId xmlns:a16="http://schemas.microsoft.com/office/drawing/2014/main" id="{3117965F-55B9-4D97-BEAC-2FE7F4D9B8CE}"/>
+          <p:cNvPr id="8" name="rescue-point-logo-background">
+            <a:extLst xmlns:a="http://schemas.openxmlformats.org/drawingml/2006/main">
+              <a:ext uri="{FF2B5EF4-FFF2-40B4-BE49-F238E27FC236}">
+                <a16:creationId xmlns:a16="http://schemas.microsoft.com/office/drawing/2014/main" id="{21C6D098-E2D7-45F7-91EB-E92B408CF60C}"/>
+              </a:ext>
+            </a:extLst>
+          </p:cNvPr>
+          <p:cNvSpPr>
+            <a:spLocks xmlns:a="http://schemas.openxmlformats.org/drawingml/2006/main" noGrp="1"/>
+          </p:cNvSpPr>
+          <p:nvPr/>
+        </p:nvSpPr>
+        <p:spPr>
+          <a:xfrm xmlns:a="http://schemas.openxmlformats.org/drawingml/2006/main">
+            <a:off x="9772650" y="133350"/>
+            <a:ext cx="1733550" cy="457200"/>
+          </a:xfrm>
+          <a:prstGeom xmlns:a="http://schemas.openxmlformats.org/drawingml/2006/main" prst="roundRect">
+            <a:avLst>
+              <a:gd name="adj" fmla="val 16667"/>
+            </a:avLst>
+          </a:prstGeom>
+          <a:solidFill xmlns:a="http://schemas.openxmlformats.org/drawingml/2006/main">
+            <a:srgbClr val="06142E"/>
+          </a:solidFill>
+          <a:ln xmlns:a="http://schemas.openxmlformats.org/drawingml/2006/main" w="9525">
+            <a:solidFill>
+              <a:srgbClr val="1EC5FF">
+                <a:alpha val="33333"/>
+              </a:srgbClr>
+            </a:solidFill>
+            <a:prstDash val="solid"/>
+          </a:ln>
+        </p:spPr>
+      </p:sp>
+      <p:pic>
+        <p:nvPicPr>
+          <p:cNvPr id="23" name="" descr="Figura oficial da documentação dbt usada para explicar: Contrate o limite público — Interfaces críticas merecem rigidez; staging ainda precisa evoluir.."/>
+          <p:cNvPicPr>
+            <a:picLocks xmlns:a="http://schemas.openxmlformats.org/drawingml/2006/main" noChangeAspect="1"/>
+          </p:cNvPicPr>
+          <p:nvPr/>
+        </p:nvPicPr>
+        <p:blipFill>
+          <a:blip xmlns:r="http://schemas.openxmlformats.org/officeDocument/2006/relationships" xmlns:a="http://schemas.openxmlformats.org/drawingml/2006/main" r:embed="R50ff741cc7654d59"/>
+          <a:stretch xmlns:a="http://schemas.openxmlformats.org/drawingml/2006/main"/>
+        </p:blipFill>
+        <p:spPr>
+          <a:xfrm xmlns:a="http://schemas.openxmlformats.org/drawingml/2006/main">
+            <a:off x="9893718" y="209550"/>
+            <a:ext cx="1491414" cy="323850"/>
+          </a:xfrm>
+          <a:prstGeom xmlns:a="http://schemas.openxmlformats.org/drawingml/2006/main" prst="rect">
+            <a:avLst/>
+          </a:prstGeom>
+        </p:spPr>
+      </p:pic>
+      <p:sp>
+        <p:nvSpPr>
+          <p:cNvPr id="10" name="footer-rule">
+            <a:extLst xmlns:a="http://schemas.openxmlformats.org/drawingml/2006/main">
+              <a:ext uri="{FF2B5EF4-FFF2-40B4-BE49-F238E27FC236}">
+                <a16:creationId xmlns:a16="http://schemas.microsoft.com/office/drawing/2014/main" id="{419DBF1D-D8F1-4C37-B7ED-2400DB3B7598}"/>
               </a:ext>
             </a:extLst>
           </p:cNvPr>
@@ -12697,10 +13741,10 @@
       </p:sp>
       <p:sp>
         <p:nvSpPr>
-          <p:cNvPr id="9" name="footer">
-            <a:extLst xmlns:a="http://schemas.openxmlformats.org/drawingml/2006/main">
-              <a:ext uri="{FF2B5EF4-FFF2-40B4-BE49-F238E27FC236}">
-                <a16:creationId xmlns:a16="http://schemas.microsoft.com/office/drawing/2014/main" id="{728BCA8B-8481-403D-A8B1-9E05FC09ED77}"/>
+          <p:cNvPr id="11" name="footer">
+            <a:extLst xmlns:a="http://schemas.openxmlformats.org/drawingml/2006/main">
+              <a:ext uri="{FF2B5EF4-FFF2-40B4-BE49-F238E27FC236}">
+                <a16:creationId xmlns:a16="http://schemas.microsoft.com/office/drawing/2014/main" id="{1BACAEF9-37A2-49A4-8498-EC447691535F}"/>
               </a:ext>
             </a:extLst>
           </p:cNvPr>
@@ -12752,10 +13796,10 @@
       </p:sp>
       <p:sp>
         <p:nvSpPr>
-          <p:cNvPr id="10" name="page-number">
-            <a:extLst xmlns:a="http://schemas.openxmlformats.org/drawingml/2006/main">
-              <a:ext uri="{FF2B5EF4-FFF2-40B4-BE49-F238E27FC236}">
-                <a16:creationId xmlns:a16="http://schemas.microsoft.com/office/drawing/2014/main" id="{13233146-6F51-4A1B-A4E5-856033DFB1C3}"/>
+          <p:cNvPr id="12" name="page-number">
+            <a:extLst xmlns:a="http://schemas.openxmlformats.org/drawingml/2006/main">
+              <a:ext uri="{FF2B5EF4-FFF2-40B4-BE49-F238E27FC236}">
+                <a16:creationId xmlns:a16="http://schemas.microsoft.com/office/drawing/2014/main" id="{FDB61567-5C1D-4D24-83D0-14B16359B17B}"/>
               </a:ext>
             </a:extLst>
           </p:cNvPr>
@@ -12808,7 +13852,7 @@
     </p:spTree>
     <p:extLst>
       <p:ext uri="{BB962C8B-B14F-4D97-AF65-F5344CB8AC3E}">
-        <p14:creationId xmlns:p14="http://schemas.microsoft.com/office/powerpoint/2010/main" val="477746742"/>
+        <p14:creationId xmlns:p14="http://schemas.microsoft.com/office/powerpoint/2010/main" val="1602910670"/>
       </p:ext>
     </p:extLst>
   </p:cSld>
@@ -12844,10 +13888,10 @@
       </p:grpSpPr>
       <p:sp>
         <p:nvSpPr>
-          <p:cNvPr id="11" name="slide-title">
-            <a:extLst xmlns:a="http://schemas.openxmlformats.org/drawingml/2006/main">
-              <a:ext uri="{FF2B5EF4-FFF2-40B4-BE49-F238E27FC236}">
-                <a16:creationId xmlns:a16="http://schemas.microsoft.com/office/drawing/2014/main" id="{E0F9BAE6-A593-4112-8453-E76B6A1A6061}"/>
+          <p:cNvPr id="13" name="slide-title">
+            <a:extLst xmlns:a="http://schemas.openxmlformats.org/drawingml/2006/main">
+              <a:ext uri="{FF2B5EF4-FFF2-40B4-BE49-F238E27FC236}">
+                <a16:creationId xmlns:a16="http://schemas.microsoft.com/office/drawing/2014/main" id="{E9556741-9344-474C-BD6D-438FA054F24F}"/>
               </a:ext>
             </a:extLst>
           </p:cNvPr>
@@ -12898,7 +13942,7 @@
           <p:cNvPr id="2" name="flow-1">
             <a:extLst xmlns:a="http://schemas.openxmlformats.org/drawingml/2006/main">
               <a:ext uri="{FF2B5EF4-FFF2-40B4-BE49-F238E27FC236}">
-                <a16:creationId xmlns:a16="http://schemas.microsoft.com/office/drawing/2014/main" id="{35AAF6F9-43D6-44A0-841A-CABD9947989B}"/>
+                <a16:creationId xmlns:a16="http://schemas.microsoft.com/office/drawing/2014/main" id="{7C790A0B-4060-4F02-ACA4-65608387CBCA}"/>
               </a:ext>
             </a:extLst>
           </p:cNvPr>
@@ -12955,7 +13999,7 @@
           <p:cNvPr id="3" name="flow-2">
             <a:extLst xmlns:a="http://schemas.openxmlformats.org/drawingml/2006/main">
               <a:ext uri="{FF2B5EF4-FFF2-40B4-BE49-F238E27FC236}">
-                <a16:creationId xmlns:a16="http://schemas.microsoft.com/office/drawing/2014/main" id="{67CE2BA7-EE8C-470A-8E48-110159B80949}"/>
+                <a16:creationId xmlns:a16="http://schemas.microsoft.com/office/drawing/2014/main" id="{25C635F4-7D14-491F-99DE-2B6C20467B20}"/>
               </a:ext>
             </a:extLst>
           </p:cNvPr>
@@ -13012,7 +14056,7 @@
           <p:cNvPr id="4" name="flow-3">
             <a:extLst xmlns:a="http://schemas.openxmlformats.org/drawingml/2006/main">
               <a:ext uri="{FF2B5EF4-FFF2-40B4-BE49-F238E27FC236}">
-                <a16:creationId xmlns:a16="http://schemas.microsoft.com/office/drawing/2014/main" id="{DB092ECA-EB32-4768-A772-E31E54F2165B}"/>
+                <a16:creationId xmlns:a16="http://schemas.microsoft.com/office/drawing/2014/main" id="{56995FF1-6F49-4B38-8E36-B4807FAF833F}"/>
               </a:ext>
             </a:extLst>
           </p:cNvPr>
@@ -13066,7 +14110,7 @@
       </p:sp>
       <p:cxnSp>
         <p:nvCxnSpPr>
-          <p:cNvPr id="21" name=""/>
+          <p:cNvPr id="24" name=""/>
           <p:cNvCxnSpPr>
             <a:stCxn xmlns:a="http://schemas.openxmlformats.org/drawingml/2006/main" id="2" idx="3"/>
             <a:endCxn xmlns:a="http://schemas.openxmlformats.org/drawingml/2006/main" id="3" idx="1"/>
@@ -13092,7 +14136,7 @@
       </p:cxnSp>
       <p:cxnSp>
         <p:nvCxnSpPr>
-          <p:cNvPr id="22" name=""/>
+          <p:cNvPr id="25" name=""/>
           <p:cNvCxnSpPr>
             <a:stCxn xmlns:a="http://schemas.openxmlformats.org/drawingml/2006/main" id="3" idx="3"/>
             <a:endCxn xmlns:a="http://schemas.openxmlformats.org/drawingml/2006/main" id="4" idx="1"/>
@@ -13121,7 +14165,7 @@
           <p:cNvPr id="7" name="eyebrow">
             <a:extLst xmlns:a="http://schemas.openxmlformats.org/drawingml/2006/main">
               <a:ext uri="{FF2B5EF4-FFF2-40B4-BE49-F238E27FC236}">
-                <a16:creationId xmlns:a16="http://schemas.microsoft.com/office/drawing/2014/main" id="{37959B4A-81C3-45C1-85F0-A392718F561C}"/>
+                <a16:creationId xmlns:a16="http://schemas.microsoft.com/office/drawing/2014/main" id="{14CEC216-872F-4C80-8A06-62ABF0928270}"/>
               </a:ext>
             </a:extLst>
           </p:cNvPr>
@@ -13169,10 +14213,69 @@
       </p:sp>
       <p:sp>
         <p:nvSpPr>
-          <p:cNvPr id="8" name="footer-rule">
-            <a:extLst xmlns:a="http://schemas.openxmlformats.org/drawingml/2006/main">
-              <a:ext uri="{FF2B5EF4-FFF2-40B4-BE49-F238E27FC236}">
-                <a16:creationId xmlns:a16="http://schemas.microsoft.com/office/drawing/2014/main" id="{8FF2583A-5450-4F3F-9F53-760E903F8506}"/>
+          <p:cNvPr id="8" name="rescue-point-logo-background">
+            <a:extLst xmlns:a="http://schemas.openxmlformats.org/drawingml/2006/main">
+              <a:ext uri="{FF2B5EF4-FFF2-40B4-BE49-F238E27FC236}">
+                <a16:creationId xmlns:a16="http://schemas.microsoft.com/office/drawing/2014/main" id="{83C656A1-60F6-413C-8FCE-C92BE1B6F4E6}"/>
+              </a:ext>
+            </a:extLst>
+          </p:cNvPr>
+          <p:cNvSpPr>
+            <a:spLocks xmlns:a="http://schemas.openxmlformats.org/drawingml/2006/main" noGrp="1"/>
+          </p:cNvSpPr>
+          <p:nvPr/>
+        </p:nvSpPr>
+        <p:spPr>
+          <a:xfrm xmlns:a="http://schemas.openxmlformats.org/drawingml/2006/main">
+            <a:off x="9772650" y="133350"/>
+            <a:ext cx="1733550" cy="457200"/>
+          </a:xfrm>
+          <a:prstGeom xmlns:a="http://schemas.openxmlformats.org/drawingml/2006/main" prst="roundRect">
+            <a:avLst>
+              <a:gd name="adj" fmla="val 16667"/>
+            </a:avLst>
+          </a:prstGeom>
+          <a:solidFill xmlns:a="http://schemas.openxmlformats.org/drawingml/2006/main">
+            <a:srgbClr val="06142E"/>
+          </a:solidFill>
+          <a:ln xmlns:a="http://schemas.openxmlformats.org/drawingml/2006/main" w="9525">
+            <a:solidFill>
+              <a:srgbClr val="1EC5FF">
+                <a:alpha val="33333"/>
+              </a:srgbClr>
+            </a:solidFill>
+            <a:prstDash val="solid"/>
+          </a:ln>
+        </p:spPr>
+      </p:sp>
+      <p:pic>
+        <p:nvPicPr>
+          <p:cNvPr id="28" name="" descr="Figura oficial da documentação dbt usada para explicar: Contrate o limite público — Privado."/>
+          <p:cNvPicPr>
+            <a:picLocks xmlns:a="http://schemas.openxmlformats.org/drawingml/2006/main" noChangeAspect="1"/>
+          </p:cNvPicPr>
+          <p:nvPr/>
+        </p:nvPicPr>
+        <p:blipFill>
+          <a:blip xmlns:r="http://schemas.openxmlformats.org/officeDocument/2006/relationships" xmlns:a="http://schemas.openxmlformats.org/drawingml/2006/main" r:embed="Rd4aeeba36b324ea3"/>
+          <a:stretch xmlns:a="http://schemas.openxmlformats.org/drawingml/2006/main"/>
+        </p:blipFill>
+        <p:spPr>
+          <a:xfrm xmlns:a="http://schemas.openxmlformats.org/drawingml/2006/main">
+            <a:off x="9893718" y="209550"/>
+            <a:ext cx="1491414" cy="323850"/>
+          </a:xfrm>
+          <a:prstGeom xmlns:a="http://schemas.openxmlformats.org/drawingml/2006/main" prst="rect">
+            <a:avLst/>
+          </a:prstGeom>
+        </p:spPr>
+      </p:pic>
+      <p:sp>
+        <p:nvSpPr>
+          <p:cNvPr id="10" name="footer-rule">
+            <a:extLst xmlns:a="http://schemas.openxmlformats.org/drawingml/2006/main">
+              <a:ext uri="{FF2B5EF4-FFF2-40B4-BE49-F238E27FC236}">
+                <a16:creationId xmlns:a16="http://schemas.microsoft.com/office/drawing/2014/main" id="{0EB214C6-F5B8-4073-9A69-6DFF6765D726}"/>
               </a:ext>
             </a:extLst>
           </p:cNvPr>
@@ -13202,10 +14305,10 @@
       </p:sp>
       <p:sp>
         <p:nvSpPr>
-          <p:cNvPr id="9" name="footer">
-            <a:extLst xmlns:a="http://schemas.openxmlformats.org/drawingml/2006/main">
-              <a:ext uri="{FF2B5EF4-FFF2-40B4-BE49-F238E27FC236}">
-                <a16:creationId xmlns:a16="http://schemas.microsoft.com/office/drawing/2014/main" id="{FFA7C502-5D5C-4639-BDED-9FFBA96658CF}"/>
+          <p:cNvPr id="11" name="footer">
+            <a:extLst xmlns:a="http://schemas.openxmlformats.org/drawingml/2006/main">
+              <a:ext uri="{FF2B5EF4-FFF2-40B4-BE49-F238E27FC236}">
+                <a16:creationId xmlns:a16="http://schemas.microsoft.com/office/drawing/2014/main" id="{5008D2D2-7F5D-4C33-B759-5663F618502A}"/>
               </a:ext>
             </a:extLst>
           </p:cNvPr>
@@ -13257,10 +14360,10 @@
       </p:sp>
       <p:sp>
         <p:nvSpPr>
-          <p:cNvPr id="10" name="page-number">
-            <a:extLst xmlns:a="http://schemas.openxmlformats.org/drawingml/2006/main">
-              <a:ext uri="{FF2B5EF4-FFF2-40B4-BE49-F238E27FC236}">
-                <a16:creationId xmlns:a16="http://schemas.microsoft.com/office/drawing/2014/main" id="{31969C46-4F80-48AA-AD37-B2A253D9E26A}"/>
+          <p:cNvPr id="12" name="page-number">
+            <a:extLst xmlns:a="http://schemas.openxmlformats.org/drawingml/2006/main">
+              <a:ext uri="{FF2B5EF4-FFF2-40B4-BE49-F238E27FC236}">
+                <a16:creationId xmlns:a16="http://schemas.microsoft.com/office/drawing/2014/main" id="{19E45A53-8D40-40B9-BF36-5E78DCB1FF1F}"/>
               </a:ext>
             </a:extLst>
           </p:cNvPr>
@@ -13313,7 +14416,7 @@
     </p:spTree>
     <p:extLst>
       <p:ext uri="{BB962C8B-B14F-4D97-AF65-F5344CB8AC3E}">
-        <p14:creationId xmlns:p14="http://schemas.microsoft.com/office/powerpoint/2010/main" val="1701254513"/>
+        <p14:creationId xmlns:p14="http://schemas.microsoft.com/office/powerpoint/2010/main" val="933413800"/>
       </p:ext>
     </p:extLst>
   </p:cSld>
@@ -13349,10 +14452,10 @@
       </p:grpSpPr>
       <p:sp>
         <p:nvSpPr>
-          <p:cNvPr id="11" name="slide-title">
-            <a:extLst xmlns:a="http://schemas.openxmlformats.org/drawingml/2006/main">
-              <a:ext uri="{FF2B5EF4-FFF2-40B4-BE49-F238E27FC236}">
-                <a16:creationId xmlns:a16="http://schemas.microsoft.com/office/drawing/2014/main" id="{A9AFD03C-53D1-4A18-B52F-E05D0B964E2E}"/>
+          <p:cNvPr id="13" name="slide-title">
+            <a:extLst xmlns:a="http://schemas.openxmlformats.org/drawingml/2006/main">
+              <a:ext uri="{FF2B5EF4-FFF2-40B4-BE49-F238E27FC236}">
+                <a16:creationId xmlns:a16="http://schemas.microsoft.com/office/drawing/2014/main" id="{646B28CC-2B73-4401-87FB-551C5E165159}"/>
               </a:ext>
             </a:extLst>
           </p:cNvPr>
@@ -13403,7 +14506,7 @@
           <p:cNvPr id="2" name="slide-subtitle">
             <a:extLst xmlns:a="http://schemas.openxmlformats.org/drawingml/2006/main">
               <a:ext uri="{FF2B5EF4-FFF2-40B4-BE49-F238E27FC236}">
-                <a16:creationId xmlns:a16="http://schemas.microsoft.com/office/drawing/2014/main" id="{18A8C437-89D4-477C-B893-34D5A149CF1B}"/>
+                <a16:creationId xmlns:a16="http://schemas.microsoft.com/office/drawing/2014/main" id="{8AAEE6E1-4899-46D6-A018-6882CD845EEA}"/>
               </a:ext>
             </a:extLst>
           </p:cNvPr>
@@ -13454,7 +14557,7 @@
           <p:cNvPr id="3" name="bullets">
             <a:extLst xmlns:a="http://schemas.openxmlformats.org/drawingml/2006/main">
               <a:ext uri="{FF2B5EF4-FFF2-40B4-BE49-F238E27FC236}">
-                <a16:creationId xmlns:a16="http://schemas.microsoft.com/office/drawing/2014/main" id="{2ACDC49A-F8E5-4B5F-B615-081E02A78272}"/>
+                <a16:creationId xmlns:a16="http://schemas.microsoft.com/office/drawing/2014/main" id="{410C8083-9674-437B-ABBD-93A3C4E7DC63}"/>
               </a:ext>
             </a:extLst>
           </p:cNvPr>
@@ -13541,7 +14644,7 @@
           <p:cNvPr id="4" name="ambient-glow">
             <a:extLst xmlns:a="http://schemas.openxmlformats.org/drawingml/2006/main">
               <a:ext uri="{FF2B5EF4-FFF2-40B4-BE49-F238E27FC236}">
-                <a16:creationId xmlns:a16="http://schemas.microsoft.com/office/drawing/2014/main" id="{66F88993-948A-4D1B-A0FA-AA67FF768043}"/>
+                <a16:creationId xmlns:a16="http://schemas.microsoft.com/office/drawing/2014/main" id="{BE98D177-27F5-4F94-AA15-3F78C1F4E6F3}"/>
               </a:ext>
             </a:extLst>
           </p:cNvPr>
@@ -13578,7 +14681,7 @@
           <p:cNvPr id="5" name="ambient-core">
             <a:extLst xmlns:a="http://schemas.openxmlformats.org/drawingml/2006/main">
               <a:ext uri="{FF2B5EF4-FFF2-40B4-BE49-F238E27FC236}">
-                <a16:creationId xmlns:a16="http://schemas.microsoft.com/office/drawing/2014/main" id="{83FB3038-B492-4500-9287-DCB73B29BFD9}"/>
+                <a16:creationId xmlns:a16="http://schemas.microsoft.com/office/drawing/2014/main" id="{BBC41AAF-98F9-4635-9C80-790CB26C4A95}"/>
               </a:ext>
             </a:extLst>
           </p:cNvPr>
@@ -13615,7 +14718,7 @@
           <p:cNvPr id="6" name="section-number">
             <a:extLst xmlns:a="http://schemas.openxmlformats.org/drawingml/2006/main">
               <a:ext uri="{FF2B5EF4-FFF2-40B4-BE49-F238E27FC236}">
-                <a16:creationId xmlns:a16="http://schemas.microsoft.com/office/drawing/2014/main" id="{1BF1672E-0CC7-4BCB-9B7F-A9BADDE21B7E}"/>
+                <a16:creationId xmlns:a16="http://schemas.microsoft.com/office/drawing/2014/main" id="{F922C586-38AA-4CD8-ABD8-F5A78D2220B1}"/>
               </a:ext>
             </a:extLst>
           </p:cNvPr>
@@ -13666,7 +14769,7 @@
           <p:cNvPr id="7" name="eyebrow">
             <a:extLst xmlns:a="http://schemas.openxmlformats.org/drawingml/2006/main">
               <a:ext uri="{FF2B5EF4-FFF2-40B4-BE49-F238E27FC236}">
-                <a16:creationId xmlns:a16="http://schemas.microsoft.com/office/drawing/2014/main" id="{814152BA-801B-4525-AE9B-50DAB92AF04B}"/>
+                <a16:creationId xmlns:a16="http://schemas.microsoft.com/office/drawing/2014/main" id="{14D97566-94E0-4AD5-8B98-01FAC3FE2408}"/>
               </a:ext>
             </a:extLst>
           </p:cNvPr>
@@ -13714,10 +14817,69 @@
       </p:sp>
       <p:sp>
         <p:nvSpPr>
-          <p:cNvPr id="8" name="footer-rule">
-            <a:extLst xmlns:a="http://schemas.openxmlformats.org/drawingml/2006/main">
-              <a:ext uri="{FF2B5EF4-FFF2-40B4-BE49-F238E27FC236}">
-                <a16:creationId xmlns:a16="http://schemas.microsoft.com/office/drawing/2014/main" id="{57C4C952-FACC-4392-BA08-FE75E8619B3F}"/>
+          <p:cNvPr id="8" name="rescue-point-logo-background">
+            <a:extLst xmlns:a="http://schemas.openxmlformats.org/drawingml/2006/main">
+              <a:ext uri="{FF2B5EF4-FFF2-40B4-BE49-F238E27FC236}">
+                <a16:creationId xmlns:a16="http://schemas.microsoft.com/office/drawing/2014/main" id="{9067EFA6-438E-41A7-BEFD-070E5FC7BF3C}"/>
+              </a:ext>
+            </a:extLst>
+          </p:cNvPr>
+          <p:cNvSpPr>
+            <a:spLocks xmlns:a="http://schemas.openxmlformats.org/drawingml/2006/main" noGrp="1"/>
+          </p:cNvSpPr>
+          <p:nvPr/>
+        </p:nvSpPr>
+        <p:spPr>
+          <a:xfrm xmlns:a="http://schemas.openxmlformats.org/drawingml/2006/main">
+            <a:off x="9772650" y="133350"/>
+            <a:ext cx="1733550" cy="457200"/>
+          </a:xfrm>
+          <a:prstGeom xmlns:a="http://schemas.openxmlformats.org/drawingml/2006/main" prst="roundRect">
+            <a:avLst>
+              <a:gd name="adj" fmla="val 16667"/>
+            </a:avLst>
+          </a:prstGeom>
+          <a:solidFill xmlns:a="http://schemas.openxmlformats.org/drawingml/2006/main">
+            <a:srgbClr val="06142E"/>
+          </a:solidFill>
+          <a:ln xmlns:a="http://schemas.openxmlformats.org/drawingml/2006/main" w="9525">
+            <a:solidFill>
+              <a:srgbClr val="1EC5FF">
+                <a:alpha val="33333"/>
+              </a:srgbClr>
+            </a:solidFill>
+            <a:prstDash val="solid"/>
+          </a:ln>
+        </p:spPr>
+      </p:sp>
+      <p:pic>
+        <p:nvPicPr>
+          <p:cNvPr id="23" name="" descr="Figura oficial da documentação dbt usada para explicar: Versão é para mudança incompatível — Remover coluna pede nova versão; adicionar coluna costuma ser compatível.."/>
+          <p:cNvPicPr>
+            <a:picLocks xmlns:a="http://schemas.openxmlformats.org/drawingml/2006/main" noChangeAspect="1"/>
+          </p:cNvPicPr>
+          <p:nvPr/>
+        </p:nvPicPr>
+        <p:blipFill>
+          <a:blip xmlns:r="http://schemas.openxmlformats.org/officeDocument/2006/relationships" xmlns:a="http://schemas.openxmlformats.org/drawingml/2006/main" r:embed="Rf5d95f6025f249ca"/>
+          <a:stretch xmlns:a="http://schemas.openxmlformats.org/drawingml/2006/main"/>
+        </p:blipFill>
+        <p:spPr>
+          <a:xfrm xmlns:a="http://schemas.openxmlformats.org/drawingml/2006/main">
+            <a:off x="9893718" y="209550"/>
+            <a:ext cx="1491414" cy="323850"/>
+          </a:xfrm>
+          <a:prstGeom xmlns:a="http://schemas.openxmlformats.org/drawingml/2006/main" prst="rect">
+            <a:avLst/>
+          </a:prstGeom>
+        </p:spPr>
+      </p:pic>
+      <p:sp>
+        <p:nvSpPr>
+          <p:cNvPr id="10" name="footer-rule">
+            <a:extLst xmlns:a="http://schemas.openxmlformats.org/drawingml/2006/main">
+              <a:ext uri="{FF2B5EF4-FFF2-40B4-BE49-F238E27FC236}">
+                <a16:creationId xmlns:a16="http://schemas.microsoft.com/office/drawing/2014/main" id="{B5714BB3-C18C-4248-8312-201B4ECCC9C4}"/>
               </a:ext>
             </a:extLst>
           </p:cNvPr>
@@ -13747,10 +14909,10 @@
       </p:sp>
       <p:sp>
         <p:nvSpPr>
-          <p:cNvPr id="9" name="footer">
-            <a:extLst xmlns:a="http://schemas.openxmlformats.org/drawingml/2006/main">
-              <a:ext uri="{FF2B5EF4-FFF2-40B4-BE49-F238E27FC236}">
-                <a16:creationId xmlns:a16="http://schemas.microsoft.com/office/drawing/2014/main" id="{9526A79D-11D4-4597-93D7-46A92C558876}"/>
+          <p:cNvPr id="11" name="footer">
+            <a:extLst xmlns:a="http://schemas.openxmlformats.org/drawingml/2006/main">
+              <a:ext uri="{FF2B5EF4-FFF2-40B4-BE49-F238E27FC236}">
+                <a16:creationId xmlns:a16="http://schemas.microsoft.com/office/drawing/2014/main" id="{E10B318B-9621-4B9A-8149-094D86AF4E77}"/>
               </a:ext>
             </a:extLst>
           </p:cNvPr>
@@ -13802,10 +14964,10 @@
       </p:sp>
       <p:sp>
         <p:nvSpPr>
-          <p:cNvPr id="10" name="page-number">
-            <a:extLst xmlns:a="http://schemas.openxmlformats.org/drawingml/2006/main">
-              <a:ext uri="{FF2B5EF4-FFF2-40B4-BE49-F238E27FC236}">
-                <a16:creationId xmlns:a16="http://schemas.microsoft.com/office/drawing/2014/main" id="{A200EBED-937C-450F-98D1-3DA0845F6881}"/>
+          <p:cNvPr id="12" name="page-number">
+            <a:extLst xmlns:a="http://schemas.openxmlformats.org/drawingml/2006/main">
+              <a:ext uri="{FF2B5EF4-FFF2-40B4-BE49-F238E27FC236}">
+                <a16:creationId xmlns:a16="http://schemas.microsoft.com/office/drawing/2014/main" id="{9100E1B0-3B93-42C9-9058-D32EC098AFCD}"/>
               </a:ext>
             </a:extLst>
           </p:cNvPr>
@@ -13858,7 +15020,7 @@
     </p:spTree>
     <p:extLst>
       <p:ext uri="{BB962C8B-B14F-4D97-AF65-F5344CB8AC3E}">
-        <p14:creationId xmlns:p14="http://schemas.microsoft.com/office/powerpoint/2010/main" val="865305492"/>
+        <p14:creationId xmlns:p14="http://schemas.microsoft.com/office/powerpoint/2010/main" val="2036114209"/>
       </p:ext>
     </p:extLst>
   </p:cSld>
@@ -13886,10 +15048,10 @@
       </p:grpSpPr>
       <p:sp>
         <p:nvSpPr>
-          <p:cNvPr id="11" name="slide-title">
-            <a:extLst xmlns:a="http://schemas.openxmlformats.org/drawingml/2006/main">
-              <a:ext uri="{FF2B5EF4-FFF2-40B4-BE49-F238E27FC236}">
-                <a16:creationId xmlns:a16="http://schemas.microsoft.com/office/drawing/2014/main" id="{F1F760FB-7F7C-4E23-BDE1-7E87BBA555D6}"/>
+          <p:cNvPr id="13" name="slide-title">
+            <a:extLst xmlns:a="http://schemas.openxmlformats.org/drawingml/2006/main">
+              <a:ext uri="{FF2B5EF4-FFF2-40B4-BE49-F238E27FC236}">
+                <a16:creationId xmlns:a16="http://schemas.microsoft.com/office/drawing/2014/main" id="{88E16B05-3CA2-4C53-A070-5B1D1B0074E5}"/>
               </a:ext>
             </a:extLst>
           </p:cNvPr>
@@ -13940,7 +15102,7 @@
           <p:cNvPr id="2" name="compare-left-title">
             <a:extLst xmlns:a="http://schemas.openxmlformats.org/drawingml/2006/main">
               <a:ext uri="{FF2B5EF4-FFF2-40B4-BE49-F238E27FC236}">
-                <a16:creationId xmlns:a16="http://schemas.microsoft.com/office/drawing/2014/main" id="{23FED759-C306-4A18-BB07-24509847FB78}"/>
+                <a16:creationId xmlns:a16="http://schemas.microsoft.com/office/drawing/2014/main" id="{5F4EBD96-76D2-41A9-B650-636FAAB71054}"/>
               </a:ext>
             </a:extLst>
           </p:cNvPr>
@@ -13991,7 +15153,7 @@
           <p:cNvPr id="3" name="compare-right-title">
             <a:extLst xmlns:a="http://schemas.openxmlformats.org/drawingml/2006/main">
               <a:ext uri="{FF2B5EF4-FFF2-40B4-BE49-F238E27FC236}">
-                <a16:creationId xmlns:a16="http://schemas.microsoft.com/office/drawing/2014/main" id="{B0F7D172-68C7-435F-B0E3-E7FC79E96085}"/>
+                <a16:creationId xmlns:a16="http://schemas.microsoft.com/office/drawing/2014/main" id="{4C8BEB48-3431-410E-913C-3BF035DADD7D}"/>
               </a:ext>
             </a:extLst>
           </p:cNvPr>
@@ -14042,7 +15204,7 @@
           <p:cNvPr id="4" name="compare-divider">
             <a:extLst xmlns:a="http://schemas.openxmlformats.org/drawingml/2006/main">
               <a:ext uri="{FF2B5EF4-FFF2-40B4-BE49-F238E27FC236}">
-                <a16:creationId xmlns:a16="http://schemas.microsoft.com/office/drawing/2014/main" id="{7123BABE-F370-4490-B13F-3D8D1AD7062E}"/>
+                <a16:creationId xmlns:a16="http://schemas.microsoft.com/office/drawing/2014/main" id="{38FB8203-A23F-4B86-AB36-ADA8C56AF703}"/>
               </a:ext>
             </a:extLst>
           </p:cNvPr>
@@ -14073,7 +15235,7 @@
           <p:cNvPr id="5" name="bullets">
             <a:extLst xmlns:a="http://schemas.openxmlformats.org/drawingml/2006/main">
               <a:ext uri="{FF2B5EF4-FFF2-40B4-BE49-F238E27FC236}">
-                <a16:creationId xmlns:a16="http://schemas.microsoft.com/office/drawing/2014/main" id="{99B53FC9-10BE-467F-A025-BE64D1281551}"/>
+                <a16:creationId xmlns:a16="http://schemas.microsoft.com/office/drawing/2014/main" id="{5CD63344-A132-40E0-8D2B-311FB11BAE2F}"/>
               </a:ext>
             </a:extLst>
           </p:cNvPr>
@@ -14142,7 +15304,7 @@
           <p:cNvPr id="6" name="bullets">
             <a:extLst xmlns:a="http://schemas.openxmlformats.org/drawingml/2006/main">
               <a:ext uri="{FF2B5EF4-FFF2-40B4-BE49-F238E27FC236}">
-                <a16:creationId xmlns:a16="http://schemas.microsoft.com/office/drawing/2014/main" id="{46023E8F-4B4B-4B15-BD5F-41550E1ECE27}"/>
+                <a16:creationId xmlns:a16="http://schemas.microsoft.com/office/drawing/2014/main" id="{86ADB0F0-21B8-4F27-AE21-BD116072F53C}"/>
               </a:ext>
             </a:extLst>
           </p:cNvPr>
@@ -14193,7 +15355,7 @@
           <p:cNvPr id="7" name="eyebrow">
             <a:extLst xmlns:a="http://schemas.openxmlformats.org/drawingml/2006/main">
               <a:ext uri="{FF2B5EF4-FFF2-40B4-BE49-F238E27FC236}">
-                <a16:creationId xmlns:a16="http://schemas.microsoft.com/office/drawing/2014/main" id="{B4432901-7EDF-4F2D-9B17-92F28577C267}"/>
+                <a16:creationId xmlns:a16="http://schemas.microsoft.com/office/drawing/2014/main" id="{45C3CF2B-177C-4EEC-9F49-B0BBC29A6B96}"/>
               </a:ext>
             </a:extLst>
           </p:cNvPr>
@@ -14241,10 +15403,69 @@
       </p:sp>
       <p:sp>
         <p:nvSpPr>
-          <p:cNvPr id="8" name="footer-rule">
-            <a:extLst xmlns:a="http://schemas.openxmlformats.org/drawingml/2006/main">
-              <a:ext uri="{FF2B5EF4-FFF2-40B4-BE49-F238E27FC236}">
-                <a16:creationId xmlns:a16="http://schemas.microsoft.com/office/drawing/2014/main" id="{BBB4D7FA-C965-4C23-8E41-C2A8EC44F1D6}"/>
+          <p:cNvPr id="8" name="rescue-point-logo-background">
+            <a:extLst xmlns:a="http://schemas.openxmlformats.org/drawingml/2006/main">
+              <a:ext uri="{FF2B5EF4-FFF2-40B4-BE49-F238E27FC236}">
+                <a16:creationId xmlns:a16="http://schemas.microsoft.com/office/drawing/2014/main" id="{BBD3E2B8-E299-4C39-99E4-203D24C4254D}"/>
+              </a:ext>
+            </a:extLst>
+          </p:cNvPr>
+          <p:cNvSpPr>
+            <a:spLocks xmlns:a="http://schemas.openxmlformats.org/drawingml/2006/main" noGrp="1"/>
+          </p:cNvSpPr>
+          <p:nvPr/>
+        </p:nvSpPr>
+        <p:spPr>
+          <a:xfrm xmlns:a="http://schemas.openxmlformats.org/drawingml/2006/main">
+            <a:off x="9772650" y="133350"/>
+            <a:ext cx="1733550" cy="457200"/>
+          </a:xfrm>
+          <a:prstGeom xmlns:a="http://schemas.openxmlformats.org/drawingml/2006/main" prst="roundRect">
+            <a:avLst>
+              <a:gd name="adj" fmla="val 16667"/>
+            </a:avLst>
+          </a:prstGeom>
+          <a:solidFill xmlns:a="http://schemas.openxmlformats.org/drawingml/2006/main">
+            <a:srgbClr val="06142E"/>
+          </a:solidFill>
+          <a:ln xmlns:a="http://schemas.openxmlformats.org/drawingml/2006/main" w="9525">
+            <a:solidFill>
+              <a:srgbClr val="1EC5FF">
+                <a:alpha val="33333"/>
+              </a:srgbClr>
+            </a:solidFill>
+            <a:prstDash val="solid"/>
+          </a:ln>
+        </p:spPr>
+      </p:sp>
+      <p:pic>
+        <p:nvPicPr>
+          <p:cNvPr id="23" name="" descr="Figura oficial da documentação dbt usada para explicar: Versão é para mudança incompatível — v1."/>
+          <p:cNvPicPr>
+            <a:picLocks xmlns:a="http://schemas.openxmlformats.org/drawingml/2006/main" noChangeAspect="1"/>
+          </p:cNvPicPr>
+          <p:nvPr/>
+        </p:nvPicPr>
+        <p:blipFill>
+          <a:blip xmlns:r="http://schemas.openxmlformats.org/officeDocument/2006/relationships" xmlns:a="http://schemas.openxmlformats.org/drawingml/2006/main" r:embed="R4f843b6fed95409d"/>
+          <a:stretch xmlns:a="http://schemas.openxmlformats.org/drawingml/2006/main"/>
+        </p:blipFill>
+        <p:spPr>
+          <a:xfrm xmlns:a="http://schemas.openxmlformats.org/drawingml/2006/main">
+            <a:off x="9893718" y="209550"/>
+            <a:ext cx="1491414" cy="323850"/>
+          </a:xfrm>
+          <a:prstGeom xmlns:a="http://schemas.openxmlformats.org/drawingml/2006/main" prst="rect">
+            <a:avLst/>
+          </a:prstGeom>
+        </p:spPr>
+      </p:pic>
+      <p:sp>
+        <p:nvSpPr>
+          <p:cNvPr id="10" name="footer-rule">
+            <a:extLst xmlns:a="http://schemas.openxmlformats.org/drawingml/2006/main">
+              <a:ext uri="{FF2B5EF4-FFF2-40B4-BE49-F238E27FC236}">
+                <a16:creationId xmlns:a16="http://schemas.microsoft.com/office/drawing/2014/main" id="{CA49FF8D-C5D4-4910-A353-62EDC1368023}"/>
               </a:ext>
             </a:extLst>
           </p:cNvPr>
@@ -14274,10 +15495,10 @@
       </p:sp>
       <p:sp>
         <p:nvSpPr>
-          <p:cNvPr id="9" name="footer">
-            <a:extLst xmlns:a="http://schemas.openxmlformats.org/drawingml/2006/main">
-              <a:ext uri="{FF2B5EF4-FFF2-40B4-BE49-F238E27FC236}">
-                <a16:creationId xmlns:a16="http://schemas.microsoft.com/office/drawing/2014/main" id="{24461585-3C18-44AE-A654-B7D008000C3D}"/>
+          <p:cNvPr id="11" name="footer">
+            <a:extLst xmlns:a="http://schemas.openxmlformats.org/drawingml/2006/main">
+              <a:ext uri="{FF2B5EF4-FFF2-40B4-BE49-F238E27FC236}">
+                <a16:creationId xmlns:a16="http://schemas.microsoft.com/office/drawing/2014/main" id="{08084C15-4454-4F60-84F1-7FFCBB6D89D0}"/>
               </a:ext>
             </a:extLst>
           </p:cNvPr>
@@ -14329,10 +15550,10 @@
       </p:sp>
       <p:sp>
         <p:nvSpPr>
-          <p:cNvPr id="10" name="page-number">
-            <a:extLst xmlns:a="http://schemas.openxmlformats.org/drawingml/2006/main">
-              <a:ext uri="{FF2B5EF4-FFF2-40B4-BE49-F238E27FC236}">
-                <a16:creationId xmlns:a16="http://schemas.microsoft.com/office/drawing/2014/main" id="{56F55993-C415-4A39-A4DF-EA59787BA7FF}"/>
+          <p:cNvPr id="12" name="page-number">
+            <a:extLst xmlns:a="http://schemas.openxmlformats.org/drawingml/2006/main">
+              <a:ext uri="{FF2B5EF4-FFF2-40B4-BE49-F238E27FC236}">
+                <a16:creationId xmlns:a16="http://schemas.microsoft.com/office/drawing/2014/main" id="{CD06264C-939A-4DB0-A93A-7B5F2C793759}"/>
               </a:ext>
             </a:extLst>
           </p:cNvPr>
@@ -14385,7 +15606,7 @@
     </p:spTree>
     <p:extLst>
       <p:ext uri="{BB962C8B-B14F-4D97-AF65-F5344CB8AC3E}">
-        <p14:creationId xmlns:p14="http://schemas.microsoft.com/office/powerpoint/2010/main" val="1380866312"/>
+        <p14:creationId xmlns:p14="http://schemas.microsoft.com/office/powerpoint/2010/main" val="1752034380"/>
       </p:ext>
     </p:extLst>
   </p:cSld>
@@ -14413,10 +15634,10 @@
       </p:grpSpPr>
       <p:sp>
         <p:nvSpPr>
-          <p:cNvPr id="11" name="slide-title">
-            <a:extLst xmlns:a="http://schemas.openxmlformats.org/drawingml/2006/main">
-              <a:ext uri="{FF2B5EF4-FFF2-40B4-BE49-F238E27FC236}">
-                <a16:creationId xmlns:a16="http://schemas.microsoft.com/office/drawing/2014/main" id="{1AE85A37-1895-4D2B-973D-FF4F9A6E7C14}"/>
+          <p:cNvPr id="13" name="slide-title">
+            <a:extLst xmlns:a="http://schemas.openxmlformats.org/drawingml/2006/main">
+              <a:ext uri="{FF2B5EF4-FFF2-40B4-BE49-F238E27FC236}">
+                <a16:creationId xmlns:a16="http://schemas.microsoft.com/office/drawing/2014/main" id="{943CDDB7-D8BE-4078-96DB-C1A2C1109FC1}"/>
               </a:ext>
             </a:extLst>
           </p:cNvPr>
@@ -14467,7 +15688,7 @@
           <p:cNvPr id="2" name="slide-subtitle">
             <a:extLst xmlns:a="http://schemas.openxmlformats.org/drawingml/2006/main">
               <a:ext uri="{FF2B5EF4-FFF2-40B4-BE49-F238E27FC236}">
-                <a16:creationId xmlns:a16="http://schemas.microsoft.com/office/drawing/2014/main" id="{35EF640B-F074-4F63-90F9-85E48A3FEAEA}"/>
+                <a16:creationId xmlns:a16="http://schemas.microsoft.com/office/drawing/2014/main" id="{ED5CA1B9-D5BC-42CA-BF77-7A228F53FFF5}"/>
               </a:ext>
             </a:extLst>
           </p:cNvPr>
@@ -14518,7 +15739,7 @@
           <p:cNvPr id="3" name="bullets">
             <a:extLst xmlns:a="http://schemas.openxmlformats.org/drawingml/2006/main">
               <a:ext uri="{FF2B5EF4-FFF2-40B4-BE49-F238E27FC236}">
-                <a16:creationId xmlns:a16="http://schemas.microsoft.com/office/drawing/2014/main" id="{2B80832A-C6E1-4E23-A375-A335AD857A7D}"/>
+                <a16:creationId xmlns:a16="http://schemas.microsoft.com/office/drawing/2014/main" id="{C8C4B434-F159-4F0A-8434-56108CA83F7F}"/>
               </a:ext>
             </a:extLst>
           </p:cNvPr>
@@ -14623,7 +15844,7 @@
           <p:cNvPr id="4" name="ambient-glow">
             <a:extLst xmlns:a="http://schemas.openxmlformats.org/drawingml/2006/main">
               <a:ext uri="{FF2B5EF4-FFF2-40B4-BE49-F238E27FC236}">
-                <a16:creationId xmlns:a16="http://schemas.microsoft.com/office/drawing/2014/main" id="{D8115C7F-74F2-46B8-8DE5-07019E290943}"/>
+                <a16:creationId xmlns:a16="http://schemas.microsoft.com/office/drawing/2014/main" id="{B55BF55B-8D54-44EF-A6C0-4653D1B080E6}"/>
               </a:ext>
             </a:extLst>
           </p:cNvPr>
@@ -14660,7 +15881,7 @@
           <p:cNvPr id="5" name="ambient-core">
             <a:extLst xmlns:a="http://schemas.openxmlformats.org/drawingml/2006/main">
               <a:ext uri="{FF2B5EF4-FFF2-40B4-BE49-F238E27FC236}">
-                <a16:creationId xmlns:a16="http://schemas.microsoft.com/office/drawing/2014/main" id="{B97ED4FE-A8E8-463F-80D9-E7C520704690}"/>
+                <a16:creationId xmlns:a16="http://schemas.microsoft.com/office/drawing/2014/main" id="{D6422697-00AD-4633-9E3D-BCF057C190DC}"/>
               </a:ext>
             </a:extLst>
           </p:cNvPr>
@@ -14697,7 +15918,7 @@
           <p:cNvPr id="6" name="section-number">
             <a:extLst xmlns:a="http://schemas.openxmlformats.org/drawingml/2006/main">
               <a:ext uri="{FF2B5EF4-FFF2-40B4-BE49-F238E27FC236}">
-                <a16:creationId xmlns:a16="http://schemas.microsoft.com/office/drawing/2014/main" id="{A23BA533-0680-458F-A981-6C953381A272}"/>
+                <a16:creationId xmlns:a16="http://schemas.microsoft.com/office/drawing/2014/main" id="{0B631B65-FCE6-4F7E-A87E-B17D52ABE00B}"/>
               </a:ext>
             </a:extLst>
           </p:cNvPr>
@@ -14748,7 +15969,7 @@
           <p:cNvPr id="7" name="eyebrow">
             <a:extLst xmlns:a="http://schemas.openxmlformats.org/drawingml/2006/main">
               <a:ext uri="{FF2B5EF4-FFF2-40B4-BE49-F238E27FC236}">
-                <a16:creationId xmlns:a16="http://schemas.microsoft.com/office/drawing/2014/main" id="{6B25DDE1-9FF2-400F-BA83-C5D6D4618ECB}"/>
+                <a16:creationId xmlns:a16="http://schemas.microsoft.com/office/drawing/2014/main" id="{FB0D9FB2-AF50-4BAE-BC9A-963CE538A13B}"/>
               </a:ext>
             </a:extLst>
           </p:cNvPr>
@@ -14796,10 +16017,69 @@
       </p:sp>
       <p:sp>
         <p:nvSpPr>
-          <p:cNvPr id="8" name="footer-rule">
-            <a:extLst xmlns:a="http://schemas.openxmlformats.org/drawingml/2006/main">
-              <a:ext uri="{FF2B5EF4-FFF2-40B4-BE49-F238E27FC236}">
-                <a16:creationId xmlns:a16="http://schemas.microsoft.com/office/drawing/2014/main" id="{3AFDEF04-5FEF-40EE-A132-066BCD83990C}"/>
+          <p:cNvPr id="8" name="rescue-point-logo-background">
+            <a:extLst xmlns:a="http://schemas.openxmlformats.org/drawingml/2006/main">
+              <a:ext uri="{FF2B5EF4-FFF2-40B4-BE49-F238E27FC236}">
+                <a16:creationId xmlns:a16="http://schemas.microsoft.com/office/drawing/2014/main" id="{64601620-59C6-41EC-93F3-ED8119170A23}"/>
+              </a:ext>
+            </a:extLst>
+          </p:cNvPr>
+          <p:cNvSpPr>
+            <a:spLocks xmlns:a="http://schemas.openxmlformats.org/drawingml/2006/main" noGrp="1"/>
+          </p:cNvSpPr>
+          <p:nvPr/>
+        </p:nvSpPr>
+        <p:spPr>
+          <a:xfrm xmlns:a="http://schemas.openxmlformats.org/drawingml/2006/main">
+            <a:off x="9772650" y="133350"/>
+            <a:ext cx="1733550" cy="457200"/>
+          </a:xfrm>
+          <a:prstGeom xmlns:a="http://schemas.openxmlformats.org/drawingml/2006/main" prst="roundRect">
+            <a:avLst>
+              <a:gd name="adj" fmla="val 16667"/>
+            </a:avLst>
+          </a:prstGeom>
+          <a:solidFill xmlns:a="http://schemas.openxmlformats.org/drawingml/2006/main">
+            <a:srgbClr val="06142E"/>
+          </a:solidFill>
+          <a:ln xmlns:a="http://schemas.openxmlformats.org/drawingml/2006/main" w="9525">
+            <a:solidFill>
+              <a:srgbClr val="1EC5FF">
+                <a:alpha val="33333"/>
+              </a:srgbClr>
+            </a:solidFill>
+            <a:prstDash val="solid"/>
+          </a:ln>
+        </p:spPr>
+      </p:sp>
+      <p:pic>
+        <p:nvPicPr>
+          <p:cNvPr id="23" name="" descr="Figura oficial da documentação dbt usada para explicar: Depreciação precisa de saída — Versão sem owner, consumidor e data vira dívida permanente.."/>
+          <p:cNvPicPr>
+            <a:picLocks xmlns:a="http://schemas.openxmlformats.org/drawingml/2006/main" noChangeAspect="1"/>
+          </p:cNvPicPr>
+          <p:nvPr/>
+        </p:nvPicPr>
+        <p:blipFill>
+          <a:blip xmlns:r="http://schemas.openxmlformats.org/officeDocument/2006/relationships" xmlns:a="http://schemas.openxmlformats.org/drawingml/2006/main" r:embed="R718630f31b9b4963"/>
+          <a:stretch xmlns:a="http://schemas.openxmlformats.org/drawingml/2006/main"/>
+        </p:blipFill>
+        <p:spPr>
+          <a:xfrm xmlns:a="http://schemas.openxmlformats.org/drawingml/2006/main">
+            <a:off x="9893718" y="209550"/>
+            <a:ext cx="1491414" cy="323850"/>
+          </a:xfrm>
+          <a:prstGeom xmlns:a="http://schemas.openxmlformats.org/drawingml/2006/main" prst="rect">
+            <a:avLst/>
+          </a:prstGeom>
+        </p:spPr>
+      </p:pic>
+      <p:sp>
+        <p:nvSpPr>
+          <p:cNvPr id="10" name="footer-rule">
+            <a:extLst xmlns:a="http://schemas.openxmlformats.org/drawingml/2006/main">
+              <a:ext uri="{FF2B5EF4-FFF2-40B4-BE49-F238E27FC236}">
+                <a16:creationId xmlns:a16="http://schemas.microsoft.com/office/drawing/2014/main" id="{837516DC-BB5E-44BA-AA15-45080F11FD06}"/>
               </a:ext>
             </a:extLst>
           </p:cNvPr>
@@ -14829,10 +16109,10 @@
       </p:sp>
       <p:sp>
         <p:nvSpPr>
-          <p:cNvPr id="9" name="footer">
-            <a:extLst xmlns:a="http://schemas.openxmlformats.org/drawingml/2006/main">
-              <a:ext uri="{FF2B5EF4-FFF2-40B4-BE49-F238E27FC236}">
-                <a16:creationId xmlns:a16="http://schemas.microsoft.com/office/drawing/2014/main" id="{EE45506C-E5FE-4026-B6C9-876A7D7DF701}"/>
+          <p:cNvPr id="11" name="footer">
+            <a:extLst xmlns:a="http://schemas.openxmlformats.org/drawingml/2006/main">
+              <a:ext uri="{FF2B5EF4-FFF2-40B4-BE49-F238E27FC236}">
+                <a16:creationId xmlns:a16="http://schemas.microsoft.com/office/drawing/2014/main" id="{EA59C10B-C4D2-4B41-9A04-499DF67E85A7}"/>
               </a:ext>
             </a:extLst>
           </p:cNvPr>
@@ -14884,10 +16164,10 @@
       </p:sp>
       <p:sp>
         <p:nvSpPr>
-          <p:cNvPr id="10" name="page-number">
-            <a:extLst xmlns:a="http://schemas.openxmlformats.org/drawingml/2006/main">
-              <a:ext uri="{FF2B5EF4-FFF2-40B4-BE49-F238E27FC236}">
-                <a16:creationId xmlns:a16="http://schemas.microsoft.com/office/drawing/2014/main" id="{63D966E7-4810-4028-B581-140910EA2FF7}"/>
+          <p:cNvPr id="12" name="page-number">
+            <a:extLst xmlns:a="http://schemas.openxmlformats.org/drawingml/2006/main">
+              <a:ext uri="{FF2B5EF4-FFF2-40B4-BE49-F238E27FC236}">
+                <a16:creationId xmlns:a16="http://schemas.microsoft.com/office/drawing/2014/main" id="{9B0BD299-CE1C-4886-A91A-F35863244A0D}"/>
               </a:ext>
             </a:extLst>
           </p:cNvPr>
@@ -14940,7 +16220,7 @@
     </p:spTree>
     <p:extLst>
       <p:ext uri="{BB962C8B-B14F-4D97-AF65-F5344CB8AC3E}">
-        <p14:creationId xmlns:p14="http://schemas.microsoft.com/office/powerpoint/2010/main" val="1812873242"/>
+        <p14:creationId xmlns:p14="http://schemas.microsoft.com/office/powerpoint/2010/main" val="1895573442"/>
       </p:ext>
     </p:extLst>
   </p:cSld>
